--- a/report/presentation.pptx
+++ b/report/presentation.pptx
@@ -16,12 +16,9 @@
     <p:sldId id="264" r:id="rId10"/>
     <p:sldId id="265" r:id="rId11"/>
     <p:sldId id="266" r:id="rId12"/>
-    <p:sldId id="267" r:id="rId13"/>
-    <p:sldId id="268" r:id="rId14"/>
-    <p:sldId id="269" r:id="rId15"/>
   </p:sldIdLst>
   <p:notesMasterIdLst>
-    <p:notesMasterId r:id="rId16"/>
+    <p:notesMasterId r:id="rId13"/>
   </p:notesMasterIdLst>
   <p:sldSz cx="9144000" cy="5143500"/>
   <p:notesSz cx="5143500" cy="9144000"/>
@@ -120,42 +117,39 @@
   <p:extLst>
     <p:ext uri="{521415D9-36F7-43E2-AB2F-B90AF26B5E84}">
       <p14:sectionLst xmlns:p14="http://schemas.microsoft.com/office/powerpoint/2010/main">
-        <p14:section name="Opening" id="{519e8b66-6d4f-2688-dc88-880a172dbefd}">
+        <p14:section name="Opening" id="{c74d3087-3b1e-9d13-9523-555a6af62cd2}">
           <p14:sldIdLst>
             <p14:sldId id="256"/>
           </p14:sldIdLst>
         </p14:section>
-        <p14:section name="Context" id="{ee7c636d-c5b1-83b7-aa20-e4fcdb68d796}">
+        <p14:section name="Context" id="{8c4b1566-2b83-6736-42d6-807f5bb624a1}">
           <p14:sldIdLst>
             <p14:sldId id="257"/>
             <p14:sldId id="258"/>
             <p14:sldId id="259"/>
           </p14:sldIdLst>
         </p14:section>
-        <p14:section name="Solution" id="{ba0598cd-89ca-06f1-a10b-84a043fbe966}">
+        <p14:section name="Solution" id="{36f5953d-13ef-6a9c-9bfd-1464bdb00b3c}">
           <p14:sldIdLst>
             <p14:sldId id="260"/>
             <p14:sldId id="261"/>
+          </p14:sldIdLst>
+        </p14:section>
+        <p14:section name="Hard part" id="{59961285-1916-8b1a-4a88-4d9268911e84}">
+          <p14:sldIdLst>
             <p14:sldId id="262"/>
             <p14:sldId id="263"/>
           </p14:sldIdLst>
         </p14:section>
-        <p14:section name="Hard part" id="{f45e7e84-78d6-5911-fa2c-8e58bd082c9b}">
+        <p14:section name="Journey" id="{95629938-a30e-498f-2663-df3ee3f33e02}">
           <p14:sldIdLst>
             <p14:sldId id="264"/>
             <p14:sldId id="265"/>
-            <p14:sldId id="266"/>
           </p14:sldIdLst>
         </p14:section>
-        <p14:section name="Journey" id="{7c1b6afc-9836-2d60-c635-681ebba81e11}">
+        <p14:section name="Closing" id="{cf7bf942-ae65-9682-e32a-7a1e8e9bb1e4}">
           <p14:sldIdLst>
-            <p14:sldId id="267"/>
-            <p14:sldId id="268"/>
-          </p14:sldIdLst>
-        </p14:section>
-        <p14:section name="Closing" id="{ca8b9cc5-339c-1307-00c2-2074cf14e4b6}">
-          <p14:sldIdLst>
-            <p14:sldId id="269"/>
+            <p14:sldId id="266"/>
           </p14:sldIdLst>
         </p14:section>
       </p14:sectionLst>
@@ -562,7 +556,7 @@
           <a:p>
             <a:r>
               <a:rPr lang="en-US" dirty="0"/>
-              <a:t>Good morning everyone. Today I'd like to describe a project I have worked on: a Course Management and Registration System. It is a full-stack web application that lets students register for their classes online, and lets the academic office manage courses, semesters and class sections.</a:t>
+              <a:t>Good morning, everyone. My name is [your name]. Today, I would like to tell you about a project that I have worked on: a course registration system for university students. I will explain why I built it, what it does, the biggest challenges I faced, and what I learned along the way.</a:t>
             </a:r>
             <a:endParaRPr lang="en-US" dirty="0"/>
           </a:p>
@@ -650,7 +644,7 @@
           <a:p>
             <a:r>
               <a:rPr lang="en-US" dirty="0"/>
-              <a:t>The first challenge is the last seat. Imagine a class with forty seats and thirty-nine students. Student A and Student B click Register at the same moment. Both read 'one seat left', both get registered, and now the class has forty-one students. To fix this, I run the whole registration inside a database transaction, and I lock the section's row. Student B has to wait until Student A finishes, and then B correctly sees that the class is full.</a:t>
+              <a:t>Finally, what did I learn? Of course, I improved my technical skills. But more importantly, I learned four skills that are useful in any job. First, plan before acting: writing the rules first saved me a lot of time. Second, learn independently: many answers were only in English documentation. Third, write clearly: writing documentation taught me to explain ideas simply. And fourth, manage my time by working in small stages. In the future, I would like to add automatic tests, a waiting list, and a prerequisite check.</a:t>
             </a:r>
             <a:endParaRPr lang="en-US" dirty="0"/>
           </a:p>
@@ -738,7 +732,7 @@
           <a:p>
             <a:r>
               <a:rPr lang="en-US" dirty="0"/>
-              <a:t>The second challenge is timetable clashes. When a student registers, the system compares the new class with every class the student already has in that semester. Two classes clash only when three things are true: same day, overlapping periods, and compatible weeks. For example, a class held only in odd weeks never clashes with one held only in even weeks. If there is a clash, the server returns error 409 with the name of the conflicting class.</a:t>
+              <a:t>To sum up, this project started from a problem I experienced myself and became a complete, working system. It taught me that good software is not only about code, but about understanding people's problems. Thank you very much for listening. I would be happy to answer any questions you may have.</a:t>
             </a:r>
             <a:endParaRPr lang="en-US" dirty="0"/>
           </a:p>
@@ -762,270 +756,6 @@
             <a:fld id="{F7021451-1387-4CA6-816F-3879F97B5CBC}" type="slidenum">
               <a:rPr lang="en-US"/>
               <a:t>11</a:t>
-            </a:fld>
-            <a:endParaRPr lang="en-US"/>
-          </a:p>
-        </p:txBody>
-      </p:sp>
-    </p:spTree>
-    <p:extLst>
-      <p:ext uri="{BB962C8B-B14F-4D97-AF65-F5344CB8AC3E}">
-        <p14:creationId xmlns:p14="http://schemas.microsoft.com/office/powerpoint/2010/main" val="1024086991"/>
-      </p:ext>
-    </p:extLst>
-  </p:cSld>
-  <p:clrMapOvr>
-    <a:masterClrMapping/>
-  </p:clrMapOvr>
-</p:notes>
-</file>
-
-<file path=ppt/notesSlides/notesSlide12.xml><?xml version="1.0" encoding="utf-8"?>
-<p:notes xmlns:a="http://schemas.openxmlformats.org/drawingml/2006/main" xmlns:r="http://schemas.openxmlformats.org/officeDocument/2006/relationships" xmlns:p="http://schemas.openxmlformats.org/presentationml/2006/main">
-  <p:cSld>
-    <p:spTree>
-      <p:nvGrpSpPr>
-        <p:cNvPr id="1" name=""/>
-        <p:cNvGrpSpPr/>
-        <p:nvPr/>
-      </p:nvGrpSpPr>
-      <p:grpSpPr>
-        <a:xfrm>
-          <a:off x="0" y="0"/>
-          <a:ext cx="0" cy="0"/>
-          <a:chOff x="0" y="0"/>
-          <a:chExt cx="0" cy="0"/>
-        </a:xfrm>
-      </p:grpSpPr>
-      <p:sp>
-        <p:nvSpPr>
-          <p:cNvPr id="2" name="Slide Image Placeholder 1"/>
-          <p:cNvSpPr>
-            <a:spLocks noGrp="1" noRot="1" noChangeAspect="1"/>
-          </p:cNvSpPr>
-          <p:nvPr>
-            <p:ph type="sldImg"/>
-          </p:nvPr>
-        </p:nvSpPr>
-        <p:spPr/>
-      </p:sp>
-      <p:sp>
-        <p:nvSpPr>
-          <p:cNvPr id="3" name="Notes Placeholder 2"/>
-          <p:cNvSpPr>
-            <a:spLocks noGrp="1"/>
-          </p:cNvSpPr>
-          <p:nvPr>
-            <p:ph type="body" idx="1"/>
-          </p:nvPr>
-        </p:nvSpPr>
-        <p:spPr/>
-        <p:txBody>
-          <a:bodyPr/>
-          <a:lstStyle/>
-          <a:p>
-            <a:r>
-              <a:rPr lang="en-US" dirty="0"/>
-              <a:t>I built the project in five stages. In January I analysed the real registration process and wrote the rules. In March I built the database and the backend API, then reorganised the project into a monorepo so I could start everything with one command. Next I built the student and admin websites, and finally I packaged everything with Docker and wrote the documentation. I used Git the whole time.</a:t>
-            </a:r>
-            <a:endParaRPr lang="en-US" dirty="0"/>
-          </a:p>
-        </p:txBody>
-      </p:sp>
-      <p:sp>
-        <p:nvSpPr>
-          <p:cNvPr id="4" name="Slide Number Placeholder 3"/>
-          <p:cNvSpPr>
-            <a:spLocks noGrp="1"/>
-          </p:cNvSpPr>
-          <p:nvPr>
-            <p:ph type="sldNum" sz="quarter" idx="10"/>
-          </p:nvPr>
-        </p:nvSpPr>
-        <p:spPr/>
-        <p:txBody>
-          <a:bodyPr/>
-          <a:lstStyle/>
-          <a:p>
-            <a:fld id="{F7021451-1387-4CA6-816F-3879F97B5CBC}" type="slidenum">
-              <a:rPr lang="en-US"/>
-              <a:t>12</a:t>
-            </a:fld>
-            <a:endParaRPr lang="en-US"/>
-          </a:p>
-        </p:txBody>
-      </p:sp>
-    </p:spTree>
-    <p:extLst>
-      <p:ext uri="{BB962C8B-B14F-4D97-AF65-F5344CB8AC3E}">
-        <p14:creationId xmlns:p14="http://schemas.microsoft.com/office/powerpoint/2010/main" val="1024086991"/>
-      </p:ext>
-    </p:extLst>
-  </p:cSld>
-  <p:clrMapOvr>
-    <a:masterClrMapping/>
-  </p:clrMapOvr>
-</p:notes>
-</file>
-
-<file path=ppt/notesSlides/notesSlide13.xml><?xml version="1.0" encoding="utf-8"?>
-<p:notes xmlns:a="http://schemas.openxmlformats.org/drawingml/2006/main" xmlns:r="http://schemas.openxmlformats.org/officeDocument/2006/relationships" xmlns:p="http://schemas.openxmlformats.org/presentationml/2006/main">
-  <p:cSld>
-    <p:spTree>
-      <p:nvGrpSpPr>
-        <p:cNvPr id="1" name=""/>
-        <p:cNvGrpSpPr/>
-        <p:nvPr/>
-      </p:nvGrpSpPr>
-      <p:grpSpPr>
-        <a:xfrm>
-          <a:off x="0" y="0"/>
-          <a:ext cx="0" cy="0"/>
-          <a:chOff x="0" y="0"/>
-          <a:chExt cx="0" cy="0"/>
-        </a:xfrm>
-      </p:grpSpPr>
-      <p:sp>
-        <p:nvSpPr>
-          <p:cNvPr id="2" name="Slide Image Placeholder 1"/>
-          <p:cNvSpPr>
-            <a:spLocks noGrp="1" noRot="1" noChangeAspect="1"/>
-          </p:cNvSpPr>
-          <p:nvPr>
-            <p:ph type="sldImg"/>
-          </p:nvPr>
-        </p:nvSpPr>
-        <p:spPr/>
-      </p:sp>
-      <p:sp>
-        <p:nvSpPr>
-          <p:cNvPr id="3" name="Notes Placeholder 2"/>
-          <p:cNvSpPr>
-            <a:spLocks noGrp="1"/>
-          </p:cNvSpPr>
-          <p:nvPr>
-            <p:ph type="body" idx="1"/>
-          </p:nvPr>
-        </p:nvSpPr>
-        <p:spPr/>
-        <p:txBody>
-          <a:bodyPr/>
-          <a:lstStyle/>
-          <a:p>
-            <a:r>
-              <a:rPr lang="en-US" dirty="0"/>
-              <a:t>This project taught me a lot. First, correctness needs the database: transactions and locks really matter. Second, thinking before coding: writing the rules first made the code much clearer. Third, a clean layered architecture makes changes safe. And fourth, professional habits like Git, documentation and Docker. In the future, I want to check prerequisites automatically, add automated tests, add a waiting list with email alerts, and add caching for peak load.</a:t>
-            </a:r>
-            <a:endParaRPr lang="en-US" dirty="0"/>
-          </a:p>
-        </p:txBody>
-      </p:sp>
-      <p:sp>
-        <p:nvSpPr>
-          <p:cNvPr id="4" name="Slide Number Placeholder 3"/>
-          <p:cNvSpPr>
-            <a:spLocks noGrp="1"/>
-          </p:cNvSpPr>
-          <p:nvPr>
-            <p:ph type="sldNum" sz="quarter" idx="10"/>
-          </p:nvPr>
-        </p:nvSpPr>
-        <p:spPr/>
-        <p:txBody>
-          <a:bodyPr/>
-          <a:lstStyle/>
-          <a:p>
-            <a:fld id="{F7021451-1387-4CA6-816F-3879F97B5CBC}" type="slidenum">
-              <a:rPr lang="en-US"/>
-              <a:t>13</a:t>
-            </a:fld>
-            <a:endParaRPr lang="en-US"/>
-          </a:p>
-        </p:txBody>
-      </p:sp>
-    </p:spTree>
-    <p:extLst>
-      <p:ext uri="{BB962C8B-B14F-4D97-AF65-F5344CB8AC3E}">
-        <p14:creationId xmlns:p14="http://schemas.microsoft.com/office/powerpoint/2010/main" val="1024086991"/>
-      </p:ext>
-    </p:extLst>
-  </p:cSld>
-  <p:clrMapOvr>
-    <a:masterClrMapping/>
-  </p:clrMapOvr>
-</p:notes>
-</file>
-
-<file path=ppt/notesSlides/notesSlide14.xml><?xml version="1.0" encoding="utf-8"?>
-<p:notes xmlns:a="http://schemas.openxmlformats.org/drawingml/2006/main" xmlns:r="http://schemas.openxmlformats.org/officeDocument/2006/relationships" xmlns:p="http://schemas.openxmlformats.org/presentationml/2006/main">
-  <p:cSld>
-    <p:spTree>
-      <p:nvGrpSpPr>
-        <p:cNvPr id="1" name=""/>
-        <p:cNvGrpSpPr/>
-        <p:nvPr/>
-      </p:nvGrpSpPr>
-      <p:grpSpPr>
-        <a:xfrm>
-          <a:off x="0" y="0"/>
-          <a:ext cx="0" cy="0"/>
-          <a:chOff x="0" y="0"/>
-          <a:chExt cx="0" cy="0"/>
-        </a:xfrm>
-      </p:grpSpPr>
-      <p:sp>
-        <p:nvSpPr>
-          <p:cNvPr id="2" name="Slide Image Placeholder 1"/>
-          <p:cNvSpPr>
-            <a:spLocks noGrp="1" noRot="1" noChangeAspect="1"/>
-          </p:cNvSpPr>
-          <p:nvPr>
-            <p:ph type="sldImg"/>
-          </p:nvPr>
-        </p:nvSpPr>
-        <p:spPr/>
-      </p:sp>
-      <p:sp>
-        <p:nvSpPr>
-          <p:cNvPr id="3" name="Notes Placeholder 2"/>
-          <p:cNvSpPr>
-            <a:spLocks noGrp="1"/>
-          </p:cNvSpPr>
-          <p:nvPr>
-            <p:ph type="body" idx="1"/>
-          </p:nvPr>
-        </p:nvSpPr>
-        <p:spPr/>
-        <p:txBody>
-          <a:bodyPr/>
-          <a:lstStyle/>
-          <a:p>
-            <a:r>
-              <a:rPr lang="en-US" dirty="0"/>
-              <a:t>To sum up, this project solves a real problem that every student knows, and it works from end to end. It is the project I am most proud of so far. Thank you for listening. I'm happy to answer any questions.</a:t>
-            </a:r>
-            <a:endParaRPr lang="en-US" dirty="0"/>
-          </a:p>
-        </p:txBody>
-      </p:sp>
-      <p:sp>
-        <p:nvSpPr>
-          <p:cNvPr id="4" name="Slide Number Placeholder 3"/>
-          <p:cNvSpPr>
-            <a:spLocks noGrp="1"/>
-          </p:cNvSpPr>
-          <p:nvPr>
-            <p:ph type="sldNum" sz="quarter" idx="10"/>
-          </p:nvPr>
-        </p:nvSpPr>
-        <p:spPr/>
-        <p:txBody>
-          <a:bodyPr/>
-          <a:lstStyle/>
-          <a:p>
-            <a:fld id="{F7021451-1387-4CA6-816F-3879F97B5CBC}" type="slidenum">
-              <a:rPr lang="en-US"/>
-              <a:t>14</a:t>
             </a:fld>
             <a:endParaRPr lang="en-US"/>
           </a:p>
@@ -1090,7 +820,7 @@
           <a:p>
             <a:r>
               <a:rPr lang="en-US" dirty="0"/>
-              <a:t>My presentation has four parts. First, the problem. Second, the solution: the features, the technologies and the architecture. Third, the most interesting technical part, the business rules. And finally, how I built it and what I learned.</a:t>
+              <a:t>My presentation is divided into four parts. First, I will talk about why I chose this project. Second, I will show you what the system does and how it works. Third, I will focus on the two hardest problems I had to solve. And finally, I will share what I learned. The presentation will take about seven minutes, and I will be happy to answer your questions at the end.</a:t>
             </a:r>
             <a:endParaRPr lang="en-US" dirty="0"/>
           </a:p>
@@ -1178,7 +908,7 @@
           <a:p>
             <a:r>
               <a:rPr lang="en-US" dirty="0"/>
-              <a:t>Why did I choose this project? Every semester, students rush to register when the window opens. Seats are limited, so many students try to take the last seat at the same time. It is easy to choose two classes that clash. The time window is short. And on the other side, staff often manage everything with spreadsheets. I wanted to build a system that solves these problems properly.</a:t>
+              <a:t>Let me start with the problem. I am sure many of you remember registration day. Everyone clicks at the same time, so seats disappear in minutes. It is easy to choose two classes that are at the same time. The registration period is very short. And on the other side, the academic office often manages everything in spreadsheets. I experienced this stress myself, and that is exactly why I chose this project.</a:t>
             </a:r>
             <a:endParaRPr lang="en-US" dirty="0"/>
           </a:p>
@@ -1266,7 +996,7 @@
           <a:p>
             <a:r>
               <a:rPr lang="en-US" dirty="0"/>
-              <a:t>Here is the project at a glance. There are two portals, one for students and one for administrators. The database has eight tables. I defined nine business rules for registration and cancellation. And the whole system runs in three Docker containers. My main goal was correctness: the server must enforce the rules, even when many students register at the same moment.</a:t>
+              <a:t>Here is the project at a glance. The system has two portals: one for students and one for administrators. It checks nine rules every time a student signs up for a class. I built it in about three months, from January to March 2026, and I designed and developed it by myself. My main goal was simple: the system must be fair, reliable and easy to use, even on the busiest day.</a:t>
             </a:r>
             <a:endParaRPr lang="en-US" dirty="0"/>
           </a:p>
@@ -1354,7 +1084,7 @@
           <a:p>
             <a:r>
               <a:rPr lang="en-US" dirty="0"/>
-              <a:t>The system has two portals. Students can see their information, register for or cancel classes with one click, view a weekly timetable, and check their grades. Administrators manage courses, semesters, class sections and schedules, and they can track registrations. Both portals share one login, and the token decides which portal opens. I also added a dark mode.</a:t>
+              <a:t>Now, let's move on to what the system actually does. Students can view their information, register for or cancel a class with just one click, see their weekly timetable, and check their grades. Administrators, on the other hand, can manage courses, semesters and classes, and they can monitor how many students have registered. Each user only sees the portal that matches their role.</a:t>
             </a:r>
             <a:endParaRPr lang="en-US" dirty="0"/>
           </a:p>
@@ -1442,7 +1172,7 @@
           <a:p>
             <a:r>
               <a:rPr lang="en-US" dirty="0"/>
-              <a:t>For the technology: the frontend uses React with Vite and React Router. The backend is Node.js with Express, and I used the Sequelize ORM to talk to a MySQL 8 database. For security I used JWT tokens and bcrypt password hashing. And everything is packaged with Docker Compose, with Nginx serving the frontend.</a:t>
+              <a:t>So, how does it work? Like most web applications, it has three parts. The front end is what users see in their browser; I built it with React. The back end is the 'brain': it checks who the user is and applies all the rules. And the database stores all the information. Finally, I packaged everything with a tool called Docker, so the whole system can be started with a single command.</a:t>
             </a:r>
             <a:endParaRPr lang="en-US" dirty="0"/>
           </a:p>
@@ -1530,7 +1260,7 @@
           <a:p>
             <a:r>
               <a:rPr lang="en-US" dirty="0"/>
-              <a:t>This is the architecture. The React client sends JSON requests with a JWT token to the Express API. Inside the API there are five layers, and each layer has one job. Routes map URLs to controllers. Middleware checks the token, the user's role and the input. Controllers handle the request and response. Services, highlighted in orange, contain the business rules. And models map objects to MySQL tables. This separation made the code much easier to change.</a:t>
+              <a:t>This brings me to the most interesting part: the challenges. The first one is what I call 'the last seat'. Imagine a class with forty seats and thirty-nine students. Two students click Register at exactly the same moment. Without protection, both see one free seat, both are accepted, and the class ends up with forty-one students. To solve this, I made the sign-up 'all or nothing', and I lock the class for a very short moment, so the second student has to wait. When it is their turn, the system correctly says the class is full. As a final safety net, the database itself refuses more students than seats.</a:t>
             </a:r>
             <a:endParaRPr lang="en-US" dirty="0"/>
           </a:p>
@@ -1618,7 +1348,7 @@
           <a:p>
             <a:r>
               <a:rPr lang="en-US" dirty="0"/>
-              <a:t>The database has eight tables. A course can be opened as several sections in a semester. Each section has schedules, meaning the day and periods it meets. Students register for sections through the enrollments table. I didn't rely only on code: the database also has safety nets. A unique index prevents duplicate registrations, and a check constraint ensures a class never has more students than seats.</a:t>
+              <a:t>The second challenge was timetable clashes. It sounds easy, but some classes only meet in odd weeks, and others only in even weeks. So I defined a clear rule: two classes clash only if all three conditions on this slide are true: the same day, overlapping periods, and compatible weeks. And when there is a clash, the system does not just say 'Error'. It tells the student exactly which class is the problem.</a:t>
             </a:r>
             <a:endParaRPr lang="en-US" dirty="0"/>
           </a:p>
@@ -1706,7 +1436,7 @@
           <a:p>
             <a:r>
               <a:rPr lang="en-US" dirty="0"/>
-              <a:t>Before writing code, I wrote down nine business rules. Rules one to six apply when a student registers: no duplicates, the class must have seats, it must be inside the registration window, there must be no timetable clash, the student must not be suspended, and the class must be open. Rules seven to nine apply to cancellation. The two highlighted rules, two and four, were the hardest, so let me explain them.</a:t>
+              <a:t>Now, let me briefly describe how I built the project. I worked in five stages. In January, I analysed the real process and wrote down nine rules. In March, I built the database and the back end, then reorganised the code, built the two websites, and finally prepared the release with Docker and documentation. I used Git the whole time, so I could always go back if I made a mistake.</a:t>
             </a:r>
             <a:endParaRPr lang="en-US" dirty="0"/>
           </a:p>
@@ -2496,7 +2226,7 @@
                   <a:schemeClr val="accent5"/>
                 </a:solidFill>
               </a:rPr>
-              <a:t>A full-stack web app that helps students register for classes, and helps the academic office run them</a:t>
+              <a:t>A web application that makes course registration fair, reliable and simple</a:t>
             </a:r>
             <a:endParaRPr lang="en-US" sz="1800" dirty="0"/>
           </a:p>
@@ -2532,7 +2262,7 @@
                   <a:schemeClr val="bg1"/>
                 </a:solidFill>
               </a:rPr>
-              <a:t>Your Name  ·  Student ID  ·  Course Name</a:t>
+              <a:t>Your Name  ·  Student ID  ·  English Writing &amp; Presentation Skills</a:t>
             </a:r>
             <a:endParaRPr lang="en-US" sz="1400" dirty="0"/>
           </a:p>
@@ -2642,7 +2372,7 @@
                 <a:ea typeface="Cambria" pitchFamily="34" charset="-122"/>
                 <a:cs typeface="Cambria" pitchFamily="34" charset="-120"/>
               </a:rPr>
-              <a:t>Challenge 1: the last seat</a:t>
+              <a:t>What I learned</a:t>
             </a:r>
             <a:endParaRPr lang="en-US" sz="3000" dirty="0"/>
           </a:p>
@@ -2650,444 +2380,482 @@
       </p:sp>
       <p:sp>
         <p:nvSpPr>
-          <p:cNvPr id="3" name="card_153"/>
+          <p:cNvPr id="3" name="icon-bg_149"/>
           <p:cNvSpPr/>
           <p:nvPr/>
         </p:nvSpPr>
         <p:spPr>
           <a:xfrm>
-            <a:off x="457200" y="1188720"/>
-            <a:ext cx="4023360" cy="3291840"/>
+            <a:off x="457200" y="1143000"/>
+            <a:ext cx="640080" cy="640080"/>
+          </a:xfrm>
+          <a:prstGeom prst="ellipse">
+            <a:avLst/>
+          </a:prstGeom>
+          <a:solidFill>
+            <a:srgbClr val="1F4E5F"/>
+          </a:solidFill>
+          <a:ln/>
+        </p:spPr>
+      </p:sp>
+      <p:pic>
+        <p:nvPicPr>
+          <p:cNvPr id="4" name="icon_150" descr="preencoded.png">    </p:cNvPr>
+          <p:cNvPicPr>
+            <a:picLocks noChangeAspect="1"/>
+          </p:cNvPicPr>
+          <p:nvPr/>
+        </p:nvPicPr>
+        <p:blipFill>
+          <a:blip r:embed="rId1"/>
+          <a:stretch>
+            <a:fillRect/>
+          </a:stretch>
+        </p:blipFill>
+        <p:spPr>
+          <a:xfrm>
+            <a:off x="617220" y="1303020"/>
+            <a:ext cx="320040" cy="320040"/>
+          </a:xfrm>
+          <a:prstGeom prst="rect">
+            <a:avLst/>
+          </a:prstGeom>
+        </p:spPr>
+      </p:pic>
+      <p:sp>
+        <p:nvSpPr>
+          <p:cNvPr id="5" name="text_151"/>
+          <p:cNvSpPr txBox="1"/>
+          <p:nvPr/>
+        </p:nvSpPr>
+        <p:spPr>
+          <a:xfrm>
+            <a:off x="1280160" y="1161288"/>
+            <a:ext cx="3657600" cy="320040"/>
+          </a:xfrm>
+          <a:prstGeom prst="rect">
+            <a:avLst/>
+          </a:prstGeom>
+          <a:noFill/>
+          <a:ln/>
+        </p:spPr>
+        <p:txBody>
+          <a:bodyPr wrap="square" lIns="0" tIns="0" rIns="0" bIns="0" rtlCol="0" anchor="t"/>
+          <a:lstStyle/>
+          <a:p>
+            <a:pPr indent="0" marL="0">
+              <a:buNone/>
+            </a:pPr>
+            <a:r>
+              <a:rPr lang="en-US" sz="1700" b="1" dirty="0">
+                <a:solidFill>
+                  <a:schemeClr val="tx2"/>
+                </a:solidFill>
+              </a:rPr>
+              <a:t>Plan before acting</a:t>
+            </a:r>
+            <a:endParaRPr lang="en-US" sz="1700" dirty="0"/>
+          </a:p>
+        </p:txBody>
+      </p:sp>
+      <p:sp>
+        <p:nvSpPr>
+          <p:cNvPr id="6" name="text_152"/>
+          <p:cNvSpPr txBox="1"/>
+          <p:nvPr/>
+        </p:nvSpPr>
+        <p:spPr>
+          <a:xfrm>
+            <a:off x="1280160" y="1481328"/>
+            <a:ext cx="4023360" cy="320040"/>
+          </a:xfrm>
+          <a:prstGeom prst="rect">
+            <a:avLst/>
+          </a:prstGeom>
+          <a:noFill/>
+          <a:ln/>
+        </p:spPr>
+        <p:txBody>
+          <a:bodyPr wrap="square" lIns="0" tIns="0" rIns="0" bIns="0" rtlCol="0" anchor="t"/>
+          <a:lstStyle/>
+          <a:p>
+            <a:pPr indent="0" marL="0">
+              <a:buNone/>
+            </a:pPr>
+            <a:r>
+              <a:rPr lang="en-US" sz="1400" dirty="0">
+                <a:solidFill>
+                  <a:schemeClr val="tx1"/>
+                </a:solidFill>
+              </a:rPr>
+              <a:t>Writing the nine rules first saved me a lot of time</a:t>
+            </a:r>
+            <a:endParaRPr lang="en-US" sz="1400" dirty="0"/>
+          </a:p>
+        </p:txBody>
+      </p:sp>
+      <p:sp>
+        <p:nvSpPr>
+          <p:cNvPr id="7" name="icon-bg_153"/>
+          <p:cNvSpPr/>
+          <p:nvPr/>
+        </p:nvSpPr>
+        <p:spPr>
+          <a:xfrm>
+            <a:off x="457200" y="1984248"/>
+            <a:ext cx="640080" cy="640080"/>
+          </a:xfrm>
+          <a:prstGeom prst="ellipse">
+            <a:avLst/>
+          </a:prstGeom>
+          <a:solidFill>
+            <a:srgbClr val="1F4E5F"/>
+          </a:solidFill>
+          <a:ln/>
+        </p:spPr>
+      </p:sp>
+      <p:pic>
+        <p:nvPicPr>
+          <p:cNvPr id="8" name="icon_154" descr="preencoded.png">    </p:cNvPr>
+          <p:cNvPicPr>
+            <a:picLocks noChangeAspect="1"/>
+          </p:cNvPicPr>
+          <p:nvPr/>
+        </p:nvPicPr>
+        <p:blipFill>
+          <a:blip r:embed="rId2"/>
+          <a:stretch>
+            <a:fillRect/>
+          </a:stretch>
+        </p:blipFill>
+        <p:spPr>
+          <a:xfrm>
+            <a:off x="617220" y="2144268"/>
+            <a:ext cx="320040" cy="320040"/>
+          </a:xfrm>
+          <a:prstGeom prst="rect">
+            <a:avLst/>
+          </a:prstGeom>
+        </p:spPr>
+      </p:pic>
+      <p:sp>
+        <p:nvSpPr>
+          <p:cNvPr id="9" name="text_155"/>
+          <p:cNvSpPr txBox="1"/>
+          <p:nvPr/>
+        </p:nvSpPr>
+        <p:spPr>
+          <a:xfrm>
+            <a:off x="1280160" y="2002536"/>
+            <a:ext cx="3657600" cy="320040"/>
+          </a:xfrm>
+          <a:prstGeom prst="rect">
+            <a:avLst/>
+          </a:prstGeom>
+          <a:noFill/>
+          <a:ln/>
+        </p:spPr>
+        <p:txBody>
+          <a:bodyPr wrap="square" lIns="0" tIns="0" rIns="0" bIns="0" rtlCol="0" anchor="t"/>
+          <a:lstStyle/>
+          <a:p>
+            <a:pPr indent="0" marL="0">
+              <a:buNone/>
+            </a:pPr>
+            <a:r>
+              <a:rPr lang="en-US" sz="1700" b="1" dirty="0">
+                <a:solidFill>
+                  <a:schemeClr val="tx2"/>
+                </a:solidFill>
+              </a:rPr>
+              <a:t>Learn independently</a:t>
+            </a:r>
+            <a:endParaRPr lang="en-US" sz="1700" dirty="0"/>
+          </a:p>
+        </p:txBody>
+      </p:sp>
+      <p:sp>
+        <p:nvSpPr>
+          <p:cNvPr id="10" name="text_156"/>
+          <p:cNvSpPr txBox="1"/>
+          <p:nvPr/>
+        </p:nvSpPr>
+        <p:spPr>
+          <a:xfrm>
+            <a:off x="1280160" y="2322576"/>
+            <a:ext cx="4023360" cy="320040"/>
+          </a:xfrm>
+          <a:prstGeom prst="rect">
+            <a:avLst/>
+          </a:prstGeom>
+          <a:noFill/>
+          <a:ln/>
+        </p:spPr>
+        <p:txBody>
+          <a:bodyPr wrap="square" lIns="0" tIns="0" rIns="0" bIns="0" rtlCol="0" anchor="t"/>
+          <a:lstStyle/>
+          <a:p>
+            <a:pPr indent="0" marL="0">
+              <a:buNone/>
+            </a:pPr>
+            <a:r>
+              <a:rPr lang="en-US" sz="1400" dirty="0">
+                <a:solidFill>
+                  <a:schemeClr val="tx1"/>
+                </a:solidFill>
+              </a:rPr>
+              <a:t>I found many answers in English documentation</a:t>
+            </a:r>
+            <a:endParaRPr lang="en-US" sz="1400" dirty="0"/>
+          </a:p>
+        </p:txBody>
+      </p:sp>
+      <p:sp>
+        <p:nvSpPr>
+          <p:cNvPr id="11" name="icon-bg_157"/>
+          <p:cNvSpPr/>
+          <p:nvPr/>
+        </p:nvSpPr>
+        <p:spPr>
+          <a:xfrm>
+            <a:off x="457200" y="2825496"/>
+            <a:ext cx="640080" cy="640080"/>
+          </a:xfrm>
+          <a:prstGeom prst="ellipse">
+            <a:avLst/>
+          </a:prstGeom>
+          <a:solidFill>
+            <a:srgbClr val="1F4E5F"/>
+          </a:solidFill>
+          <a:ln/>
+        </p:spPr>
+      </p:sp>
+      <p:pic>
+        <p:nvPicPr>
+          <p:cNvPr id="12" name="icon_158" descr="preencoded.png">    </p:cNvPr>
+          <p:cNvPicPr>
+            <a:picLocks noChangeAspect="1"/>
+          </p:cNvPicPr>
+          <p:nvPr/>
+        </p:nvPicPr>
+        <p:blipFill>
+          <a:blip r:embed="rId3"/>
+          <a:stretch>
+            <a:fillRect/>
+          </a:stretch>
+        </p:blipFill>
+        <p:spPr>
+          <a:xfrm>
+            <a:off x="617220" y="2985516"/>
+            <a:ext cx="320040" cy="320040"/>
+          </a:xfrm>
+          <a:prstGeom prst="rect">
+            <a:avLst/>
+          </a:prstGeom>
+        </p:spPr>
+      </p:pic>
+      <p:sp>
+        <p:nvSpPr>
+          <p:cNvPr id="13" name="text_159"/>
+          <p:cNvSpPr txBox="1"/>
+          <p:nvPr/>
+        </p:nvSpPr>
+        <p:spPr>
+          <a:xfrm>
+            <a:off x="1280160" y="2843784"/>
+            <a:ext cx="3657600" cy="320040"/>
+          </a:xfrm>
+          <a:prstGeom prst="rect">
+            <a:avLst/>
+          </a:prstGeom>
+          <a:noFill/>
+          <a:ln/>
+        </p:spPr>
+        <p:txBody>
+          <a:bodyPr wrap="square" lIns="0" tIns="0" rIns="0" bIns="0" rtlCol="0" anchor="t"/>
+          <a:lstStyle/>
+          <a:p>
+            <a:pPr indent="0" marL="0">
+              <a:buNone/>
+            </a:pPr>
+            <a:r>
+              <a:rPr lang="en-US" sz="1700" b="1" dirty="0">
+                <a:solidFill>
+                  <a:schemeClr val="tx2"/>
+                </a:solidFill>
+              </a:rPr>
+              <a:t>Write clearly</a:t>
+            </a:r>
+            <a:endParaRPr lang="en-US" sz="1700" dirty="0"/>
+          </a:p>
+        </p:txBody>
+      </p:sp>
+      <p:sp>
+        <p:nvSpPr>
+          <p:cNvPr id="14" name="text_160"/>
+          <p:cNvSpPr txBox="1"/>
+          <p:nvPr/>
+        </p:nvSpPr>
+        <p:spPr>
+          <a:xfrm>
+            <a:off x="1280160" y="3163824"/>
+            <a:ext cx="4023360" cy="320040"/>
+          </a:xfrm>
+          <a:prstGeom prst="rect">
+            <a:avLst/>
+          </a:prstGeom>
+          <a:noFill/>
+          <a:ln/>
+        </p:spPr>
+        <p:txBody>
+          <a:bodyPr wrap="square" lIns="0" tIns="0" rIns="0" bIns="0" rtlCol="0" anchor="t"/>
+          <a:lstStyle/>
+          <a:p>
+            <a:pPr indent="0" marL="0">
+              <a:buNone/>
+            </a:pPr>
+            <a:r>
+              <a:rPr lang="en-US" sz="1400" dirty="0">
+                <a:solidFill>
+                  <a:schemeClr val="tx1"/>
+                </a:solidFill>
+              </a:rPr>
+              <a:t>Documentation taught me to explain ideas simply</a:t>
+            </a:r>
+            <a:endParaRPr lang="en-US" sz="1400" dirty="0"/>
+          </a:p>
+        </p:txBody>
+      </p:sp>
+      <p:sp>
+        <p:nvSpPr>
+          <p:cNvPr id="15" name="icon-bg_161"/>
+          <p:cNvSpPr/>
+          <p:nvPr/>
+        </p:nvSpPr>
+        <p:spPr>
+          <a:xfrm>
+            <a:off x="457200" y="3666744"/>
+            <a:ext cx="640080" cy="640080"/>
+          </a:xfrm>
+          <a:prstGeom prst="ellipse">
+            <a:avLst/>
+          </a:prstGeom>
+          <a:solidFill>
+            <a:srgbClr val="1F4E5F"/>
+          </a:solidFill>
+          <a:ln/>
+        </p:spPr>
+      </p:sp>
+      <p:pic>
+        <p:nvPicPr>
+          <p:cNvPr id="16" name="icon_162" descr="preencoded.png">    </p:cNvPr>
+          <p:cNvPicPr>
+            <a:picLocks noChangeAspect="1"/>
+          </p:cNvPicPr>
+          <p:nvPr/>
+        </p:nvPicPr>
+        <p:blipFill>
+          <a:blip r:embed="rId4"/>
+          <a:stretch>
+            <a:fillRect/>
+          </a:stretch>
+        </p:blipFill>
+        <p:spPr>
+          <a:xfrm>
+            <a:off x="617220" y="3826764"/>
+            <a:ext cx="320040" cy="320040"/>
+          </a:xfrm>
+          <a:prstGeom prst="rect">
+            <a:avLst/>
+          </a:prstGeom>
+        </p:spPr>
+      </p:pic>
+      <p:sp>
+        <p:nvSpPr>
+          <p:cNvPr id="17" name="text_163"/>
+          <p:cNvSpPr txBox="1"/>
+          <p:nvPr/>
+        </p:nvSpPr>
+        <p:spPr>
+          <a:xfrm>
+            <a:off x="1280160" y="3685032"/>
+            <a:ext cx="3657600" cy="320040"/>
+          </a:xfrm>
+          <a:prstGeom prst="rect">
+            <a:avLst/>
+          </a:prstGeom>
+          <a:noFill/>
+          <a:ln/>
+        </p:spPr>
+        <p:txBody>
+          <a:bodyPr wrap="square" lIns="0" tIns="0" rIns="0" bIns="0" rtlCol="0" anchor="t"/>
+          <a:lstStyle/>
+          <a:p>
+            <a:pPr indent="0" marL="0">
+              <a:buNone/>
+            </a:pPr>
+            <a:r>
+              <a:rPr lang="en-US" sz="1700" b="1" dirty="0">
+                <a:solidFill>
+                  <a:schemeClr val="tx2"/>
+                </a:solidFill>
+              </a:rPr>
+              <a:t>Manage my time</a:t>
+            </a:r>
+            <a:endParaRPr lang="en-US" sz="1700" dirty="0"/>
+          </a:p>
+        </p:txBody>
+      </p:sp>
+      <p:sp>
+        <p:nvSpPr>
+          <p:cNvPr id="18" name="text_164"/>
+          <p:cNvSpPr txBox="1"/>
+          <p:nvPr/>
+        </p:nvSpPr>
+        <p:spPr>
+          <a:xfrm>
+            <a:off x="1280160" y="4005072"/>
+            <a:ext cx="4023360" cy="320040"/>
+          </a:xfrm>
+          <a:prstGeom prst="rect">
+            <a:avLst/>
+          </a:prstGeom>
+          <a:noFill/>
+          <a:ln/>
+        </p:spPr>
+        <p:txBody>
+          <a:bodyPr wrap="square" lIns="0" tIns="0" rIns="0" bIns="0" rtlCol="0" anchor="t"/>
+          <a:lstStyle/>
+          <a:p>
+            <a:pPr indent="0" marL="0">
+              <a:buNone/>
+            </a:pPr>
+            <a:r>
+              <a:rPr lang="en-US" sz="1400" dirty="0">
+                <a:solidFill>
+                  <a:schemeClr val="tx1"/>
+                </a:solidFill>
+              </a:rPr>
+              <a:t>Small stages kept me motivated and on track</a:t>
+            </a:r>
+            <a:endParaRPr lang="en-US" sz="1400" dirty="0"/>
+          </a:p>
+        </p:txBody>
+      </p:sp>
+      <p:sp>
+        <p:nvSpPr>
+          <p:cNvPr id="19" name="card_165"/>
+          <p:cNvSpPr/>
+          <p:nvPr/>
+        </p:nvSpPr>
+        <p:spPr>
+          <a:xfrm>
+            <a:off x="5669280" y="1143000"/>
+            <a:ext cx="3017520" cy="3337560"/>
           </a:xfrm>
           <a:prstGeom prst="roundRect">
             <a:avLst>
-              <a:gd name="adj" fmla="val 2222"/>
-            </a:avLst>
-          </a:prstGeom>
-          <a:solidFill>
-            <a:schemeClr val="bg2"/>
-          </a:solidFill>
-          <a:ln/>
-        </p:spPr>
-      </p:sp>
-      <p:sp>
-        <p:nvSpPr>
-          <p:cNvPr id="4" name="text_154"/>
-          <p:cNvSpPr txBox="1"/>
-          <p:nvPr/>
-        </p:nvSpPr>
-        <p:spPr>
-          <a:xfrm>
-            <a:off x="685800" y="1325880"/>
-            <a:ext cx="3566160" cy="365760"/>
-          </a:xfrm>
-          <a:prstGeom prst="rect">
-            <a:avLst/>
-          </a:prstGeom>
-          <a:noFill/>
-          <a:ln/>
-        </p:spPr>
-        <p:txBody>
-          <a:bodyPr wrap="square" lIns="0" tIns="0" rIns="0" bIns="0" rtlCol="0" anchor="t"/>
-          <a:lstStyle/>
-          <a:p>
-            <a:pPr indent="0" marL="0">
-              <a:buNone/>
-            </a:pPr>
-            <a:r>
-              <a:rPr lang="en-US" sz="1800" b="1" dirty="0">
-                <a:solidFill>
-                  <a:schemeClr val="accent2"/>
-                </a:solidFill>
-              </a:rPr>
-              <a:t>Without protection</a:t>
-            </a:r>
-            <a:endParaRPr lang="en-US" sz="1800" dirty="0"/>
-          </a:p>
-        </p:txBody>
-      </p:sp>
-      <p:sp>
-        <p:nvSpPr>
-          <p:cNvPr id="5" name="step_155"/>
-          <p:cNvSpPr/>
-          <p:nvPr/>
-        </p:nvSpPr>
-        <p:spPr>
-          <a:xfrm>
-            <a:off x="685800" y="1828800"/>
-            <a:ext cx="411480" cy="411480"/>
-          </a:xfrm>
-          <a:prstGeom prst="ellipse">
-            <a:avLst/>
-          </a:prstGeom>
-          <a:solidFill>
-            <a:srgbClr val="5B6B73"/>
-          </a:solidFill>
-          <a:ln/>
-        </p:spPr>
-      </p:sp>
-      <p:sp>
-        <p:nvSpPr>
-          <p:cNvPr id="6" name="text_156"/>
-          <p:cNvSpPr txBox="1"/>
-          <p:nvPr/>
-        </p:nvSpPr>
-        <p:spPr>
-          <a:xfrm>
-            <a:off x="685800" y="1828800"/>
-            <a:ext cx="411480" cy="411480"/>
-          </a:xfrm>
-          <a:prstGeom prst="rect">
-            <a:avLst/>
-          </a:prstGeom>
-          <a:noFill/>
-          <a:ln/>
-        </p:spPr>
-        <p:txBody>
-          <a:bodyPr wrap="square" lIns="0" tIns="0" rIns="0" bIns="0" rtlCol="0" anchor="ctr"/>
-          <a:lstStyle/>
-          <a:p>
-            <a:pPr algn="ctr" indent="0" marL="0">
-              <a:buNone/>
-            </a:pPr>
-            <a:r>
-              <a:rPr lang="en-US" sz="1400" b="1" dirty="0">
-                <a:solidFill>
-                  <a:schemeClr val="bg1"/>
-                </a:solidFill>
-              </a:rPr>
-              <a:t>1</a:t>
-            </a:r>
-            <a:endParaRPr lang="en-US" sz="1400" dirty="0"/>
-          </a:p>
-        </p:txBody>
-      </p:sp>
-      <p:sp>
-        <p:nvSpPr>
-          <p:cNvPr id="7" name="text_157"/>
-          <p:cNvSpPr txBox="1"/>
-          <p:nvPr/>
-        </p:nvSpPr>
-        <p:spPr>
-          <a:xfrm>
-            <a:off x="1280160" y="1828800"/>
-            <a:ext cx="3017520" cy="411480"/>
-          </a:xfrm>
-          <a:prstGeom prst="rect">
-            <a:avLst/>
-          </a:prstGeom>
-          <a:noFill/>
-          <a:ln/>
-        </p:spPr>
-        <p:txBody>
-          <a:bodyPr wrap="square" lIns="0" tIns="0" rIns="0" bIns="0" rtlCol="0" anchor="ctr"/>
-          <a:lstStyle/>
-          <a:p>
-            <a:pPr indent="0" marL="0">
-              <a:buNone/>
-            </a:pPr>
-            <a:r>
-              <a:rPr lang="en-US" sz="1500" dirty="0">
-                <a:solidFill>
-                  <a:schemeClr val="tx1"/>
-                </a:solidFill>
-              </a:rPr>
-              <a:t>Student A reads: 1 seat left</a:t>
-            </a:r>
-            <a:endParaRPr lang="en-US" sz="1500" dirty="0"/>
-          </a:p>
-        </p:txBody>
-      </p:sp>
-      <p:sp>
-        <p:nvSpPr>
-          <p:cNvPr id="8" name="step_158"/>
-          <p:cNvSpPr/>
-          <p:nvPr/>
-        </p:nvSpPr>
-        <p:spPr>
-          <a:xfrm>
-            <a:off x="685800" y="2450592"/>
-            <a:ext cx="411480" cy="411480"/>
-          </a:xfrm>
-          <a:prstGeom prst="ellipse">
-            <a:avLst/>
-          </a:prstGeom>
-          <a:solidFill>
-            <a:srgbClr val="5B6B73"/>
-          </a:solidFill>
-          <a:ln/>
-        </p:spPr>
-      </p:sp>
-      <p:sp>
-        <p:nvSpPr>
-          <p:cNvPr id="9" name="text_159"/>
-          <p:cNvSpPr txBox="1"/>
-          <p:nvPr/>
-        </p:nvSpPr>
-        <p:spPr>
-          <a:xfrm>
-            <a:off x="685800" y="2450592"/>
-            <a:ext cx="411480" cy="411480"/>
-          </a:xfrm>
-          <a:prstGeom prst="rect">
-            <a:avLst/>
-          </a:prstGeom>
-          <a:noFill/>
-          <a:ln/>
-        </p:spPr>
-        <p:txBody>
-          <a:bodyPr wrap="square" lIns="0" tIns="0" rIns="0" bIns="0" rtlCol="0" anchor="ctr"/>
-          <a:lstStyle/>
-          <a:p>
-            <a:pPr algn="ctr" indent="0" marL="0">
-              <a:buNone/>
-            </a:pPr>
-            <a:r>
-              <a:rPr lang="en-US" sz="1400" b="1" dirty="0">
-                <a:solidFill>
-                  <a:schemeClr val="bg1"/>
-                </a:solidFill>
-              </a:rPr>
-              <a:t>2</a:t>
-            </a:r>
-            <a:endParaRPr lang="en-US" sz="1400" dirty="0"/>
-          </a:p>
-        </p:txBody>
-      </p:sp>
-      <p:sp>
-        <p:nvSpPr>
-          <p:cNvPr id="10" name="text_160"/>
-          <p:cNvSpPr txBox="1"/>
-          <p:nvPr/>
-        </p:nvSpPr>
-        <p:spPr>
-          <a:xfrm>
-            <a:off x="1280160" y="2450592"/>
-            <a:ext cx="3017520" cy="411480"/>
-          </a:xfrm>
-          <a:prstGeom prst="rect">
-            <a:avLst/>
-          </a:prstGeom>
-          <a:noFill/>
-          <a:ln/>
-        </p:spPr>
-        <p:txBody>
-          <a:bodyPr wrap="square" lIns="0" tIns="0" rIns="0" bIns="0" rtlCol="0" anchor="ctr"/>
-          <a:lstStyle/>
-          <a:p>
-            <a:pPr indent="0" marL="0">
-              <a:buNone/>
-            </a:pPr>
-            <a:r>
-              <a:rPr lang="en-US" sz="1500" dirty="0">
-                <a:solidFill>
-                  <a:schemeClr val="tx1"/>
-                </a:solidFill>
-              </a:rPr>
-              <a:t>Student B reads: 1 seat left</a:t>
-            </a:r>
-            <a:endParaRPr lang="en-US" sz="1500" dirty="0"/>
-          </a:p>
-        </p:txBody>
-      </p:sp>
-      <p:sp>
-        <p:nvSpPr>
-          <p:cNvPr id="11" name="step_161"/>
-          <p:cNvSpPr/>
-          <p:nvPr/>
-        </p:nvSpPr>
-        <p:spPr>
-          <a:xfrm>
-            <a:off x="685800" y="3072384"/>
-            <a:ext cx="411480" cy="411480"/>
-          </a:xfrm>
-          <a:prstGeom prst="ellipse">
-            <a:avLst/>
-          </a:prstGeom>
-          <a:solidFill>
-            <a:srgbClr val="5B6B73"/>
-          </a:solidFill>
-          <a:ln/>
-        </p:spPr>
-      </p:sp>
-      <p:sp>
-        <p:nvSpPr>
-          <p:cNvPr id="12" name="text_162"/>
-          <p:cNvSpPr txBox="1"/>
-          <p:nvPr/>
-        </p:nvSpPr>
-        <p:spPr>
-          <a:xfrm>
-            <a:off x="685800" y="3072384"/>
-            <a:ext cx="411480" cy="411480"/>
-          </a:xfrm>
-          <a:prstGeom prst="rect">
-            <a:avLst/>
-          </a:prstGeom>
-          <a:noFill/>
-          <a:ln/>
-        </p:spPr>
-        <p:txBody>
-          <a:bodyPr wrap="square" lIns="0" tIns="0" rIns="0" bIns="0" rtlCol="0" anchor="ctr"/>
-          <a:lstStyle/>
-          <a:p>
-            <a:pPr algn="ctr" indent="0" marL="0">
-              <a:buNone/>
-            </a:pPr>
-            <a:r>
-              <a:rPr lang="en-US" sz="1400" b="1" dirty="0">
-                <a:solidFill>
-                  <a:schemeClr val="bg1"/>
-                </a:solidFill>
-              </a:rPr>
-              <a:t>3</a:t>
-            </a:r>
-            <a:endParaRPr lang="en-US" sz="1400" dirty="0"/>
-          </a:p>
-        </p:txBody>
-      </p:sp>
-      <p:sp>
-        <p:nvSpPr>
-          <p:cNvPr id="13" name="text_163"/>
-          <p:cNvSpPr txBox="1"/>
-          <p:nvPr/>
-        </p:nvSpPr>
-        <p:spPr>
-          <a:xfrm>
-            <a:off x="1280160" y="3072384"/>
-            <a:ext cx="3017520" cy="411480"/>
-          </a:xfrm>
-          <a:prstGeom prst="rect">
-            <a:avLst/>
-          </a:prstGeom>
-          <a:noFill/>
-          <a:ln/>
-        </p:spPr>
-        <p:txBody>
-          <a:bodyPr wrap="square" lIns="0" tIns="0" rIns="0" bIns="0" rtlCol="0" anchor="ctr"/>
-          <a:lstStyle/>
-          <a:p>
-            <a:pPr indent="0" marL="0">
-              <a:buNone/>
-            </a:pPr>
-            <a:r>
-              <a:rPr lang="en-US" sz="1500" dirty="0">
-                <a:solidFill>
-                  <a:schemeClr val="tx1"/>
-                </a:solidFill>
-              </a:rPr>
-              <a:t>Both are registered</a:t>
-            </a:r>
-            <a:endParaRPr lang="en-US" sz="1500" dirty="0"/>
-          </a:p>
-        </p:txBody>
-      </p:sp>
-      <p:sp>
-        <p:nvSpPr>
-          <p:cNvPr id="14" name="step_164"/>
-          <p:cNvSpPr/>
-          <p:nvPr/>
-        </p:nvSpPr>
-        <p:spPr>
-          <a:xfrm>
-            <a:off x="685800" y="3694176"/>
-            <a:ext cx="411480" cy="411480"/>
-          </a:xfrm>
-          <a:prstGeom prst="ellipse">
-            <a:avLst/>
-          </a:prstGeom>
-          <a:solidFill>
-            <a:srgbClr val="E07A2F"/>
-          </a:solidFill>
-          <a:ln/>
-        </p:spPr>
-      </p:sp>
-      <p:sp>
-        <p:nvSpPr>
-          <p:cNvPr id="15" name="text_165"/>
-          <p:cNvSpPr txBox="1"/>
-          <p:nvPr/>
-        </p:nvSpPr>
-        <p:spPr>
-          <a:xfrm>
-            <a:off x="685800" y="3694176"/>
-            <a:ext cx="411480" cy="411480"/>
-          </a:xfrm>
-          <a:prstGeom prst="rect">
-            <a:avLst/>
-          </a:prstGeom>
-          <a:noFill/>
-          <a:ln/>
-        </p:spPr>
-        <p:txBody>
-          <a:bodyPr wrap="square" lIns="0" tIns="0" rIns="0" bIns="0" rtlCol="0" anchor="ctr"/>
-          <a:lstStyle/>
-          <a:p>
-            <a:pPr algn="ctr" indent="0" marL="0">
-              <a:buNone/>
-            </a:pPr>
-            <a:r>
-              <a:rPr lang="en-US" sz="1400" b="1" dirty="0">
-                <a:solidFill>
-                  <a:schemeClr val="bg1"/>
-                </a:solidFill>
-              </a:rPr>
-              <a:t>4</a:t>
-            </a:r>
-            <a:endParaRPr lang="en-US" sz="1400" dirty="0"/>
-          </a:p>
-        </p:txBody>
-      </p:sp>
-      <p:sp>
-        <p:nvSpPr>
-          <p:cNvPr id="16" name="text_166"/>
-          <p:cNvSpPr txBox="1"/>
-          <p:nvPr/>
-        </p:nvSpPr>
-        <p:spPr>
-          <a:xfrm>
-            <a:off x="1280160" y="3694176"/>
-            <a:ext cx="3017520" cy="411480"/>
-          </a:xfrm>
-          <a:prstGeom prst="rect">
-            <a:avLst/>
-          </a:prstGeom>
-          <a:noFill/>
-          <a:ln/>
-        </p:spPr>
-        <p:txBody>
-          <a:bodyPr wrap="square" lIns="0" tIns="0" rIns="0" bIns="0" rtlCol="0" anchor="ctr"/>
-          <a:lstStyle/>
-          <a:p>
-            <a:pPr indent="0" marL="0">
-              <a:buNone/>
-            </a:pPr>
-            <a:r>
-              <a:rPr lang="en-US" sz="1500" b="1" dirty="0">
-                <a:solidFill>
-                  <a:schemeClr val="tx1"/>
-                </a:solidFill>
-              </a:rPr>
-              <a:t>Class is over-full: 41 / 40</a:t>
-            </a:r>
-            <a:endParaRPr lang="en-US" sz="1500" dirty="0"/>
-          </a:p>
-        </p:txBody>
-      </p:sp>
-      <p:sp>
-        <p:nvSpPr>
-          <p:cNvPr id="17" name="card_167"/>
-          <p:cNvSpPr/>
-          <p:nvPr/>
-        </p:nvSpPr>
-        <p:spPr>
-          <a:xfrm>
-            <a:off x="4663440" y="1188720"/>
-            <a:ext cx="4023360" cy="3291840"/>
-          </a:xfrm>
-          <a:prstGeom prst="roundRect">
-            <a:avLst>
-              <a:gd name="adj" fmla="val 2222"/>
+              <a:gd name="adj" fmla="val 2424"/>
             </a:avLst>
           </a:prstGeom>
           <a:solidFill>
@@ -3098,14 +2866,14 @@
       </p:sp>
       <p:sp>
         <p:nvSpPr>
-          <p:cNvPr id="18" name="text_168"/>
-          <p:cNvSpPr txBox="1"/>
-          <p:nvPr/>
-        </p:nvSpPr>
-        <p:spPr>
-          <a:xfrm>
-            <a:off x="4892040" y="1325880"/>
-            <a:ext cx="3566160" cy="365760"/>
+          <p:cNvPr id="20" name="text_166"/>
+          <p:cNvSpPr txBox="1"/>
+          <p:nvPr/>
+        </p:nvSpPr>
+        <p:spPr>
+          <a:xfrm>
+            <a:off x="5897880" y="1280160"/>
+            <a:ext cx="2560320" cy="365760"/>
           </a:xfrm>
           <a:prstGeom prst="rect">
             <a:avLst/>
@@ -3126,7 +2894,7 @@
                   <a:schemeClr val="tx2"/>
                 </a:solidFill>
               </a:rPr>
-              <a:t>My solution</a:t>
+              <a:t>Next steps</a:t>
             </a:r>
             <a:endParaRPr lang="en-US" sz="1800" dirty="0"/>
           </a:p>
@@ -3134,14 +2902,14 @@
       </p:sp>
       <p:sp>
         <p:nvSpPr>
-          <p:cNvPr id="19" name="text_169"/>
-          <p:cNvSpPr txBox="1"/>
-          <p:nvPr/>
-        </p:nvSpPr>
-        <p:spPr>
-          <a:xfrm>
-            <a:off x="4892040" y="1828800"/>
-            <a:ext cx="3611880" cy="777240"/>
+          <p:cNvPr id="21" name="text_167"/>
+          <p:cNvSpPr txBox="1"/>
+          <p:nvPr/>
+        </p:nvSpPr>
+        <p:spPr>
+          <a:xfrm>
+            <a:off x="5897880" y="1783080"/>
+            <a:ext cx="2606040" cy="2560320"/>
           </a:xfrm>
           <a:prstGeom prst="rect">
             <a:avLst/>
@@ -3153,132 +2921,58 @@
           <a:bodyPr wrap="square" lIns="0" tIns="0" rIns="0" bIns="0" rtlCol="0" anchor="t"/>
           <a:lstStyle/>
           <a:p>
-            <a:pPr indent="0" marL="0">
-              <a:buNone/>
-            </a:pPr>
-            <a:r>
-              <a:rPr lang="en-US" sz="1400" b="1" dirty="0">
-                <a:solidFill>
-                  <a:schemeClr val="tx2"/>
-                </a:solidFill>
-              </a:rPr>
-              <a:t>Transaction</a:t>
-            </a:r>
-            <a:endParaRPr lang="en-US" sz="1400" dirty="0"/>
-          </a:p>
-          <a:p>
-            <a:pPr indent="0" marL="0">
-              <a:buNone/>
-            </a:pPr>
-            <a:r>
-              <a:rPr lang="en-US" sz="1400" dirty="0">
+            <a:pPr marL="342900" indent="-342900">
+              <a:spcAft>
+                <a:spcPts val="1000"/>
+              </a:spcAft>
+              <a:buSzPct val="100000"/>
+              <a:buChar char="•"/>
+            </a:pPr>
+            <a:r>
+              <a:rPr lang="en-US" sz="1500" dirty="0">
                 <a:solidFill>
                   <a:schemeClr val="tx1"/>
                 </a:solidFill>
               </a:rPr>
-              <a:t>all checks and the insert succeed together, or nothing changes</a:t>
-            </a:r>
-            <a:endParaRPr lang="en-US" sz="1400" dirty="0"/>
-          </a:p>
-        </p:txBody>
-      </p:sp>
-      <p:sp>
-        <p:nvSpPr>
-          <p:cNvPr id="20" name="text_170"/>
-          <p:cNvSpPr txBox="1"/>
-          <p:nvPr/>
-        </p:nvSpPr>
-        <p:spPr>
-          <a:xfrm>
-            <a:off x="4892040" y="2697480"/>
-            <a:ext cx="3611880" cy="777240"/>
-          </a:xfrm>
-          <a:prstGeom prst="rect">
-            <a:avLst/>
-          </a:prstGeom>
-          <a:noFill/>
-          <a:ln/>
-        </p:spPr>
-        <p:txBody>
-          <a:bodyPr wrap="square" lIns="0" tIns="0" rIns="0" bIns="0" rtlCol="0" anchor="t"/>
-          <a:lstStyle/>
-          <a:p>
-            <a:pPr indent="0" marL="0">
-              <a:buNone/>
-            </a:pPr>
-            <a:r>
-              <a:rPr lang="en-US" sz="1400" b="1" dirty="0">
-                <a:solidFill>
-                  <a:schemeClr val="tx2"/>
-                </a:solidFill>
-              </a:rPr>
-              <a:t>Row lock</a:t>
-            </a:r>
-            <a:endParaRPr lang="en-US" sz="1400" dirty="0"/>
-          </a:p>
-          <a:p>
-            <a:pPr indent="0" marL="0">
-              <a:buNone/>
-            </a:pPr>
-            <a:r>
-              <a:rPr lang="en-US" sz="1400" dirty="0">
+              <a:t>Automatic tests</a:t>
+            </a:r>
+            <a:endParaRPr lang="en-US" sz="1500" dirty="0"/>
+          </a:p>
+          <a:p>
+            <a:pPr marL="342900" indent="-342900">
+              <a:spcAft>
+                <a:spcPts val="1000"/>
+              </a:spcAft>
+              <a:buSzPct val="100000"/>
+              <a:buChar char="•"/>
+            </a:pPr>
+            <a:r>
+              <a:rPr lang="en-US" sz="1500" dirty="0">
                 <a:solidFill>
                   <a:schemeClr val="tx1"/>
                 </a:solidFill>
               </a:rPr>
-              <a:t>SELECT … FOR UPDATE makes Student B wait for Student A</a:t>
-            </a:r>
-            <a:endParaRPr lang="en-US" sz="1400" dirty="0"/>
-          </a:p>
-        </p:txBody>
-      </p:sp>
-      <p:sp>
-        <p:nvSpPr>
-          <p:cNvPr id="21" name="text_171"/>
-          <p:cNvSpPr txBox="1"/>
-          <p:nvPr/>
-        </p:nvSpPr>
-        <p:spPr>
-          <a:xfrm>
-            <a:off x="4892040" y="3566160"/>
-            <a:ext cx="3611880" cy="777240"/>
-          </a:xfrm>
-          <a:prstGeom prst="rect">
-            <a:avLst/>
-          </a:prstGeom>
-          <a:noFill/>
-          <a:ln/>
-        </p:spPr>
-        <p:txBody>
-          <a:bodyPr wrap="square" lIns="0" tIns="0" rIns="0" bIns="0" rtlCol="0" anchor="t"/>
-          <a:lstStyle/>
-          <a:p>
-            <a:pPr indent="0" marL="0">
-              <a:buNone/>
-            </a:pPr>
-            <a:r>
-              <a:rPr lang="en-US" sz="1400" b="1" dirty="0">
-                <a:solidFill>
-                  <a:schemeClr val="tx2"/>
-                </a:solidFill>
-              </a:rPr>
-              <a:t>Atomic counter</a:t>
-            </a:r>
-            <a:endParaRPr lang="en-US" sz="1400" dirty="0"/>
-          </a:p>
-          <a:p>
-            <a:pPr indent="0" marL="0">
-              <a:buNone/>
-            </a:pPr>
-            <a:r>
-              <a:rPr lang="en-US" sz="1400" dirty="0">
+              <a:t>Waiting list with email alerts</a:t>
+            </a:r>
+            <a:endParaRPr lang="en-US" sz="1500" dirty="0"/>
+          </a:p>
+          <a:p>
+            <a:pPr marL="342900" indent="-342900">
+              <a:spcAft>
+                <a:spcPts val="1000"/>
+              </a:spcAft>
+              <a:buSzPct val="100000"/>
+              <a:buChar char="•"/>
+            </a:pPr>
+            <a:r>
+              <a:rPr lang="en-US" sz="1500" dirty="0">
                 <a:solidFill>
                   <a:schemeClr val="tx1"/>
                 </a:solidFill>
               </a:rPr>
-              <a:t>seat count is incremented inside the database</a:t>
-            </a:r>
-            <a:endParaRPr lang="en-US" sz="1400" dirty="0"/>
+              <a:t>Automatic prerequisite check</a:t>
+            </a:r>
+            <a:endParaRPr lang="en-US" sz="1500" dirty="0"/>
           </a:p>
         </p:txBody>
       </p:sp>
@@ -3362,105 +3056,85 @@
         </p:nvSpPr>
         <p:spPr>
           <a:xfrm>
-            <a:off x="457200" y="274320"/>
-            <a:ext cx="8229600" cy="685800"/>
-          </a:xfrm>
-          <a:prstGeom prst="rect">
-            <a:avLst/>
-          </a:prstGeom>
-          <a:noFill/>
-          <a:ln/>
-        </p:spPr>
-        <p:txBody>
-          <a:bodyPr wrap="square" lIns="0" tIns="0" rIns="0" bIns="0" rtlCol="0" anchor="ctr"/>
+            <a:off x="548640" y="1417320"/>
+            <a:ext cx="8046720" cy="1371600"/>
+          </a:xfrm>
+          <a:prstGeom prst="rect">
+            <a:avLst/>
+          </a:prstGeom>
+          <a:noFill/>
+          <a:ln/>
+        </p:spPr>
+        <p:txBody>
+          <a:bodyPr wrap="square" rtlCol="0" anchor="t"/>
           <a:lstStyle/>
           <a:p>
             <a:pPr algn="l" indent="0" marL="0">
               <a:buNone/>
             </a:pPr>
             <a:r>
-              <a:rPr lang="en-US" sz="3000" b="1" dirty="0">
-                <a:solidFill>
-                  <a:schemeClr val="tx2"/>
+              <a:rPr lang="en-US" sz="4000" b="1" dirty="0">
+                <a:solidFill>
+                  <a:schemeClr val="bg1"/>
                 </a:solidFill>
                 <a:latin typeface="Cambria" pitchFamily="34" charset="0"/>
                 <a:ea typeface="Cambria" pitchFamily="34" charset="-122"/>
                 <a:cs typeface="Cambria" pitchFamily="34" charset="-120"/>
               </a:rPr>
-              <a:t>Challenge 2: timetable clashes</a:t>
-            </a:r>
-            <a:endParaRPr lang="en-US" sz="3000" dirty="0"/>
-          </a:p>
-        </p:txBody>
-      </p:sp>
-      <p:sp>
-        <p:nvSpPr>
-          <p:cNvPr id="3" name="text_172"/>
-          <p:cNvSpPr txBox="1"/>
-          <p:nvPr/>
-        </p:nvSpPr>
-        <p:spPr>
-          <a:xfrm>
-            <a:off x="457200" y="1097280"/>
-            <a:ext cx="8229600" cy="365760"/>
-          </a:xfrm>
-          <a:prstGeom prst="rect">
-            <a:avLst/>
-          </a:prstGeom>
-          <a:noFill/>
-          <a:ln/>
-        </p:spPr>
-        <p:txBody>
-          <a:bodyPr wrap="square" lIns="0" tIns="0" rIns="0" bIns="0" rtlCol="0" anchor="t"/>
+              <a:t>Thank you!</a:t>
+            </a:r>
+            <a:endParaRPr lang="en-US" sz="4000" dirty="0"/>
+          </a:p>
+        </p:txBody>
+      </p:sp>
+      <p:sp>
+        <p:nvSpPr>
+          <p:cNvPr id="3" name="Text 0"/>
+          <p:cNvSpPr/>
+          <p:nvPr>
+            <p:ph idx="101" type="body" hasCustomPrompt="1"/>
+          </p:nvPr>
+        </p:nvSpPr>
+        <p:spPr>
+          <a:xfrm>
+            <a:off x="548640" y="2834640"/>
+            <a:ext cx="8046720" cy="822960"/>
+          </a:xfrm>
+          <a:prstGeom prst="rect">
+            <a:avLst/>
+          </a:prstGeom>
+          <a:noFill/>
+          <a:ln/>
+        </p:spPr>
+        <p:txBody>
+          <a:bodyPr wrap="square" rtlCol="0" anchor="t"/>
           <a:lstStyle/>
           <a:p>
             <a:pPr indent="0" marL="0">
               <a:buNone/>
             </a:pPr>
             <a:r>
-              <a:rPr lang="en-US" sz="1600" dirty="0">
-                <a:solidFill>
-                  <a:schemeClr val="accent4"/>
-                </a:solidFill>
-              </a:rPr>
-              <a:t>Two classes clash only if all three conditions are true</a:t>
-            </a:r>
-            <a:endParaRPr lang="en-US" sz="1600" dirty="0"/>
-          </a:p>
-        </p:txBody>
-      </p:sp>
-      <p:sp>
-        <p:nvSpPr>
-          <p:cNvPr id="4" name="card_173"/>
+              <a:rPr lang="en-US" sz="1800" dirty="0">
+                <a:solidFill>
+                  <a:schemeClr val="accent5"/>
+                </a:solidFill>
+              </a:rPr>
+              <a:t>Questions and feedback are very welcome</a:t>
+            </a:r>
+            <a:endParaRPr lang="en-US" sz="1800" dirty="0"/>
+          </a:p>
+        </p:txBody>
+      </p:sp>
+      <p:sp>
+        <p:nvSpPr>
+          <p:cNvPr id="4" name="icon-bg_168"/>
           <p:cNvSpPr/>
           <p:nvPr/>
         </p:nvSpPr>
         <p:spPr>
           <a:xfrm>
-            <a:off x="457200" y="1645920"/>
-            <a:ext cx="2651760" cy="2011680"/>
-          </a:xfrm>
-          <a:prstGeom prst="roundRect">
-            <a:avLst>
-              <a:gd name="adj" fmla="val 3636"/>
-            </a:avLst>
-          </a:prstGeom>
-          <a:solidFill>
-            <a:schemeClr val="bg2"/>
-          </a:solidFill>
-          <a:ln/>
-        </p:spPr>
-      </p:sp>
-      <p:sp>
-        <p:nvSpPr>
-          <p:cNvPr id="5" name="icon-bg_174"/>
-          <p:cNvSpPr/>
-          <p:nvPr/>
-        </p:nvSpPr>
-        <p:spPr>
-          <a:xfrm>
-            <a:off x="685800" y="1874520"/>
-            <a:ext cx="640080" cy="640080"/>
+            <a:off x="7635240" y="502920"/>
+            <a:ext cx="914400" cy="914400"/>
           </a:xfrm>
           <a:prstGeom prst="ellipse">
             <a:avLst/>
@@ -3473,7 +3147,7 @@
       </p:sp>
       <p:pic>
         <p:nvPicPr>
-          <p:cNvPr id="6" name="icon_175" descr="preencoded.png">    </p:cNvPr>
+          <p:cNvPr id="5" name="icon_169" descr="preencoded.png">    </p:cNvPr>
           <p:cNvPicPr>
             <a:picLocks noChangeAspect="1"/>
           </p:cNvPicPr>
@@ -3487,2200 +3161,6 @@
         </p:blipFill>
         <p:spPr>
           <a:xfrm>
-            <a:off x="845820" y="2034540"/>
-            <a:ext cx="320040" cy="320040"/>
-          </a:xfrm>
-          <a:prstGeom prst="rect">
-            <a:avLst/>
-          </a:prstGeom>
-        </p:spPr>
-      </p:pic>
-      <p:sp>
-        <p:nvSpPr>
-          <p:cNvPr id="7" name="text_176"/>
-          <p:cNvSpPr txBox="1"/>
-          <p:nvPr/>
-        </p:nvSpPr>
-        <p:spPr>
-          <a:xfrm>
-            <a:off x="685800" y="2651760"/>
-            <a:ext cx="2286000" cy="365760"/>
-          </a:xfrm>
-          <a:prstGeom prst="rect">
-            <a:avLst/>
-          </a:prstGeom>
-          <a:noFill/>
-          <a:ln/>
-        </p:spPr>
-        <p:txBody>
-          <a:bodyPr wrap="square" lIns="0" tIns="0" rIns="0" bIns="0" rtlCol="0" anchor="t"/>
-          <a:lstStyle/>
-          <a:p>
-            <a:pPr indent="0" marL="0">
-              <a:buNone/>
-            </a:pPr>
-            <a:r>
-              <a:rPr lang="en-US" sz="1700" b="1" dirty="0">
-                <a:solidFill>
-                  <a:schemeClr val="tx2"/>
-                </a:solidFill>
-              </a:rPr>
-              <a:t>Same day</a:t>
-            </a:r>
-            <a:endParaRPr lang="en-US" sz="1700" dirty="0"/>
-          </a:p>
-        </p:txBody>
-      </p:sp>
-      <p:sp>
-        <p:nvSpPr>
-          <p:cNvPr id="8" name="text_177"/>
-          <p:cNvSpPr txBox="1"/>
-          <p:nvPr/>
-        </p:nvSpPr>
-        <p:spPr>
-          <a:xfrm>
-            <a:off x="685800" y="3017520"/>
-            <a:ext cx="2286000" cy="594360"/>
-          </a:xfrm>
-          <a:prstGeom prst="rect">
-            <a:avLst/>
-          </a:prstGeom>
-          <a:noFill/>
-          <a:ln/>
-        </p:spPr>
-        <p:txBody>
-          <a:bodyPr wrap="square" lIns="0" tIns="0" rIns="0" bIns="0" rtlCol="0" anchor="t"/>
-          <a:lstStyle/>
-          <a:p>
-            <a:pPr indent="0" marL="0">
-              <a:buNone/>
-            </a:pPr>
-            <a:r>
-              <a:rPr lang="en-US" sz="1300" dirty="0">
-                <a:solidFill>
-                  <a:schemeClr val="tx1"/>
-                </a:solidFill>
-              </a:rPr>
-              <a:t>Both meet on, for example, Monday</a:t>
-            </a:r>
-            <a:endParaRPr lang="en-US" sz="1300" dirty="0"/>
-          </a:p>
-        </p:txBody>
-      </p:sp>
-      <p:sp>
-        <p:nvSpPr>
-          <p:cNvPr id="9" name="card_178"/>
-          <p:cNvSpPr/>
-          <p:nvPr/>
-        </p:nvSpPr>
-        <p:spPr>
-          <a:xfrm>
-            <a:off x="3246120" y="1645920"/>
-            <a:ext cx="2651760" cy="2011680"/>
-          </a:xfrm>
-          <a:prstGeom prst="roundRect">
-            <a:avLst>
-              <a:gd name="adj" fmla="val 3636"/>
-            </a:avLst>
-          </a:prstGeom>
-          <a:solidFill>
-            <a:schemeClr val="bg2"/>
-          </a:solidFill>
-          <a:ln/>
-        </p:spPr>
-      </p:sp>
-      <p:sp>
-        <p:nvSpPr>
-          <p:cNvPr id="10" name="icon-bg_179"/>
-          <p:cNvSpPr/>
-          <p:nvPr/>
-        </p:nvSpPr>
-        <p:spPr>
-          <a:xfrm>
-            <a:off x="3474720" y="1874520"/>
-            <a:ext cx="640080" cy="640080"/>
-          </a:xfrm>
-          <a:prstGeom prst="ellipse">
-            <a:avLst/>
-          </a:prstGeom>
-          <a:solidFill>
-            <a:srgbClr val="1F4E5F"/>
-          </a:solidFill>
-          <a:ln/>
-        </p:spPr>
-      </p:sp>
-      <p:pic>
-        <p:nvPicPr>
-          <p:cNvPr id="11" name="icon_180" descr="preencoded.png">    </p:cNvPr>
-          <p:cNvPicPr>
-            <a:picLocks noChangeAspect="1"/>
-          </p:cNvPicPr>
-          <p:nvPr/>
-        </p:nvPicPr>
-        <p:blipFill>
-          <a:blip r:embed="rId2"/>
-          <a:stretch>
-            <a:fillRect/>
-          </a:stretch>
-        </p:blipFill>
-        <p:spPr>
-          <a:xfrm>
-            <a:off x="3634740" y="2034540"/>
-            <a:ext cx="320040" cy="320040"/>
-          </a:xfrm>
-          <a:prstGeom prst="rect">
-            <a:avLst/>
-          </a:prstGeom>
-        </p:spPr>
-      </p:pic>
-      <p:sp>
-        <p:nvSpPr>
-          <p:cNvPr id="12" name="text_181"/>
-          <p:cNvSpPr txBox="1"/>
-          <p:nvPr/>
-        </p:nvSpPr>
-        <p:spPr>
-          <a:xfrm>
-            <a:off x="3474720" y="2651760"/>
-            <a:ext cx="2286000" cy="365760"/>
-          </a:xfrm>
-          <a:prstGeom prst="rect">
-            <a:avLst/>
-          </a:prstGeom>
-          <a:noFill/>
-          <a:ln/>
-        </p:spPr>
-        <p:txBody>
-          <a:bodyPr wrap="square" lIns="0" tIns="0" rIns="0" bIns="0" rtlCol="0" anchor="t"/>
-          <a:lstStyle/>
-          <a:p>
-            <a:pPr indent="0" marL="0">
-              <a:buNone/>
-            </a:pPr>
-            <a:r>
-              <a:rPr lang="en-US" sz="1700" b="1" dirty="0">
-                <a:solidFill>
-                  <a:schemeClr val="tx2"/>
-                </a:solidFill>
-              </a:rPr>
-              <a:t>Periods overlap</a:t>
-            </a:r>
-            <a:endParaRPr lang="en-US" sz="1700" dirty="0"/>
-          </a:p>
-        </p:txBody>
-      </p:sp>
-      <p:sp>
-        <p:nvSpPr>
-          <p:cNvPr id="13" name="text_182"/>
-          <p:cNvSpPr txBox="1"/>
-          <p:nvPr/>
-        </p:nvSpPr>
-        <p:spPr>
-          <a:xfrm>
-            <a:off x="3474720" y="3017520"/>
-            <a:ext cx="2286000" cy="594360"/>
-          </a:xfrm>
-          <a:prstGeom prst="rect">
-            <a:avLst/>
-          </a:prstGeom>
-          <a:noFill/>
-          <a:ln/>
-        </p:spPr>
-        <p:txBody>
-          <a:bodyPr wrap="square" lIns="0" tIns="0" rIns="0" bIns="0" rtlCol="0" anchor="t"/>
-          <a:lstStyle/>
-          <a:p>
-            <a:pPr indent="0" marL="0">
-              <a:buNone/>
-            </a:pPr>
-            <a:r>
-              <a:rPr lang="en-US" sz="1300" dirty="0">
-                <a:solidFill>
-                  <a:schemeClr val="tx1"/>
-                </a:solidFill>
-              </a:rPr>
-              <a:t>start A ≤ end B  and  end A ≥ start B</a:t>
-            </a:r>
-            <a:endParaRPr lang="en-US" sz="1300" dirty="0"/>
-          </a:p>
-        </p:txBody>
-      </p:sp>
-      <p:sp>
-        <p:nvSpPr>
-          <p:cNvPr id="14" name="card_183"/>
-          <p:cNvSpPr/>
-          <p:nvPr/>
-        </p:nvSpPr>
-        <p:spPr>
-          <a:xfrm>
-            <a:off x="6035040" y="1645920"/>
-            <a:ext cx="2651760" cy="2011680"/>
-          </a:xfrm>
-          <a:prstGeom prst="roundRect">
-            <a:avLst>
-              <a:gd name="adj" fmla="val 3636"/>
-            </a:avLst>
-          </a:prstGeom>
-          <a:solidFill>
-            <a:schemeClr val="bg2"/>
-          </a:solidFill>
-          <a:ln/>
-        </p:spPr>
-      </p:sp>
-      <p:sp>
-        <p:nvSpPr>
-          <p:cNvPr id="15" name="icon-bg_184"/>
-          <p:cNvSpPr/>
-          <p:nvPr/>
-        </p:nvSpPr>
-        <p:spPr>
-          <a:xfrm>
-            <a:off x="6263640" y="1874520"/>
-            <a:ext cx="640080" cy="640080"/>
-          </a:xfrm>
-          <a:prstGeom prst="ellipse">
-            <a:avLst/>
-          </a:prstGeom>
-          <a:solidFill>
-            <a:srgbClr val="1F4E5F"/>
-          </a:solidFill>
-          <a:ln/>
-        </p:spPr>
-      </p:sp>
-      <p:pic>
-        <p:nvPicPr>
-          <p:cNvPr id="16" name="icon_185" descr="preencoded.png">    </p:cNvPr>
-          <p:cNvPicPr>
-            <a:picLocks noChangeAspect="1"/>
-          </p:cNvPicPr>
-          <p:nvPr/>
-        </p:nvPicPr>
-        <p:blipFill>
-          <a:blip r:embed="rId3"/>
-          <a:stretch>
-            <a:fillRect/>
-          </a:stretch>
-        </p:blipFill>
-        <p:spPr>
-          <a:xfrm>
-            <a:off x="6423660" y="2034540"/>
-            <a:ext cx="320040" cy="320040"/>
-          </a:xfrm>
-          <a:prstGeom prst="rect">
-            <a:avLst/>
-          </a:prstGeom>
-        </p:spPr>
-      </p:pic>
-      <p:sp>
-        <p:nvSpPr>
-          <p:cNvPr id="17" name="text_186"/>
-          <p:cNvSpPr txBox="1"/>
-          <p:nvPr/>
-        </p:nvSpPr>
-        <p:spPr>
-          <a:xfrm>
-            <a:off x="6263640" y="2651760"/>
-            <a:ext cx="2286000" cy="365760"/>
-          </a:xfrm>
-          <a:prstGeom prst="rect">
-            <a:avLst/>
-          </a:prstGeom>
-          <a:noFill/>
-          <a:ln/>
-        </p:spPr>
-        <p:txBody>
-          <a:bodyPr wrap="square" lIns="0" tIns="0" rIns="0" bIns="0" rtlCol="0" anchor="t"/>
-          <a:lstStyle/>
-          <a:p>
-            <a:pPr indent="0" marL="0">
-              <a:buNone/>
-            </a:pPr>
-            <a:r>
-              <a:rPr lang="en-US" sz="1700" b="1" dirty="0">
-                <a:solidFill>
-                  <a:schemeClr val="tx2"/>
-                </a:solidFill>
-              </a:rPr>
-              <a:t>Weeks match</a:t>
-            </a:r>
-            <a:endParaRPr lang="en-US" sz="1700" dirty="0"/>
-          </a:p>
-        </p:txBody>
-      </p:sp>
-      <p:sp>
-        <p:nvSpPr>
-          <p:cNvPr id="18" name="text_187"/>
-          <p:cNvSpPr txBox="1"/>
-          <p:nvPr/>
-        </p:nvSpPr>
-        <p:spPr>
-          <a:xfrm>
-            <a:off x="6263640" y="3017520"/>
-            <a:ext cx="2286000" cy="594360"/>
-          </a:xfrm>
-          <a:prstGeom prst="rect">
-            <a:avLst/>
-          </a:prstGeom>
-          <a:noFill/>
-          <a:ln/>
-        </p:spPr>
-        <p:txBody>
-          <a:bodyPr wrap="square" lIns="0" tIns="0" rIns="0" bIns="0" rtlCol="0" anchor="t"/>
-          <a:lstStyle/>
-          <a:p>
-            <a:pPr indent="0" marL="0">
-              <a:buNone/>
-            </a:pPr>
-            <a:r>
-              <a:rPr lang="en-US" sz="1300" dirty="0">
-                <a:solidFill>
-                  <a:schemeClr val="tx1"/>
-                </a:solidFill>
-              </a:rPr>
-              <a:t>An odd-week class never clashes with an even-week class</a:t>
-            </a:r>
-            <a:endParaRPr lang="en-US" sz="1300" dirty="0"/>
-          </a:p>
-        </p:txBody>
-      </p:sp>
-      <p:sp>
-        <p:nvSpPr>
-          <p:cNvPr id="19" name="card_188"/>
-          <p:cNvSpPr/>
-          <p:nvPr/>
-        </p:nvSpPr>
-        <p:spPr>
-          <a:xfrm>
-            <a:off x="457200" y="3840480"/>
-            <a:ext cx="8229600" cy="640080"/>
-          </a:xfrm>
-          <a:prstGeom prst="roundRect">
-            <a:avLst>
-              <a:gd name="adj" fmla="val 11429"/>
-            </a:avLst>
-          </a:prstGeom>
-          <a:solidFill>
-            <a:schemeClr val="accent5"/>
-          </a:solidFill>
-          <a:ln/>
-        </p:spPr>
-      </p:sp>
-      <p:sp>
-        <p:nvSpPr>
-          <p:cNvPr id="20" name="text_189"/>
-          <p:cNvSpPr txBox="1"/>
-          <p:nvPr/>
-        </p:nvSpPr>
-        <p:spPr>
-          <a:xfrm>
-            <a:off x="685800" y="3840480"/>
-            <a:ext cx="7772400" cy="640080"/>
-          </a:xfrm>
-          <a:prstGeom prst="rect">
-            <a:avLst/>
-          </a:prstGeom>
-          <a:noFill/>
-          <a:ln/>
-        </p:spPr>
-        <p:txBody>
-          <a:bodyPr wrap="square" lIns="0" tIns="0" rIns="0" bIns="0" rtlCol="0" anchor="ctr"/>
-          <a:lstStyle/>
-          <a:p>
-            <a:pPr indent="0" marL="0">
-              <a:buNone/>
-            </a:pPr>
-            <a:r>
-              <a:rPr lang="en-US" sz="1500" b="1" dirty="0">
-                <a:solidFill>
-                  <a:schemeClr val="tx2"/>
-                </a:solidFill>
-              </a:rPr>
-              <a:t>Result: </a:t>
-            </a:r>
-            <a:pPr indent="0" marL="0">
-              <a:buNone/>
-            </a:pPr>
-            <a:r>
-              <a:rPr lang="en-US" sz="1500" dirty="0">
-                <a:solidFill>
-                  <a:schemeClr val="tx1"/>
-                </a:solidFill>
-              </a:rPr>
-              <a:t>HTTP 409 Conflict plus the name of the clashing class, so the student knows exactly what to change.</a:t>
-            </a:r>
-            <a:endParaRPr lang="en-US" sz="1500" dirty="0"/>
-          </a:p>
-        </p:txBody>
-      </p:sp>
-      <p:sp>
-        <p:nvSpPr>
-          <p:cNvPr id="25" name="Slide Number Placeholder 0"/>
-          <p:cNvSpPr>
-            <a:spLocks noGrp="1"/>
-          </p:cNvSpPr>
-          <p:nvPr>
-            <p:ph type="sldNum" sz="quarter" idx="4294967295"/>
-          </p:nvPr>
-        </p:nvSpPr>
-        <p:spPr>
-          <a:xfrm>
-            <a:off x="8229600" y="4754880"/>
-            <a:ext cx="457200" cy="274320"/>
-          </a:xfrm>
-          <a:prstGeom prst="rect">
-            <a:avLst/>
-          </a:prstGeom>
-          <a:extLst>
-            <a:ext uri="{C572A759-6A51-4108-AA02-DFA0A04FC94B}">
-              <ma14:wrappingTextBoxFlag xmlns:ma14="http://schemas.microsoft.com/office/mac/drawingml/2011/main" val="0"/>
-            </a:ext>
-          </a:extLst>
-        </p:spPr>
-        <p:txBody>
-          <a:bodyPr/>
-          <a:lstStyle>
-            <a:lvl1pPr>
-              <a:defRPr sz="1000">
-                <a:solidFill>
-                  <a:srgbClr val="5B6B73"/>
-                </a:solidFill>
-              </a:defRPr>
-            </a:lvl1pPr>
-          </a:lstStyle>
-          <a:p>
-            <a:pPr algn="r"/>
-            <a:fld id="{F7021451-1387-4CA6-816F-3879F97B5CBC}" type="slidenum">
-              <a:rPr b="0" lang="en-US"/>
-              <a:t>11</a:t>
-            </a:fld>
-            <a:endParaRPr lang="en-US"/>
-          </a:p>
-        </p:txBody>
-      </p:sp>
-    </p:spTree>
-  </p:cSld>
-  <p:clrMapOvr>
-    <a:masterClrMapping/>
-  </p:clrMapOvr>
-</p:sld>
-</file>
-
-<file path=ppt/slides/slide12.xml><?xml version="1.0" encoding="utf-8"?>
-<p:sld xmlns:a="http://schemas.openxmlformats.org/drawingml/2006/main" xmlns:r="http://schemas.openxmlformats.org/officeDocument/2006/relationships" xmlns:p="http://schemas.openxmlformats.org/presentationml/2006/main">
-  <p:cSld name="Slide 12">
-    <p:spTree>
-      <p:nvGrpSpPr>
-        <p:cNvPr id="1" name=""/>
-        <p:cNvGrpSpPr/>
-        <p:nvPr/>
-      </p:nvGrpSpPr>
-      <p:grpSpPr>
-        <a:xfrm>
-          <a:off x="0" y="0"/>
-          <a:ext cx="0" cy="0"/>
-          <a:chOff x="0" y="0"/>
-          <a:chExt cx="0" cy="0"/>
-        </a:xfrm>
-      </p:grpSpPr>
-      <p:sp>
-        <p:nvSpPr>
-          <p:cNvPr id="2" name="Text 0"/>
-          <p:cNvSpPr/>
-          <p:nvPr>
-            <p:ph idx="100" type="title" hasCustomPrompt="1"/>
-          </p:nvPr>
-        </p:nvSpPr>
-        <p:spPr>
-          <a:xfrm>
-            <a:off x="457200" y="274320"/>
-            <a:ext cx="8229600" cy="685800"/>
-          </a:xfrm>
-          <a:prstGeom prst="rect">
-            <a:avLst/>
-          </a:prstGeom>
-          <a:noFill/>
-          <a:ln/>
-        </p:spPr>
-        <p:txBody>
-          <a:bodyPr wrap="square" lIns="0" tIns="0" rIns="0" bIns="0" rtlCol="0" anchor="ctr"/>
-          <a:lstStyle/>
-          <a:p>
-            <a:pPr algn="l" indent="0" marL="0">
-              <a:buNone/>
-            </a:pPr>
-            <a:r>
-              <a:rPr lang="en-US" sz="3000" b="1" dirty="0">
-                <a:solidFill>
-                  <a:schemeClr val="tx2"/>
-                </a:solidFill>
-                <a:latin typeface="Cambria" pitchFamily="34" charset="0"/>
-                <a:ea typeface="Cambria" pitchFamily="34" charset="-122"/>
-                <a:cs typeface="Cambria" pitchFamily="34" charset="-120"/>
-              </a:rPr>
-              <a:t>How I built it</a:t>
-            </a:r>
-            <a:endParaRPr lang="en-US" sz="3000" dirty="0"/>
-          </a:p>
-        </p:txBody>
-      </p:sp>
-      <p:sp>
-        <p:nvSpPr>
-          <p:cNvPr id="3" name="timeline_190"/>
-          <p:cNvSpPr/>
-          <p:nvPr/>
-        </p:nvSpPr>
-        <p:spPr>
-          <a:xfrm>
-            <a:off x="822960" y="1965960"/>
-            <a:ext cx="7498080" cy="0"/>
-          </a:xfrm>
-          <a:prstGeom prst="line">
-            <a:avLst/>
-          </a:prstGeom>
-          <a:noFill/>
-          <a:ln w="38100">
-            <a:solidFill>
-              <a:srgbClr val="C9D6DA"/>
-            </a:solidFill>
-            <a:prstDash val="solid"/>
-          </a:ln>
-        </p:spPr>
-      </p:sp>
-      <p:sp>
-        <p:nvSpPr>
-          <p:cNvPr id="4" name="dot_191"/>
-          <p:cNvSpPr/>
-          <p:nvPr/>
-        </p:nvSpPr>
-        <p:spPr>
-          <a:xfrm>
-            <a:off x="640080" y="1783080"/>
-            <a:ext cx="365760" cy="365760"/>
-          </a:xfrm>
-          <a:prstGeom prst="ellipse">
-            <a:avLst/>
-          </a:prstGeom>
-          <a:solidFill>
-            <a:srgbClr val="E07A2F"/>
-          </a:solidFill>
-          <a:ln w="38100">
-            <a:solidFill>
-              <a:srgbClr val="FFFFFF"/>
-            </a:solidFill>
-            <a:prstDash val="solid"/>
-          </a:ln>
-        </p:spPr>
-      </p:sp>
-      <p:sp>
-        <p:nvSpPr>
-          <p:cNvPr id="5" name="text_192"/>
-          <p:cNvSpPr txBox="1"/>
-          <p:nvPr/>
-        </p:nvSpPr>
-        <p:spPr>
-          <a:xfrm>
-            <a:off x="45720" y="1325880"/>
-            <a:ext cx="1554480" cy="320040"/>
-          </a:xfrm>
-          <a:prstGeom prst="rect">
-            <a:avLst/>
-          </a:prstGeom>
-          <a:noFill/>
-          <a:ln/>
-        </p:spPr>
-        <p:txBody>
-          <a:bodyPr wrap="square" lIns="0" tIns="0" rIns="0" bIns="0" rtlCol="0" anchor="t"/>
-          <a:lstStyle/>
-          <a:p>
-            <a:pPr algn="ctr" indent="0" marL="0">
-              <a:buNone/>
-            </a:pPr>
-            <a:r>
-              <a:rPr lang="en-US" sz="1200" dirty="0">
-                <a:solidFill>
-                  <a:schemeClr val="accent4"/>
-                </a:solidFill>
-              </a:rPr>
-              <a:t>Jan 2026</a:t>
-            </a:r>
-            <a:endParaRPr lang="en-US" sz="1200" dirty="0"/>
-          </a:p>
-        </p:txBody>
-      </p:sp>
-      <p:sp>
-        <p:nvSpPr>
-          <p:cNvPr id="6" name="text_193"/>
-          <p:cNvSpPr txBox="1"/>
-          <p:nvPr/>
-        </p:nvSpPr>
-        <p:spPr>
-          <a:xfrm>
-            <a:off x="45720" y="2331720"/>
-            <a:ext cx="1554480" cy="365760"/>
-          </a:xfrm>
-          <a:prstGeom prst="rect">
-            <a:avLst/>
-          </a:prstGeom>
-          <a:noFill/>
-          <a:ln/>
-        </p:spPr>
-        <p:txBody>
-          <a:bodyPr wrap="square" lIns="0" tIns="0" rIns="0" bIns="0" rtlCol="0" anchor="t"/>
-          <a:lstStyle/>
-          <a:p>
-            <a:pPr algn="ctr" indent="0" marL="0">
-              <a:buNone/>
-            </a:pPr>
-            <a:r>
-              <a:rPr lang="en-US" sz="1700" b="1" dirty="0">
-                <a:solidFill>
-                  <a:schemeClr val="tx2"/>
-                </a:solidFill>
-              </a:rPr>
-              <a:t>Analysis</a:t>
-            </a:r>
-            <a:endParaRPr lang="en-US" sz="1700" dirty="0"/>
-          </a:p>
-        </p:txBody>
-      </p:sp>
-      <p:sp>
-        <p:nvSpPr>
-          <p:cNvPr id="7" name="text_194"/>
-          <p:cNvSpPr txBox="1"/>
-          <p:nvPr/>
-        </p:nvSpPr>
-        <p:spPr>
-          <a:xfrm>
-            <a:off x="45720" y="2743200"/>
-            <a:ext cx="1554480" cy="1097280"/>
-          </a:xfrm>
-          <a:prstGeom prst="rect">
-            <a:avLst/>
-          </a:prstGeom>
-          <a:noFill/>
-          <a:ln/>
-        </p:spPr>
-        <p:txBody>
-          <a:bodyPr wrap="square" lIns="0" tIns="0" rIns="0" bIns="0" rtlCol="0" anchor="t"/>
-          <a:lstStyle/>
-          <a:p>
-            <a:pPr algn="ctr" indent="0" marL="0">
-              <a:buNone/>
-            </a:pPr>
-            <a:r>
-              <a:rPr lang="en-US" sz="1300" dirty="0">
-                <a:solidFill>
-                  <a:schemeClr val="tx1"/>
-                </a:solidFill>
-              </a:rPr>
-              <a:t>Studied the real process, wrote the 9 rules</a:t>
-            </a:r>
-            <a:endParaRPr lang="en-US" sz="1300" dirty="0"/>
-          </a:p>
-        </p:txBody>
-      </p:sp>
-      <p:sp>
-        <p:nvSpPr>
-          <p:cNvPr id="8" name="dot_195"/>
-          <p:cNvSpPr/>
-          <p:nvPr/>
-        </p:nvSpPr>
-        <p:spPr>
-          <a:xfrm>
-            <a:off x="2514600" y="1783080"/>
-            <a:ext cx="365760" cy="365760"/>
-          </a:xfrm>
-          <a:prstGeom prst="ellipse">
-            <a:avLst/>
-          </a:prstGeom>
-          <a:solidFill>
-            <a:srgbClr val="1F4E5F"/>
-          </a:solidFill>
-          <a:ln w="38100">
-            <a:solidFill>
-              <a:srgbClr val="FFFFFF"/>
-            </a:solidFill>
-            <a:prstDash val="solid"/>
-          </a:ln>
-        </p:spPr>
-      </p:sp>
-      <p:sp>
-        <p:nvSpPr>
-          <p:cNvPr id="9" name="text_196"/>
-          <p:cNvSpPr txBox="1"/>
-          <p:nvPr/>
-        </p:nvSpPr>
-        <p:spPr>
-          <a:xfrm>
-            <a:off x="1920240" y="1325880"/>
-            <a:ext cx="1554480" cy="320040"/>
-          </a:xfrm>
-          <a:prstGeom prst="rect">
-            <a:avLst/>
-          </a:prstGeom>
-          <a:noFill/>
-          <a:ln/>
-        </p:spPr>
-        <p:txBody>
-          <a:bodyPr wrap="square" lIns="0" tIns="0" rIns="0" bIns="0" rtlCol="0" anchor="t"/>
-          <a:lstStyle/>
-          <a:p>
-            <a:pPr algn="ctr" indent="0" marL="0">
-              <a:buNone/>
-            </a:pPr>
-            <a:r>
-              <a:rPr lang="en-US" sz="1200" dirty="0">
-                <a:solidFill>
-                  <a:schemeClr val="accent4"/>
-                </a:solidFill>
-              </a:rPr>
-              <a:t>Mar 2026</a:t>
-            </a:r>
-            <a:endParaRPr lang="en-US" sz="1200" dirty="0"/>
-          </a:p>
-        </p:txBody>
-      </p:sp>
-      <p:sp>
-        <p:nvSpPr>
-          <p:cNvPr id="10" name="text_197"/>
-          <p:cNvSpPr txBox="1"/>
-          <p:nvPr/>
-        </p:nvSpPr>
-        <p:spPr>
-          <a:xfrm>
-            <a:off x="1920240" y="2331720"/>
-            <a:ext cx="1554480" cy="365760"/>
-          </a:xfrm>
-          <a:prstGeom prst="rect">
-            <a:avLst/>
-          </a:prstGeom>
-          <a:noFill/>
-          <a:ln/>
-        </p:spPr>
-        <p:txBody>
-          <a:bodyPr wrap="square" lIns="0" tIns="0" rIns="0" bIns="0" rtlCol="0" anchor="t"/>
-          <a:lstStyle/>
-          <a:p>
-            <a:pPr algn="ctr" indent="0" marL="0">
-              <a:buNone/>
-            </a:pPr>
-            <a:r>
-              <a:rPr lang="en-US" sz="1700" b="1" dirty="0">
-                <a:solidFill>
-                  <a:schemeClr val="tx2"/>
-                </a:solidFill>
-              </a:rPr>
-              <a:t>Backend</a:t>
-            </a:r>
-            <a:endParaRPr lang="en-US" sz="1700" dirty="0"/>
-          </a:p>
-        </p:txBody>
-      </p:sp>
-      <p:sp>
-        <p:nvSpPr>
-          <p:cNvPr id="11" name="text_198"/>
-          <p:cNvSpPr txBox="1"/>
-          <p:nvPr/>
-        </p:nvSpPr>
-        <p:spPr>
-          <a:xfrm>
-            <a:off x="1920240" y="2743200"/>
-            <a:ext cx="1554480" cy="1097280"/>
-          </a:xfrm>
-          <a:prstGeom prst="rect">
-            <a:avLst/>
-          </a:prstGeom>
-          <a:noFill/>
-          <a:ln/>
-        </p:spPr>
-        <p:txBody>
-          <a:bodyPr wrap="square" lIns="0" tIns="0" rIns="0" bIns="0" rtlCol="0" anchor="t"/>
-          <a:lstStyle/>
-          <a:p>
-            <a:pPr algn="ctr" indent="0" marL="0">
-              <a:buNone/>
-            </a:pPr>
-            <a:r>
-              <a:rPr lang="en-US" sz="1300" dirty="0">
-                <a:solidFill>
-                  <a:schemeClr val="tx1"/>
-                </a:solidFill>
-              </a:rPr>
-              <a:t>Database schema, seed data, REST API</a:t>
-            </a:r>
-            <a:endParaRPr lang="en-US" sz="1300" dirty="0"/>
-          </a:p>
-        </p:txBody>
-      </p:sp>
-      <p:sp>
-        <p:nvSpPr>
-          <p:cNvPr id="12" name="dot_199"/>
-          <p:cNvSpPr/>
-          <p:nvPr/>
-        </p:nvSpPr>
-        <p:spPr>
-          <a:xfrm>
-            <a:off x="4389120" y="1783080"/>
-            <a:ext cx="365760" cy="365760"/>
-          </a:xfrm>
-          <a:prstGeom prst="ellipse">
-            <a:avLst/>
-          </a:prstGeom>
-          <a:solidFill>
-            <a:srgbClr val="1F4E5F"/>
-          </a:solidFill>
-          <a:ln w="38100">
-            <a:solidFill>
-              <a:srgbClr val="FFFFFF"/>
-            </a:solidFill>
-            <a:prstDash val="solid"/>
-          </a:ln>
-        </p:spPr>
-      </p:sp>
-      <p:sp>
-        <p:nvSpPr>
-          <p:cNvPr id="13" name="text_200"/>
-          <p:cNvSpPr txBox="1"/>
-          <p:nvPr/>
-        </p:nvSpPr>
-        <p:spPr>
-          <a:xfrm>
-            <a:off x="3794760" y="1325880"/>
-            <a:ext cx="1554480" cy="320040"/>
-          </a:xfrm>
-          <a:prstGeom prst="rect">
-            <a:avLst/>
-          </a:prstGeom>
-          <a:noFill/>
-          <a:ln/>
-        </p:spPr>
-        <p:txBody>
-          <a:bodyPr wrap="square" lIns="0" tIns="0" rIns="0" bIns="0" rtlCol="0" anchor="t"/>
-          <a:lstStyle/>
-          <a:p>
-            <a:pPr algn="ctr" indent="0" marL="0">
-              <a:buNone/>
-            </a:pPr>
-            <a:r>
-              <a:rPr lang="en-US" sz="1200" dirty="0">
-                <a:solidFill>
-                  <a:schemeClr val="accent4"/>
-                </a:solidFill>
-              </a:rPr>
-              <a:t>Mar 2026</a:t>
-            </a:r>
-            <a:endParaRPr lang="en-US" sz="1200" dirty="0"/>
-          </a:p>
-        </p:txBody>
-      </p:sp>
-      <p:sp>
-        <p:nvSpPr>
-          <p:cNvPr id="14" name="text_201"/>
-          <p:cNvSpPr txBox="1"/>
-          <p:nvPr/>
-        </p:nvSpPr>
-        <p:spPr>
-          <a:xfrm>
-            <a:off x="3794760" y="2331720"/>
-            <a:ext cx="1554480" cy="365760"/>
-          </a:xfrm>
-          <a:prstGeom prst="rect">
-            <a:avLst/>
-          </a:prstGeom>
-          <a:noFill/>
-          <a:ln/>
-        </p:spPr>
-        <p:txBody>
-          <a:bodyPr wrap="square" lIns="0" tIns="0" rIns="0" bIns="0" rtlCol="0" anchor="t"/>
-          <a:lstStyle/>
-          <a:p>
-            <a:pPr algn="ctr" indent="0" marL="0">
-              <a:buNone/>
-            </a:pPr>
-            <a:r>
-              <a:rPr lang="en-US" sz="1700" b="1" dirty="0">
-                <a:solidFill>
-                  <a:schemeClr val="tx2"/>
-                </a:solidFill>
-              </a:rPr>
-              <a:t>Monorepo</a:t>
-            </a:r>
-            <a:endParaRPr lang="en-US" sz="1700" dirty="0"/>
-          </a:p>
-        </p:txBody>
-      </p:sp>
-      <p:sp>
-        <p:nvSpPr>
-          <p:cNvPr id="15" name="text_202"/>
-          <p:cNvSpPr txBox="1"/>
-          <p:nvPr/>
-        </p:nvSpPr>
-        <p:spPr>
-          <a:xfrm>
-            <a:off x="3794760" y="2743200"/>
-            <a:ext cx="1554480" cy="1097280"/>
-          </a:xfrm>
-          <a:prstGeom prst="rect">
-            <a:avLst/>
-          </a:prstGeom>
-          <a:noFill/>
-          <a:ln/>
-        </p:spPr>
-        <p:txBody>
-          <a:bodyPr wrap="square" lIns="0" tIns="0" rIns="0" bIns="0" rtlCol="0" anchor="t"/>
-          <a:lstStyle/>
-          <a:p>
-            <a:pPr algn="ctr" indent="0" marL="0">
-              <a:buNone/>
-            </a:pPr>
-            <a:r>
-              <a:rPr lang="en-US" sz="1300" dirty="0">
-                <a:solidFill>
-                  <a:schemeClr val="tx1"/>
-                </a:solidFill>
-              </a:rPr>
-              <a:t>Client + server workspaces, one dev command</a:t>
-            </a:r>
-            <a:endParaRPr lang="en-US" sz="1300" dirty="0"/>
-          </a:p>
-        </p:txBody>
-      </p:sp>
-      <p:sp>
-        <p:nvSpPr>
-          <p:cNvPr id="16" name="dot_203"/>
-          <p:cNvSpPr/>
-          <p:nvPr/>
-        </p:nvSpPr>
-        <p:spPr>
-          <a:xfrm>
-            <a:off x="6263640" y="1783080"/>
-            <a:ext cx="365760" cy="365760"/>
-          </a:xfrm>
-          <a:prstGeom prst="ellipse">
-            <a:avLst/>
-          </a:prstGeom>
-          <a:solidFill>
-            <a:srgbClr val="1F4E5F"/>
-          </a:solidFill>
-          <a:ln w="38100">
-            <a:solidFill>
-              <a:srgbClr val="FFFFFF"/>
-            </a:solidFill>
-            <a:prstDash val="solid"/>
-          </a:ln>
-        </p:spPr>
-      </p:sp>
-      <p:sp>
-        <p:nvSpPr>
-          <p:cNvPr id="17" name="text_204"/>
-          <p:cNvSpPr txBox="1"/>
-          <p:nvPr/>
-        </p:nvSpPr>
-        <p:spPr>
-          <a:xfrm>
-            <a:off x="5669280" y="1325880"/>
-            <a:ext cx="1554480" cy="320040"/>
-          </a:xfrm>
-          <a:prstGeom prst="rect">
-            <a:avLst/>
-          </a:prstGeom>
-          <a:noFill/>
-          <a:ln/>
-        </p:spPr>
-        <p:txBody>
-          <a:bodyPr wrap="square" lIns="0" tIns="0" rIns="0" bIns="0" rtlCol="0" anchor="t"/>
-          <a:lstStyle/>
-          <a:p>
-            <a:pPr algn="ctr" indent="0" marL="0">
-              <a:buNone/>
-            </a:pPr>
-            <a:r>
-              <a:rPr lang="en-US" sz="1200" dirty="0">
-                <a:solidFill>
-                  <a:schemeClr val="accent4"/>
-                </a:solidFill>
-              </a:rPr>
-              <a:t>Mar 2026</a:t>
-            </a:r>
-            <a:endParaRPr lang="en-US" sz="1200" dirty="0"/>
-          </a:p>
-        </p:txBody>
-      </p:sp>
-      <p:sp>
-        <p:nvSpPr>
-          <p:cNvPr id="18" name="text_205"/>
-          <p:cNvSpPr txBox="1"/>
-          <p:nvPr/>
-        </p:nvSpPr>
-        <p:spPr>
-          <a:xfrm>
-            <a:off x="5669280" y="2331720"/>
-            <a:ext cx="1554480" cy="365760"/>
-          </a:xfrm>
-          <a:prstGeom prst="rect">
-            <a:avLst/>
-          </a:prstGeom>
-          <a:noFill/>
-          <a:ln/>
-        </p:spPr>
-        <p:txBody>
-          <a:bodyPr wrap="square" lIns="0" tIns="0" rIns="0" bIns="0" rtlCol="0" anchor="t"/>
-          <a:lstStyle/>
-          <a:p>
-            <a:pPr algn="ctr" indent="0" marL="0">
-              <a:buNone/>
-            </a:pPr>
-            <a:r>
-              <a:rPr lang="en-US" sz="1700" b="1" dirty="0">
-                <a:solidFill>
-                  <a:schemeClr val="tx2"/>
-                </a:solidFill>
-              </a:rPr>
-              <a:t>Frontend</a:t>
-            </a:r>
-            <a:endParaRPr lang="en-US" sz="1700" dirty="0"/>
-          </a:p>
-        </p:txBody>
-      </p:sp>
-      <p:sp>
-        <p:nvSpPr>
-          <p:cNvPr id="19" name="text_206"/>
-          <p:cNvSpPr txBox="1"/>
-          <p:nvPr/>
-        </p:nvSpPr>
-        <p:spPr>
-          <a:xfrm>
-            <a:off x="5669280" y="2743200"/>
-            <a:ext cx="1554480" cy="1097280"/>
-          </a:xfrm>
-          <a:prstGeom prst="rect">
-            <a:avLst/>
-          </a:prstGeom>
-          <a:noFill/>
-          <a:ln/>
-        </p:spPr>
-        <p:txBody>
-          <a:bodyPr wrap="square" lIns="0" tIns="0" rIns="0" bIns="0" rtlCol="0" anchor="t"/>
-          <a:lstStyle/>
-          <a:p>
-            <a:pPr algn="ctr" indent="0" marL="0">
-              <a:buNone/>
-            </a:pPr>
-            <a:r>
-              <a:rPr lang="en-US" sz="1300" dirty="0">
-                <a:solidFill>
-                  <a:schemeClr val="tx1"/>
-                </a:solidFill>
-              </a:rPr>
-              <a:t>Student and admin sites, dark mode</a:t>
-            </a:r>
-            <a:endParaRPr lang="en-US" sz="1300" dirty="0"/>
-          </a:p>
-        </p:txBody>
-      </p:sp>
-      <p:sp>
-        <p:nvSpPr>
-          <p:cNvPr id="20" name="dot_207"/>
-          <p:cNvSpPr/>
-          <p:nvPr/>
-        </p:nvSpPr>
-        <p:spPr>
-          <a:xfrm>
-            <a:off x="8138160" y="1783080"/>
-            <a:ext cx="365760" cy="365760"/>
-          </a:xfrm>
-          <a:prstGeom prst="ellipse">
-            <a:avLst/>
-          </a:prstGeom>
-          <a:solidFill>
-            <a:srgbClr val="1F4E5F"/>
-          </a:solidFill>
-          <a:ln w="38100">
-            <a:solidFill>
-              <a:srgbClr val="FFFFFF"/>
-            </a:solidFill>
-            <a:prstDash val="solid"/>
-          </a:ln>
-        </p:spPr>
-      </p:sp>
-      <p:sp>
-        <p:nvSpPr>
-          <p:cNvPr id="21" name="text_208"/>
-          <p:cNvSpPr txBox="1"/>
-          <p:nvPr/>
-        </p:nvSpPr>
-        <p:spPr>
-          <a:xfrm>
-            <a:off x="7543800" y="1325880"/>
-            <a:ext cx="1554480" cy="320040"/>
-          </a:xfrm>
-          <a:prstGeom prst="rect">
-            <a:avLst/>
-          </a:prstGeom>
-          <a:noFill/>
-          <a:ln/>
-        </p:spPr>
-        <p:txBody>
-          <a:bodyPr wrap="square" lIns="0" tIns="0" rIns="0" bIns="0" rtlCol="0" anchor="t"/>
-          <a:lstStyle/>
-          <a:p>
-            <a:pPr algn="ctr" indent="0" marL="0">
-              <a:buNone/>
-            </a:pPr>
-            <a:r>
-              <a:rPr lang="en-US" sz="1200" dirty="0">
-                <a:solidFill>
-                  <a:schemeClr val="accent4"/>
-                </a:solidFill>
-              </a:rPr>
-              <a:t>Mar 2026</a:t>
-            </a:r>
-            <a:endParaRPr lang="en-US" sz="1200" dirty="0"/>
-          </a:p>
-        </p:txBody>
-      </p:sp>
-      <p:sp>
-        <p:nvSpPr>
-          <p:cNvPr id="22" name="text_209"/>
-          <p:cNvSpPr txBox="1"/>
-          <p:nvPr/>
-        </p:nvSpPr>
-        <p:spPr>
-          <a:xfrm>
-            <a:off x="7543800" y="2331720"/>
-            <a:ext cx="1554480" cy="365760"/>
-          </a:xfrm>
-          <a:prstGeom prst="rect">
-            <a:avLst/>
-          </a:prstGeom>
-          <a:noFill/>
-          <a:ln/>
-        </p:spPr>
-        <p:txBody>
-          <a:bodyPr wrap="square" lIns="0" tIns="0" rIns="0" bIns="0" rtlCol="0" anchor="t"/>
-          <a:lstStyle/>
-          <a:p>
-            <a:pPr algn="ctr" indent="0" marL="0">
-              <a:buNone/>
-            </a:pPr>
-            <a:r>
-              <a:rPr lang="en-US" sz="1700" b="1" dirty="0">
-                <a:solidFill>
-                  <a:schemeClr val="tx2"/>
-                </a:solidFill>
-              </a:rPr>
-              <a:t>Docker</a:t>
-            </a:r>
-            <a:endParaRPr lang="en-US" sz="1700" dirty="0"/>
-          </a:p>
-        </p:txBody>
-      </p:sp>
-      <p:sp>
-        <p:nvSpPr>
-          <p:cNvPr id="23" name="text_210"/>
-          <p:cNvSpPr txBox="1"/>
-          <p:nvPr/>
-        </p:nvSpPr>
-        <p:spPr>
-          <a:xfrm>
-            <a:off x="7543800" y="2743200"/>
-            <a:ext cx="1554480" cy="1097280"/>
-          </a:xfrm>
-          <a:prstGeom prst="rect">
-            <a:avLst/>
-          </a:prstGeom>
-          <a:noFill/>
-          <a:ln/>
-        </p:spPr>
-        <p:txBody>
-          <a:bodyPr wrap="square" lIns="0" tIns="0" rIns="0" bIns="0" rtlCol="0" anchor="t"/>
-          <a:lstStyle/>
-          <a:p>
-            <a:pPr algn="ctr" indent="0" marL="0">
-              <a:buNone/>
-            </a:pPr>
-            <a:r>
-              <a:rPr lang="en-US" sz="1300" dirty="0">
-                <a:solidFill>
-                  <a:schemeClr val="tx1"/>
-                </a:solidFill>
-              </a:rPr>
-              <a:t>MySQL, API, Nginx with health checks + docs</a:t>
-            </a:r>
-            <a:endParaRPr lang="en-US" sz="1300" dirty="0"/>
-          </a:p>
-        </p:txBody>
-      </p:sp>
-      <p:sp>
-        <p:nvSpPr>
-          <p:cNvPr id="24" name="card_211"/>
-          <p:cNvSpPr/>
-          <p:nvPr/>
-        </p:nvSpPr>
-        <p:spPr>
-          <a:xfrm>
-            <a:off x="457200" y="3931920"/>
-            <a:ext cx="8229600" cy="548640"/>
-          </a:xfrm>
-          <a:prstGeom prst="roundRect">
-            <a:avLst>
-              <a:gd name="adj" fmla="val 13333"/>
-            </a:avLst>
-          </a:prstGeom>
-          <a:solidFill>
-            <a:schemeClr val="accent5"/>
-          </a:solidFill>
-          <a:ln/>
-        </p:spPr>
-      </p:sp>
-      <p:sp>
-        <p:nvSpPr>
-          <p:cNvPr id="25" name="text_212"/>
-          <p:cNvSpPr txBox="1"/>
-          <p:nvPr/>
-        </p:nvSpPr>
-        <p:spPr>
-          <a:xfrm>
-            <a:off x="685800" y="3931920"/>
-            <a:ext cx="7772400" cy="548640"/>
-          </a:xfrm>
-          <a:prstGeom prst="rect">
-            <a:avLst/>
-          </a:prstGeom>
-          <a:noFill/>
-          <a:ln/>
-        </p:spPr>
-        <p:txBody>
-          <a:bodyPr wrap="square" lIns="0" tIns="0" rIns="0" bIns="0" rtlCol="0" anchor="ctr"/>
-          <a:lstStyle/>
-          <a:p>
-            <a:pPr indent="0" marL="0">
-              <a:buNone/>
-            </a:pPr>
-            <a:r>
-              <a:rPr lang="en-US" sz="1400" dirty="0">
-                <a:solidFill>
-                  <a:schemeClr val="tx2"/>
-                </a:solidFill>
-              </a:rPr>
-              <a:t>Everything tracked with Git, from the first README to the Docker setup</a:t>
-            </a:r>
-            <a:endParaRPr lang="en-US" sz="1400" dirty="0"/>
-          </a:p>
-        </p:txBody>
-      </p:sp>
-      <p:sp>
-        <p:nvSpPr>
-          <p:cNvPr id="25" name="Slide Number Placeholder 0"/>
-          <p:cNvSpPr>
-            <a:spLocks noGrp="1"/>
-          </p:cNvSpPr>
-          <p:nvPr>
-            <p:ph type="sldNum" sz="quarter" idx="4294967295"/>
-          </p:nvPr>
-        </p:nvSpPr>
-        <p:spPr>
-          <a:xfrm>
-            <a:off x="8229600" y="4754880"/>
-            <a:ext cx="457200" cy="274320"/>
-          </a:xfrm>
-          <a:prstGeom prst="rect">
-            <a:avLst/>
-          </a:prstGeom>
-          <a:extLst>
-            <a:ext uri="{C572A759-6A51-4108-AA02-DFA0A04FC94B}">
-              <ma14:wrappingTextBoxFlag xmlns:ma14="http://schemas.microsoft.com/office/mac/drawingml/2011/main" val="0"/>
-            </a:ext>
-          </a:extLst>
-        </p:spPr>
-        <p:txBody>
-          <a:bodyPr/>
-          <a:lstStyle>
-            <a:lvl1pPr>
-              <a:defRPr sz="1000">
-                <a:solidFill>
-                  <a:srgbClr val="5B6B73"/>
-                </a:solidFill>
-              </a:defRPr>
-            </a:lvl1pPr>
-          </a:lstStyle>
-          <a:p>
-            <a:pPr algn="r"/>
-            <a:fld id="{F7021451-1387-4CA6-816F-3879F97B5CBC}" type="slidenum">
-              <a:rPr b="0" lang="en-US"/>
-              <a:t>12</a:t>
-            </a:fld>
-            <a:endParaRPr lang="en-US"/>
-          </a:p>
-        </p:txBody>
-      </p:sp>
-    </p:spTree>
-  </p:cSld>
-  <p:clrMapOvr>
-    <a:masterClrMapping/>
-  </p:clrMapOvr>
-</p:sld>
-</file>
-
-<file path=ppt/slides/slide13.xml><?xml version="1.0" encoding="utf-8"?>
-<p:sld xmlns:a="http://schemas.openxmlformats.org/drawingml/2006/main" xmlns:r="http://schemas.openxmlformats.org/officeDocument/2006/relationships" xmlns:p="http://schemas.openxmlformats.org/presentationml/2006/main">
-  <p:cSld name="Slide 13">
-    <p:spTree>
-      <p:nvGrpSpPr>
-        <p:cNvPr id="1" name=""/>
-        <p:cNvGrpSpPr/>
-        <p:nvPr/>
-      </p:nvGrpSpPr>
-      <p:grpSpPr>
-        <a:xfrm>
-          <a:off x="0" y="0"/>
-          <a:ext cx="0" cy="0"/>
-          <a:chOff x="0" y="0"/>
-          <a:chExt cx="0" cy="0"/>
-        </a:xfrm>
-      </p:grpSpPr>
-      <p:sp>
-        <p:nvSpPr>
-          <p:cNvPr id="2" name="Text 0"/>
-          <p:cNvSpPr/>
-          <p:nvPr>
-            <p:ph idx="100" type="title" hasCustomPrompt="1"/>
-          </p:nvPr>
-        </p:nvSpPr>
-        <p:spPr>
-          <a:xfrm>
-            <a:off x="457200" y="274320"/>
-            <a:ext cx="8229600" cy="685800"/>
-          </a:xfrm>
-          <a:prstGeom prst="rect">
-            <a:avLst/>
-          </a:prstGeom>
-          <a:noFill/>
-          <a:ln/>
-        </p:spPr>
-        <p:txBody>
-          <a:bodyPr wrap="square" lIns="0" tIns="0" rIns="0" bIns="0" rtlCol="0" anchor="ctr"/>
-          <a:lstStyle/>
-          <a:p>
-            <a:pPr algn="l" indent="0" marL="0">
-              <a:buNone/>
-            </a:pPr>
-            <a:r>
-              <a:rPr lang="en-US" sz="3000" b="1" dirty="0">
-                <a:solidFill>
-                  <a:schemeClr val="tx2"/>
-                </a:solidFill>
-                <a:latin typeface="Cambria" pitchFamily="34" charset="0"/>
-                <a:ea typeface="Cambria" pitchFamily="34" charset="-122"/>
-                <a:cs typeface="Cambria" pitchFamily="34" charset="-120"/>
-              </a:rPr>
-              <a:t>What I learned</a:t>
-            </a:r>
-            <a:endParaRPr lang="en-US" sz="3000" dirty="0"/>
-          </a:p>
-        </p:txBody>
-      </p:sp>
-      <p:sp>
-        <p:nvSpPr>
-          <p:cNvPr id="3" name="icon-bg_213"/>
-          <p:cNvSpPr/>
-          <p:nvPr/>
-        </p:nvSpPr>
-        <p:spPr>
-          <a:xfrm>
-            <a:off x="457200" y="1143000"/>
-            <a:ext cx="640080" cy="640080"/>
-          </a:xfrm>
-          <a:prstGeom prst="ellipse">
-            <a:avLst/>
-          </a:prstGeom>
-          <a:solidFill>
-            <a:srgbClr val="1F4E5F"/>
-          </a:solidFill>
-          <a:ln/>
-        </p:spPr>
-      </p:sp>
-      <p:pic>
-        <p:nvPicPr>
-          <p:cNvPr id="4" name="icon_214" descr="preencoded.png">    </p:cNvPr>
-          <p:cNvPicPr>
-            <a:picLocks noChangeAspect="1"/>
-          </p:cNvPicPr>
-          <p:nvPr/>
-        </p:nvPicPr>
-        <p:blipFill>
-          <a:blip r:embed="rId1"/>
-          <a:stretch>
-            <a:fillRect/>
-          </a:stretch>
-        </p:blipFill>
-        <p:spPr>
-          <a:xfrm>
-            <a:off x="617220" y="1303020"/>
-            <a:ext cx="320040" cy="320040"/>
-          </a:xfrm>
-          <a:prstGeom prst="rect">
-            <a:avLst/>
-          </a:prstGeom>
-        </p:spPr>
-      </p:pic>
-      <p:sp>
-        <p:nvSpPr>
-          <p:cNvPr id="5" name="text_215"/>
-          <p:cNvSpPr txBox="1"/>
-          <p:nvPr/>
-        </p:nvSpPr>
-        <p:spPr>
-          <a:xfrm>
-            <a:off x="1280160" y="1161288"/>
-            <a:ext cx="3657600" cy="320040"/>
-          </a:xfrm>
-          <a:prstGeom prst="rect">
-            <a:avLst/>
-          </a:prstGeom>
-          <a:noFill/>
-          <a:ln/>
-        </p:spPr>
-        <p:txBody>
-          <a:bodyPr wrap="square" lIns="0" tIns="0" rIns="0" bIns="0" rtlCol="0" anchor="t"/>
-          <a:lstStyle/>
-          <a:p>
-            <a:pPr indent="0" marL="0">
-              <a:buNone/>
-            </a:pPr>
-            <a:r>
-              <a:rPr lang="en-US" sz="1700" b="1" dirty="0">
-                <a:solidFill>
-                  <a:schemeClr val="tx2"/>
-                </a:solidFill>
-              </a:rPr>
-              <a:t>Transactions matter</a:t>
-            </a:r>
-            <a:endParaRPr lang="en-US" sz="1700" dirty="0"/>
-          </a:p>
-        </p:txBody>
-      </p:sp>
-      <p:sp>
-        <p:nvSpPr>
-          <p:cNvPr id="6" name="text_216"/>
-          <p:cNvSpPr txBox="1"/>
-          <p:nvPr/>
-        </p:nvSpPr>
-        <p:spPr>
-          <a:xfrm>
-            <a:off x="1280160" y="1481328"/>
-            <a:ext cx="4023360" cy="320040"/>
-          </a:xfrm>
-          <a:prstGeom prst="rect">
-            <a:avLst/>
-          </a:prstGeom>
-          <a:noFill/>
-          <a:ln/>
-        </p:spPr>
-        <p:txBody>
-          <a:bodyPr wrap="square" lIns="0" tIns="0" rIns="0" bIns="0" rtlCol="0" anchor="t"/>
-          <a:lstStyle/>
-          <a:p>
-            <a:pPr indent="0" marL="0">
-              <a:buNone/>
-            </a:pPr>
-            <a:r>
-              <a:rPr lang="en-US" sz="1400" dirty="0">
-                <a:solidFill>
-                  <a:schemeClr val="tx1"/>
-                </a:solidFill>
-              </a:rPr>
-              <a:t>Transactions and locks are what keep data right under load</a:t>
-            </a:r>
-            <a:endParaRPr lang="en-US" sz="1400" dirty="0"/>
-          </a:p>
-        </p:txBody>
-      </p:sp>
-      <p:sp>
-        <p:nvSpPr>
-          <p:cNvPr id="7" name="icon-bg_217"/>
-          <p:cNvSpPr/>
-          <p:nvPr/>
-        </p:nvSpPr>
-        <p:spPr>
-          <a:xfrm>
-            <a:off x="457200" y="1984248"/>
-            <a:ext cx="640080" cy="640080"/>
-          </a:xfrm>
-          <a:prstGeom prst="ellipse">
-            <a:avLst/>
-          </a:prstGeom>
-          <a:solidFill>
-            <a:srgbClr val="1F4E5F"/>
-          </a:solidFill>
-          <a:ln/>
-        </p:spPr>
-      </p:sp>
-      <p:pic>
-        <p:nvPicPr>
-          <p:cNvPr id="8" name="icon_218" descr="preencoded.png">    </p:cNvPr>
-          <p:cNvPicPr>
-            <a:picLocks noChangeAspect="1"/>
-          </p:cNvPicPr>
-          <p:nvPr/>
-        </p:nvPicPr>
-        <p:blipFill>
-          <a:blip r:embed="rId2"/>
-          <a:stretch>
-            <a:fillRect/>
-          </a:stretch>
-        </p:blipFill>
-        <p:spPr>
-          <a:xfrm>
-            <a:off x="617220" y="2144268"/>
-            <a:ext cx="320040" cy="320040"/>
-          </a:xfrm>
-          <a:prstGeom prst="rect">
-            <a:avLst/>
-          </a:prstGeom>
-        </p:spPr>
-      </p:pic>
-      <p:sp>
-        <p:nvSpPr>
-          <p:cNvPr id="9" name="text_219"/>
-          <p:cNvSpPr txBox="1"/>
-          <p:nvPr/>
-        </p:nvSpPr>
-        <p:spPr>
-          <a:xfrm>
-            <a:off x="1280160" y="2002536"/>
-            <a:ext cx="3657600" cy="320040"/>
-          </a:xfrm>
-          <a:prstGeom prst="rect">
-            <a:avLst/>
-          </a:prstGeom>
-          <a:noFill/>
-          <a:ln/>
-        </p:spPr>
-        <p:txBody>
-          <a:bodyPr wrap="square" lIns="0" tIns="0" rIns="0" bIns="0" rtlCol="0" anchor="t"/>
-          <a:lstStyle/>
-          <a:p>
-            <a:pPr indent="0" marL="0">
-              <a:buNone/>
-            </a:pPr>
-            <a:r>
-              <a:rPr lang="en-US" sz="1700" b="1" dirty="0">
-                <a:solidFill>
-                  <a:schemeClr val="tx2"/>
-                </a:solidFill>
-              </a:rPr>
-              <a:t>Think before coding</a:t>
-            </a:r>
-            <a:endParaRPr lang="en-US" sz="1700" dirty="0"/>
-          </a:p>
-        </p:txBody>
-      </p:sp>
-      <p:sp>
-        <p:nvSpPr>
-          <p:cNvPr id="10" name="text_220"/>
-          <p:cNvSpPr txBox="1"/>
-          <p:nvPr/>
-        </p:nvSpPr>
-        <p:spPr>
-          <a:xfrm>
-            <a:off x="1280160" y="2322576"/>
-            <a:ext cx="4023360" cy="320040"/>
-          </a:xfrm>
-          <a:prstGeom prst="rect">
-            <a:avLst/>
-          </a:prstGeom>
-          <a:noFill/>
-          <a:ln/>
-        </p:spPr>
-        <p:txBody>
-          <a:bodyPr wrap="square" lIns="0" tIns="0" rIns="0" bIns="0" rtlCol="0" anchor="t"/>
-          <a:lstStyle/>
-          <a:p>
-            <a:pPr indent="0" marL="0">
-              <a:buNone/>
-            </a:pPr>
-            <a:r>
-              <a:rPr lang="en-US" sz="1400" dirty="0">
-                <a:solidFill>
-                  <a:schemeClr val="tx1"/>
-                </a:solidFill>
-              </a:rPr>
-              <a:t>Writing the rules first made the code clear and easy to check</a:t>
-            </a:r>
-            <a:endParaRPr lang="en-US" sz="1400" dirty="0"/>
-          </a:p>
-        </p:txBody>
-      </p:sp>
-      <p:sp>
-        <p:nvSpPr>
-          <p:cNvPr id="11" name="icon-bg_221"/>
-          <p:cNvSpPr/>
-          <p:nvPr/>
-        </p:nvSpPr>
-        <p:spPr>
-          <a:xfrm>
-            <a:off x="457200" y="2825496"/>
-            <a:ext cx="640080" cy="640080"/>
-          </a:xfrm>
-          <a:prstGeom prst="ellipse">
-            <a:avLst/>
-          </a:prstGeom>
-          <a:solidFill>
-            <a:srgbClr val="1F4E5F"/>
-          </a:solidFill>
-          <a:ln/>
-        </p:spPr>
-      </p:sp>
-      <p:pic>
-        <p:nvPicPr>
-          <p:cNvPr id="12" name="icon_222" descr="preencoded.png">    </p:cNvPr>
-          <p:cNvPicPr>
-            <a:picLocks noChangeAspect="1"/>
-          </p:cNvPicPr>
-          <p:nvPr/>
-        </p:nvPicPr>
-        <p:blipFill>
-          <a:blip r:embed="rId3"/>
-          <a:stretch>
-            <a:fillRect/>
-          </a:stretch>
-        </p:blipFill>
-        <p:spPr>
-          <a:xfrm>
-            <a:off x="617220" y="2985516"/>
-            <a:ext cx="320040" cy="320040"/>
-          </a:xfrm>
-          <a:prstGeom prst="rect">
-            <a:avLst/>
-          </a:prstGeom>
-        </p:spPr>
-      </p:pic>
-      <p:sp>
-        <p:nvSpPr>
-          <p:cNvPr id="13" name="text_223"/>
-          <p:cNvSpPr txBox="1"/>
-          <p:nvPr/>
-        </p:nvSpPr>
-        <p:spPr>
-          <a:xfrm>
-            <a:off x="1280160" y="2843784"/>
-            <a:ext cx="3657600" cy="320040"/>
-          </a:xfrm>
-          <a:prstGeom prst="rect">
-            <a:avLst/>
-          </a:prstGeom>
-          <a:noFill/>
-          <a:ln/>
-        </p:spPr>
-        <p:txBody>
-          <a:bodyPr wrap="square" lIns="0" tIns="0" rIns="0" bIns="0" rtlCol="0" anchor="t"/>
-          <a:lstStyle/>
-          <a:p>
-            <a:pPr indent="0" marL="0">
-              <a:buNone/>
-            </a:pPr>
-            <a:r>
-              <a:rPr lang="en-US" sz="1700" b="1" dirty="0">
-                <a:solidFill>
-                  <a:schemeClr val="tx2"/>
-                </a:solidFill>
-              </a:rPr>
-              <a:t>Clean layers pay off</a:t>
-            </a:r>
-            <a:endParaRPr lang="en-US" sz="1700" dirty="0"/>
-          </a:p>
-        </p:txBody>
-      </p:sp>
-      <p:sp>
-        <p:nvSpPr>
-          <p:cNvPr id="14" name="text_224"/>
-          <p:cNvSpPr txBox="1"/>
-          <p:nvPr/>
-        </p:nvSpPr>
-        <p:spPr>
-          <a:xfrm>
-            <a:off x="1280160" y="3163824"/>
-            <a:ext cx="4023360" cy="320040"/>
-          </a:xfrm>
-          <a:prstGeom prst="rect">
-            <a:avLst/>
-          </a:prstGeom>
-          <a:noFill/>
-          <a:ln/>
-        </p:spPr>
-        <p:txBody>
-          <a:bodyPr wrap="square" lIns="0" tIns="0" rIns="0" bIns="0" rtlCol="0" anchor="t"/>
-          <a:lstStyle/>
-          <a:p>
-            <a:pPr indent="0" marL="0">
-              <a:buNone/>
-            </a:pPr>
-            <a:r>
-              <a:rPr lang="en-US" sz="1400" dirty="0">
-                <a:solidFill>
-                  <a:schemeClr val="tx1"/>
-                </a:solidFill>
-              </a:rPr>
-              <a:t>I could change one layer without breaking the others</a:t>
-            </a:r>
-            <a:endParaRPr lang="en-US" sz="1400" dirty="0"/>
-          </a:p>
-        </p:txBody>
-      </p:sp>
-      <p:sp>
-        <p:nvSpPr>
-          <p:cNvPr id="15" name="icon-bg_225"/>
-          <p:cNvSpPr/>
-          <p:nvPr/>
-        </p:nvSpPr>
-        <p:spPr>
-          <a:xfrm>
-            <a:off x="457200" y="3666744"/>
-            <a:ext cx="640080" cy="640080"/>
-          </a:xfrm>
-          <a:prstGeom prst="ellipse">
-            <a:avLst/>
-          </a:prstGeom>
-          <a:solidFill>
-            <a:srgbClr val="1F4E5F"/>
-          </a:solidFill>
-          <a:ln/>
-        </p:spPr>
-      </p:sp>
-      <p:pic>
-        <p:nvPicPr>
-          <p:cNvPr id="16" name="icon_226" descr="preencoded.png">    </p:cNvPr>
-          <p:cNvPicPr>
-            <a:picLocks noChangeAspect="1"/>
-          </p:cNvPicPr>
-          <p:nvPr/>
-        </p:nvPicPr>
-        <p:blipFill>
-          <a:blip r:embed="rId4"/>
-          <a:stretch>
-            <a:fillRect/>
-          </a:stretch>
-        </p:blipFill>
-        <p:spPr>
-          <a:xfrm>
-            <a:off x="617220" y="3826764"/>
-            <a:ext cx="320040" cy="320040"/>
-          </a:xfrm>
-          <a:prstGeom prst="rect">
-            <a:avLst/>
-          </a:prstGeom>
-        </p:spPr>
-      </p:pic>
-      <p:sp>
-        <p:nvSpPr>
-          <p:cNvPr id="17" name="text_227"/>
-          <p:cNvSpPr txBox="1"/>
-          <p:nvPr/>
-        </p:nvSpPr>
-        <p:spPr>
-          <a:xfrm>
-            <a:off x="1280160" y="3685032"/>
-            <a:ext cx="3657600" cy="320040"/>
-          </a:xfrm>
-          <a:prstGeom prst="rect">
-            <a:avLst/>
-          </a:prstGeom>
-          <a:noFill/>
-          <a:ln/>
-        </p:spPr>
-        <p:txBody>
-          <a:bodyPr wrap="square" lIns="0" tIns="0" rIns="0" bIns="0" rtlCol="0" anchor="t"/>
-          <a:lstStyle/>
-          <a:p>
-            <a:pPr indent="0" marL="0">
-              <a:buNone/>
-            </a:pPr>
-            <a:r>
-              <a:rPr lang="en-US" sz="1700" b="1" dirty="0">
-                <a:solidFill>
-                  <a:schemeClr val="tx2"/>
-                </a:solidFill>
-              </a:rPr>
-              <a:t>Professional habits</a:t>
-            </a:r>
-            <a:endParaRPr lang="en-US" sz="1700" dirty="0"/>
-          </a:p>
-        </p:txBody>
-      </p:sp>
-      <p:sp>
-        <p:nvSpPr>
-          <p:cNvPr id="18" name="text_228"/>
-          <p:cNvSpPr txBox="1"/>
-          <p:nvPr/>
-        </p:nvSpPr>
-        <p:spPr>
-          <a:xfrm>
-            <a:off x="1280160" y="4005072"/>
-            <a:ext cx="4023360" cy="320040"/>
-          </a:xfrm>
-          <a:prstGeom prst="rect">
-            <a:avLst/>
-          </a:prstGeom>
-          <a:noFill/>
-          <a:ln/>
-        </p:spPr>
-        <p:txBody>
-          <a:bodyPr wrap="square" lIns="0" tIns="0" rIns="0" bIns="0" rtlCol="0" anchor="t"/>
-          <a:lstStyle/>
-          <a:p>
-            <a:pPr indent="0" marL="0">
-              <a:buNone/>
-            </a:pPr>
-            <a:r>
-              <a:rPr lang="en-US" sz="1400" dirty="0">
-                <a:solidFill>
-                  <a:schemeClr val="tx1"/>
-                </a:solidFill>
-              </a:rPr>
-              <a:t>Git, documentation and Docker from day one</a:t>
-            </a:r>
-            <a:endParaRPr lang="en-US" sz="1400" dirty="0"/>
-          </a:p>
-        </p:txBody>
-      </p:sp>
-      <p:sp>
-        <p:nvSpPr>
-          <p:cNvPr id="19" name="card_229"/>
-          <p:cNvSpPr/>
-          <p:nvPr/>
-        </p:nvSpPr>
-        <p:spPr>
-          <a:xfrm>
-            <a:off x="5669280" y="1143000"/>
-            <a:ext cx="3017520" cy="3337560"/>
-          </a:xfrm>
-          <a:prstGeom prst="roundRect">
-            <a:avLst>
-              <a:gd name="adj" fmla="val 2424"/>
-            </a:avLst>
-          </a:prstGeom>
-          <a:solidFill>
-            <a:schemeClr val="accent5"/>
-          </a:solidFill>
-          <a:ln/>
-        </p:spPr>
-      </p:sp>
-      <p:sp>
-        <p:nvSpPr>
-          <p:cNvPr id="20" name="text_230"/>
-          <p:cNvSpPr txBox="1"/>
-          <p:nvPr/>
-        </p:nvSpPr>
-        <p:spPr>
-          <a:xfrm>
-            <a:off x="5897880" y="1280160"/>
-            <a:ext cx="2560320" cy="365760"/>
-          </a:xfrm>
-          <a:prstGeom prst="rect">
-            <a:avLst/>
-          </a:prstGeom>
-          <a:noFill/>
-          <a:ln/>
-        </p:spPr>
-        <p:txBody>
-          <a:bodyPr wrap="square" lIns="0" tIns="0" rIns="0" bIns="0" rtlCol="0" anchor="t"/>
-          <a:lstStyle/>
-          <a:p>
-            <a:pPr indent="0" marL="0">
-              <a:buNone/>
-            </a:pPr>
-            <a:r>
-              <a:rPr lang="en-US" sz="1800" b="1" dirty="0">
-                <a:solidFill>
-                  <a:schemeClr val="tx2"/>
-                </a:solidFill>
-              </a:rPr>
-              <a:t>Next steps</a:t>
-            </a:r>
-            <a:endParaRPr lang="en-US" sz="1800" dirty="0"/>
-          </a:p>
-        </p:txBody>
-      </p:sp>
-      <p:sp>
-        <p:nvSpPr>
-          <p:cNvPr id="21" name="text_231"/>
-          <p:cNvSpPr txBox="1"/>
-          <p:nvPr/>
-        </p:nvSpPr>
-        <p:spPr>
-          <a:xfrm>
-            <a:off x="5897880" y="1783080"/>
-            <a:ext cx="2606040" cy="2560320"/>
-          </a:xfrm>
-          <a:prstGeom prst="rect">
-            <a:avLst/>
-          </a:prstGeom>
-          <a:noFill/>
-          <a:ln/>
-        </p:spPr>
-        <p:txBody>
-          <a:bodyPr wrap="square" lIns="0" tIns="0" rIns="0" bIns="0" rtlCol="0" anchor="t"/>
-          <a:lstStyle/>
-          <a:p>
-            <a:pPr marL="342900" indent="-342900">
-              <a:spcAft>
-                <a:spcPts val="1000"/>
-              </a:spcAft>
-              <a:buSzPct val="100000"/>
-              <a:buChar char="•"/>
-            </a:pPr>
-            <a:r>
-              <a:rPr lang="en-US" sz="1500" dirty="0">
-                <a:solidFill>
-                  <a:schemeClr val="tx1"/>
-                </a:solidFill>
-              </a:rPr>
-              <a:t>Check prerequisites automatically</a:t>
-            </a:r>
-            <a:endParaRPr lang="en-US" sz="1500" dirty="0"/>
-          </a:p>
-          <a:p>
-            <a:pPr marL="342900" indent="-342900">
-              <a:spcAft>
-                <a:spcPts val="1000"/>
-              </a:spcAft>
-              <a:buSzPct val="100000"/>
-              <a:buChar char="•"/>
-            </a:pPr>
-            <a:r>
-              <a:rPr lang="en-US" sz="1500" dirty="0">
-                <a:solidFill>
-                  <a:schemeClr val="tx1"/>
-                </a:solidFill>
-              </a:rPr>
-              <a:t>Automated tests with Jest</a:t>
-            </a:r>
-            <a:endParaRPr lang="en-US" sz="1500" dirty="0"/>
-          </a:p>
-          <a:p>
-            <a:pPr marL="342900" indent="-342900">
-              <a:spcAft>
-                <a:spcPts val="1000"/>
-              </a:spcAft>
-              <a:buSzPct val="100000"/>
-              <a:buChar char="•"/>
-            </a:pPr>
-            <a:r>
-              <a:rPr lang="en-US" sz="1500" dirty="0">
-                <a:solidFill>
-                  <a:schemeClr val="tx1"/>
-                </a:solidFill>
-              </a:rPr>
-              <a:t>Waiting list + email alerts</a:t>
-            </a:r>
-            <a:endParaRPr lang="en-US" sz="1500" dirty="0"/>
-          </a:p>
-          <a:p>
-            <a:pPr marL="342900" indent="-342900">
-              <a:spcAft>
-                <a:spcPts val="1000"/>
-              </a:spcAft>
-              <a:buSzPct val="100000"/>
-              <a:buChar char="•"/>
-            </a:pPr>
-            <a:r>
-              <a:rPr lang="en-US" sz="1500" dirty="0">
-                <a:solidFill>
-                  <a:schemeClr val="tx1"/>
-                </a:solidFill>
-              </a:rPr>
-              <a:t>Caching for peak load</a:t>
-            </a:r>
-            <a:endParaRPr lang="en-US" sz="1500" dirty="0"/>
-          </a:p>
-        </p:txBody>
-      </p:sp>
-      <p:sp>
-        <p:nvSpPr>
-          <p:cNvPr id="25" name="Slide Number Placeholder 0"/>
-          <p:cNvSpPr>
-            <a:spLocks noGrp="1"/>
-          </p:cNvSpPr>
-          <p:nvPr>
-            <p:ph type="sldNum" sz="quarter" idx="4294967295"/>
-          </p:nvPr>
-        </p:nvSpPr>
-        <p:spPr>
-          <a:xfrm>
-            <a:off x="8229600" y="4754880"/>
-            <a:ext cx="457200" cy="274320"/>
-          </a:xfrm>
-          <a:prstGeom prst="rect">
-            <a:avLst/>
-          </a:prstGeom>
-          <a:extLst>
-            <a:ext uri="{C572A759-6A51-4108-AA02-DFA0A04FC94B}">
-              <ma14:wrappingTextBoxFlag xmlns:ma14="http://schemas.microsoft.com/office/mac/drawingml/2011/main" val="0"/>
-            </a:ext>
-          </a:extLst>
-        </p:spPr>
-        <p:txBody>
-          <a:bodyPr/>
-          <a:lstStyle>
-            <a:lvl1pPr>
-              <a:defRPr sz="1000">
-                <a:solidFill>
-                  <a:srgbClr val="5B6B73"/>
-                </a:solidFill>
-              </a:defRPr>
-            </a:lvl1pPr>
-          </a:lstStyle>
-          <a:p>
-            <a:pPr algn="r"/>
-            <a:fld id="{F7021451-1387-4CA6-816F-3879F97B5CBC}" type="slidenum">
-              <a:rPr b="0" lang="en-US"/>
-              <a:t>13</a:t>
-            </a:fld>
-            <a:endParaRPr lang="en-US"/>
-          </a:p>
-        </p:txBody>
-      </p:sp>
-    </p:spTree>
-  </p:cSld>
-  <p:clrMapOvr>
-    <a:masterClrMapping/>
-  </p:clrMapOvr>
-</p:sld>
-</file>
-
-<file path=ppt/slides/slide14.xml><?xml version="1.0" encoding="utf-8"?>
-<p:sld xmlns:a="http://schemas.openxmlformats.org/drawingml/2006/main" xmlns:r="http://schemas.openxmlformats.org/officeDocument/2006/relationships" xmlns:p="http://schemas.openxmlformats.org/presentationml/2006/main">
-  <p:cSld name="Slide 14">
-    <p:spTree>
-      <p:nvGrpSpPr>
-        <p:cNvPr id="1" name=""/>
-        <p:cNvGrpSpPr/>
-        <p:nvPr/>
-      </p:nvGrpSpPr>
-      <p:grpSpPr>
-        <a:xfrm>
-          <a:off x="0" y="0"/>
-          <a:ext cx="0" cy="0"/>
-          <a:chOff x="0" y="0"/>
-          <a:chExt cx="0" cy="0"/>
-        </a:xfrm>
-      </p:grpSpPr>
-      <p:sp>
-        <p:nvSpPr>
-          <p:cNvPr id="2" name="Text 0"/>
-          <p:cNvSpPr/>
-          <p:nvPr>
-            <p:ph idx="100" type="title" hasCustomPrompt="1"/>
-          </p:nvPr>
-        </p:nvSpPr>
-        <p:spPr>
-          <a:xfrm>
-            <a:off x="548640" y="1417320"/>
-            <a:ext cx="8046720" cy="1371600"/>
-          </a:xfrm>
-          <a:prstGeom prst="rect">
-            <a:avLst/>
-          </a:prstGeom>
-          <a:noFill/>
-          <a:ln/>
-        </p:spPr>
-        <p:txBody>
-          <a:bodyPr wrap="square" rtlCol="0" anchor="t"/>
-          <a:lstStyle/>
-          <a:p>
-            <a:pPr algn="l" indent="0" marL="0">
-              <a:buNone/>
-            </a:pPr>
-            <a:r>
-              <a:rPr lang="en-US" sz="4000" b="1" dirty="0">
-                <a:solidFill>
-                  <a:schemeClr val="bg1"/>
-                </a:solidFill>
-                <a:latin typeface="Cambria" pitchFamily="34" charset="0"/>
-                <a:ea typeface="Cambria" pitchFamily="34" charset="-122"/>
-                <a:cs typeface="Cambria" pitchFamily="34" charset="-120"/>
-              </a:rPr>
-              <a:t>Thank you!</a:t>
-            </a:r>
-            <a:endParaRPr lang="en-US" sz="4000" dirty="0"/>
-          </a:p>
-        </p:txBody>
-      </p:sp>
-      <p:sp>
-        <p:nvSpPr>
-          <p:cNvPr id="3" name="Text 0"/>
-          <p:cNvSpPr/>
-          <p:nvPr>
-            <p:ph idx="101" type="body" hasCustomPrompt="1"/>
-          </p:nvPr>
-        </p:nvSpPr>
-        <p:spPr>
-          <a:xfrm>
-            <a:off x="548640" y="2834640"/>
-            <a:ext cx="8046720" cy="822960"/>
-          </a:xfrm>
-          <a:prstGeom prst="rect">
-            <a:avLst/>
-          </a:prstGeom>
-          <a:noFill/>
-          <a:ln/>
-        </p:spPr>
-        <p:txBody>
-          <a:bodyPr wrap="square" rtlCol="0" anchor="t"/>
-          <a:lstStyle/>
-          <a:p>
-            <a:pPr indent="0" marL="0">
-              <a:buNone/>
-            </a:pPr>
-            <a:r>
-              <a:rPr lang="en-US" sz="1800" dirty="0">
-                <a:solidFill>
-                  <a:schemeClr val="accent5"/>
-                </a:solidFill>
-              </a:rPr>
-              <a:t>Questions and feedback are very welcome</a:t>
-            </a:r>
-            <a:endParaRPr lang="en-US" sz="1800" dirty="0"/>
-          </a:p>
-        </p:txBody>
-      </p:sp>
-      <p:sp>
-        <p:nvSpPr>
-          <p:cNvPr id="4" name="icon-bg_232"/>
-          <p:cNvSpPr/>
-          <p:nvPr/>
-        </p:nvSpPr>
-        <p:spPr>
-          <a:xfrm>
-            <a:off x="7635240" y="502920"/>
-            <a:ext cx="914400" cy="914400"/>
-          </a:xfrm>
-          <a:prstGeom prst="ellipse">
-            <a:avLst/>
-          </a:prstGeom>
-          <a:solidFill>
-            <a:srgbClr val="1F4E5F"/>
-          </a:solidFill>
-          <a:ln/>
-        </p:spPr>
-      </p:sp>
-      <p:pic>
-        <p:nvPicPr>
-          <p:cNvPr id="5" name="icon_233" descr="preencoded.png">    </p:cNvPr>
-          <p:cNvPicPr>
-            <a:picLocks noChangeAspect="1"/>
-          </p:cNvPicPr>
-          <p:nvPr/>
-        </p:nvPicPr>
-        <p:blipFill>
-          <a:blip r:embed="rId1"/>
-          <a:stretch>
-            <a:fillRect/>
-          </a:stretch>
-        </p:blipFill>
-        <p:spPr>
-          <a:xfrm>
             <a:off x="7863840" y="731520"/>
             <a:ext cx="457200" cy="457200"/>
           </a:xfrm>
@@ -5691,7 +3171,7 @@
       </p:pic>
       <p:sp>
         <p:nvSpPr>
-          <p:cNvPr id="6" name="text_234"/>
+          <p:cNvPr id="6" name="text_170"/>
           <p:cNvSpPr txBox="1"/>
           <p:nvPr/>
         </p:nvSpPr>
@@ -5719,7 +3199,7 @@
                   <a:schemeClr val="bg1"/>
                 </a:solidFill>
               </a:rPr>
-              <a:t>React · Express · MySQL · Docker</a:t>
+              <a:t>Your Name  ·  English Writing &amp; Presentation Skills</a:t>
             </a:r>
             <a:endParaRPr lang="en-US" sz="1400" dirty="0"/>
           </a:p>
@@ -5882,7 +3362,7 @@
                   <a:schemeClr val="tx2"/>
                 </a:solidFill>
               </a:rPr>
-              <a:t>The problem</a:t>
+              <a:t>Why</a:t>
             </a:r>
             <a:endParaRPr lang="en-US" sz="1800" dirty="0"/>
           </a:p>
@@ -5918,7 +3398,7 @@
                   <a:schemeClr val="tx1"/>
                 </a:solidFill>
               </a:rPr>
-              <a:t>Why course registration is harder than it looks</a:t>
+              <a:t>The problem that inspired this project</a:t>
             </a:r>
             <a:endParaRPr lang="en-US" sz="1400" dirty="0"/>
           </a:p>
@@ -6015,7 +3495,7 @@
                   <a:schemeClr val="tx2"/>
                 </a:solidFill>
               </a:rPr>
-              <a:t>The solution</a:t>
+              <a:t>What</a:t>
             </a:r>
             <a:endParaRPr lang="en-US" sz="1800" dirty="0"/>
           </a:p>
@@ -6051,7 +3531,7 @@
                   <a:schemeClr val="tx1"/>
                 </a:solidFill>
               </a:rPr>
-              <a:t>Features, technology and architecture</a:t>
+              <a:t>What the system does and how it works</a:t>
             </a:r>
             <a:endParaRPr lang="en-US" sz="1400" dirty="0"/>
           </a:p>
@@ -6148,7 +3628,7 @@
                   <a:schemeClr val="tx2"/>
                 </a:solidFill>
               </a:rPr>
-              <a:t>The hard part</a:t>
+              <a:t>Challenges</a:t>
             </a:r>
             <a:endParaRPr lang="en-US" sz="1800" dirty="0"/>
           </a:p>
@@ -6184,7 +3664,7 @@
                   <a:schemeClr val="tx1"/>
                 </a:solidFill>
               </a:rPr>
-              <a:t>Business rules, race conditions and timetable clashes</a:t>
+              <a:t>The two hardest problems I solved</a:t>
             </a:r>
             <a:endParaRPr lang="en-US" sz="1400" dirty="0"/>
           </a:p>
@@ -6281,7 +3761,7 @@
                   <a:schemeClr val="tx2"/>
                 </a:solidFill>
               </a:rPr>
-              <a:t>The journey</a:t>
+              <a:t>Lessons</a:t>
             </a:r>
             <a:endParaRPr lang="en-US" sz="1800" dirty="0"/>
           </a:p>
@@ -6317,7 +3797,7 @@
                   <a:schemeClr val="tx1"/>
                 </a:solidFill>
               </a:rPr>
-              <a:t>How I built it, challenges and lessons learned</a:t>
+              <a:t>How I built it and what I learned</a:t>
             </a:r>
             <a:endParaRPr lang="en-US" sz="1400" dirty="0"/>
           </a:p>
@@ -7202,7 +4682,7 @@
                   <a:schemeClr val="accent4"/>
                 </a:solidFill>
               </a:rPr>
-              <a:t>student &amp; admin</a:t>
+              <a:t>students &amp; admins</a:t>
             </a:r>
             <a:endParaRPr lang="en-US" sz="1300" dirty="0"/>
           </a:p>
@@ -7241,7 +4721,7 @@
                 <a:ea typeface="Cambria" pitchFamily="34" charset="-122"/>
                 <a:cs typeface="Cambria" pitchFamily="34" charset="-120"/>
               </a:rPr>
-              <a:t>8</a:t>
+              <a:t>9</a:t>
             </a:r>
             <a:endParaRPr lang="en-US" sz="6000" dirty="0"/>
           </a:p>
@@ -7277,7 +4757,7 @@
                   <a:schemeClr val="tx2"/>
                 </a:solidFill>
               </a:rPr>
-              <a:t>database tables</a:t>
+              <a:t>rules</a:t>
             </a:r>
             <a:endParaRPr lang="en-US" sz="1600" dirty="0"/>
           </a:p>
@@ -7313,7 +4793,7 @@
                   <a:schemeClr val="accent4"/>
                 </a:solidFill>
               </a:rPr>
-              <a:t>MySQL 8</a:t>
+              <a:t>checked on every sign-up</a:t>
             </a:r>
             <a:endParaRPr lang="en-US" sz="1300" dirty="0"/>
           </a:p>
@@ -7352,7 +4832,7 @@
                 <a:ea typeface="Cambria" pitchFamily="34" charset="-122"/>
                 <a:cs typeface="Cambria" pitchFamily="34" charset="-120"/>
               </a:rPr>
-              <a:t>9</a:t>
+              <a:t>3</a:t>
             </a:r>
             <a:endParaRPr lang="en-US" sz="6000" dirty="0"/>
           </a:p>
@@ -7388,7 +4868,7 @@
                   <a:schemeClr val="tx2"/>
                 </a:solidFill>
               </a:rPr>
-              <a:t>business rules</a:t>
+              <a:t>months</a:t>
             </a:r>
             <a:endParaRPr lang="en-US" sz="1600" dirty="0"/>
           </a:p>
@@ -7424,7 +4904,7 @@
                   <a:schemeClr val="accent4"/>
                 </a:solidFill>
               </a:rPr>
-              <a:t>BR01 – BR09</a:t>
+              <a:t>January – March 2026</a:t>
             </a:r>
             <a:endParaRPr lang="en-US" sz="1300" dirty="0"/>
           </a:p>
@@ -7463,7 +4943,7 @@
                 <a:ea typeface="Cambria" pitchFamily="34" charset="-122"/>
                 <a:cs typeface="Cambria" pitchFamily="34" charset="-120"/>
               </a:rPr>
-              <a:t>3</a:t>
+              <a:t>1</a:t>
             </a:r>
             <a:endParaRPr lang="en-US" sz="6000" dirty="0"/>
           </a:p>
@@ -7499,7 +4979,7 @@
                   <a:schemeClr val="tx2"/>
                 </a:solidFill>
               </a:rPr>
-              <a:t>containers</a:t>
+              <a:t>developer</a:t>
             </a:r>
             <a:endParaRPr lang="en-US" sz="1600" dirty="0"/>
           </a:p>
@@ -7535,7 +5015,7 @@
                   <a:schemeClr val="accent4"/>
                 </a:solidFill>
               </a:rPr>
-              <a:t>Docker, one command</a:t>
+              <a:t>designed and built by me</a:t>
             </a:r>
             <a:endParaRPr lang="en-US" sz="1300" dirty="0"/>
           </a:p>
@@ -7604,7 +5084,7 @@
                   <a:schemeClr val="tx1"/>
                 </a:solidFill>
               </a:rPr>
-              <a:t>a working system where registration rules are enforced on the server, so the data stays correct even when many students click “Register” at the same moment.</a:t>
+              <a:t>a system that is fair, reliable and easy to use, even when hundreds of students click “Register” at the same moment.</a:t>
             </a:r>
             <a:endParaRPr lang="en-US" sz="1600" dirty="0"/>
           </a:p>
@@ -8218,7 +5698,7 @@
                 <a:ea typeface="Cambria" pitchFamily="34" charset="-122"/>
                 <a:cs typeface="Cambria" pitchFamily="34" charset="-120"/>
               </a:rPr>
-              <a:t>Technology stack</a:t>
+              <a:t>How it works: three parts</a:t>
             </a:r>
             <a:endParaRPr lang="en-US" sz="3000" dirty="0"/>
           </a:p>
@@ -8233,11 +5713,11 @@
         <p:spPr>
           <a:xfrm>
             <a:off x="457200" y="1234440"/>
-            <a:ext cx="1920240" cy="3200400"/>
+            <a:ext cx="2514600" cy="2514600"/>
           </a:xfrm>
           <a:prstGeom prst="roundRect">
             <a:avLst>
-              <a:gd name="adj" fmla="val 3810"/>
+              <a:gd name="adj" fmla="val 2909"/>
             </a:avLst>
           </a:prstGeom>
           <a:solidFill>
@@ -8254,8 +5734,8 @@
         </p:nvSpPr>
         <p:spPr>
           <a:xfrm>
-            <a:off x="1005840" y="1508760"/>
-            <a:ext cx="822960" cy="822960"/>
+            <a:off x="1325880" y="1463040"/>
+            <a:ext cx="777240" cy="777240"/>
           </a:xfrm>
           <a:prstGeom prst="ellipse">
             <a:avLst/>
@@ -8282,8 +5762,8 @@
         </p:blipFill>
         <p:spPr>
           <a:xfrm>
-            <a:off x="1211580" y="1714500"/>
-            <a:ext cx="411480" cy="411480"/>
+            <a:off x="1520190" y="1657350"/>
+            <a:ext cx="388620" cy="388620"/>
           </a:xfrm>
           <a:prstGeom prst="rect">
             <a:avLst/>
@@ -8298,8 +5778,8 @@
         </p:nvSpPr>
         <p:spPr>
           <a:xfrm>
-            <a:off x="594360" y="2468880"/>
-            <a:ext cx="1645920" cy="365760"/>
+            <a:off x="594360" y="2377440"/>
+            <a:ext cx="2240280" cy="365760"/>
           </a:xfrm>
           <a:prstGeom prst="rect">
             <a:avLst/>
@@ -8315,14 +5795,14 @@
               <a:buNone/>
             </a:pPr>
             <a:r>
-              <a:rPr lang="en-US" sz="1800" b="1" dirty="0">
+              <a:rPr lang="en-US" sz="1900" b="1" dirty="0">
                 <a:solidFill>
                   <a:schemeClr val="tx2"/>
                 </a:solidFill>
               </a:rPr>
-              <a:t>Frontend</a:t>
-            </a:r>
-            <a:endParaRPr lang="en-US" sz="1800" dirty="0"/>
+              <a:t>Front end</a:t>
+            </a:r>
+            <a:endParaRPr lang="en-US" sz="1900" dirty="0"/>
           </a:p>
         </p:txBody>
       </p:sp>
@@ -8334,8 +5814,8 @@
         </p:nvSpPr>
         <p:spPr>
           <a:xfrm>
-            <a:off x="640080" y="2926080"/>
-            <a:ext cx="1554480" cy="1371600"/>
+            <a:off x="640080" y="2788920"/>
+            <a:ext cx="2148840" cy="594360"/>
           </a:xfrm>
           <a:prstGeom prst="rect">
             <a:avLst/>
@@ -8348,9 +5828,6 @@
           <a:lstStyle/>
           <a:p>
             <a:pPr algn="ctr" indent="0" marL="0">
-              <a:spcAft>
-                <a:spcPts val="400"/>
-              </a:spcAft>
               <a:buNone/>
             </a:pPr>
             <a:r>
@@ -8359,108 +5836,118 @@
                   <a:schemeClr val="tx1"/>
                 </a:solidFill>
               </a:rPr>
-              <a:t>React 19</a:t>
+              <a:t>What users see and click in the browser</a:t>
             </a:r>
             <a:endParaRPr lang="en-US" sz="1400" dirty="0"/>
           </a:p>
+        </p:txBody>
+      </p:sp>
+      <p:sp>
+        <p:nvSpPr>
+          <p:cNvPr id="8" name="text_70"/>
+          <p:cNvSpPr txBox="1"/>
+          <p:nvPr/>
+        </p:nvSpPr>
+        <p:spPr>
+          <a:xfrm>
+            <a:off x="594360" y="3383280"/>
+            <a:ext cx="2240280" cy="274320"/>
+          </a:xfrm>
+          <a:prstGeom prst="rect">
+            <a:avLst/>
+          </a:prstGeom>
+          <a:noFill/>
+          <a:ln/>
+        </p:spPr>
+        <p:txBody>
+          <a:bodyPr wrap="square" lIns="0" tIns="0" rIns="0" bIns="0" rtlCol="0" anchor="t"/>
+          <a:lstStyle/>
           <a:p>
             <a:pPr algn="ctr" indent="0" marL="0">
-              <a:spcAft>
-                <a:spcPts val="400"/>
-              </a:spcAft>
-              <a:buNone/>
-            </a:pPr>
-            <a:r>
-              <a:rPr lang="en-US" sz="1400" dirty="0">
-                <a:solidFill>
-                  <a:schemeClr val="tx1"/>
-                </a:solidFill>
-              </a:rPr>
-              <a:t>Vite</a:t>
-            </a:r>
-            <a:endParaRPr lang="en-US" sz="1400" dirty="0"/>
-          </a:p>
-          <a:p>
-            <a:pPr algn="ctr" indent="0" marL="0">
-              <a:spcAft>
-                <a:spcPts val="400"/>
-              </a:spcAft>
-              <a:buNone/>
-            </a:pPr>
-            <a:r>
-              <a:rPr lang="en-US" sz="1400" dirty="0">
-                <a:solidFill>
-                  <a:schemeClr val="tx1"/>
-                </a:solidFill>
-              </a:rPr>
-              <a:t>React Router</a:t>
-            </a:r>
-            <a:endParaRPr lang="en-US" sz="1400" dirty="0"/>
-          </a:p>
-          <a:p>
-            <a:pPr algn="ctr" indent="0" marL="0">
-              <a:spcAft>
-                <a:spcPts val="400"/>
-              </a:spcAft>
-              <a:buNone/>
-            </a:pPr>
-            <a:r>
-              <a:rPr lang="en-US" sz="1400" dirty="0">
-                <a:solidFill>
-                  <a:schemeClr val="tx1"/>
-                </a:solidFill>
-              </a:rPr>
-              <a:t>Custom CSS + dark mode</a:t>
-            </a:r>
-            <a:endParaRPr lang="en-US" sz="1400" dirty="0"/>
-          </a:p>
-        </p:txBody>
-      </p:sp>
-      <p:sp>
-        <p:nvSpPr>
-          <p:cNvPr id="8" name="card_70"/>
+              <a:buNone/>
+            </a:pPr>
+            <a:r>
+              <a:rPr lang="en-US" sz="1300" i="1" dirty="0">
+                <a:solidFill>
+                  <a:schemeClr val="accent4"/>
+                </a:solidFill>
+              </a:rPr>
+              <a:t>React</a:t>
+            </a:r>
+            <a:endParaRPr lang="en-US" sz="1300" dirty="0"/>
+          </a:p>
+        </p:txBody>
+      </p:sp>
+      <p:sp>
+        <p:nvSpPr>
+          <p:cNvPr id="9" name="arrow_71"/>
           <p:cNvSpPr/>
           <p:nvPr/>
         </p:nvSpPr>
         <p:spPr>
           <a:xfrm>
-            <a:off x="2560320" y="1234440"/>
-            <a:ext cx="1920240" cy="3200400"/>
+            <a:off x="3017520" y="2487168"/>
+            <a:ext cx="274320" cy="0"/>
+          </a:xfrm>
+          <a:prstGeom prst="line">
+            <a:avLst/>
+          </a:prstGeom>
+          <a:noFill/>
+          <a:ln w="25400">
+            <a:solidFill>
+              <a:srgbClr val="5B6B73"/>
+            </a:solidFill>
+            <a:prstDash val="solid"/>
+            <a:headEnd type="triangle"/>
+            <a:tailEnd type="triangle"/>
+          </a:ln>
+        </p:spPr>
+      </p:sp>
+      <p:sp>
+        <p:nvSpPr>
+          <p:cNvPr id="10" name="card_72"/>
+          <p:cNvSpPr/>
+          <p:nvPr/>
+        </p:nvSpPr>
+        <p:spPr>
+          <a:xfrm>
+            <a:off x="3337560" y="1234440"/>
+            <a:ext cx="2514600" cy="2514600"/>
           </a:xfrm>
           <a:prstGeom prst="roundRect">
             <a:avLst>
-              <a:gd name="adj" fmla="val 3810"/>
+              <a:gd name="adj" fmla="val 2909"/>
             </a:avLst>
           </a:prstGeom>
           <a:solidFill>
-            <a:schemeClr val="bg2"/>
+            <a:schemeClr val="accent5"/>
           </a:solidFill>
           <a:ln/>
         </p:spPr>
       </p:sp>
       <p:sp>
         <p:nvSpPr>
-          <p:cNvPr id="9" name="icon-bg_71"/>
+          <p:cNvPr id="11" name="icon-bg_73"/>
           <p:cNvSpPr/>
           <p:nvPr/>
         </p:nvSpPr>
         <p:spPr>
           <a:xfrm>
-            <a:off x="3108960" y="1508760"/>
-            <a:ext cx="822960" cy="822960"/>
+            <a:off x="4206240" y="1463040"/>
+            <a:ext cx="777240" cy="777240"/>
           </a:xfrm>
           <a:prstGeom prst="ellipse">
             <a:avLst/>
           </a:prstGeom>
           <a:solidFill>
-            <a:srgbClr val="1F4E5F"/>
+            <a:srgbClr val="E07A2F"/>
           </a:solidFill>
           <a:ln/>
         </p:spPr>
       </p:sp>
       <p:pic>
         <p:nvPicPr>
-          <p:cNvPr id="10" name="icon_72" descr="preencoded.png">    </p:cNvPr>
+          <p:cNvPr id="12" name="icon_74" descr="preencoded.png">    </p:cNvPr>
           <p:cNvPicPr>
             <a:picLocks noChangeAspect="1"/>
           </p:cNvPicPr>
@@ -8474,8 +5961,8 @@
         </p:blipFill>
         <p:spPr>
           <a:xfrm>
-            <a:off x="3314700" y="1714500"/>
-            <a:ext cx="411480" cy="411480"/>
+            <a:off x="4400550" y="1657350"/>
+            <a:ext cx="388620" cy="388620"/>
           </a:xfrm>
           <a:prstGeom prst="rect">
             <a:avLst/>
@@ -8484,14 +5971,14 @@
       </p:pic>
       <p:sp>
         <p:nvSpPr>
-          <p:cNvPr id="11" name="text_73"/>
-          <p:cNvSpPr txBox="1"/>
-          <p:nvPr/>
-        </p:nvSpPr>
-        <p:spPr>
-          <a:xfrm>
-            <a:off x="2697480" y="2468880"/>
-            <a:ext cx="1645920" cy="365760"/>
+          <p:cNvPr id="13" name="text_75"/>
+          <p:cNvSpPr txBox="1"/>
+          <p:nvPr/>
+        </p:nvSpPr>
+        <p:spPr>
+          <a:xfrm>
+            <a:off x="3474720" y="2377440"/>
+            <a:ext cx="2240280" cy="365760"/>
           </a:xfrm>
           <a:prstGeom prst="rect">
             <a:avLst/>
@@ -8507,27 +5994,27 @@
               <a:buNone/>
             </a:pPr>
             <a:r>
-              <a:rPr lang="en-US" sz="1800" b="1" dirty="0">
+              <a:rPr lang="en-US" sz="1900" b="1" dirty="0">
                 <a:solidFill>
                   <a:schemeClr val="tx2"/>
                 </a:solidFill>
               </a:rPr>
-              <a:t>Backend</a:t>
-            </a:r>
-            <a:endParaRPr lang="en-US" sz="1800" dirty="0"/>
-          </a:p>
-        </p:txBody>
-      </p:sp>
-      <p:sp>
-        <p:nvSpPr>
-          <p:cNvPr id="12" name="text_74"/>
-          <p:cNvSpPr txBox="1"/>
-          <p:nvPr/>
-        </p:nvSpPr>
-        <p:spPr>
-          <a:xfrm>
-            <a:off x="2743200" y="2926080"/>
-            <a:ext cx="1554480" cy="1371600"/>
+              <a:t>Back end</a:t>
+            </a:r>
+            <a:endParaRPr lang="en-US" sz="1900" dirty="0"/>
+          </a:p>
+        </p:txBody>
+      </p:sp>
+      <p:sp>
+        <p:nvSpPr>
+          <p:cNvPr id="14" name="text_76"/>
+          <p:cNvSpPr txBox="1"/>
+          <p:nvPr/>
+        </p:nvSpPr>
+        <p:spPr>
+          <a:xfrm>
+            <a:off x="3520440" y="2788920"/>
+            <a:ext cx="2148840" cy="594360"/>
           </a:xfrm>
           <a:prstGeom prst="rect">
             <a:avLst/>
@@ -8540,9 +6027,6 @@
           <a:lstStyle/>
           <a:p>
             <a:pPr algn="ctr" indent="0" marL="0">
-              <a:spcAft>
-                <a:spcPts val="400"/>
-              </a:spcAft>
               <a:buNone/>
             </a:pPr>
             <a:r>
@@ -8551,60 +6035,87 @@
                   <a:schemeClr val="tx1"/>
                 </a:solidFill>
               </a:rPr>
+              <a:t>Checks who you are and applies the rules</a:t>
+            </a:r>
+            <a:endParaRPr lang="en-US" sz="1400" dirty="0"/>
+          </a:p>
+        </p:txBody>
+      </p:sp>
+      <p:sp>
+        <p:nvSpPr>
+          <p:cNvPr id="15" name="text_77"/>
+          <p:cNvSpPr txBox="1"/>
+          <p:nvPr/>
+        </p:nvSpPr>
+        <p:spPr>
+          <a:xfrm>
+            <a:off x="3474720" y="3383280"/>
+            <a:ext cx="2240280" cy="274320"/>
+          </a:xfrm>
+          <a:prstGeom prst="rect">
+            <a:avLst/>
+          </a:prstGeom>
+          <a:noFill/>
+          <a:ln/>
+        </p:spPr>
+        <p:txBody>
+          <a:bodyPr wrap="square" lIns="0" tIns="0" rIns="0" bIns="0" rtlCol="0" anchor="t"/>
+          <a:lstStyle/>
+          <a:p>
+            <a:pPr algn="ctr" indent="0" marL="0">
+              <a:buNone/>
+            </a:pPr>
+            <a:r>
+              <a:rPr lang="en-US" sz="1300" i="1" dirty="0">
+                <a:solidFill>
+                  <a:schemeClr val="accent4"/>
+                </a:solidFill>
+              </a:rPr>
               <a:t>Node.js + Express</a:t>
             </a:r>
-            <a:endParaRPr lang="en-US" sz="1400" dirty="0"/>
-          </a:p>
-          <a:p>
-            <a:pPr algn="ctr" indent="0" marL="0">
-              <a:spcAft>
-                <a:spcPts val="400"/>
-              </a:spcAft>
-              <a:buNone/>
-            </a:pPr>
-            <a:r>
-              <a:rPr lang="en-US" sz="1400" dirty="0">
-                <a:solidFill>
-                  <a:schemeClr val="tx1"/>
-                </a:solidFill>
-              </a:rPr>
-              <a:t>Sequelize ORM</a:t>
-            </a:r>
-            <a:endParaRPr lang="en-US" sz="1400" dirty="0"/>
-          </a:p>
-          <a:p>
-            <a:pPr algn="ctr" indent="0" marL="0">
-              <a:spcAft>
-                <a:spcPts val="400"/>
-              </a:spcAft>
-              <a:buNone/>
-            </a:pPr>
-            <a:r>
-              <a:rPr lang="en-US" sz="1400" dirty="0">
-                <a:solidFill>
-                  <a:schemeClr val="tx1"/>
-                </a:solidFill>
-              </a:rPr>
-              <a:t>express-validator</a:t>
-            </a:r>
-            <a:endParaRPr lang="en-US" sz="1400" dirty="0"/>
-          </a:p>
-        </p:txBody>
-      </p:sp>
-      <p:sp>
-        <p:nvSpPr>
-          <p:cNvPr id="13" name="card_75"/>
+            <a:endParaRPr lang="en-US" sz="1300" dirty="0"/>
+          </a:p>
+        </p:txBody>
+      </p:sp>
+      <p:sp>
+        <p:nvSpPr>
+          <p:cNvPr id="16" name="arrow_78"/>
           <p:cNvSpPr/>
           <p:nvPr/>
         </p:nvSpPr>
         <p:spPr>
           <a:xfrm>
-            <a:off x="4663440" y="1234440"/>
-            <a:ext cx="1920240" cy="3200400"/>
+            <a:off x="5897880" y="2487168"/>
+            <a:ext cx="274320" cy="0"/>
+          </a:xfrm>
+          <a:prstGeom prst="line">
+            <a:avLst/>
+          </a:prstGeom>
+          <a:noFill/>
+          <a:ln w="25400">
+            <a:solidFill>
+              <a:srgbClr val="5B6B73"/>
+            </a:solidFill>
+            <a:prstDash val="solid"/>
+            <a:headEnd type="triangle"/>
+            <a:tailEnd type="triangle"/>
+          </a:ln>
+        </p:spPr>
+      </p:sp>
+      <p:sp>
+        <p:nvSpPr>
+          <p:cNvPr id="17" name="card_79"/>
+          <p:cNvSpPr/>
+          <p:nvPr/>
+        </p:nvSpPr>
+        <p:spPr>
+          <a:xfrm>
+            <a:off x="6217920" y="1234440"/>
+            <a:ext cx="2514600" cy="2514600"/>
           </a:xfrm>
           <a:prstGeom prst="roundRect">
             <a:avLst>
-              <a:gd name="adj" fmla="val 3810"/>
+              <a:gd name="adj" fmla="val 2909"/>
             </a:avLst>
           </a:prstGeom>
           <a:solidFill>
@@ -8615,14 +6126,14 @@
       </p:sp>
       <p:sp>
         <p:nvSpPr>
-          <p:cNvPr id="14" name="icon-bg_76"/>
+          <p:cNvPr id="18" name="icon-bg_80"/>
           <p:cNvSpPr/>
           <p:nvPr/>
         </p:nvSpPr>
         <p:spPr>
           <a:xfrm>
-            <a:off x="5212080" y="1508760"/>
-            <a:ext cx="822960" cy="822960"/>
+            <a:off x="7086600" y="1463040"/>
+            <a:ext cx="777240" cy="777240"/>
           </a:xfrm>
           <a:prstGeom prst="ellipse">
             <a:avLst/>
@@ -8635,7 +6146,7 @@
       </p:sp>
       <p:pic>
         <p:nvPicPr>
-          <p:cNvPr id="15" name="icon_77" descr="preencoded.png">    </p:cNvPr>
+          <p:cNvPr id="19" name="icon_81" descr="preencoded.png">    </p:cNvPr>
           <p:cNvPicPr>
             <a:picLocks noChangeAspect="1"/>
           </p:cNvPicPr>
@@ -8649,8 +6160,8 @@
         </p:blipFill>
         <p:spPr>
           <a:xfrm>
-            <a:off x="5417820" y="1714500"/>
-            <a:ext cx="411480" cy="411480"/>
+            <a:off x="7280910" y="1657350"/>
+            <a:ext cx="388620" cy="388620"/>
           </a:xfrm>
           <a:prstGeom prst="rect">
             <a:avLst/>
@@ -8659,14 +6170,14 @@
       </p:pic>
       <p:sp>
         <p:nvSpPr>
-          <p:cNvPr id="16" name="text_78"/>
-          <p:cNvSpPr txBox="1"/>
-          <p:nvPr/>
-        </p:nvSpPr>
-        <p:spPr>
-          <a:xfrm>
-            <a:off x="4800600" y="2468880"/>
-            <a:ext cx="1645920" cy="365760"/>
+          <p:cNvPr id="20" name="text_82"/>
+          <p:cNvSpPr txBox="1"/>
+          <p:nvPr/>
+        </p:nvSpPr>
+        <p:spPr>
+          <a:xfrm>
+            <a:off x="6355080" y="2377440"/>
+            <a:ext cx="2240280" cy="365760"/>
           </a:xfrm>
           <a:prstGeom prst="rect">
             <a:avLst/>
@@ -8682,27 +6193,27 @@
               <a:buNone/>
             </a:pPr>
             <a:r>
-              <a:rPr lang="en-US" sz="1800" b="1" dirty="0">
+              <a:rPr lang="en-US" sz="1900" b="1" dirty="0">
                 <a:solidFill>
                   <a:schemeClr val="tx2"/>
                 </a:solidFill>
               </a:rPr>
               <a:t>Database</a:t>
             </a:r>
-            <a:endParaRPr lang="en-US" sz="1800" dirty="0"/>
-          </a:p>
-        </p:txBody>
-      </p:sp>
-      <p:sp>
-        <p:nvSpPr>
-          <p:cNvPr id="17" name="text_79"/>
-          <p:cNvSpPr txBox="1"/>
-          <p:nvPr/>
-        </p:nvSpPr>
-        <p:spPr>
-          <a:xfrm>
-            <a:off x="4846320" y="2926080"/>
-            <a:ext cx="1554480" cy="1371600"/>
+            <a:endParaRPr lang="en-US" sz="1900" dirty="0"/>
+          </a:p>
+        </p:txBody>
+      </p:sp>
+      <p:sp>
+        <p:nvSpPr>
+          <p:cNvPr id="21" name="text_83"/>
+          <p:cNvSpPr txBox="1"/>
+          <p:nvPr/>
+        </p:nvSpPr>
+        <p:spPr>
+          <a:xfrm>
+            <a:off x="6400800" y="2788920"/>
+            <a:ext cx="2148840" cy="594360"/>
           </a:xfrm>
           <a:prstGeom prst="rect">
             <a:avLst/>
@@ -8715,9 +6226,6 @@
           <a:lstStyle/>
           <a:p>
             <a:pPr algn="ctr" indent="0" marL="0">
-              <a:spcAft>
-                <a:spcPts val="400"/>
-              </a:spcAft>
               <a:buNone/>
             </a:pPr>
             <a:r>
@@ -8726,78 +6234,80 @@
                   <a:schemeClr val="tx1"/>
                 </a:solidFill>
               </a:rPr>
-              <a:t>MySQL 8</a:t>
+              <a:t>Stores students, classes, timetables and grades</a:t>
             </a:r>
             <a:endParaRPr lang="en-US" sz="1400" dirty="0"/>
           </a:p>
+        </p:txBody>
+      </p:sp>
+      <p:sp>
+        <p:nvSpPr>
+          <p:cNvPr id="22" name="text_84"/>
+          <p:cNvSpPr txBox="1"/>
+          <p:nvPr/>
+        </p:nvSpPr>
+        <p:spPr>
+          <a:xfrm>
+            <a:off x="6355080" y="3383280"/>
+            <a:ext cx="2240280" cy="274320"/>
+          </a:xfrm>
+          <a:prstGeom prst="rect">
+            <a:avLst/>
+          </a:prstGeom>
+          <a:noFill/>
+          <a:ln/>
+        </p:spPr>
+        <p:txBody>
+          <a:bodyPr wrap="square" lIns="0" tIns="0" rIns="0" bIns="0" rtlCol="0" anchor="t"/>
+          <a:lstStyle/>
           <a:p>
             <a:pPr algn="ctr" indent="0" marL="0">
-              <a:spcAft>
-                <a:spcPts val="400"/>
-              </a:spcAft>
-              <a:buNone/>
-            </a:pPr>
-            <a:r>
-              <a:rPr lang="en-US" sz="1400" dirty="0">
-                <a:solidFill>
-                  <a:schemeClr val="tx1"/>
-                </a:solidFill>
-              </a:rPr>
-              <a:t>utf8mb4 for Vietnamese</a:t>
-            </a:r>
-            <a:endParaRPr lang="en-US" sz="1400" dirty="0"/>
-          </a:p>
-          <a:p>
-            <a:pPr algn="ctr" indent="0" marL="0">
-              <a:spcAft>
-                <a:spcPts val="400"/>
-              </a:spcAft>
-              <a:buNone/>
-            </a:pPr>
-            <a:r>
-              <a:rPr lang="en-US" sz="1400" dirty="0">
-                <a:solidFill>
-                  <a:schemeClr val="tx1"/>
-                </a:solidFill>
-              </a:rPr>
-              <a:t>Indexes + constraints</a:t>
-            </a:r>
-            <a:endParaRPr lang="en-US" sz="1400" dirty="0"/>
-          </a:p>
-        </p:txBody>
-      </p:sp>
-      <p:sp>
-        <p:nvSpPr>
-          <p:cNvPr id="18" name="card_80"/>
+              <a:buNone/>
+            </a:pPr>
+            <a:r>
+              <a:rPr lang="en-US" sz="1300" i="1" dirty="0">
+                <a:solidFill>
+                  <a:schemeClr val="accent4"/>
+                </a:solidFill>
+              </a:rPr>
+              <a:t>MySQL</a:t>
+            </a:r>
+            <a:endParaRPr lang="en-US" sz="1300" dirty="0"/>
+          </a:p>
+        </p:txBody>
+      </p:sp>
+      <p:sp>
+        <p:nvSpPr>
+          <p:cNvPr id="23" name="card_85"/>
           <p:cNvSpPr/>
           <p:nvPr/>
         </p:nvSpPr>
         <p:spPr>
           <a:xfrm>
-            <a:off x="6766560" y="1234440"/>
-            <a:ext cx="1920240" cy="3200400"/>
+            <a:off x="457200" y="3931920"/>
+            <a:ext cx="8229600" cy="548640"/>
           </a:xfrm>
           <a:prstGeom prst="roundRect">
             <a:avLst>
-              <a:gd name="adj" fmla="val 3810"/>
+              <a:gd name="adj" fmla="val 13333"/>
             </a:avLst>
           </a:prstGeom>
           <a:solidFill>
-            <a:schemeClr val="bg2"/>
+            <a:schemeClr val="accent5"/>
           </a:solidFill>
           <a:ln/>
         </p:spPr>
       </p:sp>
       <p:sp>
         <p:nvSpPr>
-          <p:cNvPr id="19" name="icon-bg_81"/>
+          <p:cNvPr id="24" name="icon-bg_86"/>
           <p:cNvSpPr/>
           <p:nvPr/>
         </p:nvSpPr>
         <p:spPr>
           <a:xfrm>
-            <a:off x="7315200" y="1508760"/>
-            <a:ext cx="822960" cy="822960"/>
+            <a:off x="594360" y="3995928"/>
+            <a:ext cx="420624" cy="420624"/>
           </a:xfrm>
           <a:prstGeom prst="ellipse">
             <a:avLst/>
@@ -8810,7 +6320,7 @@
       </p:sp>
       <p:pic>
         <p:nvPicPr>
-          <p:cNvPr id="20" name="icon_82" descr="preencoded.png">    </p:cNvPr>
+          <p:cNvPr id="25" name="icon_87" descr="preencoded.png">    </p:cNvPr>
           <p:cNvPicPr>
             <a:picLocks noChangeAspect="1"/>
           </p:cNvPicPr>
@@ -8824,8 +6334,8 @@
         </p:blipFill>
         <p:spPr>
           <a:xfrm>
-            <a:off x="7520940" y="1714500"/>
-            <a:ext cx="411480" cy="411480"/>
+            <a:off x="699516" y="4101084"/>
+            <a:ext cx="210312" cy="210312"/>
           </a:xfrm>
           <a:prstGeom prst="rect">
             <a:avLst/>
@@ -8834,110 +6344,37 @@
       </p:pic>
       <p:sp>
         <p:nvSpPr>
-          <p:cNvPr id="21" name="text_83"/>
-          <p:cNvSpPr txBox="1"/>
-          <p:nvPr/>
-        </p:nvSpPr>
-        <p:spPr>
-          <a:xfrm>
-            <a:off x="6903720" y="2468880"/>
-            <a:ext cx="1645920" cy="365760"/>
-          </a:xfrm>
-          <a:prstGeom prst="rect">
-            <a:avLst/>
-          </a:prstGeom>
-          <a:noFill/>
-          <a:ln/>
-        </p:spPr>
-        <p:txBody>
-          <a:bodyPr wrap="square" lIns="0" tIns="0" rIns="0" bIns="0" rtlCol="0" anchor="t"/>
-          <a:lstStyle/>
-          <a:p>
-            <a:pPr algn="ctr" indent="0" marL="0">
-              <a:buNone/>
-            </a:pPr>
-            <a:r>
-              <a:rPr lang="en-US" sz="1800" b="1" dirty="0">
+          <p:cNvPr id="26" name="text_88"/>
+          <p:cNvSpPr txBox="1"/>
+          <p:nvPr/>
+        </p:nvSpPr>
+        <p:spPr>
+          <a:xfrm>
+            <a:off x="1188720" y="3931920"/>
+            <a:ext cx="7315200" cy="548640"/>
+          </a:xfrm>
+          <a:prstGeom prst="rect">
+            <a:avLst/>
+          </a:prstGeom>
+          <a:noFill/>
+          <a:ln/>
+        </p:spPr>
+        <p:txBody>
+          <a:bodyPr wrap="square" lIns="0" tIns="0" rIns="0" bIns="0" rtlCol="0" anchor="ctr"/>
+          <a:lstStyle/>
+          <a:p>
+            <a:pPr indent="0" marL="0">
+              <a:buNone/>
+            </a:pPr>
+            <a:r>
+              <a:rPr lang="en-US" sz="1500" dirty="0">
                 <a:solidFill>
                   <a:schemeClr val="tx2"/>
                 </a:solidFill>
               </a:rPr>
-              <a:t>DevOps</a:t>
-            </a:r>
-            <a:endParaRPr lang="en-US" sz="1800" dirty="0"/>
-          </a:p>
-        </p:txBody>
-      </p:sp>
-      <p:sp>
-        <p:nvSpPr>
-          <p:cNvPr id="22" name="text_84"/>
-          <p:cNvSpPr txBox="1"/>
-          <p:nvPr/>
-        </p:nvSpPr>
-        <p:spPr>
-          <a:xfrm>
-            <a:off x="6949440" y="2926080"/>
-            <a:ext cx="1554480" cy="1371600"/>
-          </a:xfrm>
-          <a:prstGeom prst="rect">
-            <a:avLst/>
-          </a:prstGeom>
-          <a:noFill/>
-          <a:ln/>
-        </p:spPr>
-        <p:txBody>
-          <a:bodyPr wrap="square" lIns="0" tIns="0" rIns="0" bIns="0" rtlCol="0" anchor="t"/>
-          <a:lstStyle/>
-          <a:p>
-            <a:pPr algn="ctr" indent="0" marL="0">
-              <a:spcAft>
-                <a:spcPts val="400"/>
-              </a:spcAft>
-              <a:buNone/>
-            </a:pPr>
-            <a:r>
-              <a:rPr lang="en-US" sz="1400" dirty="0">
-                <a:solidFill>
-                  <a:schemeClr val="tx1"/>
-                </a:solidFill>
-              </a:rPr>
-              <a:t>Docker Compose</a:t>
-            </a:r>
-            <a:endParaRPr lang="en-US" sz="1400" dirty="0"/>
-          </a:p>
-          <a:p>
-            <a:pPr algn="ctr" indent="0" marL="0">
-              <a:spcAft>
-                <a:spcPts val="400"/>
-              </a:spcAft>
-              <a:buNone/>
-            </a:pPr>
-            <a:r>
-              <a:rPr lang="en-US" sz="1400" dirty="0">
-                <a:solidFill>
-                  <a:schemeClr val="tx1"/>
-                </a:solidFill>
-              </a:rPr>
-              <a:t>Nginx</a:t>
-            </a:r>
-            <a:endParaRPr lang="en-US" sz="1400" dirty="0"/>
-          </a:p>
-          <a:p>
-            <a:pPr algn="ctr" indent="0" marL="0">
-              <a:spcAft>
-                <a:spcPts val="400"/>
-              </a:spcAft>
-              <a:buNone/>
-            </a:pPr>
-            <a:r>
-              <a:rPr lang="en-US" sz="1400" dirty="0">
-                <a:solidFill>
-                  <a:schemeClr val="tx1"/>
-                </a:solidFill>
-              </a:rPr>
-              <a:t>npm workspaces</a:t>
-            </a:r>
-            <a:endParaRPr lang="en-US" sz="1400" dirty="0"/>
+              <a:t>Packaged with Docker: the whole system starts with one command</a:t>
+            </a:r>
+            <a:endParaRPr lang="en-US" sz="1500" dirty="0"/>
           </a:p>
         </p:txBody>
       </p:sp>
@@ -9046,7 +6483,7 @@
                 <a:ea typeface="Cambria" pitchFamily="34" charset="-122"/>
                 <a:cs typeface="Cambria" pitchFamily="34" charset="-120"/>
               </a:rPr>
-              <a:t>Layered architecture</a:t>
+              <a:t>Challenge 1: the last seat</a:t>
             </a:r>
             <a:endParaRPr lang="en-US" sz="3000" dirty="0"/>
           </a:p>
@@ -9054,43 +6491,92 @@
       </p:sp>
       <p:sp>
         <p:nvSpPr>
-          <p:cNvPr id="3" name="box_85"/>
+          <p:cNvPr id="3" name="card_89"/>
           <p:cNvSpPr/>
           <p:nvPr/>
         </p:nvSpPr>
         <p:spPr>
           <a:xfrm>
-            <a:off x="457200" y="2240280"/>
-            <a:ext cx="1737360" cy="914400"/>
+            <a:off x="457200" y="1188720"/>
+            <a:ext cx="4023360" cy="3291840"/>
           </a:xfrm>
           <a:prstGeom prst="roundRect">
             <a:avLst>
-              <a:gd name="adj" fmla="val 8000"/>
+              <a:gd name="adj" fmla="val 2222"/>
             </a:avLst>
           </a:prstGeom>
           <a:solidFill>
-            <a:srgbClr val="1F4E5F"/>
+            <a:schemeClr val="bg2"/>
           </a:solidFill>
           <a:ln/>
-          <a:effectLst>
-            <a:outerShdw sx="100000" sy="100000" kx="0" ky="0" algn="bl" rotWithShape="0" blurRad="76200" dist="25400" dir="5400000">
-              <a:srgbClr val="000000">
-                <a:alpha val="12000"/>
-              </a:srgbClr>
-            </a:outerShdw>
-          </a:effectLst>
-        </p:spPr>
-      </p:sp>
-      <p:sp>
-        <p:nvSpPr>
-          <p:cNvPr id="4" name="text_86"/>
-          <p:cNvSpPr txBox="1"/>
-          <p:nvPr/>
-        </p:nvSpPr>
-        <p:spPr>
-          <a:xfrm>
-            <a:off x="457200" y="2240280"/>
-            <a:ext cx="1737360" cy="914400"/>
+        </p:spPr>
+      </p:sp>
+      <p:sp>
+        <p:nvSpPr>
+          <p:cNvPr id="4" name="text_90"/>
+          <p:cNvSpPr txBox="1"/>
+          <p:nvPr/>
+        </p:nvSpPr>
+        <p:spPr>
+          <a:xfrm>
+            <a:off x="685800" y="1325880"/>
+            <a:ext cx="3566160" cy="365760"/>
+          </a:xfrm>
+          <a:prstGeom prst="rect">
+            <a:avLst/>
+          </a:prstGeom>
+          <a:noFill/>
+          <a:ln/>
+        </p:spPr>
+        <p:txBody>
+          <a:bodyPr wrap="square" lIns="0" tIns="0" rIns="0" bIns="0" rtlCol="0" anchor="t"/>
+          <a:lstStyle/>
+          <a:p>
+            <a:pPr indent="0" marL="0">
+              <a:buNone/>
+            </a:pPr>
+            <a:r>
+              <a:rPr lang="en-US" sz="1800" b="1" dirty="0">
+                <a:solidFill>
+                  <a:schemeClr val="accent2"/>
+                </a:solidFill>
+              </a:rPr>
+              <a:t>Without protection</a:t>
+            </a:r>
+            <a:endParaRPr lang="en-US" sz="1800" dirty="0"/>
+          </a:p>
+        </p:txBody>
+      </p:sp>
+      <p:sp>
+        <p:nvSpPr>
+          <p:cNvPr id="5" name="step_91"/>
+          <p:cNvSpPr/>
+          <p:nvPr/>
+        </p:nvSpPr>
+        <p:spPr>
+          <a:xfrm>
+            <a:off x="685800" y="1828800"/>
+            <a:ext cx="411480" cy="411480"/>
+          </a:xfrm>
+          <a:prstGeom prst="ellipse">
+            <a:avLst/>
+          </a:prstGeom>
+          <a:solidFill>
+            <a:srgbClr val="5B6B73"/>
+          </a:solidFill>
+          <a:ln/>
+        </p:spPr>
+      </p:sp>
+      <p:sp>
+        <p:nvSpPr>
+          <p:cNvPr id="6" name="text_92"/>
+          <p:cNvSpPr txBox="1"/>
+          <p:nvPr/>
+        </p:nvSpPr>
+        <p:spPr>
+          <a:xfrm>
+            <a:off x="685800" y="1828800"/>
+            <a:ext cx="411480" cy="411480"/>
           </a:xfrm>
           <a:prstGeom prst="rect">
             <a:avLst/>
@@ -9106,56 +6592,83 @@
               <a:buNone/>
             </a:pPr>
             <a:r>
-              <a:rPr lang="en-US" sz="1600" b="1" dirty="0">
+              <a:rPr lang="en-US" sz="1400" b="1" dirty="0">
                 <a:solidFill>
                   <a:schemeClr val="bg1"/>
                 </a:solidFill>
               </a:rPr>
-              <a:t>React Client</a:t>
-            </a:r>
-            <a:endParaRPr lang="en-US" sz="1600" dirty="0"/>
-          </a:p>
-        </p:txBody>
-      </p:sp>
-      <p:sp>
-        <p:nvSpPr>
-          <p:cNvPr id="5" name="box_87"/>
+              <a:t>1</a:t>
+            </a:r>
+            <a:endParaRPr lang="en-US" sz="1400" dirty="0"/>
+          </a:p>
+        </p:txBody>
+      </p:sp>
+      <p:sp>
+        <p:nvSpPr>
+          <p:cNvPr id="7" name="text_93"/>
+          <p:cNvSpPr txBox="1"/>
+          <p:nvPr/>
+        </p:nvSpPr>
+        <p:spPr>
+          <a:xfrm>
+            <a:off x="1280160" y="1828800"/>
+            <a:ext cx="3017520" cy="411480"/>
+          </a:xfrm>
+          <a:prstGeom prst="rect">
+            <a:avLst/>
+          </a:prstGeom>
+          <a:noFill/>
+          <a:ln/>
+        </p:spPr>
+        <p:txBody>
+          <a:bodyPr wrap="square" lIns="0" tIns="0" rIns="0" bIns="0" rtlCol="0" anchor="ctr"/>
+          <a:lstStyle/>
+          <a:p>
+            <a:pPr indent="0" marL="0">
+              <a:buNone/>
+            </a:pPr>
+            <a:r>
+              <a:rPr lang="en-US" sz="1500" dirty="0">
+                <a:solidFill>
+                  <a:schemeClr val="tx1"/>
+                </a:solidFill>
+              </a:rPr>
+              <a:t>Student A reads: 1 seat left</a:t>
+            </a:r>
+            <a:endParaRPr lang="en-US" sz="1500" dirty="0"/>
+          </a:p>
+        </p:txBody>
+      </p:sp>
+      <p:sp>
+        <p:nvSpPr>
+          <p:cNvPr id="8" name="step_94"/>
           <p:cNvSpPr/>
           <p:nvPr/>
         </p:nvSpPr>
         <p:spPr>
           <a:xfrm>
-            <a:off x="6949440" y="2240280"/>
-            <a:ext cx="1737360" cy="914400"/>
-          </a:xfrm>
-          <a:prstGeom prst="roundRect">
-            <a:avLst>
-              <a:gd name="adj" fmla="val 8000"/>
-            </a:avLst>
+            <a:off x="685800" y="2450592"/>
+            <a:ext cx="411480" cy="411480"/>
+          </a:xfrm>
+          <a:prstGeom prst="ellipse">
+            <a:avLst/>
           </a:prstGeom>
           <a:solidFill>
-            <a:srgbClr val="1F4E5F"/>
+            <a:srgbClr val="5B6B73"/>
           </a:solidFill>
           <a:ln/>
-          <a:effectLst>
-            <a:outerShdw sx="100000" sy="100000" kx="0" ky="0" algn="bl" rotWithShape="0" blurRad="76200" dist="25400" dir="5400000">
-              <a:srgbClr val="000000">
-                <a:alpha val="12000"/>
-              </a:srgbClr>
-            </a:outerShdw>
-          </a:effectLst>
-        </p:spPr>
-      </p:sp>
-      <p:sp>
-        <p:nvSpPr>
-          <p:cNvPr id="6" name="text_88"/>
-          <p:cNvSpPr txBox="1"/>
-          <p:nvPr/>
-        </p:nvSpPr>
-        <p:spPr>
-          <a:xfrm>
-            <a:off x="6949440" y="2240280"/>
-            <a:ext cx="1737360" cy="914400"/>
+        </p:spPr>
+      </p:sp>
+      <p:sp>
+        <p:nvSpPr>
+          <p:cNvPr id="9" name="text_95"/>
+          <p:cNvSpPr txBox="1"/>
+          <p:nvPr/>
+        </p:nvSpPr>
+        <p:spPr>
+          <a:xfrm>
+            <a:off x="685800" y="2450592"/>
+            <a:ext cx="411480" cy="411480"/>
           </a:xfrm>
           <a:prstGeom prst="rect">
             <a:avLst/>
@@ -9171,63 +6684,92 @@
               <a:buNone/>
             </a:pPr>
             <a:r>
-              <a:rPr lang="en-US" sz="1600" b="1" dirty="0">
+              <a:rPr lang="en-US" sz="1400" b="1" dirty="0">
                 <a:solidFill>
                   <a:schemeClr val="bg1"/>
                 </a:solidFill>
               </a:rPr>
-              <a:t>MySQL 8</a:t>
-            </a:r>
-            <a:endParaRPr lang="en-US" sz="1600" dirty="0"/>
-          </a:p>
-        </p:txBody>
-      </p:sp>
-      <p:sp>
-        <p:nvSpPr>
-          <p:cNvPr id="7" name="api-frame_89"/>
+              <a:t>2</a:t>
+            </a:r>
+            <a:endParaRPr lang="en-US" sz="1400" dirty="0"/>
+          </a:p>
+        </p:txBody>
+      </p:sp>
+      <p:sp>
+        <p:nvSpPr>
+          <p:cNvPr id="10" name="text_96"/>
+          <p:cNvSpPr txBox="1"/>
+          <p:nvPr/>
+        </p:nvSpPr>
+        <p:spPr>
+          <a:xfrm>
+            <a:off x="1280160" y="2450592"/>
+            <a:ext cx="3017520" cy="411480"/>
+          </a:xfrm>
+          <a:prstGeom prst="rect">
+            <a:avLst/>
+          </a:prstGeom>
+          <a:noFill/>
+          <a:ln/>
+        </p:spPr>
+        <p:txBody>
+          <a:bodyPr wrap="square" lIns="0" tIns="0" rIns="0" bIns="0" rtlCol="0" anchor="ctr"/>
+          <a:lstStyle/>
+          <a:p>
+            <a:pPr indent="0" marL="0">
+              <a:buNone/>
+            </a:pPr>
+            <a:r>
+              <a:rPr lang="en-US" sz="1500" dirty="0">
+                <a:solidFill>
+                  <a:schemeClr val="tx1"/>
+                </a:solidFill>
+              </a:rPr>
+              <a:t>Student B reads: 1 seat left</a:t>
+            </a:r>
+            <a:endParaRPr lang="en-US" sz="1500" dirty="0"/>
+          </a:p>
+        </p:txBody>
+      </p:sp>
+      <p:sp>
+        <p:nvSpPr>
+          <p:cNvPr id="11" name="step_97"/>
           <p:cNvSpPr/>
           <p:nvPr/>
         </p:nvSpPr>
         <p:spPr>
           <a:xfrm>
-            <a:off x="2926080" y="1143000"/>
-            <a:ext cx="3291840" cy="3429000"/>
-          </a:xfrm>
-          <a:prstGeom prst="roundRect">
-            <a:avLst>
-              <a:gd name="adj" fmla="val 2778"/>
-            </a:avLst>
+            <a:off x="685800" y="3072384"/>
+            <a:ext cx="411480" cy="411480"/>
+          </a:xfrm>
+          <a:prstGeom prst="ellipse">
+            <a:avLst/>
           </a:prstGeom>
           <a:solidFill>
-            <a:srgbClr val="F3F6F7"/>
+            <a:srgbClr val="5B6B73"/>
           </a:solidFill>
-          <a:ln w="12700">
-            <a:solidFill>
-              <a:srgbClr val="C9D6DA"/>
-            </a:solidFill>
-            <a:prstDash val="dash"/>
-          </a:ln>
-        </p:spPr>
-      </p:sp>
-      <p:sp>
-        <p:nvSpPr>
-          <p:cNvPr id="8" name="text_90"/>
-          <p:cNvSpPr txBox="1"/>
-          <p:nvPr/>
-        </p:nvSpPr>
-        <p:spPr>
-          <a:xfrm>
-            <a:off x="2926080" y="1207008"/>
-            <a:ext cx="3291840" cy="320040"/>
-          </a:xfrm>
-          <a:prstGeom prst="rect">
-            <a:avLst/>
-          </a:prstGeom>
-          <a:noFill/>
-          <a:ln/>
-        </p:spPr>
-        <p:txBody>
-          <a:bodyPr wrap="square" lIns="0" tIns="0" rIns="0" bIns="0" rtlCol="0" anchor="t"/>
+          <a:ln/>
+        </p:spPr>
+      </p:sp>
+      <p:sp>
+        <p:nvSpPr>
+          <p:cNvPr id="12" name="text_98"/>
+          <p:cNvSpPr txBox="1"/>
+          <p:nvPr/>
+        </p:nvSpPr>
+        <p:spPr>
+          <a:xfrm>
+            <a:off x="685800" y="3072384"/>
+            <a:ext cx="411480" cy="411480"/>
+          </a:xfrm>
+          <a:prstGeom prst="rect">
+            <a:avLst/>
+          </a:prstGeom>
+          <a:noFill/>
+          <a:ln/>
+        </p:spPr>
+        <p:txBody>
+          <a:bodyPr wrap="square" lIns="0" tIns="0" rIns="0" bIns="0" rtlCol="0" anchor="ctr"/>
           <a:lstStyle/>
           <a:p>
             <a:pPr algn="ctr" indent="0" marL="0">
@@ -9236,10 +6778,10 @@
             <a:r>
               <a:rPr lang="en-US" sz="1400" b="1" dirty="0">
                 <a:solidFill>
-                  <a:schemeClr val="tx2"/>
-                </a:solidFill>
-              </a:rPr>
-              <a:t>Express API</a:t>
+                  <a:schemeClr val="bg1"/>
+                </a:solidFill>
+              </a:rPr>
+              <a:t>3</a:t>
             </a:r>
             <a:endParaRPr lang="en-US" sz="1400" dirty="0"/>
           </a:p>
@@ -9247,263 +6789,70 @@
       </p:sp>
       <p:sp>
         <p:nvSpPr>
-          <p:cNvPr id="9" name="layer_91"/>
+          <p:cNvPr id="13" name="text_99"/>
+          <p:cNvSpPr txBox="1"/>
+          <p:nvPr/>
+        </p:nvSpPr>
+        <p:spPr>
+          <a:xfrm>
+            <a:off x="1280160" y="3072384"/>
+            <a:ext cx="3017520" cy="411480"/>
+          </a:xfrm>
+          <a:prstGeom prst="rect">
+            <a:avLst/>
+          </a:prstGeom>
+          <a:noFill/>
+          <a:ln/>
+        </p:spPr>
+        <p:txBody>
+          <a:bodyPr wrap="square" lIns="0" tIns="0" rIns="0" bIns="0" rtlCol="0" anchor="ctr"/>
+          <a:lstStyle/>
+          <a:p>
+            <a:pPr indent="0" marL="0">
+              <a:buNone/>
+            </a:pPr>
+            <a:r>
+              <a:rPr lang="en-US" sz="1500" dirty="0">
+                <a:solidFill>
+                  <a:schemeClr val="tx1"/>
+                </a:solidFill>
+              </a:rPr>
+              <a:t>Both are registered</a:t>
+            </a:r>
+            <a:endParaRPr lang="en-US" sz="1500" dirty="0"/>
+          </a:p>
+        </p:txBody>
+      </p:sp>
+      <p:sp>
+        <p:nvSpPr>
+          <p:cNvPr id="14" name="step_100"/>
           <p:cNvSpPr/>
           <p:nvPr/>
         </p:nvSpPr>
         <p:spPr>
           <a:xfrm>
-            <a:off x="3108960" y="1600200"/>
-            <a:ext cx="2926080" cy="484632"/>
-          </a:xfrm>
-          <a:prstGeom prst="roundRect">
-            <a:avLst>
-              <a:gd name="adj" fmla="val 11321"/>
-            </a:avLst>
-          </a:prstGeom>
-          <a:solidFill>
-            <a:srgbClr val="FFFFFF"/>
-          </a:solidFill>
-          <a:ln w="12700">
-            <a:solidFill>
-              <a:srgbClr val="C9D6DA"/>
-            </a:solidFill>
-            <a:prstDash val="solid"/>
-          </a:ln>
-        </p:spPr>
-      </p:sp>
-      <p:sp>
-        <p:nvSpPr>
-          <p:cNvPr id="10" name="text_92"/>
-          <p:cNvSpPr txBox="1"/>
-          <p:nvPr/>
-        </p:nvSpPr>
-        <p:spPr>
-          <a:xfrm>
-            <a:off x="3246120" y="1600200"/>
-            <a:ext cx="2743200" cy="484632"/>
-          </a:xfrm>
-          <a:prstGeom prst="rect">
-            <a:avLst/>
-          </a:prstGeom>
-          <a:noFill/>
-          <a:ln/>
-        </p:spPr>
-        <p:txBody>
-          <a:bodyPr wrap="square" lIns="0" tIns="0" rIns="0" bIns="0" rtlCol="0" anchor="ctr"/>
-          <a:lstStyle/>
-          <a:p>
-            <a:pPr indent="0" marL="0">
-              <a:buNone/>
-            </a:pPr>
-            <a:r>
-              <a:rPr lang="en-US" sz="1400" b="1" dirty="0">
-                <a:solidFill>
-                  <a:schemeClr val="tx2"/>
-                </a:solidFill>
-              </a:rPr>
-              <a:t>Routes  </a:t>
-            </a:r>
-            <a:pPr indent="0" marL="0">
-              <a:buNone/>
-            </a:pPr>
-            <a:r>
-              <a:rPr lang="en-US" sz="1200" dirty="0">
-                <a:solidFill>
-                  <a:schemeClr val="tx2"/>
-                </a:solidFill>
-              </a:rPr>
-              <a:t>map URLs to controllers</a:t>
-            </a:r>
-            <a:endParaRPr lang="en-US" sz="1400" dirty="0"/>
-          </a:p>
-        </p:txBody>
-      </p:sp>
-      <p:sp>
-        <p:nvSpPr>
-          <p:cNvPr id="11" name="layer_93"/>
-          <p:cNvSpPr/>
-          <p:nvPr/>
-        </p:nvSpPr>
-        <p:spPr>
-          <a:xfrm>
-            <a:off x="3108960" y="2176272"/>
-            <a:ext cx="2926080" cy="484632"/>
-          </a:xfrm>
-          <a:prstGeom prst="roundRect">
-            <a:avLst>
-              <a:gd name="adj" fmla="val 11321"/>
-            </a:avLst>
-          </a:prstGeom>
-          <a:solidFill>
-            <a:srgbClr val="FFFFFF"/>
-          </a:solidFill>
-          <a:ln w="12700">
-            <a:solidFill>
-              <a:srgbClr val="C9D6DA"/>
-            </a:solidFill>
-            <a:prstDash val="solid"/>
-          </a:ln>
-        </p:spPr>
-      </p:sp>
-      <p:sp>
-        <p:nvSpPr>
-          <p:cNvPr id="12" name="text_94"/>
-          <p:cNvSpPr txBox="1"/>
-          <p:nvPr/>
-        </p:nvSpPr>
-        <p:spPr>
-          <a:xfrm>
-            <a:off x="3246120" y="2176272"/>
-            <a:ext cx="2743200" cy="484632"/>
-          </a:xfrm>
-          <a:prstGeom prst="rect">
-            <a:avLst/>
-          </a:prstGeom>
-          <a:noFill/>
-          <a:ln/>
-        </p:spPr>
-        <p:txBody>
-          <a:bodyPr wrap="square" lIns="0" tIns="0" rIns="0" bIns="0" rtlCol="0" anchor="ctr"/>
-          <a:lstStyle/>
-          <a:p>
-            <a:pPr indent="0" marL="0">
-              <a:buNone/>
-            </a:pPr>
-            <a:r>
-              <a:rPr lang="en-US" sz="1400" b="1" dirty="0">
-                <a:solidFill>
-                  <a:schemeClr val="tx2"/>
-                </a:solidFill>
-              </a:rPr>
-              <a:t>Middleware  </a:t>
-            </a:r>
-            <a:pPr indent="0" marL="0">
-              <a:buNone/>
-            </a:pPr>
-            <a:r>
-              <a:rPr lang="en-US" sz="1200" dirty="0">
-                <a:solidFill>
-                  <a:schemeClr val="tx2"/>
-                </a:solidFill>
-              </a:rPr>
-              <a:t>JWT · roles · validation</a:t>
-            </a:r>
-            <a:endParaRPr lang="en-US" sz="1400" dirty="0"/>
-          </a:p>
-        </p:txBody>
-      </p:sp>
-      <p:sp>
-        <p:nvSpPr>
-          <p:cNvPr id="13" name="layer_95"/>
-          <p:cNvSpPr/>
-          <p:nvPr/>
-        </p:nvSpPr>
-        <p:spPr>
-          <a:xfrm>
-            <a:off x="3108960" y="2752344"/>
-            <a:ext cx="2926080" cy="484632"/>
-          </a:xfrm>
-          <a:prstGeom prst="roundRect">
-            <a:avLst>
-              <a:gd name="adj" fmla="val 11321"/>
-            </a:avLst>
-          </a:prstGeom>
-          <a:solidFill>
-            <a:srgbClr val="FFFFFF"/>
-          </a:solidFill>
-          <a:ln w="12700">
-            <a:solidFill>
-              <a:srgbClr val="C9D6DA"/>
-            </a:solidFill>
-            <a:prstDash val="solid"/>
-          </a:ln>
-        </p:spPr>
-      </p:sp>
-      <p:sp>
-        <p:nvSpPr>
-          <p:cNvPr id="14" name="text_96"/>
-          <p:cNvSpPr txBox="1"/>
-          <p:nvPr/>
-        </p:nvSpPr>
-        <p:spPr>
-          <a:xfrm>
-            <a:off x="3246120" y="2752344"/>
-            <a:ext cx="2743200" cy="484632"/>
-          </a:xfrm>
-          <a:prstGeom prst="rect">
-            <a:avLst/>
-          </a:prstGeom>
-          <a:noFill/>
-          <a:ln/>
-        </p:spPr>
-        <p:txBody>
-          <a:bodyPr wrap="square" lIns="0" tIns="0" rIns="0" bIns="0" rtlCol="0" anchor="ctr"/>
-          <a:lstStyle/>
-          <a:p>
-            <a:pPr indent="0" marL="0">
-              <a:buNone/>
-            </a:pPr>
-            <a:r>
-              <a:rPr lang="en-US" sz="1400" b="1" dirty="0">
-                <a:solidFill>
-                  <a:schemeClr val="tx2"/>
-                </a:solidFill>
-              </a:rPr>
-              <a:t>Controllers  </a:t>
-            </a:r>
-            <a:pPr indent="0" marL="0">
-              <a:buNone/>
-            </a:pPr>
-            <a:r>
-              <a:rPr lang="en-US" sz="1200" dirty="0">
-                <a:solidFill>
-                  <a:schemeClr val="tx2"/>
-                </a:solidFill>
-              </a:rPr>
-              <a:t>read request, send response</a:t>
-            </a:r>
-            <a:endParaRPr lang="en-US" sz="1400" dirty="0"/>
-          </a:p>
-        </p:txBody>
-      </p:sp>
-      <p:sp>
-        <p:nvSpPr>
-          <p:cNvPr id="15" name="layer_97"/>
-          <p:cNvSpPr/>
-          <p:nvPr/>
-        </p:nvSpPr>
-        <p:spPr>
-          <a:xfrm>
-            <a:off x="3108960" y="3328416"/>
-            <a:ext cx="2926080" cy="484632"/>
-          </a:xfrm>
-          <a:prstGeom prst="roundRect">
-            <a:avLst>
-              <a:gd name="adj" fmla="val 11321"/>
-            </a:avLst>
+            <a:off x="685800" y="3694176"/>
+            <a:ext cx="411480" cy="411480"/>
+          </a:xfrm>
+          <a:prstGeom prst="ellipse">
+            <a:avLst/>
           </a:prstGeom>
           <a:solidFill>
             <a:srgbClr val="E07A2F"/>
           </a:solidFill>
-          <a:ln w="12700">
-            <a:solidFill>
-              <a:srgbClr val="E07A2F"/>
-            </a:solidFill>
-            <a:prstDash val="solid"/>
-          </a:ln>
-        </p:spPr>
-      </p:sp>
-      <p:sp>
-        <p:nvSpPr>
-          <p:cNvPr id="16" name="text_98"/>
-          <p:cNvSpPr txBox="1"/>
-          <p:nvPr/>
-        </p:nvSpPr>
-        <p:spPr>
-          <a:xfrm>
-            <a:off x="3246120" y="3328416"/>
-            <a:ext cx="2743200" cy="484632"/>
+          <a:ln/>
+        </p:spPr>
+      </p:sp>
+      <p:sp>
+        <p:nvSpPr>
+          <p:cNvPr id="15" name="text_101"/>
+          <p:cNvSpPr txBox="1"/>
+          <p:nvPr/>
+        </p:nvSpPr>
+        <p:spPr>
+          <a:xfrm>
+            <a:off x="685800" y="3694176"/>
+            <a:ext cx="411480" cy="411480"/>
           </a:xfrm>
           <a:prstGeom prst="rect">
             <a:avLst/>
@@ -9515,164 +6864,225 @@
           <a:bodyPr wrap="square" lIns="0" tIns="0" rIns="0" bIns="0" rtlCol="0" anchor="ctr"/>
           <a:lstStyle/>
           <a:p>
+            <a:pPr algn="ctr" indent="0" marL="0">
+              <a:buNone/>
+            </a:pPr>
+            <a:r>
+              <a:rPr lang="en-US" sz="1400" b="1" dirty="0">
+                <a:solidFill>
+                  <a:schemeClr val="bg1"/>
+                </a:solidFill>
+              </a:rPr>
+              <a:t>4</a:t>
+            </a:r>
+            <a:endParaRPr lang="en-US" sz="1400" dirty="0"/>
+          </a:p>
+        </p:txBody>
+      </p:sp>
+      <p:sp>
+        <p:nvSpPr>
+          <p:cNvPr id="16" name="text_102"/>
+          <p:cNvSpPr txBox="1"/>
+          <p:nvPr/>
+        </p:nvSpPr>
+        <p:spPr>
+          <a:xfrm>
+            <a:off x="1280160" y="3694176"/>
+            <a:ext cx="3017520" cy="411480"/>
+          </a:xfrm>
+          <a:prstGeom prst="rect">
+            <a:avLst/>
+          </a:prstGeom>
+          <a:noFill/>
+          <a:ln/>
+        </p:spPr>
+        <p:txBody>
+          <a:bodyPr wrap="square" lIns="0" tIns="0" rIns="0" bIns="0" rtlCol="0" anchor="ctr"/>
+          <a:lstStyle/>
+          <a:p>
             <a:pPr indent="0" marL="0">
               <a:buNone/>
             </a:pPr>
             <a:r>
-              <a:rPr lang="en-US" sz="1400" b="1" dirty="0">
-                <a:solidFill>
-                  <a:schemeClr val="bg1"/>
-                </a:solidFill>
-              </a:rPr>
-              <a:t>Services  </a:t>
-            </a:r>
-            <a:pPr indent="0" marL="0">
-              <a:buNone/>
-            </a:pPr>
-            <a:r>
-              <a:rPr lang="en-US" sz="1200" dirty="0">
-                <a:solidFill>
-                  <a:schemeClr val="bg1"/>
-                </a:solidFill>
-              </a:rPr>
-              <a:t>business rules BR01–BR09</a:t>
-            </a:r>
-            <a:endParaRPr lang="en-US" sz="1400" dirty="0"/>
-          </a:p>
-        </p:txBody>
-      </p:sp>
-      <p:sp>
-        <p:nvSpPr>
-          <p:cNvPr id="17" name="layer_99"/>
+              <a:rPr lang="en-US" sz="1500" b="1" dirty="0">
+                <a:solidFill>
+                  <a:schemeClr val="tx1"/>
+                </a:solidFill>
+              </a:rPr>
+              <a:t>Class is over-full: 41 / 40</a:t>
+            </a:r>
+            <a:endParaRPr lang="en-US" sz="1500" dirty="0"/>
+          </a:p>
+        </p:txBody>
+      </p:sp>
+      <p:sp>
+        <p:nvSpPr>
+          <p:cNvPr id="17" name="card_103"/>
           <p:cNvSpPr/>
           <p:nvPr/>
         </p:nvSpPr>
         <p:spPr>
           <a:xfrm>
-            <a:off x="3108960" y="3904488"/>
-            <a:ext cx="2926080" cy="484632"/>
+            <a:off x="4663440" y="1188720"/>
+            <a:ext cx="4023360" cy="3291840"/>
           </a:xfrm>
           <a:prstGeom prst="roundRect">
             <a:avLst>
-              <a:gd name="adj" fmla="val 11321"/>
+              <a:gd name="adj" fmla="val 2222"/>
             </a:avLst>
           </a:prstGeom>
           <a:solidFill>
-            <a:srgbClr val="FFFFFF"/>
+            <a:schemeClr val="accent5"/>
           </a:solidFill>
-          <a:ln w="12700">
-            <a:solidFill>
-              <a:srgbClr val="C9D6DA"/>
-            </a:solidFill>
-            <a:prstDash val="solid"/>
-          </a:ln>
-        </p:spPr>
-      </p:sp>
-      <p:sp>
-        <p:nvSpPr>
-          <p:cNvPr id="18" name="text_100"/>
-          <p:cNvSpPr txBox="1"/>
-          <p:nvPr/>
-        </p:nvSpPr>
-        <p:spPr>
-          <a:xfrm>
-            <a:off x="3246120" y="3904488"/>
-            <a:ext cx="2743200" cy="484632"/>
-          </a:xfrm>
-          <a:prstGeom prst="rect">
-            <a:avLst/>
-          </a:prstGeom>
-          <a:noFill/>
-          <a:ln/>
-        </p:spPr>
-        <p:txBody>
-          <a:bodyPr wrap="square" lIns="0" tIns="0" rIns="0" bIns="0" rtlCol="0" anchor="ctr"/>
+          <a:ln/>
+        </p:spPr>
+      </p:sp>
+      <p:sp>
+        <p:nvSpPr>
+          <p:cNvPr id="18" name="text_104"/>
+          <p:cNvSpPr txBox="1"/>
+          <p:nvPr/>
+        </p:nvSpPr>
+        <p:spPr>
+          <a:xfrm>
+            <a:off x="4892040" y="1325880"/>
+            <a:ext cx="3566160" cy="365760"/>
+          </a:xfrm>
+          <a:prstGeom prst="rect">
+            <a:avLst/>
+          </a:prstGeom>
+          <a:noFill/>
+          <a:ln/>
+        </p:spPr>
+        <p:txBody>
+          <a:bodyPr wrap="square" lIns="0" tIns="0" rIns="0" bIns="0" rtlCol="0" anchor="t"/>
           <a:lstStyle/>
           <a:p>
             <a:pPr indent="0" marL="0">
               <a:buNone/>
             </a:pPr>
             <a:r>
+              <a:rPr lang="en-US" sz="1800" b="1" dirty="0">
+                <a:solidFill>
+                  <a:schemeClr val="tx2"/>
+                </a:solidFill>
+              </a:rPr>
+              <a:t>My solution</a:t>
+            </a:r>
+            <a:endParaRPr lang="en-US" sz="1800" dirty="0"/>
+          </a:p>
+        </p:txBody>
+      </p:sp>
+      <p:sp>
+        <p:nvSpPr>
+          <p:cNvPr id="19" name="text_105"/>
+          <p:cNvSpPr txBox="1"/>
+          <p:nvPr/>
+        </p:nvSpPr>
+        <p:spPr>
+          <a:xfrm>
+            <a:off x="4892040" y="1828800"/>
+            <a:ext cx="3611880" cy="777240"/>
+          </a:xfrm>
+          <a:prstGeom prst="rect">
+            <a:avLst/>
+          </a:prstGeom>
+          <a:noFill/>
+          <a:ln/>
+        </p:spPr>
+        <p:txBody>
+          <a:bodyPr wrap="square" lIns="0" tIns="0" rIns="0" bIns="0" rtlCol="0" anchor="t"/>
+          <a:lstStyle/>
+          <a:p>
+            <a:pPr indent="0" marL="0">
+              <a:buNone/>
+            </a:pPr>
+            <a:r>
               <a:rPr lang="en-US" sz="1400" b="1" dirty="0">
                 <a:solidFill>
                   <a:schemeClr val="tx2"/>
                 </a:solidFill>
               </a:rPr>
-              <a:t>Models  </a:t>
-            </a:r>
+              <a:t>All or nothing</a:t>
+            </a:r>
+            <a:endParaRPr lang="en-US" sz="1400" dirty="0"/>
+          </a:p>
+          <a:p>
             <a:pPr indent="0" marL="0">
               <a:buNone/>
             </a:pPr>
             <a:r>
-              <a:rPr lang="en-US" sz="1200" dirty="0">
+              <a:rPr lang="en-US" sz="1400" dirty="0">
+                <a:solidFill>
+                  <a:schemeClr val="tx1"/>
+                </a:solidFill>
+              </a:rPr>
+              <a:t>every check and the sign-up succeed together, or nothing changes</a:t>
+            </a:r>
+            <a:endParaRPr lang="en-US" sz="1400" dirty="0"/>
+          </a:p>
+        </p:txBody>
+      </p:sp>
+      <p:sp>
+        <p:nvSpPr>
+          <p:cNvPr id="20" name="text_106"/>
+          <p:cNvSpPr txBox="1"/>
+          <p:nvPr/>
+        </p:nvSpPr>
+        <p:spPr>
+          <a:xfrm>
+            <a:off x="4892040" y="2697480"/>
+            <a:ext cx="3611880" cy="777240"/>
+          </a:xfrm>
+          <a:prstGeom prst="rect">
+            <a:avLst/>
+          </a:prstGeom>
+          <a:noFill/>
+          <a:ln/>
+        </p:spPr>
+        <p:txBody>
+          <a:bodyPr wrap="square" lIns="0" tIns="0" rIns="0" bIns="0" rtlCol="0" anchor="t"/>
+          <a:lstStyle/>
+          <a:p>
+            <a:pPr indent="0" marL="0">
+              <a:buNone/>
+            </a:pPr>
+            <a:r>
+              <a:rPr lang="en-US" sz="1400" b="1" dirty="0">
                 <a:solidFill>
                   <a:schemeClr val="tx2"/>
                 </a:solidFill>
               </a:rPr>
-              <a:t>Sequelize ↔ MySQL tables</a:t>
+              <a:t>A short lock</a:t>
             </a:r>
             <a:endParaRPr lang="en-US" sz="1400" dirty="0"/>
           </a:p>
-        </p:txBody>
-      </p:sp>
-      <p:sp>
-        <p:nvSpPr>
-          <p:cNvPr id="19" name="arrow_101"/>
-          <p:cNvSpPr/>
-          <p:nvPr/>
-        </p:nvSpPr>
-        <p:spPr>
-          <a:xfrm>
-            <a:off x="2240280" y="2697480"/>
-            <a:ext cx="640080" cy="0"/>
-          </a:xfrm>
-          <a:prstGeom prst="line">
-            <a:avLst/>
-          </a:prstGeom>
-          <a:noFill/>
-          <a:ln w="25400">
-            <a:solidFill>
-              <a:srgbClr val="5B6B73"/>
-            </a:solidFill>
-            <a:prstDash val="solid"/>
-            <a:tailEnd type="triangle"/>
-          </a:ln>
-        </p:spPr>
-      </p:sp>
-      <p:sp>
-        <p:nvSpPr>
-          <p:cNvPr id="20" name="arrow_102"/>
-          <p:cNvSpPr/>
-          <p:nvPr/>
-        </p:nvSpPr>
-        <p:spPr>
-          <a:xfrm>
-            <a:off x="6263640" y="2697480"/>
-            <a:ext cx="640080" cy="0"/>
-          </a:xfrm>
-          <a:prstGeom prst="line">
-            <a:avLst/>
-          </a:prstGeom>
-          <a:noFill/>
-          <a:ln w="25400">
-            <a:solidFill>
-              <a:srgbClr val="5B6B73"/>
-            </a:solidFill>
-            <a:prstDash val="solid"/>
-            <a:tailEnd type="triangle"/>
-          </a:ln>
-        </p:spPr>
-      </p:sp>
-      <p:sp>
-        <p:nvSpPr>
-          <p:cNvPr id="21" name="text_103"/>
-          <p:cNvSpPr txBox="1"/>
-          <p:nvPr/>
-        </p:nvSpPr>
-        <p:spPr>
-          <a:xfrm>
-            <a:off x="457200" y="3291840"/>
-            <a:ext cx="1737360" cy="274320"/>
+          <a:p>
+            <a:pPr indent="0" marL="0">
+              <a:buNone/>
+            </a:pPr>
+            <a:r>
+              <a:rPr lang="en-US" sz="1400" dirty="0">
+                <a:solidFill>
+                  <a:schemeClr val="tx1"/>
+                </a:solidFill>
+              </a:rPr>
+              <a:t>the class is locked for a moment, so Student B waits for Student A</a:t>
+            </a:r>
+            <a:endParaRPr lang="en-US" sz="1400" dirty="0"/>
+          </a:p>
+        </p:txBody>
+      </p:sp>
+      <p:sp>
+        <p:nvSpPr>
+          <p:cNvPr id="21" name="text_107"/>
+          <p:cNvSpPr txBox="1"/>
+          <p:nvPr/>
+        </p:nvSpPr>
+        <p:spPr>
+          <a:xfrm>
+            <a:off x="4892040" y="3566160"/>
+            <a:ext cx="3611880" cy="777240"/>
           </a:xfrm>
           <a:prstGeom prst="rect">
             <a:avLst/>
@@ -9684,54 +7094,32 @@
           <a:bodyPr wrap="square" lIns="0" tIns="0" rIns="0" bIns="0" rtlCol="0" anchor="t"/>
           <a:lstStyle/>
           <a:p>
-            <a:pPr algn="ctr" indent="0" marL="0">
-              <a:buNone/>
-            </a:pPr>
-            <a:r>
-              <a:rPr lang="en-US" sz="1200" dirty="0">
-                <a:solidFill>
-                  <a:schemeClr val="accent4"/>
-                </a:solidFill>
-              </a:rPr>
-              <a:t>JSON + JWT</a:t>
-            </a:r>
-            <a:endParaRPr lang="en-US" sz="1200" dirty="0"/>
-          </a:p>
-        </p:txBody>
-      </p:sp>
-      <p:sp>
-        <p:nvSpPr>
-          <p:cNvPr id="22" name="text_104"/>
-          <p:cNvSpPr txBox="1"/>
-          <p:nvPr/>
-        </p:nvSpPr>
-        <p:spPr>
-          <a:xfrm>
-            <a:off x="6949440" y="3291840"/>
-            <a:ext cx="1737360" cy="274320"/>
-          </a:xfrm>
-          <a:prstGeom prst="rect">
-            <a:avLst/>
-          </a:prstGeom>
-          <a:noFill/>
-          <a:ln/>
-        </p:spPr>
-        <p:txBody>
-          <a:bodyPr wrap="square" lIns="0" tIns="0" rIns="0" bIns="0" rtlCol="0" anchor="t"/>
-          <a:lstStyle/>
-          <a:p>
-            <a:pPr algn="ctr" indent="0" marL="0">
-              <a:buNone/>
-            </a:pPr>
-            <a:r>
-              <a:rPr lang="en-US" sz="1200" dirty="0">
-                <a:solidFill>
-                  <a:schemeClr val="accent4"/>
-                </a:solidFill>
-              </a:rPr>
-              <a:t>SQL</a:t>
-            </a:r>
-            <a:endParaRPr lang="en-US" sz="1200" dirty="0"/>
+            <a:pPr indent="0" marL="0">
+              <a:buNone/>
+            </a:pPr>
+            <a:r>
+              <a:rPr lang="en-US" sz="1400" b="1" dirty="0">
+                <a:solidFill>
+                  <a:schemeClr val="tx2"/>
+                </a:solidFill>
+              </a:rPr>
+              <a:t>A safety rule</a:t>
+            </a:r>
+            <a:endParaRPr lang="en-US" sz="1400" dirty="0"/>
+          </a:p>
+          <a:p>
+            <a:pPr indent="0" marL="0">
+              <a:buNone/>
+            </a:pPr>
+            <a:r>
+              <a:rPr lang="en-US" sz="1400" dirty="0">
+                <a:solidFill>
+                  <a:schemeClr val="tx1"/>
+                </a:solidFill>
+              </a:rPr>
+              <a:t>the database itself refuses more students than seats</a:t>
+            </a:r>
+            <a:endParaRPr lang="en-US" sz="1400" dirty="0"/>
           </a:p>
         </p:txBody>
       </p:sp>
@@ -9840,7 +7228,7 @@
                 <a:ea typeface="Cambria" pitchFamily="34" charset="-122"/>
                 <a:cs typeface="Cambria" pitchFamily="34" charset="-120"/>
               </a:rPr>
-              <a:t>Database design: 8 tables</a:t>
+              <a:t>Challenge 2: timetable clashes</a:t>
             </a:r>
             <a:endParaRPr lang="en-US" sz="3000" dirty="0"/>
           </a:p>
@@ -9848,19 +7236,75 @@
       </p:sp>
       <p:sp>
         <p:nvSpPr>
-          <p:cNvPr id="3" name="entity_105"/>
+          <p:cNvPr id="3" name="text_108"/>
+          <p:cNvSpPr txBox="1"/>
+          <p:nvPr/>
+        </p:nvSpPr>
+        <p:spPr>
+          <a:xfrm>
+            <a:off x="457200" y="1097280"/>
+            <a:ext cx="8229600" cy="365760"/>
+          </a:xfrm>
+          <a:prstGeom prst="rect">
+            <a:avLst/>
+          </a:prstGeom>
+          <a:noFill/>
+          <a:ln/>
+        </p:spPr>
+        <p:txBody>
+          <a:bodyPr wrap="square" lIns="0" tIns="0" rIns="0" bIns="0" rtlCol="0" anchor="t"/>
+          <a:lstStyle/>
+          <a:p>
+            <a:pPr indent="0" marL="0">
+              <a:buNone/>
+            </a:pPr>
+            <a:r>
+              <a:rPr lang="en-US" sz="1600" dirty="0">
+                <a:solidFill>
+                  <a:schemeClr val="accent4"/>
+                </a:solidFill>
+              </a:rPr>
+              <a:t>Two classes clash only if all three conditions are true</a:t>
+            </a:r>
+            <a:endParaRPr lang="en-US" sz="1600" dirty="0"/>
+          </a:p>
+        </p:txBody>
+      </p:sp>
+      <p:sp>
+        <p:nvSpPr>
+          <p:cNvPr id="4" name="card_109"/>
           <p:cNvSpPr/>
           <p:nvPr/>
         </p:nvSpPr>
         <p:spPr>
           <a:xfrm>
-            <a:off x="457200" y="1280160"/>
-            <a:ext cx="1325880" cy="502920"/>
+            <a:off x="457200" y="1645920"/>
+            <a:ext cx="2651760" cy="2011680"/>
           </a:xfrm>
           <a:prstGeom prst="roundRect">
             <a:avLst>
-              <a:gd name="adj" fmla="val 10909"/>
+              <a:gd name="adj" fmla="val 3636"/>
             </a:avLst>
+          </a:prstGeom>
+          <a:solidFill>
+            <a:schemeClr val="bg2"/>
+          </a:solidFill>
+          <a:ln/>
+        </p:spPr>
+      </p:sp>
+      <p:sp>
+        <p:nvSpPr>
+          <p:cNvPr id="5" name="icon-bg_110"/>
+          <p:cNvSpPr/>
+          <p:nvPr/>
+        </p:nvSpPr>
+        <p:spPr>
+          <a:xfrm>
+            <a:off x="685800" y="1874520"/>
+            <a:ext cx="640080" cy="640080"/>
+          </a:xfrm>
+          <a:prstGeom prst="ellipse">
+            <a:avLst/>
           </a:prstGeom>
           <a:solidFill>
             <a:srgbClr val="1F4E5F"/>
@@ -9868,37 +7312,97 @@
           <a:ln/>
         </p:spPr>
       </p:sp>
-      <p:sp>
-        <p:nvSpPr>
-          <p:cNvPr id="4" name="text_106"/>
-          <p:cNvSpPr txBox="1"/>
-          <p:nvPr/>
-        </p:nvSpPr>
-        <p:spPr>
-          <a:xfrm>
-            <a:off x="457200" y="1280160"/>
-            <a:ext cx="1325880" cy="502920"/>
-          </a:xfrm>
-          <a:prstGeom prst="rect">
-            <a:avLst/>
-          </a:prstGeom>
-          <a:noFill/>
-          <a:ln/>
-        </p:spPr>
-        <p:txBody>
-          <a:bodyPr wrap="square" lIns="0" tIns="0" rIns="0" bIns="0" rtlCol="0" anchor="ctr"/>
-          <a:lstStyle/>
-          <a:p>
-            <a:pPr algn="ctr" indent="0" marL="0">
-              <a:buNone/>
-            </a:pPr>
-            <a:r>
-              <a:rPr lang="en-US" sz="1300" b="1" dirty="0">
-                <a:solidFill>
-                  <a:schemeClr val="bg1"/>
-                </a:solidFill>
-              </a:rPr>
-              <a:t>courses</a:t>
+      <p:pic>
+        <p:nvPicPr>
+          <p:cNvPr id="6" name="icon_111" descr="preencoded.png">    </p:cNvPr>
+          <p:cNvPicPr>
+            <a:picLocks noChangeAspect="1"/>
+          </p:cNvPicPr>
+          <p:nvPr/>
+        </p:nvPicPr>
+        <p:blipFill>
+          <a:blip r:embed="rId1"/>
+          <a:stretch>
+            <a:fillRect/>
+          </a:stretch>
+        </p:blipFill>
+        <p:spPr>
+          <a:xfrm>
+            <a:off x="845820" y="2034540"/>
+            <a:ext cx="320040" cy="320040"/>
+          </a:xfrm>
+          <a:prstGeom prst="rect">
+            <a:avLst/>
+          </a:prstGeom>
+        </p:spPr>
+      </p:pic>
+      <p:sp>
+        <p:nvSpPr>
+          <p:cNvPr id="7" name="text_112"/>
+          <p:cNvSpPr txBox="1"/>
+          <p:nvPr/>
+        </p:nvSpPr>
+        <p:spPr>
+          <a:xfrm>
+            <a:off x="685800" y="2651760"/>
+            <a:ext cx="2286000" cy="365760"/>
+          </a:xfrm>
+          <a:prstGeom prst="rect">
+            <a:avLst/>
+          </a:prstGeom>
+          <a:noFill/>
+          <a:ln/>
+        </p:spPr>
+        <p:txBody>
+          <a:bodyPr wrap="square" lIns="0" tIns="0" rIns="0" bIns="0" rtlCol="0" anchor="t"/>
+          <a:lstStyle/>
+          <a:p>
+            <a:pPr indent="0" marL="0">
+              <a:buNone/>
+            </a:pPr>
+            <a:r>
+              <a:rPr lang="en-US" sz="1700" b="1" dirty="0">
+                <a:solidFill>
+                  <a:schemeClr val="tx2"/>
+                </a:solidFill>
+              </a:rPr>
+              <a:t>Same day</a:t>
+            </a:r>
+            <a:endParaRPr lang="en-US" sz="1700" dirty="0"/>
+          </a:p>
+        </p:txBody>
+      </p:sp>
+      <p:sp>
+        <p:nvSpPr>
+          <p:cNvPr id="8" name="text_113"/>
+          <p:cNvSpPr txBox="1"/>
+          <p:nvPr/>
+        </p:nvSpPr>
+        <p:spPr>
+          <a:xfrm>
+            <a:off x="685800" y="3017520"/>
+            <a:ext cx="2286000" cy="594360"/>
+          </a:xfrm>
+          <a:prstGeom prst="rect">
+            <a:avLst/>
+          </a:prstGeom>
+          <a:noFill/>
+          <a:ln/>
+        </p:spPr>
+        <p:txBody>
+          <a:bodyPr wrap="square" lIns="0" tIns="0" rIns="0" bIns="0" rtlCol="0" anchor="t"/>
+          <a:lstStyle/>
+          <a:p>
+            <a:pPr indent="0" marL="0">
+              <a:buNone/>
+            </a:pPr>
+            <a:r>
+              <a:rPr lang="en-US" sz="1300" dirty="0">
+                <a:solidFill>
+                  <a:schemeClr val="tx1"/>
+                </a:solidFill>
+              </a:rPr>
+              <a:t>Both meet on, for example, Monday</a:t>
             </a:r>
             <a:endParaRPr lang="en-US" sz="1300" dirty="0"/>
           </a:p>
@@ -9906,19 +7410,39 @@
       </p:sp>
       <p:sp>
         <p:nvSpPr>
-          <p:cNvPr id="5" name="entity_107"/>
+          <p:cNvPr id="9" name="card_114"/>
           <p:cNvSpPr/>
           <p:nvPr/>
         </p:nvSpPr>
         <p:spPr>
           <a:xfrm>
-            <a:off x="457200" y="3108960"/>
-            <a:ext cx="1325880" cy="502920"/>
+            <a:off x="3246120" y="1645920"/>
+            <a:ext cx="2651760" cy="2011680"/>
           </a:xfrm>
           <a:prstGeom prst="roundRect">
             <a:avLst>
-              <a:gd name="adj" fmla="val 10909"/>
+              <a:gd name="adj" fmla="val 3636"/>
             </a:avLst>
+          </a:prstGeom>
+          <a:solidFill>
+            <a:schemeClr val="bg2"/>
+          </a:solidFill>
+          <a:ln/>
+        </p:spPr>
+      </p:sp>
+      <p:sp>
+        <p:nvSpPr>
+          <p:cNvPr id="10" name="icon-bg_115"/>
+          <p:cNvSpPr/>
+          <p:nvPr/>
+        </p:nvSpPr>
+        <p:spPr>
+          <a:xfrm>
+            <a:off x="3474720" y="1874520"/>
+            <a:ext cx="640080" cy="640080"/>
+          </a:xfrm>
+          <a:prstGeom prst="ellipse">
+            <a:avLst/>
           </a:prstGeom>
           <a:solidFill>
             <a:srgbClr val="1F4E5F"/>
@@ -9926,37 +7450,97 @@
           <a:ln/>
         </p:spPr>
       </p:sp>
-      <p:sp>
-        <p:nvSpPr>
-          <p:cNvPr id="6" name="text_108"/>
-          <p:cNvSpPr txBox="1"/>
-          <p:nvPr/>
-        </p:nvSpPr>
-        <p:spPr>
-          <a:xfrm>
-            <a:off x="457200" y="3108960"/>
-            <a:ext cx="1325880" cy="502920"/>
-          </a:xfrm>
-          <a:prstGeom prst="rect">
-            <a:avLst/>
-          </a:prstGeom>
-          <a:noFill/>
-          <a:ln/>
-        </p:spPr>
-        <p:txBody>
-          <a:bodyPr wrap="square" lIns="0" tIns="0" rIns="0" bIns="0" rtlCol="0" anchor="ctr"/>
-          <a:lstStyle/>
-          <a:p>
-            <a:pPr algn="ctr" indent="0" marL="0">
-              <a:buNone/>
-            </a:pPr>
-            <a:r>
-              <a:rPr lang="en-US" sz="1300" b="1" dirty="0">
-                <a:solidFill>
-                  <a:schemeClr val="bg1"/>
-                </a:solidFill>
-              </a:rPr>
-              <a:t>semesters</a:t>
+      <p:pic>
+        <p:nvPicPr>
+          <p:cNvPr id="11" name="icon_116" descr="preencoded.png">    </p:cNvPr>
+          <p:cNvPicPr>
+            <a:picLocks noChangeAspect="1"/>
+          </p:cNvPicPr>
+          <p:nvPr/>
+        </p:nvPicPr>
+        <p:blipFill>
+          <a:blip r:embed="rId2"/>
+          <a:stretch>
+            <a:fillRect/>
+          </a:stretch>
+        </p:blipFill>
+        <p:spPr>
+          <a:xfrm>
+            <a:off x="3634740" y="2034540"/>
+            <a:ext cx="320040" cy="320040"/>
+          </a:xfrm>
+          <a:prstGeom prst="rect">
+            <a:avLst/>
+          </a:prstGeom>
+        </p:spPr>
+      </p:pic>
+      <p:sp>
+        <p:nvSpPr>
+          <p:cNvPr id="12" name="text_117"/>
+          <p:cNvSpPr txBox="1"/>
+          <p:nvPr/>
+        </p:nvSpPr>
+        <p:spPr>
+          <a:xfrm>
+            <a:off x="3474720" y="2651760"/>
+            <a:ext cx="2286000" cy="365760"/>
+          </a:xfrm>
+          <a:prstGeom prst="rect">
+            <a:avLst/>
+          </a:prstGeom>
+          <a:noFill/>
+          <a:ln/>
+        </p:spPr>
+        <p:txBody>
+          <a:bodyPr wrap="square" lIns="0" tIns="0" rIns="0" bIns="0" rtlCol="0" anchor="t"/>
+          <a:lstStyle/>
+          <a:p>
+            <a:pPr indent="0" marL="0">
+              <a:buNone/>
+            </a:pPr>
+            <a:r>
+              <a:rPr lang="en-US" sz="1700" b="1" dirty="0">
+                <a:solidFill>
+                  <a:schemeClr val="tx2"/>
+                </a:solidFill>
+              </a:rPr>
+              <a:t>Periods overlap</a:t>
+            </a:r>
+            <a:endParaRPr lang="en-US" sz="1700" dirty="0"/>
+          </a:p>
+        </p:txBody>
+      </p:sp>
+      <p:sp>
+        <p:nvSpPr>
+          <p:cNvPr id="13" name="text_118"/>
+          <p:cNvSpPr txBox="1"/>
+          <p:nvPr/>
+        </p:nvSpPr>
+        <p:spPr>
+          <a:xfrm>
+            <a:off x="3474720" y="3017520"/>
+            <a:ext cx="2286000" cy="594360"/>
+          </a:xfrm>
+          <a:prstGeom prst="rect">
+            <a:avLst/>
+          </a:prstGeom>
+          <a:noFill/>
+          <a:ln/>
+        </p:spPr>
+        <p:txBody>
+          <a:bodyPr wrap="square" lIns="0" tIns="0" rIns="0" bIns="0" rtlCol="0" anchor="t"/>
+          <a:lstStyle/>
+          <a:p>
+            <a:pPr indent="0" marL="0">
+              <a:buNone/>
+            </a:pPr>
+            <a:r>
+              <a:rPr lang="en-US" sz="1300" dirty="0">
+                <a:solidFill>
+                  <a:schemeClr val="tx1"/>
+                </a:solidFill>
+              </a:rPr>
+              <a:t>Their lesson times overlap, even by one period</a:t>
             </a:r>
             <a:endParaRPr lang="en-US" sz="1300" dirty="0"/>
           </a:p>
@@ -9964,77 +7548,39 @@
       </p:sp>
       <p:sp>
         <p:nvSpPr>
-          <p:cNvPr id="7" name="entity_109"/>
+          <p:cNvPr id="14" name="card_119"/>
           <p:cNvSpPr/>
           <p:nvPr/>
         </p:nvSpPr>
         <p:spPr>
           <a:xfrm>
-            <a:off x="2377440" y="2194560"/>
-            <a:ext cx="1325880" cy="502920"/>
+            <a:off x="6035040" y="1645920"/>
+            <a:ext cx="2651760" cy="2011680"/>
           </a:xfrm>
           <a:prstGeom prst="roundRect">
             <a:avLst>
-              <a:gd name="adj" fmla="val 10909"/>
+              <a:gd name="adj" fmla="val 3636"/>
             </a:avLst>
           </a:prstGeom>
           <a:solidFill>
-            <a:srgbClr val="E07A2F"/>
+            <a:schemeClr val="bg2"/>
           </a:solidFill>
           <a:ln/>
         </p:spPr>
       </p:sp>
       <p:sp>
         <p:nvSpPr>
-          <p:cNvPr id="8" name="text_110"/>
-          <p:cNvSpPr txBox="1"/>
-          <p:nvPr/>
-        </p:nvSpPr>
-        <p:spPr>
-          <a:xfrm>
-            <a:off x="2377440" y="2194560"/>
-            <a:ext cx="1325880" cy="502920"/>
-          </a:xfrm>
-          <a:prstGeom prst="rect">
-            <a:avLst/>
-          </a:prstGeom>
-          <a:noFill/>
-          <a:ln/>
-        </p:spPr>
-        <p:txBody>
-          <a:bodyPr wrap="square" lIns="0" tIns="0" rIns="0" bIns="0" rtlCol="0" anchor="ctr"/>
-          <a:lstStyle/>
-          <a:p>
-            <a:pPr algn="ctr" indent="0" marL="0">
-              <a:buNone/>
-            </a:pPr>
-            <a:r>
-              <a:rPr lang="en-US" sz="1300" b="1" dirty="0">
-                <a:solidFill>
-                  <a:schemeClr val="bg1"/>
-                </a:solidFill>
-              </a:rPr>
-              <a:t>sections</a:t>
-            </a:r>
-            <a:endParaRPr lang="en-US" sz="1300" dirty="0"/>
-          </a:p>
-        </p:txBody>
-      </p:sp>
-      <p:sp>
-        <p:nvSpPr>
-          <p:cNvPr id="9" name="entity_111"/>
+          <p:cNvPr id="15" name="icon-bg_120"/>
           <p:cNvSpPr/>
           <p:nvPr/>
         </p:nvSpPr>
         <p:spPr>
           <a:xfrm>
-            <a:off x="4206240" y="1280160"/>
-            <a:ext cx="1325880" cy="502920"/>
-          </a:xfrm>
-          <a:prstGeom prst="roundRect">
-            <a:avLst>
-              <a:gd name="adj" fmla="val 10909"/>
-            </a:avLst>
+            <a:off x="6263640" y="1874520"/>
+            <a:ext cx="640080" cy="640080"/>
+          </a:xfrm>
+          <a:prstGeom prst="ellipse">
+            <a:avLst/>
           </a:prstGeom>
           <a:solidFill>
             <a:srgbClr val="1F4E5F"/>
@@ -10042,37 +7588,97 @@
           <a:ln/>
         </p:spPr>
       </p:sp>
-      <p:sp>
-        <p:nvSpPr>
-          <p:cNvPr id="10" name="text_112"/>
-          <p:cNvSpPr txBox="1"/>
-          <p:nvPr/>
-        </p:nvSpPr>
-        <p:spPr>
-          <a:xfrm>
-            <a:off x="4206240" y="1280160"/>
-            <a:ext cx="1325880" cy="502920"/>
-          </a:xfrm>
-          <a:prstGeom prst="rect">
-            <a:avLst/>
-          </a:prstGeom>
-          <a:noFill/>
-          <a:ln/>
-        </p:spPr>
-        <p:txBody>
-          <a:bodyPr wrap="square" lIns="0" tIns="0" rIns="0" bIns="0" rtlCol="0" anchor="ctr"/>
-          <a:lstStyle/>
-          <a:p>
-            <a:pPr algn="ctr" indent="0" marL="0">
-              <a:buNone/>
-            </a:pPr>
-            <a:r>
-              <a:rPr lang="en-US" sz="1300" b="1" dirty="0">
-                <a:solidFill>
-                  <a:schemeClr val="bg1"/>
-                </a:solidFill>
-              </a:rPr>
-              <a:t>schedules</a:t>
+      <p:pic>
+        <p:nvPicPr>
+          <p:cNvPr id="16" name="icon_121" descr="preencoded.png">    </p:cNvPr>
+          <p:cNvPicPr>
+            <a:picLocks noChangeAspect="1"/>
+          </p:cNvPicPr>
+          <p:nvPr/>
+        </p:nvPicPr>
+        <p:blipFill>
+          <a:blip r:embed="rId3"/>
+          <a:stretch>
+            <a:fillRect/>
+          </a:stretch>
+        </p:blipFill>
+        <p:spPr>
+          <a:xfrm>
+            <a:off x="6423660" y="2034540"/>
+            <a:ext cx="320040" cy="320040"/>
+          </a:xfrm>
+          <a:prstGeom prst="rect">
+            <a:avLst/>
+          </a:prstGeom>
+        </p:spPr>
+      </p:pic>
+      <p:sp>
+        <p:nvSpPr>
+          <p:cNvPr id="17" name="text_122"/>
+          <p:cNvSpPr txBox="1"/>
+          <p:nvPr/>
+        </p:nvSpPr>
+        <p:spPr>
+          <a:xfrm>
+            <a:off x="6263640" y="2651760"/>
+            <a:ext cx="2286000" cy="365760"/>
+          </a:xfrm>
+          <a:prstGeom prst="rect">
+            <a:avLst/>
+          </a:prstGeom>
+          <a:noFill/>
+          <a:ln/>
+        </p:spPr>
+        <p:txBody>
+          <a:bodyPr wrap="square" lIns="0" tIns="0" rIns="0" bIns="0" rtlCol="0" anchor="t"/>
+          <a:lstStyle/>
+          <a:p>
+            <a:pPr indent="0" marL="0">
+              <a:buNone/>
+            </a:pPr>
+            <a:r>
+              <a:rPr lang="en-US" sz="1700" b="1" dirty="0">
+                <a:solidFill>
+                  <a:schemeClr val="tx2"/>
+                </a:solidFill>
+              </a:rPr>
+              <a:t>Weeks match</a:t>
+            </a:r>
+            <a:endParaRPr lang="en-US" sz="1700" dirty="0"/>
+          </a:p>
+        </p:txBody>
+      </p:sp>
+      <p:sp>
+        <p:nvSpPr>
+          <p:cNvPr id="18" name="text_123"/>
+          <p:cNvSpPr txBox="1"/>
+          <p:nvPr/>
+        </p:nvSpPr>
+        <p:spPr>
+          <a:xfrm>
+            <a:off x="6263640" y="3017520"/>
+            <a:ext cx="2286000" cy="594360"/>
+          </a:xfrm>
+          <a:prstGeom prst="rect">
+            <a:avLst/>
+          </a:prstGeom>
+          <a:noFill/>
+          <a:ln/>
+        </p:spPr>
+        <p:txBody>
+          <a:bodyPr wrap="square" lIns="0" tIns="0" rIns="0" bIns="0" rtlCol="0" anchor="t"/>
+          <a:lstStyle/>
+          <a:p>
+            <a:pPr indent="0" marL="0">
+              <a:buNone/>
+            </a:pPr>
+            <a:r>
+              <a:rPr lang="en-US" sz="1300" dirty="0">
+                <a:solidFill>
+                  <a:schemeClr val="tx1"/>
+                </a:solidFill>
+              </a:rPr>
+              <a:t>An odd-week class never clashes with an even-week class</a:t>
             </a:r>
             <a:endParaRPr lang="en-US" sz="1300" dirty="0"/>
           </a:p>
@@ -10080,36 +7686,36 @@
       </p:sp>
       <p:sp>
         <p:nvSpPr>
-          <p:cNvPr id="11" name="entity_113"/>
+          <p:cNvPr id="19" name="card_124"/>
           <p:cNvSpPr/>
           <p:nvPr/>
         </p:nvSpPr>
         <p:spPr>
           <a:xfrm>
-            <a:off x="4206240" y="3108960"/>
-            <a:ext cx="1325880" cy="502920"/>
+            <a:off x="457200" y="3840480"/>
+            <a:ext cx="8229600" cy="640080"/>
           </a:xfrm>
           <a:prstGeom prst="roundRect">
             <a:avLst>
-              <a:gd name="adj" fmla="val 10909"/>
+              <a:gd name="adj" fmla="val 11429"/>
             </a:avLst>
           </a:prstGeom>
           <a:solidFill>
-            <a:srgbClr val="E07A2F"/>
+            <a:schemeClr val="accent5"/>
           </a:solidFill>
           <a:ln/>
         </p:spPr>
       </p:sp>
       <p:sp>
         <p:nvSpPr>
-          <p:cNvPr id="12" name="text_114"/>
-          <p:cNvSpPr txBox="1"/>
-          <p:nvPr/>
-        </p:nvSpPr>
-        <p:spPr>
-          <a:xfrm>
-            <a:off x="4206240" y="3108960"/>
-            <a:ext cx="1325880" cy="502920"/>
+          <p:cNvPr id="20" name="text_125"/>
+          <p:cNvSpPr txBox="1"/>
+          <p:nvPr/>
+        </p:nvSpPr>
+        <p:spPr>
+          <a:xfrm>
+            <a:off x="685800" y="3840480"/>
+            <a:ext cx="7772400" cy="640080"/>
           </a:xfrm>
           <a:prstGeom prst="rect">
             <a:avLst/>
@@ -10121,379 +7727,29 @@
           <a:bodyPr wrap="square" lIns="0" tIns="0" rIns="0" bIns="0" rtlCol="0" anchor="ctr"/>
           <a:lstStyle/>
           <a:p>
-            <a:pPr algn="ctr" indent="0" marL="0">
-              <a:buNone/>
-            </a:pPr>
-            <a:r>
-              <a:rPr lang="en-US" sz="1300" b="1" dirty="0">
-                <a:solidFill>
-                  <a:schemeClr val="bg1"/>
-                </a:solidFill>
-              </a:rPr>
-              <a:t>enrollments</a:t>
-            </a:r>
-            <a:endParaRPr lang="en-US" sz="1300" dirty="0"/>
-          </a:p>
-        </p:txBody>
-      </p:sp>
-      <p:sp>
-        <p:nvSpPr>
-          <p:cNvPr id="13" name="entity_115"/>
-          <p:cNvSpPr/>
-          <p:nvPr/>
-        </p:nvSpPr>
-        <p:spPr>
-          <a:xfrm>
-            <a:off x="4206240" y="3931920"/>
-            <a:ext cx="1325880" cy="502920"/>
-          </a:xfrm>
-          <a:prstGeom prst="roundRect">
-            <a:avLst>
-              <a:gd name="adj" fmla="val 10909"/>
-            </a:avLst>
-          </a:prstGeom>
-          <a:solidFill>
-            <a:srgbClr val="1F4E5F"/>
-          </a:solidFill>
-          <a:ln/>
-        </p:spPr>
-      </p:sp>
-      <p:sp>
-        <p:nvSpPr>
-          <p:cNvPr id="14" name="text_116"/>
-          <p:cNvSpPr txBox="1"/>
-          <p:nvPr/>
-        </p:nvSpPr>
-        <p:spPr>
-          <a:xfrm>
-            <a:off x="4206240" y="3931920"/>
-            <a:ext cx="1325880" cy="502920"/>
-          </a:xfrm>
-          <a:prstGeom prst="rect">
-            <a:avLst/>
-          </a:prstGeom>
-          <a:noFill/>
-          <a:ln/>
-        </p:spPr>
-        <p:txBody>
-          <a:bodyPr wrap="square" lIns="0" tIns="0" rIns="0" bIns="0" rtlCol="0" anchor="ctr"/>
-          <a:lstStyle/>
-          <a:p>
-            <a:pPr algn="ctr" indent="0" marL="0">
-              <a:buNone/>
-            </a:pPr>
-            <a:r>
-              <a:rPr lang="en-US" sz="1300" b="1" dirty="0">
-                <a:solidFill>
-                  <a:schemeClr val="bg1"/>
-                </a:solidFill>
-              </a:rPr>
-              <a:t>students</a:t>
-            </a:r>
-            <a:endParaRPr lang="en-US" sz="1300" dirty="0"/>
-          </a:p>
-        </p:txBody>
-      </p:sp>
-      <p:sp>
-        <p:nvSpPr>
-          <p:cNvPr id="15" name="rel_117"/>
-          <p:cNvSpPr/>
-          <p:nvPr/>
-        </p:nvSpPr>
-        <p:spPr>
-          <a:xfrm>
-            <a:off x="1783080" y="1536192"/>
-            <a:ext cx="594360" cy="868680"/>
-          </a:xfrm>
-          <a:prstGeom prst="line">
-            <a:avLst/>
-          </a:prstGeom>
-          <a:noFill/>
-          <a:ln w="19050">
-            <a:solidFill>
-              <a:srgbClr val="5B6B73"/>
-            </a:solidFill>
-            <a:prstDash val="solid"/>
-          </a:ln>
-        </p:spPr>
-      </p:sp>
-      <p:sp>
-        <p:nvSpPr>
-          <p:cNvPr id="16" name="rel_118"/>
-          <p:cNvSpPr/>
-          <p:nvPr/>
-        </p:nvSpPr>
-        <p:spPr>
-          <a:xfrm flipV="1">
-            <a:off x="1783080" y="2697480"/>
-            <a:ext cx="594360" cy="667512"/>
-          </a:xfrm>
-          <a:prstGeom prst="line">
-            <a:avLst/>
-          </a:prstGeom>
-          <a:noFill/>
-          <a:ln w="19050">
-            <a:solidFill>
-              <a:srgbClr val="5B6B73"/>
-            </a:solidFill>
-            <a:prstDash val="solid"/>
-          </a:ln>
-        </p:spPr>
-      </p:sp>
-      <p:sp>
-        <p:nvSpPr>
-          <p:cNvPr id="17" name="rel_119"/>
-          <p:cNvSpPr/>
-          <p:nvPr/>
-        </p:nvSpPr>
-        <p:spPr>
-          <a:xfrm flipV="1">
-            <a:off x="3703320" y="1536192"/>
-            <a:ext cx="502920" cy="868680"/>
-          </a:xfrm>
-          <a:prstGeom prst="line">
-            <a:avLst/>
-          </a:prstGeom>
-          <a:noFill/>
-          <a:ln w="19050">
-            <a:solidFill>
-              <a:srgbClr val="5B6B73"/>
-            </a:solidFill>
-            <a:prstDash val="solid"/>
-          </a:ln>
-        </p:spPr>
-      </p:sp>
-      <p:sp>
-        <p:nvSpPr>
-          <p:cNvPr id="18" name="rel_120"/>
-          <p:cNvSpPr/>
-          <p:nvPr/>
-        </p:nvSpPr>
-        <p:spPr>
-          <a:xfrm>
-            <a:off x="3703320" y="2450592"/>
-            <a:ext cx="502920" cy="914400"/>
-          </a:xfrm>
-          <a:prstGeom prst="line">
-            <a:avLst/>
-          </a:prstGeom>
-          <a:noFill/>
-          <a:ln w="19050">
-            <a:solidFill>
-              <a:srgbClr val="5B6B73"/>
-            </a:solidFill>
-            <a:prstDash val="solid"/>
-          </a:ln>
-        </p:spPr>
-      </p:sp>
-      <p:sp>
-        <p:nvSpPr>
-          <p:cNvPr id="19" name="rel_121"/>
-          <p:cNvSpPr/>
-          <p:nvPr/>
-        </p:nvSpPr>
-        <p:spPr>
-          <a:xfrm>
-            <a:off x="4864608" y="3611880"/>
-            <a:ext cx="0" cy="320040"/>
-          </a:xfrm>
-          <a:prstGeom prst="line">
-            <a:avLst/>
-          </a:prstGeom>
-          <a:noFill/>
-          <a:ln w="19050">
-            <a:solidFill>
-              <a:srgbClr val="5B6B73"/>
-            </a:solidFill>
-            <a:prstDash val="solid"/>
-          </a:ln>
-        </p:spPr>
-      </p:sp>
-      <p:sp>
-        <p:nvSpPr>
-          <p:cNvPr id="20" name="text_122"/>
-          <p:cNvSpPr txBox="1"/>
-          <p:nvPr/>
-        </p:nvSpPr>
-        <p:spPr>
-          <a:xfrm>
-            <a:off x="457200" y="4023360"/>
-            <a:ext cx="3291840" cy="320040"/>
-          </a:xfrm>
-          <a:prstGeom prst="rect">
-            <a:avLst/>
-          </a:prstGeom>
-          <a:noFill/>
-          <a:ln/>
-        </p:spPr>
-        <p:txBody>
-          <a:bodyPr wrap="square" lIns="0" tIns="0" rIns="0" bIns="0" rtlCol="0" anchor="t"/>
-          <a:lstStyle/>
-          <a:p>
             <a:pPr indent="0" marL="0">
               <a:buNone/>
             </a:pPr>
             <a:r>
-              <a:rPr lang="en-US" sz="1200" i="1" dirty="0">
-                <a:solidFill>
-                  <a:schemeClr val="accent4"/>
-                </a:solidFill>
-              </a:rPr>
-              <a:t>+ admins, results</a:t>
-            </a:r>
-            <a:endParaRPr lang="en-US" sz="1200" dirty="0"/>
-          </a:p>
-        </p:txBody>
-      </p:sp>
-      <p:sp>
-        <p:nvSpPr>
-          <p:cNvPr id="21" name="card_123"/>
-          <p:cNvSpPr/>
-          <p:nvPr/>
-        </p:nvSpPr>
-        <p:spPr>
-          <a:xfrm>
-            <a:off x="5943600" y="1188720"/>
-            <a:ext cx="2743200" cy="3291840"/>
-          </a:xfrm>
-          <a:prstGeom prst="roundRect">
-            <a:avLst>
-              <a:gd name="adj" fmla="val 2667"/>
-            </a:avLst>
-          </a:prstGeom>
-          <a:solidFill>
-            <a:schemeClr val="bg2"/>
-          </a:solidFill>
-          <a:ln/>
-        </p:spPr>
-      </p:sp>
-      <p:sp>
-        <p:nvSpPr>
-          <p:cNvPr id="22" name="text_124"/>
-          <p:cNvSpPr txBox="1"/>
-          <p:nvPr/>
-        </p:nvSpPr>
-        <p:spPr>
-          <a:xfrm>
-            <a:off x="6126480" y="1325880"/>
-            <a:ext cx="2423160" cy="365760"/>
-          </a:xfrm>
-          <a:prstGeom prst="rect">
-            <a:avLst/>
-          </a:prstGeom>
-          <a:noFill/>
-          <a:ln/>
-        </p:spPr>
-        <p:txBody>
-          <a:bodyPr wrap="square" lIns="0" tIns="0" rIns="0" bIns="0" rtlCol="0" anchor="t"/>
-          <a:lstStyle/>
-          <a:p>
+              <a:rPr lang="en-US" sz="1500" b="1" dirty="0">
+                <a:solidFill>
+                  <a:schemeClr val="tx2"/>
+                </a:solidFill>
+              </a:rPr>
+              <a:t>Result: </a:t>
+            </a:r>
             <a:pPr indent="0" marL="0">
               <a:buNone/>
             </a:pPr>
             <a:r>
-              <a:rPr lang="en-US" sz="1600" b="1" dirty="0">
-                <a:solidFill>
-                  <a:schemeClr val="tx2"/>
-                </a:solidFill>
-              </a:rPr>
-              <a:t>Safety nets in the database</a:t>
-            </a:r>
-            <a:endParaRPr lang="en-US" sz="1600" dirty="0"/>
-          </a:p>
-        </p:txBody>
-      </p:sp>
-      <p:sp>
-        <p:nvSpPr>
-          <p:cNvPr id="23" name="text_125"/>
-          <p:cNvSpPr txBox="1"/>
-          <p:nvPr/>
-        </p:nvSpPr>
-        <p:spPr>
-          <a:xfrm>
-            <a:off x="6126480" y="1828800"/>
-            <a:ext cx="2423160" cy="2514600"/>
-          </a:xfrm>
-          <a:prstGeom prst="rect">
-            <a:avLst/>
-          </a:prstGeom>
-          <a:noFill/>
-          <a:ln/>
-        </p:spPr>
-        <p:txBody>
-          <a:bodyPr wrap="square" lIns="0" tIns="0" rIns="0" bIns="0" rtlCol="0" anchor="t"/>
-          <a:lstStyle/>
-          <a:p>
-            <a:pPr marL="342900" indent="-342900">
-              <a:spcAft>
-                <a:spcPts val="800"/>
-              </a:spcAft>
-              <a:buSzPct val="100000"/>
-              <a:buChar char="•"/>
-            </a:pPr>
-            <a:r>
-              <a:rPr lang="en-US" sz="1400" dirty="0">
+              <a:rPr lang="en-US" sz="1500" dirty="0">
                 <a:solidFill>
                   <a:schemeClr val="tx1"/>
                 </a:solidFill>
               </a:rPr>
-              <a:t>UNIQUE (student, section) stops duplicate sign-ups</a:t>
-            </a:r>
-            <a:endParaRPr lang="en-US" sz="1400" dirty="0"/>
-          </a:p>
-          <a:p>
-            <a:pPr marL="342900" indent="-342900">
-              <a:spcAft>
-                <a:spcPts val="800"/>
-              </a:spcAft>
-              <a:buSzPct val="100000"/>
-              <a:buChar char="•"/>
-            </a:pPr>
-            <a:r>
-              <a:rPr lang="en-US" sz="1400" dirty="0">
-                <a:solidFill>
-                  <a:schemeClr val="tx1"/>
-                </a:solidFill>
-              </a:rPr>
-              <a:t>CHECK current ≤ max students</a:t>
-            </a:r>
-            <a:endParaRPr lang="en-US" sz="1400" dirty="0"/>
-          </a:p>
-          <a:p>
-            <a:pPr marL="342900" indent="-342900">
-              <a:spcAft>
-                <a:spcPts val="800"/>
-              </a:spcAft>
-              <a:buSzPct val="100000"/>
-              <a:buChar char="•"/>
-            </a:pPr>
-            <a:r>
-              <a:rPr lang="en-US" sz="1400" dirty="0">
-                <a:solidFill>
-                  <a:schemeClr val="tx1"/>
-                </a:solidFill>
-              </a:rPr>
-              <a:t>Scores must be 0 – 10</a:t>
-            </a:r>
-            <a:endParaRPr lang="en-US" sz="1400" dirty="0"/>
-          </a:p>
-          <a:p>
-            <a:pPr marL="342900" indent="-342900">
-              <a:spcAft>
-                <a:spcPts val="800"/>
-              </a:spcAft>
-              <a:buSzPct val="100000"/>
-              <a:buChar char="•"/>
-            </a:pPr>
-            <a:r>
-              <a:rPr lang="en-US" sz="1400" dirty="0">
-                <a:solidFill>
-                  <a:schemeClr val="tx1"/>
-                </a:solidFill>
-              </a:rPr>
-              <a:t>Indexes on foreign keys and status</a:t>
-            </a:r>
-            <a:endParaRPr lang="en-US" sz="1400" dirty="0"/>
+              <a:t>a clear message that names the clashing class, so the student knows exactly what to change.</a:t>
+            </a:r>
+            <a:endParaRPr lang="en-US" sz="1500" dirty="0"/>
           </a:p>
         </p:txBody>
       </p:sp>
@@ -10602,7 +7858,7 @@
                 <a:ea typeface="Cambria" pitchFamily="34" charset="-122"/>
                 <a:cs typeface="Cambria" pitchFamily="34" charset="-120"/>
               </a:rPr>
-              <a:t>Nine rules behind every registration</a:t>
+              <a:t>How I built it</a:t>
             </a:r>
             <a:endParaRPr lang="en-US" sz="3000" dirty="0"/>
           </a:p>
@@ -10610,112 +7866,706 @@
       </p:sp>
       <p:sp>
         <p:nvSpPr>
-          <p:cNvPr id="3" name="card_126"/>
+          <p:cNvPr id="3" name="timeline_126"/>
           <p:cNvSpPr/>
           <p:nvPr/>
         </p:nvSpPr>
         <p:spPr>
           <a:xfrm>
-            <a:off x="457200" y="1188720"/>
-            <a:ext cx="2651760" cy="914400"/>
+            <a:off x="1188720" y="1965960"/>
+            <a:ext cx="6766560" cy="0"/>
+          </a:xfrm>
+          <a:prstGeom prst="line">
+            <a:avLst/>
+          </a:prstGeom>
+          <a:noFill/>
+          <a:ln w="38100">
+            <a:solidFill>
+              <a:srgbClr val="C9D6DA"/>
+            </a:solidFill>
+            <a:prstDash val="solid"/>
+          </a:ln>
+        </p:spPr>
+      </p:sp>
+      <p:sp>
+        <p:nvSpPr>
+          <p:cNvPr id="4" name="dot_127"/>
+          <p:cNvSpPr/>
+          <p:nvPr/>
+        </p:nvSpPr>
+        <p:spPr>
+          <a:xfrm>
+            <a:off x="1005840" y="1783080"/>
+            <a:ext cx="365760" cy="365760"/>
+          </a:xfrm>
+          <a:prstGeom prst="ellipse">
+            <a:avLst/>
+          </a:prstGeom>
+          <a:solidFill>
+            <a:srgbClr val="E07A2F"/>
+          </a:solidFill>
+          <a:ln w="38100">
+            <a:solidFill>
+              <a:srgbClr val="FFFFFF"/>
+            </a:solidFill>
+            <a:prstDash val="solid"/>
+          </a:ln>
+        </p:spPr>
+      </p:sp>
+      <p:sp>
+        <p:nvSpPr>
+          <p:cNvPr id="5" name="text_128"/>
+          <p:cNvSpPr txBox="1"/>
+          <p:nvPr/>
+        </p:nvSpPr>
+        <p:spPr>
+          <a:xfrm>
+            <a:off x="457200" y="1325880"/>
+            <a:ext cx="1463040" cy="320040"/>
+          </a:xfrm>
+          <a:prstGeom prst="rect">
+            <a:avLst/>
+          </a:prstGeom>
+          <a:noFill/>
+          <a:ln/>
+        </p:spPr>
+        <p:txBody>
+          <a:bodyPr wrap="square" lIns="0" tIns="0" rIns="0" bIns="0" rtlCol="0" anchor="t"/>
+          <a:lstStyle/>
+          <a:p>
+            <a:pPr algn="ctr" indent="0" marL="0">
+              <a:buNone/>
+            </a:pPr>
+            <a:r>
+              <a:rPr lang="en-US" sz="1200" dirty="0">
+                <a:solidFill>
+                  <a:schemeClr val="accent4"/>
+                </a:solidFill>
+              </a:rPr>
+              <a:t>Jan 2026</a:t>
+            </a:r>
+            <a:endParaRPr lang="en-US" sz="1200" dirty="0"/>
+          </a:p>
+        </p:txBody>
+      </p:sp>
+      <p:sp>
+        <p:nvSpPr>
+          <p:cNvPr id="6" name="text_129"/>
+          <p:cNvSpPr txBox="1"/>
+          <p:nvPr/>
+        </p:nvSpPr>
+        <p:spPr>
+          <a:xfrm>
+            <a:off x="457200" y="2331720"/>
+            <a:ext cx="1463040" cy="365760"/>
+          </a:xfrm>
+          <a:prstGeom prst="rect">
+            <a:avLst/>
+          </a:prstGeom>
+          <a:noFill/>
+          <a:ln/>
+        </p:spPr>
+        <p:txBody>
+          <a:bodyPr wrap="square" lIns="0" tIns="0" rIns="0" bIns="0" rtlCol="0" anchor="t"/>
+          <a:lstStyle/>
+          <a:p>
+            <a:pPr algn="ctr" indent="0" marL="0">
+              <a:buNone/>
+            </a:pPr>
+            <a:r>
+              <a:rPr lang="en-US" sz="1700" b="1" dirty="0">
+                <a:solidFill>
+                  <a:schemeClr val="tx2"/>
+                </a:solidFill>
+              </a:rPr>
+              <a:t>Analysis</a:t>
+            </a:r>
+            <a:endParaRPr lang="en-US" sz="1700" dirty="0"/>
+          </a:p>
+        </p:txBody>
+      </p:sp>
+      <p:sp>
+        <p:nvSpPr>
+          <p:cNvPr id="7" name="text_130"/>
+          <p:cNvSpPr txBox="1"/>
+          <p:nvPr/>
+        </p:nvSpPr>
+        <p:spPr>
+          <a:xfrm>
+            <a:off x="457200" y="2743200"/>
+            <a:ext cx="1463040" cy="1097280"/>
+          </a:xfrm>
+          <a:prstGeom prst="rect">
+            <a:avLst/>
+          </a:prstGeom>
+          <a:noFill/>
+          <a:ln/>
+        </p:spPr>
+        <p:txBody>
+          <a:bodyPr wrap="square" lIns="0" tIns="0" rIns="0" bIns="0" rtlCol="0" anchor="t"/>
+          <a:lstStyle/>
+          <a:p>
+            <a:pPr algn="ctr" indent="0" marL="0">
+              <a:buNone/>
+            </a:pPr>
+            <a:r>
+              <a:rPr lang="en-US" sz="1300" dirty="0">
+                <a:solidFill>
+                  <a:schemeClr val="tx1"/>
+                </a:solidFill>
+              </a:rPr>
+              <a:t>Studied the real process, wrote the 9 rules</a:t>
+            </a:r>
+            <a:endParaRPr lang="en-US" sz="1300" dirty="0"/>
+          </a:p>
+        </p:txBody>
+      </p:sp>
+      <p:sp>
+        <p:nvSpPr>
+          <p:cNvPr id="8" name="dot_131"/>
+          <p:cNvSpPr/>
+          <p:nvPr/>
+        </p:nvSpPr>
+        <p:spPr>
+          <a:xfrm>
+            <a:off x="2697480" y="1783080"/>
+            <a:ext cx="365760" cy="365760"/>
+          </a:xfrm>
+          <a:prstGeom prst="ellipse">
+            <a:avLst/>
+          </a:prstGeom>
+          <a:solidFill>
+            <a:srgbClr val="1F4E5F"/>
+          </a:solidFill>
+          <a:ln w="38100">
+            <a:solidFill>
+              <a:srgbClr val="FFFFFF"/>
+            </a:solidFill>
+            <a:prstDash val="solid"/>
+          </a:ln>
+        </p:spPr>
+      </p:sp>
+      <p:sp>
+        <p:nvSpPr>
+          <p:cNvPr id="9" name="text_132"/>
+          <p:cNvSpPr txBox="1"/>
+          <p:nvPr/>
+        </p:nvSpPr>
+        <p:spPr>
+          <a:xfrm>
+            <a:off x="2148840" y="1325880"/>
+            <a:ext cx="1463040" cy="320040"/>
+          </a:xfrm>
+          <a:prstGeom prst="rect">
+            <a:avLst/>
+          </a:prstGeom>
+          <a:noFill/>
+          <a:ln/>
+        </p:spPr>
+        <p:txBody>
+          <a:bodyPr wrap="square" lIns="0" tIns="0" rIns="0" bIns="0" rtlCol="0" anchor="t"/>
+          <a:lstStyle/>
+          <a:p>
+            <a:pPr algn="ctr" indent="0" marL="0">
+              <a:buNone/>
+            </a:pPr>
+            <a:r>
+              <a:rPr lang="en-US" sz="1200" dirty="0">
+                <a:solidFill>
+                  <a:schemeClr val="accent4"/>
+                </a:solidFill>
+              </a:rPr>
+              <a:t>Mar 2026</a:t>
+            </a:r>
+            <a:endParaRPr lang="en-US" sz="1200" dirty="0"/>
+          </a:p>
+        </p:txBody>
+      </p:sp>
+      <p:sp>
+        <p:nvSpPr>
+          <p:cNvPr id="10" name="text_133"/>
+          <p:cNvSpPr txBox="1"/>
+          <p:nvPr/>
+        </p:nvSpPr>
+        <p:spPr>
+          <a:xfrm>
+            <a:off x="2148840" y="2331720"/>
+            <a:ext cx="1463040" cy="365760"/>
+          </a:xfrm>
+          <a:prstGeom prst="rect">
+            <a:avLst/>
+          </a:prstGeom>
+          <a:noFill/>
+          <a:ln/>
+        </p:spPr>
+        <p:txBody>
+          <a:bodyPr wrap="square" lIns="0" tIns="0" rIns="0" bIns="0" rtlCol="0" anchor="t"/>
+          <a:lstStyle/>
+          <a:p>
+            <a:pPr algn="ctr" indent="0" marL="0">
+              <a:buNone/>
+            </a:pPr>
+            <a:r>
+              <a:rPr lang="en-US" sz="1700" b="1" dirty="0">
+                <a:solidFill>
+                  <a:schemeClr val="tx2"/>
+                </a:solidFill>
+              </a:rPr>
+              <a:t>Back end</a:t>
+            </a:r>
+            <a:endParaRPr lang="en-US" sz="1700" dirty="0"/>
+          </a:p>
+        </p:txBody>
+      </p:sp>
+      <p:sp>
+        <p:nvSpPr>
+          <p:cNvPr id="11" name="text_134"/>
+          <p:cNvSpPr txBox="1"/>
+          <p:nvPr/>
+        </p:nvSpPr>
+        <p:spPr>
+          <a:xfrm>
+            <a:off x="2148840" y="2743200"/>
+            <a:ext cx="1463040" cy="1097280"/>
+          </a:xfrm>
+          <a:prstGeom prst="rect">
+            <a:avLst/>
+          </a:prstGeom>
+          <a:noFill/>
+          <a:ln/>
+        </p:spPr>
+        <p:txBody>
+          <a:bodyPr wrap="square" lIns="0" tIns="0" rIns="0" bIns="0" rtlCol="0" anchor="t"/>
+          <a:lstStyle/>
+          <a:p>
+            <a:pPr algn="ctr" indent="0" marL="0">
+              <a:buNone/>
+            </a:pPr>
+            <a:r>
+              <a:rPr lang="en-US" sz="1300" dirty="0">
+                <a:solidFill>
+                  <a:schemeClr val="tx1"/>
+                </a:solidFill>
+              </a:rPr>
+              <a:t>Database and all the registration rules</a:t>
+            </a:r>
+            <a:endParaRPr lang="en-US" sz="1300" dirty="0"/>
+          </a:p>
+        </p:txBody>
+      </p:sp>
+      <p:sp>
+        <p:nvSpPr>
+          <p:cNvPr id="12" name="dot_135"/>
+          <p:cNvSpPr/>
+          <p:nvPr/>
+        </p:nvSpPr>
+        <p:spPr>
+          <a:xfrm>
+            <a:off x="4389120" y="1783080"/>
+            <a:ext cx="365760" cy="365760"/>
+          </a:xfrm>
+          <a:prstGeom prst="ellipse">
+            <a:avLst/>
+          </a:prstGeom>
+          <a:solidFill>
+            <a:srgbClr val="1F4E5F"/>
+          </a:solidFill>
+          <a:ln w="38100">
+            <a:solidFill>
+              <a:srgbClr val="FFFFFF"/>
+            </a:solidFill>
+            <a:prstDash val="solid"/>
+          </a:ln>
+        </p:spPr>
+      </p:sp>
+      <p:sp>
+        <p:nvSpPr>
+          <p:cNvPr id="13" name="text_136"/>
+          <p:cNvSpPr txBox="1"/>
+          <p:nvPr/>
+        </p:nvSpPr>
+        <p:spPr>
+          <a:xfrm>
+            <a:off x="3840480" y="1325880"/>
+            <a:ext cx="1463040" cy="320040"/>
+          </a:xfrm>
+          <a:prstGeom prst="rect">
+            <a:avLst/>
+          </a:prstGeom>
+          <a:noFill/>
+          <a:ln/>
+        </p:spPr>
+        <p:txBody>
+          <a:bodyPr wrap="square" lIns="0" tIns="0" rIns="0" bIns="0" rtlCol="0" anchor="t"/>
+          <a:lstStyle/>
+          <a:p>
+            <a:pPr algn="ctr" indent="0" marL="0">
+              <a:buNone/>
+            </a:pPr>
+            <a:r>
+              <a:rPr lang="en-US" sz="1200" dirty="0">
+                <a:solidFill>
+                  <a:schemeClr val="accent4"/>
+                </a:solidFill>
+              </a:rPr>
+              <a:t>Mar 2026</a:t>
+            </a:r>
+            <a:endParaRPr lang="en-US" sz="1200" dirty="0"/>
+          </a:p>
+        </p:txBody>
+      </p:sp>
+      <p:sp>
+        <p:nvSpPr>
+          <p:cNvPr id="14" name="text_137"/>
+          <p:cNvSpPr txBox="1"/>
+          <p:nvPr/>
+        </p:nvSpPr>
+        <p:spPr>
+          <a:xfrm>
+            <a:off x="3840480" y="2331720"/>
+            <a:ext cx="1463040" cy="365760"/>
+          </a:xfrm>
+          <a:prstGeom prst="rect">
+            <a:avLst/>
+          </a:prstGeom>
+          <a:noFill/>
+          <a:ln/>
+        </p:spPr>
+        <p:txBody>
+          <a:bodyPr wrap="square" lIns="0" tIns="0" rIns="0" bIns="0" rtlCol="0" anchor="t"/>
+          <a:lstStyle/>
+          <a:p>
+            <a:pPr algn="ctr" indent="0" marL="0">
+              <a:buNone/>
+            </a:pPr>
+            <a:r>
+              <a:rPr lang="en-US" sz="1700" b="1" dirty="0">
+                <a:solidFill>
+                  <a:schemeClr val="tx2"/>
+                </a:solidFill>
+              </a:rPr>
+              <a:t>Reorganise</a:t>
+            </a:r>
+            <a:endParaRPr lang="en-US" sz="1700" dirty="0"/>
+          </a:p>
+        </p:txBody>
+      </p:sp>
+      <p:sp>
+        <p:nvSpPr>
+          <p:cNvPr id="15" name="text_138"/>
+          <p:cNvSpPr txBox="1"/>
+          <p:nvPr/>
+        </p:nvSpPr>
+        <p:spPr>
+          <a:xfrm>
+            <a:off x="3840480" y="2743200"/>
+            <a:ext cx="1463040" cy="1097280"/>
+          </a:xfrm>
+          <a:prstGeom prst="rect">
+            <a:avLst/>
+          </a:prstGeom>
+          <a:noFill/>
+          <a:ln/>
+        </p:spPr>
+        <p:txBody>
+          <a:bodyPr wrap="square" lIns="0" tIns="0" rIns="0" bIns="0" rtlCol="0" anchor="t"/>
+          <a:lstStyle/>
+          <a:p>
+            <a:pPr algn="ctr" indent="0" marL="0">
+              <a:buNone/>
+            </a:pPr>
+            <a:r>
+              <a:rPr lang="en-US" sz="1300" dirty="0">
+                <a:solidFill>
+                  <a:schemeClr val="tx1"/>
+                </a:solidFill>
+              </a:rPr>
+              <a:t>One clean project for all the code</a:t>
+            </a:r>
+            <a:endParaRPr lang="en-US" sz="1300" dirty="0"/>
+          </a:p>
+        </p:txBody>
+      </p:sp>
+      <p:sp>
+        <p:nvSpPr>
+          <p:cNvPr id="16" name="dot_139"/>
+          <p:cNvSpPr/>
+          <p:nvPr/>
+        </p:nvSpPr>
+        <p:spPr>
+          <a:xfrm>
+            <a:off x="6080760" y="1783080"/>
+            <a:ext cx="365760" cy="365760"/>
+          </a:xfrm>
+          <a:prstGeom prst="ellipse">
+            <a:avLst/>
+          </a:prstGeom>
+          <a:solidFill>
+            <a:srgbClr val="1F4E5F"/>
+          </a:solidFill>
+          <a:ln w="38100">
+            <a:solidFill>
+              <a:srgbClr val="FFFFFF"/>
+            </a:solidFill>
+            <a:prstDash val="solid"/>
+          </a:ln>
+        </p:spPr>
+      </p:sp>
+      <p:sp>
+        <p:nvSpPr>
+          <p:cNvPr id="17" name="text_140"/>
+          <p:cNvSpPr txBox="1"/>
+          <p:nvPr/>
+        </p:nvSpPr>
+        <p:spPr>
+          <a:xfrm>
+            <a:off x="5532120" y="1325880"/>
+            <a:ext cx="1463040" cy="320040"/>
+          </a:xfrm>
+          <a:prstGeom prst="rect">
+            <a:avLst/>
+          </a:prstGeom>
+          <a:noFill/>
+          <a:ln/>
+        </p:spPr>
+        <p:txBody>
+          <a:bodyPr wrap="square" lIns="0" tIns="0" rIns="0" bIns="0" rtlCol="0" anchor="t"/>
+          <a:lstStyle/>
+          <a:p>
+            <a:pPr algn="ctr" indent="0" marL="0">
+              <a:buNone/>
+            </a:pPr>
+            <a:r>
+              <a:rPr lang="en-US" sz="1200" dirty="0">
+                <a:solidFill>
+                  <a:schemeClr val="accent4"/>
+                </a:solidFill>
+              </a:rPr>
+              <a:t>Mar 2026</a:t>
+            </a:r>
+            <a:endParaRPr lang="en-US" sz="1200" dirty="0"/>
+          </a:p>
+        </p:txBody>
+      </p:sp>
+      <p:sp>
+        <p:nvSpPr>
+          <p:cNvPr id="18" name="text_141"/>
+          <p:cNvSpPr txBox="1"/>
+          <p:nvPr/>
+        </p:nvSpPr>
+        <p:spPr>
+          <a:xfrm>
+            <a:off x="5532120" y="2331720"/>
+            <a:ext cx="1463040" cy="365760"/>
+          </a:xfrm>
+          <a:prstGeom prst="rect">
+            <a:avLst/>
+          </a:prstGeom>
+          <a:noFill/>
+          <a:ln/>
+        </p:spPr>
+        <p:txBody>
+          <a:bodyPr wrap="square" lIns="0" tIns="0" rIns="0" bIns="0" rtlCol="0" anchor="t"/>
+          <a:lstStyle/>
+          <a:p>
+            <a:pPr algn="ctr" indent="0" marL="0">
+              <a:buNone/>
+            </a:pPr>
+            <a:r>
+              <a:rPr lang="en-US" sz="1700" b="1" dirty="0">
+                <a:solidFill>
+                  <a:schemeClr val="tx2"/>
+                </a:solidFill>
+              </a:rPr>
+              <a:t>Front end</a:t>
+            </a:r>
+            <a:endParaRPr lang="en-US" sz="1700" dirty="0"/>
+          </a:p>
+        </p:txBody>
+      </p:sp>
+      <p:sp>
+        <p:nvSpPr>
+          <p:cNvPr id="19" name="text_142"/>
+          <p:cNvSpPr txBox="1"/>
+          <p:nvPr/>
+        </p:nvSpPr>
+        <p:spPr>
+          <a:xfrm>
+            <a:off x="5532120" y="2743200"/>
+            <a:ext cx="1463040" cy="1097280"/>
+          </a:xfrm>
+          <a:prstGeom prst="rect">
+            <a:avLst/>
+          </a:prstGeom>
+          <a:noFill/>
+          <a:ln/>
+        </p:spPr>
+        <p:txBody>
+          <a:bodyPr wrap="square" lIns="0" tIns="0" rIns="0" bIns="0" rtlCol="0" anchor="t"/>
+          <a:lstStyle/>
+          <a:p>
+            <a:pPr algn="ctr" indent="0" marL="0">
+              <a:buNone/>
+            </a:pPr>
+            <a:r>
+              <a:rPr lang="en-US" sz="1300" dirty="0">
+                <a:solidFill>
+                  <a:schemeClr val="tx1"/>
+                </a:solidFill>
+              </a:rPr>
+              <a:t>Student and admin websites, dark mode</a:t>
+            </a:r>
+            <a:endParaRPr lang="en-US" sz="1300" dirty="0"/>
+          </a:p>
+        </p:txBody>
+      </p:sp>
+      <p:sp>
+        <p:nvSpPr>
+          <p:cNvPr id="20" name="dot_143"/>
+          <p:cNvSpPr/>
+          <p:nvPr/>
+        </p:nvSpPr>
+        <p:spPr>
+          <a:xfrm>
+            <a:off x="7772400" y="1783080"/>
+            <a:ext cx="365760" cy="365760"/>
+          </a:xfrm>
+          <a:prstGeom prst="ellipse">
+            <a:avLst/>
+          </a:prstGeom>
+          <a:solidFill>
+            <a:srgbClr val="1F4E5F"/>
+          </a:solidFill>
+          <a:ln w="38100">
+            <a:solidFill>
+              <a:srgbClr val="FFFFFF"/>
+            </a:solidFill>
+            <a:prstDash val="solid"/>
+          </a:ln>
+        </p:spPr>
+      </p:sp>
+      <p:sp>
+        <p:nvSpPr>
+          <p:cNvPr id="21" name="text_144"/>
+          <p:cNvSpPr txBox="1"/>
+          <p:nvPr/>
+        </p:nvSpPr>
+        <p:spPr>
+          <a:xfrm>
+            <a:off x="7223760" y="1325880"/>
+            <a:ext cx="1463040" cy="320040"/>
+          </a:xfrm>
+          <a:prstGeom prst="rect">
+            <a:avLst/>
+          </a:prstGeom>
+          <a:noFill/>
+          <a:ln/>
+        </p:spPr>
+        <p:txBody>
+          <a:bodyPr wrap="square" lIns="0" tIns="0" rIns="0" bIns="0" rtlCol="0" anchor="t"/>
+          <a:lstStyle/>
+          <a:p>
+            <a:pPr algn="ctr" indent="0" marL="0">
+              <a:buNone/>
+            </a:pPr>
+            <a:r>
+              <a:rPr lang="en-US" sz="1200" dirty="0">
+                <a:solidFill>
+                  <a:schemeClr val="accent4"/>
+                </a:solidFill>
+              </a:rPr>
+              <a:t>Mar 2026</a:t>
+            </a:r>
+            <a:endParaRPr lang="en-US" sz="1200" dirty="0"/>
+          </a:p>
+        </p:txBody>
+      </p:sp>
+      <p:sp>
+        <p:nvSpPr>
+          <p:cNvPr id="22" name="text_145"/>
+          <p:cNvSpPr txBox="1"/>
+          <p:nvPr/>
+        </p:nvSpPr>
+        <p:spPr>
+          <a:xfrm>
+            <a:off x="7223760" y="2331720"/>
+            <a:ext cx="1463040" cy="365760"/>
+          </a:xfrm>
+          <a:prstGeom prst="rect">
+            <a:avLst/>
+          </a:prstGeom>
+          <a:noFill/>
+          <a:ln/>
+        </p:spPr>
+        <p:txBody>
+          <a:bodyPr wrap="square" lIns="0" tIns="0" rIns="0" bIns="0" rtlCol="0" anchor="t"/>
+          <a:lstStyle/>
+          <a:p>
+            <a:pPr algn="ctr" indent="0" marL="0">
+              <a:buNone/>
+            </a:pPr>
+            <a:r>
+              <a:rPr lang="en-US" sz="1700" b="1" dirty="0">
+                <a:solidFill>
+                  <a:schemeClr val="tx2"/>
+                </a:solidFill>
+              </a:rPr>
+              <a:t>Release</a:t>
+            </a:r>
+            <a:endParaRPr lang="en-US" sz="1700" dirty="0"/>
+          </a:p>
+        </p:txBody>
+      </p:sp>
+      <p:sp>
+        <p:nvSpPr>
+          <p:cNvPr id="23" name="text_146"/>
+          <p:cNvSpPr txBox="1"/>
+          <p:nvPr/>
+        </p:nvSpPr>
+        <p:spPr>
+          <a:xfrm>
+            <a:off x="7223760" y="2743200"/>
+            <a:ext cx="1463040" cy="1097280"/>
+          </a:xfrm>
+          <a:prstGeom prst="rect">
+            <a:avLst/>
+          </a:prstGeom>
+          <a:noFill/>
+          <a:ln/>
+        </p:spPr>
+        <p:txBody>
+          <a:bodyPr wrap="square" lIns="0" tIns="0" rIns="0" bIns="0" rtlCol="0" anchor="t"/>
+          <a:lstStyle/>
+          <a:p>
+            <a:pPr algn="ctr" indent="0" marL="0">
+              <a:buNone/>
+            </a:pPr>
+            <a:r>
+              <a:rPr lang="en-US" sz="1300" dirty="0">
+                <a:solidFill>
+                  <a:schemeClr val="tx1"/>
+                </a:solidFill>
+              </a:rPr>
+              <a:t>Docker setup and documentation</a:t>
+            </a:r>
+            <a:endParaRPr lang="en-US" sz="1300" dirty="0"/>
+          </a:p>
+        </p:txBody>
+      </p:sp>
+      <p:sp>
+        <p:nvSpPr>
+          <p:cNvPr id="24" name="card_147"/>
+          <p:cNvSpPr/>
+          <p:nvPr/>
+        </p:nvSpPr>
+        <p:spPr>
+          <a:xfrm>
+            <a:off x="457200" y="3931920"/>
+            <a:ext cx="8229600" cy="548640"/>
           </a:xfrm>
           <a:prstGeom prst="roundRect">
             <a:avLst>
-              <a:gd name="adj" fmla="val 8000"/>
-            </a:avLst>
-          </a:prstGeom>
-          <a:solidFill>
-            <a:schemeClr val="bg2"/>
-          </a:solidFill>
-          <a:ln/>
-        </p:spPr>
-      </p:sp>
-      <p:sp>
-        <p:nvSpPr>
-          <p:cNvPr id="4" name="text_127"/>
-          <p:cNvSpPr txBox="1"/>
-          <p:nvPr/>
-        </p:nvSpPr>
-        <p:spPr>
-          <a:xfrm>
-            <a:off x="640080" y="1298448"/>
-            <a:ext cx="2286000" cy="320040"/>
-          </a:xfrm>
-          <a:prstGeom prst="rect">
-            <a:avLst/>
-          </a:prstGeom>
-          <a:noFill/>
-          <a:ln/>
-        </p:spPr>
-        <p:txBody>
-          <a:bodyPr wrap="square" lIns="0" tIns="0" rIns="0" bIns="0" rtlCol="0" anchor="t"/>
-          <a:lstStyle/>
-          <a:p>
-            <a:pPr indent="0" marL="0">
-              <a:buNone/>
-            </a:pPr>
-            <a:r>
-              <a:rPr lang="en-US" sz="1400" b="1" dirty="0">
-                <a:solidFill>
-                  <a:schemeClr val="tx2"/>
-                </a:solidFill>
-              </a:rPr>
-              <a:t>BR01</a:t>
-            </a:r>
-            <a:endParaRPr lang="en-US" sz="1400" dirty="0"/>
-          </a:p>
-        </p:txBody>
-      </p:sp>
-      <p:sp>
-        <p:nvSpPr>
-          <p:cNvPr id="5" name="text_128"/>
-          <p:cNvSpPr txBox="1"/>
-          <p:nvPr/>
-        </p:nvSpPr>
-        <p:spPr>
-          <a:xfrm>
-            <a:off x="640080" y="1618488"/>
-            <a:ext cx="2377440" cy="411480"/>
-          </a:xfrm>
-          <a:prstGeom prst="rect">
-            <a:avLst/>
-          </a:prstGeom>
-          <a:noFill/>
-          <a:ln/>
-        </p:spPr>
-        <p:txBody>
-          <a:bodyPr wrap="square" lIns="0" tIns="0" rIns="0" bIns="0" rtlCol="0" anchor="t"/>
-          <a:lstStyle/>
-          <a:p>
-            <a:pPr indent="0" marL="0">
-              <a:buNone/>
-            </a:pPr>
-            <a:r>
-              <a:rPr lang="en-US" sz="1400" dirty="0">
-                <a:solidFill>
-                  <a:schemeClr val="tx1"/>
-                </a:solidFill>
-              </a:rPr>
-              <a:t>No duplicate registration</a:t>
-            </a:r>
-            <a:endParaRPr lang="en-US" sz="1400" dirty="0"/>
-          </a:p>
-        </p:txBody>
-      </p:sp>
-      <p:sp>
-        <p:nvSpPr>
-          <p:cNvPr id="6" name="card_129"/>
-          <p:cNvSpPr/>
-          <p:nvPr/>
-        </p:nvSpPr>
-        <p:spPr>
-          <a:xfrm>
-            <a:off x="3246120" y="1188720"/>
-            <a:ext cx="2651760" cy="914400"/>
-          </a:xfrm>
-          <a:prstGeom prst="roundRect">
-            <a:avLst>
-              <a:gd name="adj" fmla="val 8000"/>
+              <a:gd name="adj" fmla="val 13333"/>
             </a:avLst>
           </a:prstGeom>
           <a:solidFill>
@@ -10726,729 +8576,35 @@
       </p:sp>
       <p:sp>
         <p:nvSpPr>
-          <p:cNvPr id="7" name="text_130"/>
-          <p:cNvSpPr txBox="1"/>
-          <p:nvPr/>
-        </p:nvSpPr>
-        <p:spPr>
-          <a:xfrm>
-            <a:off x="3429000" y="1298448"/>
-            <a:ext cx="2286000" cy="320040"/>
-          </a:xfrm>
-          <a:prstGeom prst="rect">
-            <a:avLst/>
-          </a:prstGeom>
-          <a:noFill/>
-          <a:ln/>
-        </p:spPr>
-        <p:txBody>
-          <a:bodyPr wrap="square" lIns="0" tIns="0" rIns="0" bIns="0" rtlCol="0" anchor="t"/>
+          <p:cNvPr id="25" name="text_148"/>
+          <p:cNvSpPr txBox="1"/>
+          <p:nvPr/>
+        </p:nvSpPr>
+        <p:spPr>
+          <a:xfrm>
+            <a:off x="685800" y="3931920"/>
+            <a:ext cx="7772400" cy="548640"/>
+          </a:xfrm>
+          <a:prstGeom prst="rect">
+            <a:avLst/>
+          </a:prstGeom>
+          <a:noFill/>
+          <a:ln/>
+        </p:spPr>
+        <p:txBody>
+          <a:bodyPr wrap="square" lIns="0" tIns="0" rIns="0" bIns="0" rtlCol="0" anchor="ctr"/>
           <a:lstStyle/>
           <a:p>
             <a:pPr indent="0" marL="0">
               <a:buNone/>
             </a:pPr>
             <a:r>
-              <a:rPr lang="en-US" sz="1400" b="1" dirty="0">
-                <a:solidFill>
-                  <a:schemeClr val="accent2"/>
-                </a:solidFill>
-              </a:rPr>
-              <a:t>BR02</a:t>
-            </a:r>
-            <a:endParaRPr lang="en-US" sz="1400" dirty="0"/>
-          </a:p>
-        </p:txBody>
-      </p:sp>
-      <p:sp>
-        <p:nvSpPr>
-          <p:cNvPr id="8" name="text_131"/>
-          <p:cNvSpPr txBox="1"/>
-          <p:nvPr/>
-        </p:nvSpPr>
-        <p:spPr>
-          <a:xfrm>
-            <a:off x="3429000" y="1618488"/>
-            <a:ext cx="2377440" cy="411480"/>
-          </a:xfrm>
-          <a:prstGeom prst="rect">
-            <a:avLst/>
-          </a:prstGeom>
-          <a:noFill/>
-          <a:ln/>
-        </p:spPr>
-        <p:txBody>
-          <a:bodyPr wrap="square" lIns="0" tIns="0" rIns="0" bIns="0" rtlCol="0" anchor="t"/>
-          <a:lstStyle/>
-          <a:p>
-            <a:pPr indent="0" marL="0">
-              <a:buNone/>
-            </a:pPr>
-            <a:r>
               <a:rPr lang="en-US" sz="1400" dirty="0">
                 <a:solidFill>
-                  <a:schemeClr val="tx1"/>
-                </a:solidFill>
-              </a:rPr>
-              <a:t>Section must have seats</a:t>
-            </a:r>
-            <a:endParaRPr lang="en-US" sz="1400" dirty="0"/>
-          </a:p>
-        </p:txBody>
-      </p:sp>
-      <p:sp>
-        <p:nvSpPr>
-          <p:cNvPr id="9" name="card_132"/>
-          <p:cNvSpPr/>
-          <p:nvPr/>
-        </p:nvSpPr>
-        <p:spPr>
-          <a:xfrm>
-            <a:off x="6035040" y="1188720"/>
-            <a:ext cx="2651760" cy="914400"/>
-          </a:xfrm>
-          <a:prstGeom prst="roundRect">
-            <a:avLst>
-              <a:gd name="adj" fmla="val 8000"/>
-            </a:avLst>
-          </a:prstGeom>
-          <a:solidFill>
-            <a:schemeClr val="bg2"/>
-          </a:solidFill>
-          <a:ln/>
-        </p:spPr>
-      </p:sp>
-      <p:sp>
-        <p:nvSpPr>
-          <p:cNvPr id="10" name="text_133"/>
-          <p:cNvSpPr txBox="1"/>
-          <p:nvPr/>
-        </p:nvSpPr>
-        <p:spPr>
-          <a:xfrm>
-            <a:off x="6217920" y="1298448"/>
-            <a:ext cx="2286000" cy="320040"/>
-          </a:xfrm>
-          <a:prstGeom prst="rect">
-            <a:avLst/>
-          </a:prstGeom>
-          <a:noFill/>
-          <a:ln/>
-        </p:spPr>
-        <p:txBody>
-          <a:bodyPr wrap="square" lIns="0" tIns="0" rIns="0" bIns="0" rtlCol="0" anchor="t"/>
-          <a:lstStyle/>
-          <a:p>
-            <a:pPr indent="0" marL="0">
-              <a:buNone/>
-            </a:pPr>
-            <a:r>
-              <a:rPr lang="en-US" sz="1400" b="1" dirty="0">
-                <a:solidFill>
                   <a:schemeClr val="tx2"/>
                 </a:solidFill>
               </a:rPr>
-              <a:t>BR03</a:t>
-            </a:r>
-            <a:endParaRPr lang="en-US" sz="1400" dirty="0"/>
-          </a:p>
-        </p:txBody>
-      </p:sp>
-      <p:sp>
-        <p:nvSpPr>
-          <p:cNvPr id="11" name="text_134"/>
-          <p:cNvSpPr txBox="1"/>
-          <p:nvPr/>
-        </p:nvSpPr>
-        <p:spPr>
-          <a:xfrm>
-            <a:off x="6217920" y="1618488"/>
-            <a:ext cx="2377440" cy="411480"/>
-          </a:xfrm>
-          <a:prstGeom prst="rect">
-            <a:avLst/>
-          </a:prstGeom>
-          <a:noFill/>
-          <a:ln/>
-        </p:spPr>
-        <p:txBody>
-          <a:bodyPr wrap="square" lIns="0" tIns="0" rIns="0" bIns="0" rtlCol="0" anchor="t"/>
-          <a:lstStyle/>
-          <a:p>
-            <a:pPr indent="0" marL="0">
-              <a:buNone/>
-            </a:pPr>
-            <a:r>
-              <a:rPr lang="en-US" sz="1400" dirty="0">
-                <a:solidFill>
-                  <a:schemeClr val="tx1"/>
-                </a:solidFill>
-              </a:rPr>
-              <a:t>Only inside the registration window</a:t>
-            </a:r>
-            <a:endParaRPr lang="en-US" sz="1400" dirty="0"/>
-          </a:p>
-        </p:txBody>
-      </p:sp>
-      <p:sp>
-        <p:nvSpPr>
-          <p:cNvPr id="12" name="card_135"/>
-          <p:cNvSpPr/>
-          <p:nvPr/>
-        </p:nvSpPr>
-        <p:spPr>
-          <a:xfrm>
-            <a:off x="457200" y="2286000"/>
-            <a:ext cx="2651760" cy="914400"/>
-          </a:xfrm>
-          <a:prstGeom prst="roundRect">
-            <a:avLst>
-              <a:gd name="adj" fmla="val 8000"/>
-            </a:avLst>
-          </a:prstGeom>
-          <a:solidFill>
-            <a:schemeClr val="accent5"/>
-          </a:solidFill>
-          <a:ln/>
-        </p:spPr>
-      </p:sp>
-      <p:sp>
-        <p:nvSpPr>
-          <p:cNvPr id="13" name="text_136"/>
-          <p:cNvSpPr txBox="1"/>
-          <p:nvPr/>
-        </p:nvSpPr>
-        <p:spPr>
-          <a:xfrm>
-            <a:off x="640080" y="2395728"/>
-            <a:ext cx="2286000" cy="320040"/>
-          </a:xfrm>
-          <a:prstGeom prst="rect">
-            <a:avLst/>
-          </a:prstGeom>
-          <a:noFill/>
-          <a:ln/>
-        </p:spPr>
-        <p:txBody>
-          <a:bodyPr wrap="square" lIns="0" tIns="0" rIns="0" bIns="0" rtlCol="0" anchor="t"/>
-          <a:lstStyle/>
-          <a:p>
-            <a:pPr indent="0" marL="0">
-              <a:buNone/>
-            </a:pPr>
-            <a:r>
-              <a:rPr lang="en-US" sz="1400" b="1" dirty="0">
-                <a:solidFill>
-                  <a:schemeClr val="accent2"/>
-                </a:solidFill>
-              </a:rPr>
-              <a:t>BR04</a:t>
-            </a:r>
-            <a:endParaRPr lang="en-US" sz="1400" dirty="0"/>
-          </a:p>
-        </p:txBody>
-      </p:sp>
-      <p:sp>
-        <p:nvSpPr>
-          <p:cNvPr id="14" name="text_137"/>
-          <p:cNvSpPr txBox="1"/>
-          <p:nvPr/>
-        </p:nvSpPr>
-        <p:spPr>
-          <a:xfrm>
-            <a:off x="640080" y="2715768"/>
-            <a:ext cx="2377440" cy="411480"/>
-          </a:xfrm>
-          <a:prstGeom prst="rect">
-            <a:avLst/>
-          </a:prstGeom>
-          <a:noFill/>
-          <a:ln/>
-        </p:spPr>
-        <p:txBody>
-          <a:bodyPr wrap="square" lIns="0" tIns="0" rIns="0" bIns="0" rtlCol="0" anchor="t"/>
-          <a:lstStyle/>
-          <a:p>
-            <a:pPr indent="0" marL="0">
-              <a:buNone/>
-            </a:pPr>
-            <a:r>
-              <a:rPr lang="en-US" sz="1400" dirty="0">
-                <a:solidFill>
-                  <a:schemeClr val="tx1"/>
-                </a:solidFill>
-              </a:rPr>
-              <a:t>No timetable clashes</a:t>
-            </a:r>
-            <a:endParaRPr lang="en-US" sz="1400" dirty="0"/>
-          </a:p>
-        </p:txBody>
-      </p:sp>
-      <p:sp>
-        <p:nvSpPr>
-          <p:cNvPr id="15" name="card_138"/>
-          <p:cNvSpPr/>
-          <p:nvPr/>
-        </p:nvSpPr>
-        <p:spPr>
-          <a:xfrm>
-            <a:off x="3246120" y="2286000"/>
-            <a:ext cx="2651760" cy="914400"/>
-          </a:xfrm>
-          <a:prstGeom prst="roundRect">
-            <a:avLst>
-              <a:gd name="adj" fmla="val 8000"/>
-            </a:avLst>
-          </a:prstGeom>
-          <a:solidFill>
-            <a:schemeClr val="bg2"/>
-          </a:solidFill>
-          <a:ln/>
-        </p:spPr>
-      </p:sp>
-      <p:sp>
-        <p:nvSpPr>
-          <p:cNvPr id="16" name="text_139"/>
-          <p:cNvSpPr txBox="1"/>
-          <p:nvPr/>
-        </p:nvSpPr>
-        <p:spPr>
-          <a:xfrm>
-            <a:off x="3429000" y="2395728"/>
-            <a:ext cx="2286000" cy="320040"/>
-          </a:xfrm>
-          <a:prstGeom prst="rect">
-            <a:avLst/>
-          </a:prstGeom>
-          <a:noFill/>
-          <a:ln/>
-        </p:spPr>
-        <p:txBody>
-          <a:bodyPr wrap="square" lIns="0" tIns="0" rIns="0" bIns="0" rtlCol="0" anchor="t"/>
-          <a:lstStyle/>
-          <a:p>
-            <a:pPr indent="0" marL="0">
-              <a:buNone/>
-            </a:pPr>
-            <a:r>
-              <a:rPr lang="en-US" sz="1400" b="1" dirty="0">
-                <a:solidFill>
-                  <a:schemeClr val="tx2"/>
-                </a:solidFill>
-              </a:rPr>
-              <a:t>BR05</a:t>
-            </a:r>
-            <a:endParaRPr lang="en-US" sz="1400" dirty="0"/>
-          </a:p>
-        </p:txBody>
-      </p:sp>
-      <p:sp>
-        <p:nvSpPr>
-          <p:cNvPr id="17" name="text_140"/>
-          <p:cNvSpPr txBox="1"/>
-          <p:nvPr/>
-        </p:nvSpPr>
-        <p:spPr>
-          <a:xfrm>
-            <a:off x="3429000" y="2715768"/>
-            <a:ext cx="2377440" cy="411480"/>
-          </a:xfrm>
-          <a:prstGeom prst="rect">
-            <a:avLst/>
-          </a:prstGeom>
-          <a:noFill/>
-          <a:ln/>
-        </p:spPr>
-        <p:txBody>
-          <a:bodyPr wrap="square" lIns="0" tIns="0" rIns="0" bIns="0" rtlCol="0" anchor="t"/>
-          <a:lstStyle/>
-          <a:p>
-            <a:pPr indent="0" marL="0">
-              <a:buNone/>
-            </a:pPr>
-            <a:r>
-              <a:rPr lang="en-US" sz="1400" dirty="0">
-                <a:solidFill>
-                  <a:schemeClr val="tx1"/>
-                </a:solidFill>
-              </a:rPr>
-              <a:t>Suspended students are blocked</a:t>
-            </a:r>
-            <a:endParaRPr lang="en-US" sz="1400" dirty="0"/>
-          </a:p>
-        </p:txBody>
-      </p:sp>
-      <p:sp>
-        <p:nvSpPr>
-          <p:cNvPr id="18" name="card_141"/>
-          <p:cNvSpPr/>
-          <p:nvPr/>
-        </p:nvSpPr>
-        <p:spPr>
-          <a:xfrm>
-            <a:off x="6035040" y="2286000"/>
-            <a:ext cx="2651760" cy="914400"/>
-          </a:xfrm>
-          <a:prstGeom prst="roundRect">
-            <a:avLst>
-              <a:gd name="adj" fmla="val 8000"/>
-            </a:avLst>
-          </a:prstGeom>
-          <a:solidFill>
-            <a:schemeClr val="bg2"/>
-          </a:solidFill>
-          <a:ln/>
-        </p:spPr>
-      </p:sp>
-      <p:sp>
-        <p:nvSpPr>
-          <p:cNvPr id="19" name="text_142"/>
-          <p:cNvSpPr txBox="1"/>
-          <p:nvPr/>
-        </p:nvSpPr>
-        <p:spPr>
-          <a:xfrm>
-            <a:off x="6217920" y="2395728"/>
-            <a:ext cx="2286000" cy="320040"/>
-          </a:xfrm>
-          <a:prstGeom prst="rect">
-            <a:avLst/>
-          </a:prstGeom>
-          <a:noFill/>
-          <a:ln/>
-        </p:spPr>
-        <p:txBody>
-          <a:bodyPr wrap="square" lIns="0" tIns="0" rIns="0" bIns="0" rtlCol="0" anchor="t"/>
-          <a:lstStyle/>
-          <a:p>
-            <a:pPr indent="0" marL="0">
-              <a:buNone/>
-            </a:pPr>
-            <a:r>
-              <a:rPr lang="en-US" sz="1400" b="1" dirty="0">
-                <a:solidFill>
-                  <a:schemeClr val="tx2"/>
-                </a:solidFill>
-              </a:rPr>
-              <a:t>BR06</a:t>
-            </a:r>
-            <a:endParaRPr lang="en-US" sz="1400" dirty="0"/>
-          </a:p>
-        </p:txBody>
-      </p:sp>
-      <p:sp>
-        <p:nvSpPr>
-          <p:cNvPr id="20" name="text_143"/>
-          <p:cNvSpPr txBox="1"/>
-          <p:nvPr/>
-        </p:nvSpPr>
-        <p:spPr>
-          <a:xfrm>
-            <a:off x="6217920" y="2715768"/>
-            <a:ext cx="2377440" cy="411480"/>
-          </a:xfrm>
-          <a:prstGeom prst="rect">
-            <a:avLst/>
-          </a:prstGeom>
-          <a:noFill/>
-          <a:ln/>
-        </p:spPr>
-        <p:txBody>
-          <a:bodyPr wrap="square" lIns="0" tIns="0" rIns="0" bIns="0" rtlCol="0" anchor="t"/>
-          <a:lstStyle/>
-          <a:p>
-            <a:pPr indent="0" marL="0">
-              <a:buNone/>
-            </a:pPr>
-            <a:r>
-              <a:rPr lang="en-US" sz="1400" dirty="0">
-                <a:solidFill>
-                  <a:schemeClr val="tx1"/>
-                </a:solidFill>
-              </a:rPr>
-              <a:t>Section must be open</a:t>
-            </a:r>
-            <a:endParaRPr lang="en-US" sz="1400" dirty="0"/>
-          </a:p>
-        </p:txBody>
-      </p:sp>
-      <p:sp>
-        <p:nvSpPr>
-          <p:cNvPr id="21" name="card_144"/>
-          <p:cNvSpPr/>
-          <p:nvPr/>
-        </p:nvSpPr>
-        <p:spPr>
-          <a:xfrm>
-            <a:off x="457200" y="3383280"/>
-            <a:ext cx="2651760" cy="914400"/>
-          </a:xfrm>
-          <a:prstGeom prst="roundRect">
-            <a:avLst>
-              <a:gd name="adj" fmla="val 8000"/>
-            </a:avLst>
-          </a:prstGeom>
-          <a:solidFill>
-            <a:schemeClr val="bg2"/>
-          </a:solidFill>
-          <a:ln/>
-        </p:spPr>
-      </p:sp>
-      <p:sp>
-        <p:nvSpPr>
-          <p:cNvPr id="22" name="text_145"/>
-          <p:cNvSpPr txBox="1"/>
-          <p:nvPr/>
-        </p:nvSpPr>
-        <p:spPr>
-          <a:xfrm>
-            <a:off x="640080" y="3493008"/>
-            <a:ext cx="2286000" cy="320040"/>
-          </a:xfrm>
-          <a:prstGeom prst="rect">
-            <a:avLst/>
-          </a:prstGeom>
-          <a:noFill/>
-          <a:ln/>
-        </p:spPr>
-        <p:txBody>
-          <a:bodyPr wrap="square" lIns="0" tIns="0" rIns="0" bIns="0" rtlCol="0" anchor="t"/>
-          <a:lstStyle/>
-          <a:p>
-            <a:pPr indent="0" marL="0">
-              <a:buNone/>
-            </a:pPr>
-            <a:r>
-              <a:rPr lang="en-US" sz="1400" b="1" dirty="0">
-                <a:solidFill>
-                  <a:schemeClr val="tx2"/>
-                </a:solidFill>
-              </a:rPr>
-              <a:t>BR07</a:t>
-            </a:r>
-            <a:endParaRPr lang="en-US" sz="1400" dirty="0"/>
-          </a:p>
-        </p:txBody>
-      </p:sp>
-      <p:sp>
-        <p:nvSpPr>
-          <p:cNvPr id="23" name="text_146"/>
-          <p:cNvSpPr txBox="1"/>
-          <p:nvPr/>
-        </p:nvSpPr>
-        <p:spPr>
-          <a:xfrm>
-            <a:off x="640080" y="3813048"/>
-            <a:ext cx="2377440" cy="411480"/>
-          </a:xfrm>
-          <a:prstGeom prst="rect">
-            <a:avLst/>
-          </a:prstGeom>
-          <a:noFill/>
-          <a:ln/>
-        </p:spPr>
-        <p:txBody>
-          <a:bodyPr wrap="square" lIns="0" tIns="0" rIns="0" bIns="0" rtlCol="0" anchor="t"/>
-          <a:lstStyle/>
-          <a:p>
-            <a:pPr indent="0" marL="0">
-              <a:buNone/>
-            </a:pPr>
-            <a:r>
-              <a:rPr lang="en-US" sz="1400" dirty="0">
-                <a:solidFill>
-                  <a:schemeClr val="tx1"/>
-                </a:solidFill>
-              </a:rPr>
-              <a:t>Cancel only inside the window</a:t>
-            </a:r>
-            <a:endParaRPr lang="en-US" sz="1400" dirty="0"/>
-          </a:p>
-        </p:txBody>
-      </p:sp>
-      <p:sp>
-        <p:nvSpPr>
-          <p:cNvPr id="24" name="card_147"/>
-          <p:cNvSpPr/>
-          <p:nvPr/>
-        </p:nvSpPr>
-        <p:spPr>
-          <a:xfrm>
-            <a:off x="3246120" y="3383280"/>
-            <a:ext cx="2651760" cy="914400"/>
-          </a:xfrm>
-          <a:prstGeom prst="roundRect">
-            <a:avLst>
-              <a:gd name="adj" fmla="val 8000"/>
-            </a:avLst>
-          </a:prstGeom>
-          <a:solidFill>
-            <a:schemeClr val="bg2"/>
-          </a:solidFill>
-          <a:ln/>
-        </p:spPr>
-      </p:sp>
-      <p:sp>
-        <p:nvSpPr>
-          <p:cNvPr id="25" name="text_148"/>
-          <p:cNvSpPr txBox="1"/>
-          <p:nvPr/>
-        </p:nvSpPr>
-        <p:spPr>
-          <a:xfrm>
-            <a:off x="3429000" y="3493008"/>
-            <a:ext cx="2286000" cy="320040"/>
-          </a:xfrm>
-          <a:prstGeom prst="rect">
-            <a:avLst/>
-          </a:prstGeom>
-          <a:noFill/>
-          <a:ln/>
-        </p:spPr>
-        <p:txBody>
-          <a:bodyPr wrap="square" lIns="0" tIns="0" rIns="0" bIns="0" rtlCol="0" anchor="t"/>
-          <a:lstStyle/>
-          <a:p>
-            <a:pPr indent="0" marL="0">
-              <a:buNone/>
-            </a:pPr>
-            <a:r>
-              <a:rPr lang="en-US" sz="1400" b="1" dirty="0">
-                <a:solidFill>
-                  <a:schemeClr val="tx2"/>
-                </a:solidFill>
-              </a:rPr>
-              <a:t>BR08</a:t>
-            </a:r>
-            <a:endParaRPr lang="en-US" sz="1400" dirty="0"/>
-          </a:p>
-        </p:txBody>
-      </p:sp>
-      <p:sp>
-        <p:nvSpPr>
-          <p:cNvPr id="26" name="text_149"/>
-          <p:cNvSpPr txBox="1"/>
-          <p:nvPr/>
-        </p:nvSpPr>
-        <p:spPr>
-          <a:xfrm>
-            <a:off x="3429000" y="3813048"/>
-            <a:ext cx="2377440" cy="411480"/>
-          </a:xfrm>
-          <a:prstGeom prst="rect">
-            <a:avLst/>
-          </a:prstGeom>
-          <a:noFill/>
-          <a:ln/>
-        </p:spPr>
-        <p:txBody>
-          <a:bodyPr wrap="square" lIns="0" tIns="0" rIns="0" bIns="0" rtlCol="0" anchor="t"/>
-          <a:lstStyle/>
-          <a:p>
-            <a:pPr indent="0" marL="0">
-              <a:buNone/>
-            </a:pPr>
-            <a:r>
-              <a:rPr lang="en-US" sz="1400" dirty="0">
-                <a:solidFill>
-                  <a:schemeClr val="tx1"/>
-                </a:solidFill>
-              </a:rPr>
-              <a:t>Seat counter updates automatically</a:t>
-            </a:r>
-            <a:endParaRPr lang="en-US" sz="1400" dirty="0"/>
-          </a:p>
-        </p:txBody>
-      </p:sp>
-      <p:sp>
-        <p:nvSpPr>
-          <p:cNvPr id="27" name="card_150"/>
-          <p:cNvSpPr/>
-          <p:nvPr/>
-        </p:nvSpPr>
-        <p:spPr>
-          <a:xfrm>
-            <a:off x="6035040" y="3383280"/>
-            <a:ext cx="2651760" cy="914400"/>
-          </a:xfrm>
-          <a:prstGeom prst="roundRect">
-            <a:avLst>
-              <a:gd name="adj" fmla="val 8000"/>
-            </a:avLst>
-          </a:prstGeom>
-          <a:solidFill>
-            <a:schemeClr val="bg2"/>
-          </a:solidFill>
-          <a:ln/>
-        </p:spPr>
-      </p:sp>
-      <p:sp>
-        <p:nvSpPr>
-          <p:cNvPr id="28" name="text_151"/>
-          <p:cNvSpPr txBox="1"/>
-          <p:nvPr/>
-        </p:nvSpPr>
-        <p:spPr>
-          <a:xfrm>
-            <a:off x="6217920" y="3493008"/>
-            <a:ext cx="2286000" cy="320040"/>
-          </a:xfrm>
-          <a:prstGeom prst="rect">
-            <a:avLst/>
-          </a:prstGeom>
-          <a:noFill/>
-          <a:ln/>
-        </p:spPr>
-        <p:txBody>
-          <a:bodyPr wrap="square" lIns="0" tIns="0" rIns="0" bIns="0" rtlCol="0" anchor="t"/>
-          <a:lstStyle/>
-          <a:p>
-            <a:pPr indent="0" marL="0">
-              <a:buNone/>
-            </a:pPr>
-            <a:r>
-              <a:rPr lang="en-US" sz="1400" b="1" dirty="0">
-                <a:solidFill>
-                  <a:schemeClr val="tx2"/>
-                </a:solidFill>
-              </a:rPr>
-              <a:t>BR09</a:t>
-            </a:r>
-            <a:endParaRPr lang="en-US" sz="1400" dirty="0"/>
-          </a:p>
-        </p:txBody>
-      </p:sp>
-      <p:sp>
-        <p:nvSpPr>
-          <p:cNvPr id="29" name="text_152"/>
-          <p:cNvSpPr txBox="1"/>
-          <p:nvPr/>
-        </p:nvSpPr>
-        <p:spPr>
-          <a:xfrm>
-            <a:off x="6217920" y="3813048"/>
-            <a:ext cx="2377440" cy="411480"/>
-          </a:xfrm>
-          <a:prstGeom prst="rect">
-            <a:avLst/>
-          </a:prstGeom>
-          <a:noFill/>
-          <a:ln/>
-        </p:spPr>
-        <p:txBody>
-          <a:bodyPr wrap="square" lIns="0" tIns="0" rIns="0" bIns="0" rtlCol="0" anchor="t"/>
-          <a:lstStyle/>
-          <a:p>
-            <a:pPr indent="0" marL="0">
-              <a:buNone/>
-            </a:pPr>
-            <a:r>
-              <a:rPr lang="en-US" sz="1400" dirty="0">
-                <a:solidFill>
-                  <a:schemeClr val="tx1"/>
-                </a:solidFill>
-              </a:rPr>
-              <a:t>Cancellations are kept (soft delete)</a:t>
+              <a:t>Every step saved with Git, so I could always go back after a mistake</a:t>
             </a:r>
             <a:endParaRPr lang="en-US" sz="1400" dirty="0"/>
           </a:p>

--- a/report/presentation.pptx
+++ b/report/presentation.pptx
@@ -16,9 +16,10 @@
     <p:sldId id="264" r:id="rId10"/>
     <p:sldId id="265" r:id="rId11"/>
     <p:sldId id="266" r:id="rId12"/>
+    <p:sldId id="267" r:id="rId13"/>
   </p:sldIdLst>
   <p:notesMasterIdLst>
-    <p:notesMasterId r:id="rId13"/>
+    <p:notesMasterId r:id="rId14"/>
   </p:notesMasterIdLst>
   <p:sldSz cx="9144000" cy="5143500"/>
   <p:notesSz cx="5143500" cy="9144000"/>
@@ -117,39 +118,40 @@
   <p:extLst>
     <p:ext uri="{521415D9-36F7-43E2-AB2F-B90AF26B5E84}">
       <p14:sectionLst xmlns:p14="http://schemas.microsoft.com/office/powerpoint/2010/main">
-        <p14:section name="Opening" id="{c74d3087-3b1e-9d13-9523-555a6af62cd2}">
+        <p14:section name="Opening" id="{614aad71-0d2f-a5c2-ac54-9dd84e1f107f}">
           <p14:sldIdLst>
             <p14:sldId id="256"/>
           </p14:sldIdLst>
         </p14:section>
-        <p14:section name="Context" id="{8c4b1566-2b83-6736-42d6-807f5bb624a1}">
+        <p14:section name="Context" id="{3107c312-559a-afaa-75bc-0c80b9063319}">
           <p14:sldIdLst>
             <p14:sldId id="257"/>
             <p14:sldId id="258"/>
             <p14:sldId id="259"/>
           </p14:sldIdLst>
         </p14:section>
-        <p14:section name="Solution" id="{36f5953d-13ef-6a9c-9bfd-1464bdb00b3c}">
+        <p14:section name="Solution" id="{b3cca349-d7ca-7435-f37c-16a9cf6fb68f}">
           <p14:sldIdLst>
             <p14:sldId id="260"/>
             <p14:sldId id="261"/>
+            <p14:sldId id="262"/>
           </p14:sldIdLst>
         </p14:section>
-        <p14:section name="Hard part" id="{59961285-1916-8b1a-4a88-4d9268911e84}">
+        <p14:section name="Hard part" id="{a7a00222-03df-c221-5acd-2a80124e208c}">
           <p14:sldIdLst>
-            <p14:sldId id="262"/>
             <p14:sldId id="263"/>
+            <p14:sldId id="264"/>
           </p14:sldIdLst>
         </p14:section>
-        <p14:section name="Journey" id="{95629938-a30e-498f-2663-df3ee3f33e02}">
+        <p14:section name="Journey" id="{b507da08-0e7c-ee31-1407-ea7e71134d17}">
           <p14:sldIdLst>
-            <p14:sldId id="264"/>
             <p14:sldId id="265"/>
+            <p14:sldId id="266"/>
           </p14:sldIdLst>
         </p14:section>
-        <p14:section name="Closing" id="{cf7bf942-ae65-9682-e32a-7a1e8e9bb1e4}">
+        <p14:section name="Closing" id="{a921c2a5-a2e8-7ba8-d161-c98c460637a3}">
           <p14:sldIdLst>
-            <p14:sldId id="266"/>
+            <p14:sldId id="267"/>
           </p14:sldIdLst>
         </p14:section>
       </p14:sectionLst>
@@ -644,7 +646,7 @@
           <a:p>
             <a:r>
               <a:rPr lang="en-US" dirty="0"/>
-              <a:t>Finally, what did I learn? Of course, I improved my technical skills. But more importantly, I learned four skills that are useful in any job. First, plan before acting: writing the rules first saved me a lot of time. Second, learn independently: many answers were only in English documentation. Third, write clearly: writing documentation taught me to explain ideas simply. And fourth, manage my time by working in small stages. In the future, I would like to add automatic tests, a waiting list, and a prerequisite check.</a:t>
+              <a:t>Now, let me briefly describe how I built the project. I worked in five stages. In January, I analysed the real process and wrote down nine rules. In March, I built the database and the back end, then reorganised the code, built the two websites, and finally prepared the release with Docker and documentation. I used Git the whole time, so I could always go back if I made a mistake.</a:t>
             </a:r>
             <a:endParaRPr lang="en-US" dirty="0"/>
           </a:p>
@@ -732,7 +734,7 @@
           <a:p>
             <a:r>
               <a:rPr lang="en-US" dirty="0"/>
-              <a:t>To sum up, this project started from a problem I experienced myself and became a complete, working system. It taught me that good software is not only about code, but about understanding people's problems. Thank you very much for listening. I would be happy to answer any questions you may have.</a:t>
+              <a:t>Finally, what did I learn? Of course, I improved my technical skills. But more importantly, I learned four skills that are useful in any job. First, plan before acting: writing the rules first saved me a lot of time. Second, learn independently: many answers were only in English documentation. Third, write clearly: writing documentation taught me to explain ideas simply. And fourth, manage my time by working in small stages. In the future, I would like to add automatic tests, a waiting list, and a prerequisite check.</a:t>
             </a:r>
             <a:endParaRPr lang="en-US" dirty="0"/>
           </a:p>
@@ -756,6 +758,94 @@
             <a:fld id="{F7021451-1387-4CA6-816F-3879F97B5CBC}" type="slidenum">
               <a:rPr lang="en-US"/>
               <a:t>11</a:t>
+            </a:fld>
+            <a:endParaRPr lang="en-US"/>
+          </a:p>
+        </p:txBody>
+      </p:sp>
+    </p:spTree>
+    <p:extLst>
+      <p:ext uri="{BB962C8B-B14F-4D97-AF65-F5344CB8AC3E}">
+        <p14:creationId xmlns:p14="http://schemas.microsoft.com/office/powerpoint/2010/main" val="1024086991"/>
+      </p:ext>
+    </p:extLst>
+  </p:cSld>
+  <p:clrMapOvr>
+    <a:masterClrMapping/>
+  </p:clrMapOvr>
+</p:notes>
+</file>
+
+<file path=ppt/notesSlides/notesSlide12.xml><?xml version="1.0" encoding="utf-8"?>
+<p:notes xmlns:a="http://schemas.openxmlformats.org/drawingml/2006/main" xmlns:r="http://schemas.openxmlformats.org/officeDocument/2006/relationships" xmlns:p="http://schemas.openxmlformats.org/presentationml/2006/main">
+  <p:cSld>
+    <p:spTree>
+      <p:nvGrpSpPr>
+        <p:cNvPr id="1" name=""/>
+        <p:cNvGrpSpPr/>
+        <p:nvPr/>
+      </p:nvGrpSpPr>
+      <p:grpSpPr>
+        <a:xfrm>
+          <a:off x="0" y="0"/>
+          <a:ext cx="0" cy="0"/>
+          <a:chOff x="0" y="0"/>
+          <a:chExt cx="0" cy="0"/>
+        </a:xfrm>
+      </p:grpSpPr>
+      <p:sp>
+        <p:nvSpPr>
+          <p:cNvPr id="2" name="Slide Image Placeholder 1"/>
+          <p:cNvSpPr>
+            <a:spLocks noGrp="1" noRot="1" noChangeAspect="1"/>
+          </p:cNvSpPr>
+          <p:nvPr>
+            <p:ph type="sldImg"/>
+          </p:nvPr>
+        </p:nvSpPr>
+        <p:spPr/>
+      </p:sp>
+      <p:sp>
+        <p:nvSpPr>
+          <p:cNvPr id="3" name="Notes Placeholder 2"/>
+          <p:cNvSpPr>
+            <a:spLocks noGrp="1"/>
+          </p:cNvSpPr>
+          <p:nvPr>
+            <p:ph type="body" idx="1"/>
+          </p:nvPr>
+        </p:nvSpPr>
+        <p:spPr/>
+        <p:txBody>
+          <a:bodyPr/>
+          <a:lstStyle/>
+          <a:p>
+            <a:r>
+              <a:rPr lang="en-US" dirty="0"/>
+              <a:t>To sum up, this project started from a problem I experienced myself and became a complete, working system. It taught me that good software is not only about code, but about understanding people's problems. Thank you very much for listening. I would be happy to answer any questions you may have.</a:t>
+            </a:r>
+            <a:endParaRPr lang="en-US" dirty="0"/>
+          </a:p>
+        </p:txBody>
+      </p:sp>
+      <p:sp>
+        <p:nvSpPr>
+          <p:cNvPr id="4" name="Slide Number Placeholder 3"/>
+          <p:cNvSpPr>
+            <a:spLocks noGrp="1"/>
+          </p:cNvSpPr>
+          <p:nvPr>
+            <p:ph type="sldNum" sz="quarter" idx="10"/>
+          </p:nvPr>
+        </p:nvSpPr>
+        <p:spPr/>
+        <p:txBody>
+          <a:bodyPr/>
+          <a:lstStyle/>
+          <a:p>
+            <a:fld id="{F7021451-1387-4CA6-816F-3879F97B5CBC}" type="slidenum">
+              <a:rPr lang="en-US"/>
+              <a:t>12</a:t>
             </a:fld>
             <a:endParaRPr lang="en-US"/>
           </a:p>
@@ -820,7 +910,7 @@
           <a:p>
             <a:r>
               <a:rPr lang="en-US" dirty="0"/>
-              <a:t>My presentation is divided into four parts. First, I will talk about why I chose this project. Second, I will show you what the system does and how it works. Third, I will focus on the two hardest problems I had to solve. And finally, I will share what I learned. The presentation will take about seven minutes, and I will be happy to answer your questions at the end.</a:t>
+              <a:t>My presentation is divided into four parts. First, I will talk about why I chose this project. Second, I will show you what the system does and how it works. Third, I will focus on the two hardest problems I had to solve. And finally, I will share what I learned. The presentation will take about eight minutes, and I will be happy to answer your questions at the end.</a:t>
             </a:r>
             <a:endParaRPr lang="en-US" dirty="0"/>
           </a:p>
@@ -1084,7 +1174,7 @@
           <a:p>
             <a:r>
               <a:rPr lang="en-US" dirty="0"/>
-              <a:t>Now, let's move on to what the system actually does. Students can view their information, register for or cancel a class with just one click, see their weekly timetable, and check their grades. Administrators, on the other hand, can manage courses, semesters and classes, and they can monitor how many students have registered. Each user only sees the portal that matches their role.</a:t>
+              <a:t>Now, let's move on to what the system actually does. Rather than just describing it, I would like to show you some real screenshots. This is the student portal. On the left is the registration page: students can see every class, its timetable and how many seats are left, and they can register or cancel with just one click. On the right, you can see the weekly timetable, which is built automatically, and the grades page with the student's GPA.</a:t>
             </a:r>
             <a:endParaRPr lang="en-US" dirty="0"/>
           </a:p>
@@ -1172,7 +1262,7 @@
           <a:p>
             <a:r>
               <a:rPr lang="en-US" dirty="0"/>
-              <a:t>So, how does it work? Like most web applications, it has three parts. The front end is what users see in their browser; I built it with React. The back end is the 'brain': it checks who the user is and applies all the rules. And the database stores all the information. Finally, I packaged everything with a tool called Docker, so the whole system can be started with a single command.</a:t>
+              <a:t>And this is the administrator portal. Here, the academic office can open new classes and assign lecturers and rooms. They can also set the registration period for each semester and see the schedule of every room in one view. Each user only sees the portal that matches their role.</a:t>
             </a:r>
             <a:endParaRPr lang="en-US" dirty="0"/>
           </a:p>
@@ -1260,7 +1350,7 @@
           <a:p>
             <a:r>
               <a:rPr lang="en-US" dirty="0"/>
-              <a:t>This brings me to the most interesting part: the challenges. The first one is what I call 'the last seat'. Imagine a class with forty seats and thirty-nine students. Two students click Register at exactly the same moment. Without protection, both see one free seat, both are accepted, and the class ends up with forty-one students. To solve this, I made the sign-up 'all or nothing', and I lock the class for a very short moment, so the second student has to wait. When it is their turn, the system correctly says the class is full. As a final safety net, the database itself refuses more students than seats.</a:t>
+              <a:t>So, how does it work? Like most web applications, it has three parts. The front end is what users see in their browser; I built it with React. The back end is the 'brain': it checks who the user is and applies all the rules. And the database stores all the information. Finally, I packaged everything with a tool called Docker, so the whole system can be started with a single command.</a:t>
             </a:r>
             <a:endParaRPr lang="en-US" dirty="0"/>
           </a:p>
@@ -1348,7 +1438,7 @@
           <a:p>
             <a:r>
               <a:rPr lang="en-US" dirty="0"/>
-              <a:t>The second challenge was timetable clashes. It sounds easy, but some classes only meet in odd weeks, and others only in even weeks. So I defined a clear rule: two classes clash only if all three conditions on this slide are true: the same day, overlapping periods, and compatible weeks. And when there is a clash, the system does not just say 'Error'. It tells the student exactly which class is the problem.</a:t>
+              <a:t>This brings me to the most interesting part: the challenges. The first one is what I call 'the last seat'. Imagine a class with forty seats and thirty-nine students. Two students click Register at exactly the same moment. Without protection, both see one free seat, both are accepted, and the class ends up with forty-one students. To solve this, I made the sign-up 'all or nothing', and I lock the class for a very short moment, so the second student has to wait. When it is their turn, the system correctly says the class is full. As a final safety net, the database itself refuses more students than seats.</a:t>
             </a:r>
             <a:endParaRPr lang="en-US" dirty="0"/>
           </a:p>
@@ -1436,7 +1526,7 @@
           <a:p>
             <a:r>
               <a:rPr lang="en-US" dirty="0"/>
-              <a:t>Now, let me briefly describe how I built the project. I worked in five stages. In January, I analysed the real process and wrote down nine rules. In March, I built the database and the back end, then reorganised the code, built the two websites, and finally prepared the release with Docker and documentation. I used Git the whole time, so I could always go back if I made a mistake.</a:t>
+              <a:t>The second challenge was timetable clashes. It sounds easy, but some classes only meet in odd weeks, and others only in even weeks. So I defined a clear rule: two classes clash only if all three conditions on this slide are true: the same day, overlapping periods, and compatible weeks. And when there is a clash, the system does not just say 'Error'. It tells the student exactly which class is the problem.</a:t>
             </a:r>
             <a:endParaRPr lang="en-US" dirty="0"/>
           </a:p>
@@ -1623,6 +1713,119 @@
 
 <file path=ppt/slideLayouts/slideLayout3.xml><?xml version="1.0" encoding="utf-8"?>
 <p:sldLayout xmlns:a="http://schemas.openxmlformats.org/drawingml/2006/main" xmlns:r="http://schemas.openxmlformats.org/officeDocument/2006/relationships" xmlns:p="http://schemas.openxmlformats.org/presentationml/2006/main" preserve="1">
+  <p:cSld name="DARK_TITLE_IMAGE">
+    <p:bg>
+      <p:bgPr>
+        <a:solidFill>
+          <a:srgbClr val="17323D"/>
+        </a:solidFill>
+      </p:bgPr>
+    </p:bg>
+    <p:spTree>
+      <p:nvGrpSpPr>
+        <p:cNvPr id="1" name=""/>
+        <p:cNvGrpSpPr/>
+        <p:nvPr/>
+      </p:nvGrpSpPr>
+      <p:grpSpPr>
+        <a:xfrm>
+          <a:off x="0" y="0"/>
+          <a:ext cx="0" cy="0"/>
+          <a:chOff x="0" y="0"/>
+          <a:chExt cx="0" cy="0"/>
+        </a:xfrm>
+      </p:grpSpPr>
+      <p:sp>
+        <p:nvSpPr>
+          <p:cNvPr id="2" name="Text 0"/>
+          <p:cNvSpPr/>
+          <p:nvPr>
+            <p:ph idx="100" type="title" hasCustomPrompt="1"/>
+          </p:nvPr>
+        </p:nvSpPr>
+        <p:spPr>
+          <a:xfrm>
+            <a:off x="548640" y="1188720"/>
+            <a:ext cx="4114800" cy="1600200"/>
+          </a:xfrm>
+          <a:prstGeom prst="rect">
+            <a:avLst/>
+          </a:prstGeom>
+          <a:noFill/>
+          <a:ln/>
+        </p:spPr>
+        <p:txBody>
+          <a:bodyPr wrap="square" rtlCol="0"/>
+          <a:lstStyle>
+            <a:lvl1pPr algn="l" indent="0" marL="0">
+              <a:buNone/>
+              <a:defRPr lang="en-US" sz="3400" b="1" dirty="0">
+                <a:solidFill>
+                  <a:schemeClr val="bg1"/>
+                </a:solidFill>
+                <a:latin typeface="Cambria" pitchFamily="34" charset="0"/>
+                <a:ea typeface="Cambria" pitchFamily="34" charset="-122"/>
+                <a:cs typeface="Cambria" pitchFamily="34" charset="-120"/>
+              </a:defRPr>
+            </a:lvl1pPr>
+          </a:lstStyle>
+          <a:p>
+            <a:pPr algn="l" indent="0" marL="0">
+              <a:buNone/>
+            </a:pPr>
+            <a:endParaRPr lang="en-US" sz="3400" dirty="0"/>
+          </a:p>
+        </p:txBody>
+      </p:sp>
+      <p:sp>
+        <p:nvSpPr>
+          <p:cNvPr id="3" name="Text 0"/>
+          <p:cNvSpPr/>
+          <p:nvPr>
+            <p:ph idx="101" type="body" hasCustomPrompt="1"/>
+          </p:nvPr>
+        </p:nvSpPr>
+        <p:spPr>
+          <a:xfrm>
+            <a:off x="548640" y="2834640"/>
+            <a:ext cx="4023360" cy="914400"/>
+          </a:xfrm>
+          <a:prstGeom prst="rect">
+            <a:avLst/>
+          </a:prstGeom>
+          <a:noFill/>
+          <a:ln/>
+        </p:spPr>
+        <p:txBody>
+          <a:bodyPr wrap="square" rtlCol="0"/>
+          <a:lstStyle>
+            <a:lvl1pPr indent="0" marL="0">
+              <a:buNone/>
+              <a:defRPr lang="en-US" sz="1600" dirty="0">
+                <a:solidFill>
+                  <a:schemeClr val="accent5"/>
+                </a:solidFill>
+              </a:defRPr>
+            </a:lvl1pPr>
+          </a:lstStyle>
+          <a:p>
+            <a:pPr indent="0" marL="0">
+              <a:buNone/>
+            </a:pPr>
+            <a:endParaRPr lang="en-US" sz="1600" dirty="0"/>
+          </a:p>
+        </p:txBody>
+      </p:sp>
+    </p:spTree>
+  </p:cSld>
+  <p:clrMapOvr>
+    <a:masterClrMapping/>
+  </p:clrMapOvr>
+</p:sldLayout>
+</file>
+
+<file path=ppt/slideLayouts/slideLayout4.xml><?xml version="1.0" encoding="utf-8"?>
+<p:sldLayout xmlns:a="http://schemas.openxmlformats.org/drawingml/2006/main" xmlns:r="http://schemas.openxmlformats.org/officeDocument/2006/relationships" xmlns:p="http://schemas.openxmlformats.org/presentationml/2006/main" preserve="1">
   <p:cSld name="CONTENT">
     <p:bg>
       <p:bgPr>
@@ -1762,7 +1965,7 @@
             <a:pPr algn="r"/>
             <a:fld id="{F7021451-1387-4CA6-816F-3879F97B5CBC}" type="slidenum">
               <a:rPr b="0" lang="en-US"/>
-              <a:t>1003</a:t>
+              <a:t>1004</a:t>
             </a:fld>
             <a:endParaRPr lang="en-US"/>
           </a:p>
@@ -1845,6 +2048,7 @@
     <p:sldLayoutId id="2147483649" r:id="rId1"/>
     <p:sldLayoutId id="2147483650" r:id="rId2"/>
     <p:sldLayoutId id="2147483651" r:id="rId3"/>
+    <p:sldLayoutId id="2147483652" r:id="rId4"/>
   </p:sldLayoutIdLst>
   <p:hf sldNum="0" hdr="0" ftr="0" dt="0"/>
   <p:txStyles>
@@ -2125,8 +2329,8 @@
         </p:nvSpPr>
         <p:spPr>
           <a:xfrm>
-            <a:off x="640080" y="914400"/>
-            <a:ext cx="7955280" cy="365760"/>
+            <a:off x="640080" y="685800"/>
+            <a:ext cx="4023360" cy="365760"/>
           </a:xfrm>
           <a:prstGeom prst="rect">
             <a:avLst/>
@@ -2142,155 +2346,52 @@
               <a:buNone/>
             </a:pPr>
             <a:r>
-              <a:rPr lang="en-US" sz="1300" b="1" spc="200" kern="0" dirty="0">
+              <a:rPr lang="en-US" sz="1100" b="1" spc="100" kern="0" dirty="0">
                 <a:solidFill>
                   <a:schemeClr val="accent2"/>
                 </a:solidFill>
               </a:rPr>
               <a:t>DESCRIBE A PROJECT WHICH I HAVE WORKED ON</a:t>
             </a:r>
-            <a:endParaRPr lang="en-US" sz="1300" dirty="0"/>
-          </a:p>
-        </p:txBody>
-      </p:sp>
-      <p:sp>
-        <p:nvSpPr>
-          <p:cNvPr id="3" name="Text 0"/>
+            <a:endParaRPr lang="en-US" sz="1100" dirty="0"/>
+          </a:p>
+        </p:txBody>
+      </p:sp>
+      <p:sp>
+        <p:nvSpPr>
+          <p:cNvPr id="3" name="shot-frame_2"/>
           <p:cNvSpPr/>
-          <p:nvPr>
-            <p:ph idx="100" type="title" hasCustomPrompt="1"/>
-          </p:nvPr>
-        </p:nvSpPr>
-        <p:spPr>
-          <a:xfrm>
-            <a:off x="548640" y="1417320"/>
-            <a:ext cx="8046720" cy="1371600"/>
-          </a:xfrm>
-          <a:prstGeom prst="rect">
-            <a:avLst/>
-          </a:prstGeom>
-          <a:noFill/>
-          <a:ln/>
-        </p:spPr>
-        <p:txBody>
-          <a:bodyPr wrap="square" rtlCol="0" anchor="t"/>
-          <a:lstStyle/>
-          <a:p>
-            <a:pPr algn="l" indent="0" marL="0">
-              <a:buNone/>
-            </a:pPr>
-            <a:r>
-              <a:rPr lang="en-US" sz="4000" b="1" dirty="0">
-                <a:solidFill>
-                  <a:schemeClr val="bg1"/>
-                </a:solidFill>
-                <a:latin typeface="Cambria" pitchFamily="34" charset="0"/>
-                <a:ea typeface="Cambria" pitchFamily="34" charset="-122"/>
-                <a:cs typeface="Cambria" pitchFamily="34" charset="-120"/>
-              </a:rPr>
-              <a:t>Course Management &amp; Registration System</a:t>
-            </a:r>
-            <a:endParaRPr lang="en-US" sz="4000" dirty="0"/>
-          </a:p>
-        </p:txBody>
-      </p:sp>
-      <p:sp>
-        <p:nvSpPr>
-          <p:cNvPr id="4" name="Text 0"/>
-          <p:cNvSpPr/>
-          <p:nvPr>
-            <p:ph idx="101" type="body" hasCustomPrompt="1"/>
-          </p:nvPr>
-        </p:nvSpPr>
-        <p:spPr>
-          <a:xfrm>
-            <a:off x="548640" y="2834640"/>
-            <a:ext cx="8046720" cy="822960"/>
-          </a:xfrm>
-          <a:prstGeom prst="rect">
-            <a:avLst/>
-          </a:prstGeom>
-          <a:noFill/>
-          <a:ln/>
-        </p:spPr>
-        <p:txBody>
-          <a:bodyPr wrap="square" rtlCol="0" anchor="t"/>
-          <a:lstStyle/>
-          <a:p>
-            <a:pPr indent="0" marL="0">
-              <a:buNone/>
-            </a:pPr>
-            <a:r>
-              <a:rPr lang="en-US" sz="1800" dirty="0">
-                <a:solidFill>
-                  <a:schemeClr val="accent5"/>
-                </a:solidFill>
-              </a:rPr>
-              <a:t>A web application that makes course registration fair, reliable and simple</a:t>
-            </a:r>
-            <a:endParaRPr lang="en-US" sz="1800" dirty="0"/>
-          </a:p>
-        </p:txBody>
-      </p:sp>
-      <p:sp>
-        <p:nvSpPr>
-          <p:cNvPr id="5" name="text_2"/>
-          <p:cNvSpPr txBox="1"/>
-          <p:nvPr/>
-        </p:nvSpPr>
-        <p:spPr>
-          <a:xfrm>
-            <a:off x="640080" y="4251960"/>
-            <a:ext cx="7955280" cy="365760"/>
-          </a:xfrm>
-          <a:prstGeom prst="rect">
-            <a:avLst/>
-          </a:prstGeom>
-          <a:noFill/>
-          <a:ln/>
-        </p:spPr>
-        <p:txBody>
-          <a:bodyPr wrap="square" lIns="0" tIns="0" rIns="0" bIns="0" rtlCol="0" anchor="t"/>
-          <a:lstStyle/>
-          <a:p>
-            <a:pPr indent="0" marL="0">
-              <a:buNone/>
-            </a:pPr>
-            <a:r>
-              <a:rPr lang="en-US" sz="1400" dirty="0">
-                <a:solidFill>
-                  <a:schemeClr val="bg1"/>
-                </a:solidFill>
-              </a:rPr>
-              <a:t>Your Name  ·  Student ID  ·  English Writing &amp; Presentation Skills</a:t>
-            </a:r>
-            <a:endParaRPr lang="en-US" sz="1400" dirty="0"/>
-          </a:p>
-        </p:txBody>
-      </p:sp>
-      <p:sp>
-        <p:nvSpPr>
-          <p:cNvPr id="6" name="icon-bg_3"/>
-          <p:cNvSpPr/>
-          <p:nvPr/>
-        </p:nvSpPr>
-        <p:spPr>
-          <a:xfrm>
-            <a:off x="7635240" y="502920"/>
-            <a:ext cx="914400" cy="914400"/>
-          </a:xfrm>
-          <a:prstGeom prst="ellipse">
+          <p:nvPr/>
+        </p:nvSpPr>
+        <p:spPr>
+          <a:xfrm>
+            <a:off x="4828032" y="1216152"/>
+            <a:ext cx="3877056" cy="2331263"/>
+          </a:xfrm>
+          <a:prstGeom prst="rect">
             <a:avLst/>
           </a:prstGeom>
           <a:solidFill>
-            <a:srgbClr val="1F4E5F"/>
+            <a:srgbClr val="FFFFFF"/>
           </a:solidFill>
-          <a:ln/>
+          <a:ln w="9525">
+            <a:solidFill>
+              <a:srgbClr val="C9D6DA"/>
+            </a:solidFill>
+            <a:prstDash val="solid"/>
+          </a:ln>
+          <a:effectLst>
+            <a:outerShdw sx="100000" sy="100000" kx="0" ky="0" algn="bl" rotWithShape="0" blurRad="76200" dist="25400" dir="5400000">
+              <a:srgbClr val="000000">
+                <a:alpha val="12000"/>
+              </a:srgbClr>
+            </a:outerShdw>
+          </a:effectLst>
         </p:spPr>
       </p:sp>
       <p:pic>
         <p:nvPicPr>
-          <p:cNvPr id="7" name="icon_4" descr="preencoded.png">    </p:cNvPr>
+          <p:cNvPr id="4" name="screenshot_3" descr="Screenshot of the system">    </p:cNvPr>
           <p:cNvPicPr>
             <a:picLocks noChangeAspect="1"/>
           </p:cNvPicPr>
@@ -2304,14 +2405,129 @@
         </p:blipFill>
         <p:spPr>
           <a:xfrm>
-            <a:off x="7863840" y="731520"/>
-            <a:ext cx="457200" cy="457200"/>
+            <a:off x="4846320" y="1234440"/>
+            <a:ext cx="3840480" cy="2294687"/>
           </a:xfrm>
           <a:prstGeom prst="rect">
             <a:avLst/>
           </a:prstGeom>
         </p:spPr>
       </p:pic>
+      <p:sp>
+        <p:nvSpPr>
+          <p:cNvPr id="5" name="Text 0"/>
+          <p:cNvSpPr/>
+          <p:nvPr>
+            <p:ph idx="100" type="title" hasCustomPrompt="1"/>
+          </p:nvPr>
+        </p:nvSpPr>
+        <p:spPr>
+          <a:xfrm>
+            <a:off x="548640" y="1188720"/>
+            <a:ext cx="4114800" cy="1600200"/>
+          </a:xfrm>
+          <a:prstGeom prst="rect">
+            <a:avLst/>
+          </a:prstGeom>
+          <a:noFill/>
+          <a:ln/>
+        </p:spPr>
+        <p:txBody>
+          <a:bodyPr wrap="square" rtlCol="0" anchor="t"/>
+          <a:lstStyle/>
+          <a:p>
+            <a:pPr algn="l" indent="0" marL="0">
+              <a:buNone/>
+            </a:pPr>
+            <a:r>
+              <a:rPr lang="en-US" sz="3400" b="1" dirty="0">
+                <a:solidFill>
+                  <a:schemeClr val="bg1"/>
+                </a:solidFill>
+                <a:latin typeface="Cambria" pitchFamily="34" charset="0"/>
+                <a:ea typeface="Cambria" pitchFamily="34" charset="-122"/>
+                <a:cs typeface="Cambria" pitchFamily="34" charset="-120"/>
+              </a:rPr>
+              <a:t>Course Management &amp; Registration System</a:t>
+            </a:r>
+            <a:endParaRPr lang="en-US" sz="3400" dirty="0"/>
+          </a:p>
+        </p:txBody>
+      </p:sp>
+      <p:sp>
+        <p:nvSpPr>
+          <p:cNvPr id="6" name="Text 0"/>
+          <p:cNvSpPr/>
+          <p:nvPr>
+            <p:ph idx="101" type="body" hasCustomPrompt="1"/>
+          </p:nvPr>
+        </p:nvSpPr>
+        <p:spPr>
+          <a:xfrm>
+            <a:off x="548640" y="2834640"/>
+            <a:ext cx="4023360" cy="914400"/>
+          </a:xfrm>
+          <a:prstGeom prst="rect">
+            <a:avLst/>
+          </a:prstGeom>
+          <a:noFill/>
+          <a:ln/>
+        </p:spPr>
+        <p:txBody>
+          <a:bodyPr wrap="square" rtlCol="0" anchor="t"/>
+          <a:lstStyle/>
+          <a:p>
+            <a:pPr indent="0" marL="0">
+              <a:buNone/>
+            </a:pPr>
+            <a:r>
+              <a:rPr lang="en-US" sz="1600" dirty="0">
+                <a:solidFill>
+                  <a:schemeClr val="accent5"/>
+                </a:solidFill>
+              </a:rPr>
+              <a:t>A web application that makes course registration fair, reliable and simple</a:t>
+            </a:r>
+            <a:endParaRPr lang="en-US" sz="1600" dirty="0"/>
+          </a:p>
+        </p:txBody>
+      </p:sp>
+      <p:sp>
+        <p:nvSpPr>
+          <p:cNvPr id="7" name="text_4"/>
+          <p:cNvSpPr txBox="1"/>
+          <p:nvPr/>
+        </p:nvSpPr>
+        <p:spPr>
+          <a:xfrm>
+            <a:off x="640080" y="4251960"/>
+            <a:ext cx="7955280" cy="365760"/>
+          </a:xfrm>
+          <a:prstGeom prst="rect">
+            <a:avLst/>
+          </a:prstGeom>
+          <a:noFill/>
+          <a:ln/>
+        </p:spPr>
+        <p:txBody>
+          <a:bodyPr wrap="square" lIns="0" tIns="0" rIns="0" bIns="0" rtlCol="0" anchor="t"/>
+          <a:lstStyle/>
+          <a:p>
+            <a:pPr indent="0" marL="0">
+              <a:buNone/>
+            </a:pPr>
+            <a:r>
+              <a:rPr lang="en-US" sz="1400" dirty="0">
+                <a:solidFill>
+                  <a:schemeClr val="bg1"/>
+                </a:solidFill>
+              </a:rPr>
+              <a:t>Your Name  ·  Student ID  ·  English Writing &amp; Presentation Skills</a:t>
+            </a:r>
+            <a:endParaRPr lang="en-US" sz="1400" dirty="0"/>
+          </a:p>
+        </p:txBody>
+      </p:sp>
     </p:spTree>
   </p:cSld>
   <p:clrMapOvr>
@@ -2372,7 +2588,7 @@
                 <a:ea typeface="Cambria" pitchFamily="34" charset="-122"/>
                 <a:cs typeface="Cambria" pitchFamily="34" charset="-120"/>
               </a:rPr>
-              <a:t>What I learned</a:t>
+              <a:t>How I built it</a:t>
             </a:r>
             <a:endParaRPr lang="en-US" sz="3000" dirty="0"/>
           </a:p>
@@ -2380,14 +2596,170 @@
       </p:sp>
       <p:sp>
         <p:nvSpPr>
-          <p:cNvPr id="3" name="icon-bg_149"/>
+          <p:cNvPr id="3" name="timeline_142"/>
           <p:cNvSpPr/>
           <p:nvPr/>
         </p:nvSpPr>
         <p:spPr>
           <a:xfrm>
-            <a:off x="457200" y="1143000"/>
-            <a:ext cx="640080" cy="640080"/>
+            <a:off x="1188720" y="1965960"/>
+            <a:ext cx="6766560" cy="0"/>
+          </a:xfrm>
+          <a:prstGeom prst="line">
+            <a:avLst/>
+          </a:prstGeom>
+          <a:noFill/>
+          <a:ln w="38100">
+            <a:solidFill>
+              <a:srgbClr val="C9D6DA"/>
+            </a:solidFill>
+            <a:prstDash val="solid"/>
+          </a:ln>
+        </p:spPr>
+      </p:sp>
+      <p:sp>
+        <p:nvSpPr>
+          <p:cNvPr id="4" name="dot_143"/>
+          <p:cNvSpPr/>
+          <p:nvPr/>
+        </p:nvSpPr>
+        <p:spPr>
+          <a:xfrm>
+            <a:off x="1005840" y="1783080"/>
+            <a:ext cx="365760" cy="365760"/>
+          </a:xfrm>
+          <a:prstGeom prst="ellipse">
+            <a:avLst/>
+          </a:prstGeom>
+          <a:solidFill>
+            <a:srgbClr val="E07A2F"/>
+          </a:solidFill>
+          <a:ln w="38100">
+            <a:solidFill>
+              <a:srgbClr val="FFFFFF"/>
+            </a:solidFill>
+            <a:prstDash val="solid"/>
+          </a:ln>
+        </p:spPr>
+      </p:sp>
+      <p:sp>
+        <p:nvSpPr>
+          <p:cNvPr id="5" name="text_144"/>
+          <p:cNvSpPr txBox="1"/>
+          <p:nvPr/>
+        </p:nvSpPr>
+        <p:spPr>
+          <a:xfrm>
+            <a:off x="457200" y="1325880"/>
+            <a:ext cx="1463040" cy="320040"/>
+          </a:xfrm>
+          <a:prstGeom prst="rect">
+            <a:avLst/>
+          </a:prstGeom>
+          <a:noFill/>
+          <a:ln/>
+        </p:spPr>
+        <p:txBody>
+          <a:bodyPr wrap="square" lIns="0" tIns="0" rIns="0" bIns="0" rtlCol="0" anchor="t"/>
+          <a:lstStyle/>
+          <a:p>
+            <a:pPr algn="ctr" indent="0" marL="0">
+              <a:buNone/>
+            </a:pPr>
+            <a:r>
+              <a:rPr lang="en-US" sz="1200" dirty="0">
+                <a:solidFill>
+                  <a:schemeClr val="accent4"/>
+                </a:solidFill>
+              </a:rPr>
+              <a:t>Jan 2026</a:t>
+            </a:r>
+            <a:endParaRPr lang="en-US" sz="1200" dirty="0"/>
+          </a:p>
+        </p:txBody>
+      </p:sp>
+      <p:sp>
+        <p:nvSpPr>
+          <p:cNvPr id="6" name="text_145"/>
+          <p:cNvSpPr txBox="1"/>
+          <p:nvPr/>
+        </p:nvSpPr>
+        <p:spPr>
+          <a:xfrm>
+            <a:off x="457200" y="2331720"/>
+            <a:ext cx="1463040" cy="365760"/>
+          </a:xfrm>
+          <a:prstGeom prst="rect">
+            <a:avLst/>
+          </a:prstGeom>
+          <a:noFill/>
+          <a:ln/>
+        </p:spPr>
+        <p:txBody>
+          <a:bodyPr wrap="square" lIns="0" tIns="0" rIns="0" bIns="0" rtlCol="0" anchor="t"/>
+          <a:lstStyle/>
+          <a:p>
+            <a:pPr algn="ctr" indent="0" marL="0">
+              <a:buNone/>
+            </a:pPr>
+            <a:r>
+              <a:rPr lang="en-US" sz="1700" b="1" dirty="0">
+                <a:solidFill>
+                  <a:schemeClr val="tx2"/>
+                </a:solidFill>
+              </a:rPr>
+              <a:t>Analysis</a:t>
+            </a:r>
+            <a:endParaRPr lang="en-US" sz="1700" dirty="0"/>
+          </a:p>
+        </p:txBody>
+      </p:sp>
+      <p:sp>
+        <p:nvSpPr>
+          <p:cNvPr id="7" name="text_146"/>
+          <p:cNvSpPr txBox="1"/>
+          <p:nvPr/>
+        </p:nvSpPr>
+        <p:spPr>
+          <a:xfrm>
+            <a:off x="457200" y="2743200"/>
+            <a:ext cx="1463040" cy="1097280"/>
+          </a:xfrm>
+          <a:prstGeom prst="rect">
+            <a:avLst/>
+          </a:prstGeom>
+          <a:noFill/>
+          <a:ln/>
+        </p:spPr>
+        <p:txBody>
+          <a:bodyPr wrap="square" lIns="0" tIns="0" rIns="0" bIns="0" rtlCol="0" anchor="t"/>
+          <a:lstStyle/>
+          <a:p>
+            <a:pPr algn="ctr" indent="0" marL="0">
+              <a:buNone/>
+            </a:pPr>
+            <a:r>
+              <a:rPr lang="en-US" sz="1300" dirty="0">
+                <a:solidFill>
+                  <a:schemeClr val="tx1"/>
+                </a:solidFill>
+              </a:rPr>
+              <a:t>Studied the real process, wrote the 9 rules</a:t>
+            </a:r>
+            <a:endParaRPr lang="en-US" sz="1300" dirty="0"/>
+          </a:p>
+        </p:txBody>
+      </p:sp>
+      <p:sp>
+        <p:nvSpPr>
+          <p:cNvPr id="8" name="dot_147"/>
+          <p:cNvSpPr/>
+          <p:nvPr/>
+        </p:nvSpPr>
+        <p:spPr>
+          <a:xfrm>
+            <a:off x="2697480" y="1783080"/>
+            <a:ext cx="365760" cy="365760"/>
           </a:xfrm>
           <a:prstGeom prst="ellipse">
             <a:avLst/>
@@ -2395,43 +2767,24 @@
           <a:solidFill>
             <a:srgbClr val="1F4E5F"/>
           </a:solidFill>
-          <a:ln/>
-        </p:spPr>
-      </p:sp>
-      <p:pic>
-        <p:nvPicPr>
-          <p:cNvPr id="4" name="icon_150" descr="preencoded.png">    </p:cNvPr>
-          <p:cNvPicPr>
-            <a:picLocks noChangeAspect="1"/>
-          </p:cNvPicPr>
-          <p:nvPr/>
-        </p:nvPicPr>
-        <p:blipFill>
-          <a:blip r:embed="rId1"/>
-          <a:stretch>
-            <a:fillRect/>
-          </a:stretch>
-        </p:blipFill>
-        <p:spPr>
-          <a:xfrm>
-            <a:off x="617220" y="1303020"/>
-            <a:ext cx="320040" cy="320040"/>
-          </a:xfrm>
-          <a:prstGeom prst="rect">
-            <a:avLst/>
-          </a:prstGeom>
-        </p:spPr>
-      </p:pic>
-      <p:sp>
-        <p:nvSpPr>
-          <p:cNvPr id="5" name="text_151"/>
-          <p:cNvSpPr txBox="1"/>
-          <p:nvPr/>
-        </p:nvSpPr>
-        <p:spPr>
-          <a:xfrm>
-            <a:off x="1280160" y="1161288"/>
-            <a:ext cx="3657600" cy="320040"/>
+          <a:ln w="38100">
+            <a:solidFill>
+              <a:srgbClr val="FFFFFF"/>
+            </a:solidFill>
+            <a:prstDash val="solid"/>
+          </a:ln>
+        </p:spPr>
+      </p:sp>
+      <p:sp>
+        <p:nvSpPr>
+          <p:cNvPr id="9" name="text_148"/>
+          <p:cNvSpPr txBox="1"/>
+          <p:nvPr/>
+        </p:nvSpPr>
+        <p:spPr>
+          <a:xfrm>
+            <a:off x="2148840" y="1325880"/>
+            <a:ext cx="1463040" cy="320040"/>
           </a:xfrm>
           <a:prstGeom prst="rect">
             <a:avLst/>
@@ -2443,7 +2796,43 @@
           <a:bodyPr wrap="square" lIns="0" tIns="0" rIns="0" bIns="0" rtlCol="0" anchor="t"/>
           <a:lstStyle/>
           <a:p>
-            <a:pPr indent="0" marL="0">
+            <a:pPr algn="ctr" indent="0" marL="0">
+              <a:buNone/>
+            </a:pPr>
+            <a:r>
+              <a:rPr lang="en-US" sz="1200" dirty="0">
+                <a:solidFill>
+                  <a:schemeClr val="accent4"/>
+                </a:solidFill>
+              </a:rPr>
+              <a:t>Mar 2026</a:t>
+            </a:r>
+            <a:endParaRPr lang="en-US" sz="1200" dirty="0"/>
+          </a:p>
+        </p:txBody>
+      </p:sp>
+      <p:sp>
+        <p:nvSpPr>
+          <p:cNvPr id="10" name="text_149"/>
+          <p:cNvSpPr txBox="1"/>
+          <p:nvPr/>
+        </p:nvSpPr>
+        <p:spPr>
+          <a:xfrm>
+            <a:off x="2148840" y="2331720"/>
+            <a:ext cx="1463040" cy="365760"/>
+          </a:xfrm>
+          <a:prstGeom prst="rect">
+            <a:avLst/>
+          </a:prstGeom>
+          <a:noFill/>
+          <a:ln/>
+        </p:spPr>
+        <p:txBody>
+          <a:bodyPr wrap="square" lIns="0" tIns="0" rIns="0" bIns="0" rtlCol="0" anchor="t"/>
+          <a:lstStyle/>
+          <a:p>
+            <a:pPr algn="ctr" indent="0" marL="0">
               <a:buNone/>
             </a:pPr>
             <a:r>
@@ -2452,7 +2841,7 @@
                   <a:schemeClr val="tx2"/>
                 </a:solidFill>
               </a:rPr>
-              <a:t>Plan before acting</a:t>
+              <a:t>Back end</a:t>
             </a:r>
             <a:endParaRPr lang="en-US" sz="1700" dirty="0"/>
           </a:p>
@@ -2460,14 +2849,14 @@
       </p:sp>
       <p:sp>
         <p:nvSpPr>
-          <p:cNvPr id="6" name="text_152"/>
-          <p:cNvSpPr txBox="1"/>
-          <p:nvPr/>
-        </p:nvSpPr>
-        <p:spPr>
-          <a:xfrm>
-            <a:off x="1280160" y="1481328"/>
-            <a:ext cx="4023360" cy="320040"/>
+          <p:cNvPr id="11" name="text_150"/>
+          <p:cNvSpPr txBox="1"/>
+          <p:nvPr/>
+        </p:nvSpPr>
+        <p:spPr>
+          <a:xfrm>
+            <a:off x="2148840" y="2743200"/>
+            <a:ext cx="1463040" cy="1097280"/>
           </a:xfrm>
           <a:prstGeom prst="rect">
             <a:avLst/>
@@ -2479,31 +2868,31 @@
           <a:bodyPr wrap="square" lIns="0" tIns="0" rIns="0" bIns="0" rtlCol="0" anchor="t"/>
           <a:lstStyle/>
           <a:p>
-            <a:pPr indent="0" marL="0">
-              <a:buNone/>
-            </a:pPr>
-            <a:r>
-              <a:rPr lang="en-US" sz="1400" dirty="0">
+            <a:pPr algn="ctr" indent="0" marL="0">
+              <a:buNone/>
+            </a:pPr>
+            <a:r>
+              <a:rPr lang="en-US" sz="1300" dirty="0">
                 <a:solidFill>
                   <a:schemeClr val="tx1"/>
                 </a:solidFill>
               </a:rPr>
-              <a:t>Writing the nine rules first saved me a lot of time</a:t>
-            </a:r>
-            <a:endParaRPr lang="en-US" sz="1400" dirty="0"/>
-          </a:p>
-        </p:txBody>
-      </p:sp>
-      <p:sp>
-        <p:nvSpPr>
-          <p:cNvPr id="7" name="icon-bg_153"/>
+              <a:t>Database and all the registration rules</a:t>
+            </a:r>
+            <a:endParaRPr lang="en-US" sz="1300" dirty="0"/>
+          </a:p>
+        </p:txBody>
+      </p:sp>
+      <p:sp>
+        <p:nvSpPr>
+          <p:cNvPr id="12" name="dot_151"/>
           <p:cNvSpPr/>
           <p:nvPr/>
         </p:nvSpPr>
         <p:spPr>
           <a:xfrm>
-            <a:off x="457200" y="1984248"/>
-            <a:ext cx="640080" cy="640080"/>
+            <a:off x="4389120" y="1783080"/>
+            <a:ext cx="365760" cy="365760"/>
           </a:xfrm>
           <a:prstGeom prst="ellipse">
             <a:avLst/>
@@ -2511,43 +2900,24 @@
           <a:solidFill>
             <a:srgbClr val="1F4E5F"/>
           </a:solidFill>
-          <a:ln/>
-        </p:spPr>
-      </p:sp>
-      <p:pic>
-        <p:nvPicPr>
-          <p:cNvPr id="8" name="icon_154" descr="preencoded.png">    </p:cNvPr>
-          <p:cNvPicPr>
-            <a:picLocks noChangeAspect="1"/>
-          </p:cNvPicPr>
-          <p:nvPr/>
-        </p:nvPicPr>
-        <p:blipFill>
-          <a:blip r:embed="rId2"/>
-          <a:stretch>
-            <a:fillRect/>
-          </a:stretch>
-        </p:blipFill>
-        <p:spPr>
-          <a:xfrm>
-            <a:off x="617220" y="2144268"/>
-            <a:ext cx="320040" cy="320040"/>
-          </a:xfrm>
-          <a:prstGeom prst="rect">
-            <a:avLst/>
-          </a:prstGeom>
-        </p:spPr>
-      </p:pic>
-      <p:sp>
-        <p:nvSpPr>
-          <p:cNvPr id="9" name="text_155"/>
-          <p:cNvSpPr txBox="1"/>
-          <p:nvPr/>
-        </p:nvSpPr>
-        <p:spPr>
-          <a:xfrm>
-            <a:off x="1280160" y="2002536"/>
-            <a:ext cx="3657600" cy="320040"/>
+          <a:ln w="38100">
+            <a:solidFill>
+              <a:srgbClr val="FFFFFF"/>
+            </a:solidFill>
+            <a:prstDash val="solid"/>
+          </a:ln>
+        </p:spPr>
+      </p:sp>
+      <p:sp>
+        <p:nvSpPr>
+          <p:cNvPr id="13" name="text_152"/>
+          <p:cNvSpPr txBox="1"/>
+          <p:nvPr/>
+        </p:nvSpPr>
+        <p:spPr>
+          <a:xfrm>
+            <a:off x="3840480" y="1325880"/>
+            <a:ext cx="1463040" cy="320040"/>
           </a:xfrm>
           <a:prstGeom prst="rect">
             <a:avLst/>
@@ -2559,7 +2929,43 @@
           <a:bodyPr wrap="square" lIns="0" tIns="0" rIns="0" bIns="0" rtlCol="0" anchor="t"/>
           <a:lstStyle/>
           <a:p>
-            <a:pPr indent="0" marL="0">
+            <a:pPr algn="ctr" indent="0" marL="0">
+              <a:buNone/>
+            </a:pPr>
+            <a:r>
+              <a:rPr lang="en-US" sz="1200" dirty="0">
+                <a:solidFill>
+                  <a:schemeClr val="accent4"/>
+                </a:solidFill>
+              </a:rPr>
+              <a:t>Mar 2026</a:t>
+            </a:r>
+            <a:endParaRPr lang="en-US" sz="1200" dirty="0"/>
+          </a:p>
+        </p:txBody>
+      </p:sp>
+      <p:sp>
+        <p:nvSpPr>
+          <p:cNvPr id="14" name="text_153"/>
+          <p:cNvSpPr txBox="1"/>
+          <p:nvPr/>
+        </p:nvSpPr>
+        <p:spPr>
+          <a:xfrm>
+            <a:off x="3840480" y="2331720"/>
+            <a:ext cx="1463040" cy="365760"/>
+          </a:xfrm>
+          <a:prstGeom prst="rect">
+            <a:avLst/>
+          </a:prstGeom>
+          <a:noFill/>
+          <a:ln/>
+        </p:spPr>
+        <p:txBody>
+          <a:bodyPr wrap="square" lIns="0" tIns="0" rIns="0" bIns="0" rtlCol="0" anchor="t"/>
+          <a:lstStyle/>
+          <a:p>
+            <a:pPr algn="ctr" indent="0" marL="0">
               <a:buNone/>
             </a:pPr>
             <a:r>
@@ -2568,7 +2974,7 @@
                   <a:schemeClr val="tx2"/>
                 </a:solidFill>
               </a:rPr>
-              <a:t>Learn independently</a:t>
+              <a:t>Reorganise</a:t>
             </a:r>
             <a:endParaRPr lang="en-US" sz="1700" dirty="0"/>
           </a:p>
@@ -2576,14 +2982,14 @@
       </p:sp>
       <p:sp>
         <p:nvSpPr>
-          <p:cNvPr id="10" name="text_156"/>
-          <p:cNvSpPr txBox="1"/>
-          <p:nvPr/>
-        </p:nvSpPr>
-        <p:spPr>
-          <a:xfrm>
-            <a:off x="1280160" y="2322576"/>
-            <a:ext cx="4023360" cy="320040"/>
+          <p:cNvPr id="15" name="text_154"/>
+          <p:cNvSpPr txBox="1"/>
+          <p:nvPr/>
+        </p:nvSpPr>
+        <p:spPr>
+          <a:xfrm>
+            <a:off x="3840480" y="2743200"/>
+            <a:ext cx="1463040" cy="1097280"/>
           </a:xfrm>
           <a:prstGeom prst="rect">
             <a:avLst/>
@@ -2595,31 +3001,31 @@
           <a:bodyPr wrap="square" lIns="0" tIns="0" rIns="0" bIns="0" rtlCol="0" anchor="t"/>
           <a:lstStyle/>
           <a:p>
-            <a:pPr indent="0" marL="0">
-              <a:buNone/>
-            </a:pPr>
-            <a:r>
-              <a:rPr lang="en-US" sz="1400" dirty="0">
+            <a:pPr algn="ctr" indent="0" marL="0">
+              <a:buNone/>
+            </a:pPr>
+            <a:r>
+              <a:rPr lang="en-US" sz="1300" dirty="0">
                 <a:solidFill>
                   <a:schemeClr val="tx1"/>
                 </a:solidFill>
               </a:rPr>
-              <a:t>I found many answers in English documentation</a:t>
-            </a:r>
-            <a:endParaRPr lang="en-US" sz="1400" dirty="0"/>
-          </a:p>
-        </p:txBody>
-      </p:sp>
-      <p:sp>
-        <p:nvSpPr>
-          <p:cNvPr id="11" name="icon-bg_157"/>
+              <a:t>One clean project for all the code</a:t>
+            </a:r>
+            <a:endParaRPr lang="en-US" sz="1300" dirty="0"/>
+          </a:p>
+        </p:txBody>
+      </p:sp>
+      <p:sp>
+        <p:nvSpPr>
+          <p:cNvPr id="16" name="dot_155"/>
           <p:cNvSpPr/>
           <p:nvPr/>
         </p:nvSpPr>
         <p:spPr>
           <a:xfrm>
-            <a:off x="457200" y="2825496"/>
-            <a:ext cx="640080" cy="640080"/>
+            <a:off x="6080760" y="1783080"/>
+            <a:ext cx="365760" cy="365760"/>
           </a:xfrm>
           <a:prstGeom prst="ellipse">
             <a:avLst/>
@@ -2627,43 +3033,24 @@
           <a:solidFill>
             <a:srgbClr val="1F4E5F"/>
           </a:solidFill>
-          <a:ln/>
-        </p:spPr>
-      </p:sp>
-      <p:pic>
-        <p:nvPicPr>
-          <p:cNvPr id="12" name="icon_158" descr="preencoded.png">    </p:cNvPr>
-          <p:cNvPicPr>
-            <a:picLocks noChangeAspect="1"/>
-          </p:cNvPicPr>
-          <p:nvPr/>
-        </p:nvPicPr>
-        <p:blipFill>
-          <a:blip r:embed="rId3"/>
-          <a:stretch>
-            <a:fillRect/>
-          </a:stretch>
-        </p:blipFill>
-        <p:spPr>
-          <a:xfrm>
-            <a:off x="617220" y="2985516"/>
-            <a:ext cx="320040" cy="320040"/>
-          </a:xfrm>
-          <a:prstGeom prst="rect">
-            <a:avLst/>
-          </a:prstGeom>
-        </p:spPr>
-      </p:pic>
-      <p:sp>
-        <p:nvSpPr>
-          <p:cNvPr id="13" name="text_159"/>
-          <p:cNvSpPr txBox="1"/>
-          <p:nvPr/>
-        </p:nvSpPr>
-        <p:spPr>
-          <a:xfrm>
-            <a:off x="1280160" y="2843784"/>
-            <a:ext cx="3657600" cy="320040"/>
+          <a:ln w="38100">
+            <a:solidFill>
+              <a:srgbClr val="FFFFFF"/>
+            </a:solidFill>
+            <a:prstDash val="solid"/>
+          </a:ln>
+        </p:spPr>
+      </p:sp>
+      <p:sp>
+        <p:nvSpPr>
+          <p:cNvPr id="17" name="text_156"/>
+          <p:cNvSpPr txBox="1"/>
+          <p:nvPr/>
+        </p:nvSpPr>
+        <p:spPr>
+          <a:xfrm>
+            <a:off x="5532120" y="1325880"/>
+            <a:ext cx="1463040" cy="320040"/>
           </a:xfrm>
           <a:prstGeom prst="rect">
             <a:avLst/>
@@ -2675,7 +3062,43 @@
           <a:bodyPr wrap="square" lIns="0" tIns="0" rIns="0" bIns="0" rtlCol="0" anchor="t"/>
           <a:lstStyle/>
           <a:p>
-            <a:pPr indent="0" marL="0">
+            <a:pPr algn="ctr" indent="0" marL="0">
+              <a:buNone/>
+            </a:pPr>
+            <a:r>
+              <a:rPr lang="en-US" sz="1200" dirty="0">
+                <a:solidFill>
+                  <a:schemeClr val="accent4"/>
+                </a:solidFill>
+              </a:rPr>
+              <a:t>Mar 2026</a:t>
+            </a:r>
+            <a:endParaRPr lang="en-US" sz="1200" dirty="0"/>
+          </a:p>
+        </p:txBody>
+      </p:sp>
+      <p:sp>
+        <p:nvSpPr>
+          <p:cNvPr id="18" name="text_157"/>
+          <p:cNvSpPr txBox="1"/>
+          <p:nvPr/>
+        </p:nvSpPr>
+        <p:spPr>
+          <a:xfrm>
+            <a:off x="5532120" y="2331720"/>
+            <a:ext cx="1463040" cy="365760"/>
+          </a:xfrm>
+          <a:prstGeom prst="rect">
+            <a:avLst/>
+          </a:prstGeom>
+          <a:noFill/>
+          <a:ln/>
+        </p:spPr>
+        <p:txBody>
+          <a:bodyPr wrap="square" lIns="0" tIns="0" rIns="0" bIns="0" rtlCol="0" anchor="t"/>
+          <a:lstStyle/>
+          <a:p>
+            <a:pPr algn="ctr" indent="0" marL="0">
               <a:buNone/>
             </a:pPr>
             <a:r>
@@ -2684,7 +3107,7 @@
                   <a:schemeClr val="tx2"/>
                 </a:solidFill>
               </a:rPr>
-              <a:t>Write clearly</a:t>
+              <a:t>Front end</a:t>
             </a:r>
             <a:endParaRPr lang="en-US" sz="1700" dirty="0"/>
           </a:p>
@@ -2692,14 +3115,14 @@
       </p:sp>
       <p:sp>
         <p:nvSpPr>
-          <p:cNvPr id="14" name="text_160"/>
-          <p:cNvSpPr txBox="1"/>
-          <p:nvPr/>
-        </p:nvSpPr>
-        <p:spPr>
-          <a:xfrm>
-            <a:off x="1280160" y="3163824"/>
-            <a:ext cx="4023360" cy="320040"/>
+          <p:cNvPr id="19" name="text_158"/>
+          <p:cNvSpPr txBox="1"/>
+          <p:nvPr/>
+        </p:nvSpPr>
+        <p:spPr>
+          <a:xfrm>
+            <a:off x="5532120" y="2743200"/>
+            <a:ext cx="1463040" cy="1097280"/>
           </a:xfrm>
           <a:prstGeom prst="rect">
             <a:avLst/>
@@ -2711,31 +3134,31 @@
           <a:bodyPr wrap="square" lIns="0" tIns="0" rIns="0" bIns="0" rtlCol="0" anchor="t"/>
           <a:lstStyle/>
           <a:p>
-            <a:pPr indent="0" marL="0">
-              <a:buNone/>
-            </a:pPr>
-            <a:r>
-              <a:rPr lang="en-US" sz="1400" dirty="0">
+            <a:pPr algn="ctr" indent="0" marL="0">
+              <a:buNone/>
+            </a:pPr>
+            <a:r>
+              <a:rPr lang="en-US" sz="1300" dirty="0">
                 <a:solidFill>
                   <a:schemeClr val="tx1"/>
                 </a:solidFill>
               </a:rPr>
-              <a:t>Documentation taught me to explain ideas simply</a:t>
-            </a:r>
-            <a:endParaRPr lang="en-US" sz="1400" dirty="0"/>
-          </a:p>
-        </p:txBody>
-      </p:sp>
-      <p:sp>
-        <p:nvSpPr>
-          <p:cNvPr id="15" name="icon-bg_161"/>
+              <a:t>Student and admin websites, dark mode</a:t>
+            </a:r>
+            <a:endParaRPr lang="en-US" sz="1300" dirty="0"/>
+          </a:p>
+        </p:txBody>
+      </p:sp>
+      <p:sp>
+        <p:nvSpPr>
+          <p:cNvPr id="20" name="dot_159"/>
           <p:cNvSpPr/>
           <p:nvPr/>
         </p:nvSpPr>
         <p:spPr>
           <a:xfrm>
-            <a:off x="457200" y="3666744"/>
-            <a:ext cx="640080" cy="640080"/>
+            <a:off x="7772400" y="1783080"/>
+            <a:ext cx="365760" cy="365760"/>
           </a:xfrm>
           <a:prstGeom prst="ellipse">
             <a:avLst/>
@@ -2743,43 +3166,24 @@
           <a:solidFill>
             <a:srgbClr val="1F4E5F"/>
           </a:solidFill>
-          <a:ln/>
-        </p:spPr>
-      </p:sp>
-      <p:pic>
-        <p:nvPicPr>
-          <p:cNvPr id="16" name="icon_162" descr="preencoded.png">    </p:cNvPr>
-          <p:cNvPicPr>
-            <a:picLocks noChangeAspect="1"/>
-          </p:cNvPicPr>
-          <p:nvPr/>
-        </p:nvPicPr>
-        <p:blipFill>
-          <a:blip r:embed="rId4"/>
-          <a:stretch>
-            <a:fillRect/>
-          </a:stretch>
-        </p:blipFill>
-        <p:spPr>
-          <a:xfrm>
-            <a:off x="617220" y="3826764"/>
-            <a:ext cx="320040" cy="320040"/>
-          </a:xfrm>
-          <a:prstGeom prst="rect">
-            <a:avLst/>
-          </a:prstGeom>
-        </p:spPr>
-      </p:pic>
-      <p:sp>
-        <p:nvSpPr>
-          <p:cNvPr id="17" name="text_163"/>
-          <p:cNvSpPr txBox="1"/>
-          <p:nvPr/>
-        </p:nvSpPr>
-        <p:spPr>
-          <a:xfrm>
-            <a:off x="1280160" y="3685032"/>
-            <a:ext cx="3657600" cy="320040"/>
+          <a:ln w="38100">
+            <a:solidFill>
+              <a:srgbClr val="FFFFFF"/>
+            </a:solidFill>
+            <a:prstDash val="solid"/>
+          </a:ln>
+        </p:spPr>
+      </p:sp>
+      <p:sp>
+        <p:nvSpPr>
+          <p:cNvPr id="21" name="text_160"/>
+          <p:cNvSpPr txBox="1"/>
+          <p:nvPr/>
+        </p:nvSpPr>
+        <p:spPr>
+          <a:xfrm>
+            <a:off x="7223760" y="1325880"/>
+            <a:ext cx="1463040" cy="320040"/>
           </a:xfrm>
           <a:prstGeom prst="rect">
             <a:avLst/>
@@ -2791,7 +3195,43 @@
           <a:bodyPr wrap="square" lIns="0" tIns="0" rIns="0" bIns="0" rtlCol="0" anchor="t"/>
           <a:lstStyle/>
           <a:p>
-            <a:pPr indent="0" marL="0">
+            <a:pPr algn="ctr" indent="0" marL="0">
+              <a:buNone/>
+            </a:pPr>
+            <a:r>
+              <a:rPr lang="en-US" sz="1200" dirty="0">
+                <a:solidFill>
+                  <a:schemeClr val="accent4"/>
+                </a:solidFill>
+              </a:rPr>
+              <a:t>Mar 2026</a:t>
+            </a:r>
+            <a:endParaRPr lang="en-US" sz="1200" dirty="0"/>
+          </a:p>
+        </p:txBody>
+      </p:sp>
+      <p:sp>
+        <p:nvSpPr>
+          <p:cNvPr id="22" name="text_161"/>
+          <p:cNvSpPr txBox="1"/>
+          <p:nvPr/>
+        </p:nvSpPr>
+        <p:spPr>
+          <a:xfrm>
+            <a:off x="7223760" y="2331720"/>
+            <a:ext cx="1463040" cy="365760"/>
+          </a:xfrm>
+          <a:prstGeom prst="rect">
+            <a:avLst/>
+          </a:prstGeom>
+          <a:noFill/>
+          <a:ln/>
+        </p:spPr>
+        <p:txBody>
+          <a:bodyPr wrap="square" lIns="0" tIns="0" rIns="0" bIns="0" rtlCol="0" anchor="t"/>
+          <a:lstStyle/>
+          <a:p>
+            <a:pPr algn="ctr" indent="0" marL="0">
               <a:buNone/>
             </a:pPr>
             <a:r>
@@ -2800,7 +3240,7 @@
                   <a:schemeClr val="tx2"/>
                 </a:solidFill>
               </a:rPr>
-              <a:t>Manage my time</a:t>
+              <a:t>Release</a:t>
             </a:r>
             <a:endParaRPr lang="en-US" sz="1700" dirty="0"/>
           </a:p>
@@ -2808,14 +3248,14 @@
       </p:sp>
       <p:sp>
         <p:nvSpPr>
-          <p:cNvPr id="18" name="text_164"/>
-          <p:cNvSpPr txBox="1"/>
-          <p:nvPr/>
-        </p:nvSpPr>
-        <p:spPr>
-          <a:xfrm>
-            <a:off x="1280160" y="4005072"/>
-            <a:ext cx="4023360" cy="320040"/>
+          <p:cNvPr id="23" name="text_162"/>
+          <p:cNvSpPr txBox="1"/>
+          <p:nvPr/>
+        </p:nvSpPr>
+        <p:spPr>
+          <a:xfrm>
+            <a:off x="7223760" y="2743200"/>
+            <a:ext cx="1463040" cy="1097280"/>
           </a:xfrm>
           <a:prstGeom prst="rect">
             <a:avLst/>
@@ -2827,35 +3267,35 @@
           <a:bodyPr wrap="square" lIns="0" tIns="0" rIns="0" bIns="0" rtlCol="0" anchor="t"/>
           <a:lstStyle/>
           <a:p>
-            <a:pPr indent="0" marL="0">
-              <a:buNone/>
-            </a:pPr>
-            <a:r>
-              <a:rPr lang="en-US" sz="1400" dirty="0">
+            <a:pPr algn="ctr" indent="0" marL="0">
+              <a:buNone/>
+            </a:pPr>
+            <a:r>
+              <a:rPr lang="en-US" sz="1300" dirty="0">
                 <a:solidFill>
                   <a:schemeClr val="tx1"/>
                 </a:solidFill>
               </a:rPr>
-              <a:t>Small stages kept me motivated and on track</a:t>
-            </a:r>
-            <a:endParaRPr lang="en-US" sz="1400" dirty="0"/>
-          </a:p>
-        </p:txBody>
-      </p:sp>
-      <p:sp>
-        <p:nvSpPr>
-          <p:cNvPr id="19" name="card_165"/>
+              <a:t>Docker setup and documentation</a:t>
+            </a:r>
+            <a:endParaRPr lang="en-US" sz="1300" dirty="0"/>
+          </a:p>
+        </p:txBody>
+      </p:sp>
+      <p:sp>
+        <p:nvSpPr>
+          <p:cNvPr id="24" name="card_163"/>
           <p:cNvSpPr/>
           <p:nvPr/>
         </p:nvSpPr>
         <p:spPr>
           <a:xfrm>
-            <a:off x="5669280" y="1143000"/>
-            <a:ext cx="3017520" cy="3337560"/>
+            <a:off x="457200" y="3931920"/>
+            <a:ext cx="8229600" cy="548640"/>
           </a:xfrm>
           <a:prstGeom prst="roundRect">
             <a:avLst>
-              <a:gd name="adj" fmla="val 2424"/>
+              <a:gd name="adj" fmla="val 13333"/>
             </a:avLst>
           </a:prstGeom>
           <a:solidFill>
@@ -2866,113 +3306,37 @@
       </p:sp>
       <p:sp>
         <p:nvSpPr>
-          <p:cNvPr id="20" name="text_166"/>
-          <p:cNvSpPr txBox="1"/>
-          <p:nvPr/>
-        </p:nvSpPr>
-        <p:spPr>
-          <a:xfrm>
-            <a:off x="5897880" y="1280160"/>
-            <a:ext cx="2560320" cy="365760"/>
-          </a:xfrm>
-          <a:prstGeom prst="rect">
-            <a:avLst/>
-          </a:prstGeom>
-          <a:noFill/>
-          <a:ln/>
-        </p:spPr>
-        <p:txBody>
-          <a:bodyPr wrap="square" lIns="0" tIns="0" rIns="0" bIns="0" rtlCol="0" anchor="t"/>
+          <p:cNvPr id="25" name="text_164"/>
+          <p:cNvSpPr txBox="1"/>
+          <p:nvPr/>
+        </p:nvSpPr>
+        <p:spPr>
+          <a:xfrm>
+            <a:off x="685800" y="3931920"/>
+            <a:ext cx="7772400" cy="548640"/>
+          </a:xfrm>
+          <a:prstGeom prst="rect">
+            <a:avLst/>
+          </a:prstGeom>
+          <a:noFill/>
+          <a:ln/>
+        </p:spPr>
+        <p:txBody>
+          <a:bodyPr wrap="square" lIns="0" tIns="0" rIns="0" bIns="0" rtlCol="0" anchor="ctr"/>
           <a:lstStyle/>
           <a:p>
             <a:pPr indent="0" marL="0">
               <a:buNone/>
             </a:pPr>
             <a:r>
-              <a:rPr lang="en-US" sz="1800" b="1" dirty="0">
+              <a:rPr lang="en-US" sz="1400" dirty="0">
                 <a:solidFill>
                   <a:schemeClr val="tx2"/>
                 </a:solidFill>
               </a:rPr>
-              <a:t>Next steps</a:t>
-            </a:r>
-            <a:endParaRPr lang="en-US" sz="1800" dirty="0"/>
-          </a:p>
-        </p:txBody>
-      </p:sp>
-      <p:sp>
-        <p:nvSpPr>
-          <p:cNvPr id="21" name="text_167"/>
-          <p:cNvSpPr txBox="1"/>
-          <p:nvPr/>
-        </p:nvSpPr>
-        <p:spPr>
-          <a:xfrm>
-            <a:off x="5897880" y="1783080"/>
-            <a:ext cx="2606040" cy="2560320"/>
-          </a:xfrm>
-          <a:prstGeom prst="rect">
-            <a:avLst/>
-          </a:prstGeom>
-          <a:noFill/>
-          <a:ln/>
-        </p:spPr>
-        <p:txBody>
-          <a:bodyPr wrap="square" lIns="0" tIns="0" rIns="0" bIns="0" rtlCol="0" anchor="t"/>
-          <a:lstStyle/>
-          <a:p>
-            <a:pPr marL="342900" indent="-342900">
-              <a:spcAft>
-                <a:spcPts val="1000"/>
-              </a:spcAft>
-              <a:buSzPct val="100000"/>
-              <a:buChar char="•"/>
-            </a:pPr>
-            <a:r>
-              <a:rPr lang="en-US" sz="1500" dirty="0">
-                <a:solidFill>
-                  <a:schemeClr val="tx1"/>
-                </a:solidFill>
-              </a:rPr>
-              <a:t>Automatic tests</a:t>
-            </a:r>
-            <a:endParaRPr lang="en-US" sz="1500" dirty="0"/>
-          </a:p>
-          <a:p>
-            <a:pPr marL="342900" indent="-342900">
-              <a:spcAft>
-                <a:spcPts val="1000"/>
-              </a:spcAft>
-              <a:buSzPct val="100000"/>
-              <a:buChar char="•"/>
-            </a:pPr>
-            <a:r>
-              <a:rPr lang="en-US" sz="1500" dirty="0">
-                <a:solidFill>
-                  <a:schemeClr val="tx1"/>
-                </a:solidFill>
-              </a:rPr>
-              <a:t>Waiting list with email alerts</a:t>
-            </a:r>
-            <a:endParaRPr lang="en-US" sz="1500" dirty="0"/>
-          </a:p>
-          <a:p>
-            <a:pPr marL="342900" indent="-342900">
-              <a:spcAft>
-                <a:spcPts val="1000"/>
-              </a:spcAft>
-              <a:buSzPct val="100000"/>
-              <a:buChar char="•"/>
-            </a:pPr>
-            <a:r>
-              <a:rPr lang="en-US" sz="1500" dirty="0">
-                <a:solidFill>
-                  <a:schemeClr val="tx1"/>
-                </a:solidFill>
-              </a:rPr>
-              <a:t>Automatic prerequisite check</a:t>
-            </a:r>
-            <a:endParaRPr lang="en-US" sz="1500" dirty="0"/>
+              <a:t>Every step saved with Git, so I could always go back after a mistake</a:t>
+            </a:r>
+            <a:endParaRPr lang="en-US" sz="1400" dirty="0"/>
           </a:p>
         </p:txBody>
       </p:sp>
@@ -3056,85 +3420,47 @@
         </p:nvSpPr>
         <p:spPr>
           <a:xfrm>
-            <a:off x="548640" y="1417320"/>
-            <a:ext cx="8046720" cy="1371600"/>
-          </a:xfrm>
-          <a:prstGeom prst="rect">
-            <a:avLst/>
-          </a:prstGeom>
-          <a:noFill/>
-          <a:ln/>
-        </p:spPr>
-        <p:txBody>
-          <a:bodyPr wrap="square" rtlCol="0" anchor="t"/>
+            <a:off x="457200" y="274320"/>
+            <a:ext cx="8229600" cy="685800"/>
+          </a:xfrm>
+          <a:prstGeom prst="rect">
+            <a:avLst/>
+          </a:prstGeom>
+          <a:noFill/>
+          <a:ln/>
+        </p:spPr>
+        <p:txBody>
+          <a:bodyPr wrap="square" lIns="0" tIns="0" rIns="0" bIns="0" rtlCol="0" anchor="ctr"/>
           <a:lstStyle/>
           <a:p>
             <a:pPr algn="l" indent="0" marL="0">
               <a:buNone/>
             </a:pPr>
             <a:r>
-              <a:rPr lang="en-US" sz="4000" b="1" dirty="0">
-                <a:solidFill>
-                  <a:schemeClr val="bg1"/>
+              <a:rPr lang="en-US" sz="3000" b="1" dirty="0">
+                <a:solidFill>
+                  <a:schemeClr val="tx2"/>
                 </a:solidFill>
                 <a:latin typeface="Cambria" pitchFamily="34" charset="0"/>
                 <a:ea typeface="Cambria" pitchFamily="34" charset="-122"/>
                 <a:cs typeface="Cambria" pitchFamily="34" charset="-120"/>
               </a:rPr>
-              <a:t>Thank you!</a:t>
-            </a:r>
-            <a:endParaRPr lang="en-US" sz="4000" dirty="0"/>
-          </a:p>
-        </p:txBody>
-      </p:sp>
-      <p:sp>
-        <p:nvSpPr>
-          <p:cNvPr id="3" name="Text 0"/>
+              <a:t>What I learned</a:t>
+            </a:r>
+            <a:endParaRPr lang="en-US" sz="3000" dirty="0"/>
+          </a:p>
+        </p:txBody>
+      </p:sp>
+      <p:sp>
+        <p:nvSpPr>
+          <p:cNvPr id="3" name="icon-bg_165"/>
           <p:cNvSpPr/>
-          <p:nvPr>
-            <p:ph idx="101" type="body" hasCustomPrompt="1"/>
-          </p:nvPr>
-        </p:nvSpPr>
-        <p:spPr>
-          <a:xfrm>
-            <a:off x="548640" y="2834640"/>
-            <a:ext cx="8046720" cy="822960"/>
-          </a:xfrm>
-          <a:prstGeom prst="rect">
-            <a:avLst/>
-          </a:prstGeom>
-          <a:noFill/>
-          <a:ln/>
-        </p:spPr>
-        <p:txBody>
-          <a:bodyPr wrap="square" rtlCol="0" anchor="t"/>
-          <a:lstStyle/>
-          <a:p>
-            <a:pPr indent="0" marL="0">
-              <a:buNone/>
-            </a:pPr>
-            <a:r>
-              <a:rPr lang="en-US" sz="1800" dirty="0">
-                <a:solidFill>
-                  <a:schemeClr val="accent5"/>
-                </a:solidFill>
-              </a:rPr>
-              <a:t>Questions and feedback are very welcome</a:t>
-            </a:r>
-            <a:endParaRPr lang="en-US" sz="1800" dirty="0"/>
-          </a:p>
-        </p:txBody>
-      </p:sp>
-      <p:sp>
-        <p:nvSpPr>
-          <p:cNvPr id="4" name="icon-bg_168"/>
-          <p:cNvSpPr/>
-          <p:nvPr/>
-        </p:nvSpPr>
-        <p:spPr>
-          <a:xfrm>
-            <a:off x="7635240" y="502920"/>
-            <a:ext cx="914400" cy="914400"/>
+          <p:nvPr/>
+        </p:nvSpPr>
+        <p:spPr>
+          <a:xfrm>
+            <a:off x="457200" y="1143000"/>
+            <a:ext cx="640080" cy="640080"/>
           </a:xfrm>
           <a:prstGeom prst="ellipse">
             <a:avLst/>
@@ -3147,7 +3473,7 @@
       </p:sp>
       <p:pic>
         <p:nvPicPr>
-          <p:cNvPr id="5" name="icon_169" descr="preencoded.png">    </p:cNvPr>
+          <p:cNvPr id="4" name="icon_166" descr="preencoded.png">    </p:cNvPr>
           <p:cNvPicPr>
             <a:picLocks noChangeAspect="1"/>
           </p:cNvPicPr>
@@ -3161,6 +3487,753 @@
         </p:blipFill>
         <p:spPr>
           <a:xfrm>
+            <a:off x="617220" y="1303020"/>
+            <a:ext cx="320040" cy="320040"/>
+          </a:xfrm>
+          <a:prstGeom prst="rect">
+            <a:avLst/>
+          </a:prstGeom>
+        </p:spPr>
+      </p:pic>
+      <p:sp>
+        <p:nvSpPr>
+          <p:cNvPr id="5" name="text_167"/>
+          <p:cNvSpPr txBox="1"/>
+          <p:nvPr/>
+        </p:nvSpPr>
+        <p:spPr>
+          <a:xfrm>
+            <a:off x="1280160" y="1161288"/>
+            <a:ext cx="3657600" cy="320040"/>
+          </a:xfrm>
+          <a:prstGeom prst="rect">
+            <a:avLst/>
+          </a:prstGeom>
+          <a:noFill/>
+          <a:ln/>
+        </p:spPr>
+        <p:txBody>
+          <a:bodyPr wrap="square" lIns="0" tIns="0" rIns="0" bIns="0" rtlCol="0" anchor="t"/>
+          <a:lstStyle/>
+          <a:p>
+            <a:pPr indent="0" marL="0">
+              <a:buNone/>
+            </a:pPr>
+            <a:r>
+              <a:rPr lang="en-US" sz="1700" b="1" dirty="0">
+                <a:solidFill>
+                  <a:schemeClr val="tx2"/>
+                </a:solidFill>
+              </a:rPr>
+              <a:t>Plan before acting</a:t>
+            </a:r>
+            <a:endParaRPr lang="en-US" sz="1700" dirty="0"/>
+          </a:p>
+        </p:txBody>
+      </p:sp>
+      <p:sp>
+        <p:nvSpPr>
+          <p:cNvPr id="6" name="text_168"/>
+          <p:cNvSpPr txBox="1"/>
+          <p:nvPr/>
+        </p:nvSpPr>
+        <p:spPr>
+          <a:xfrm>
+            <a:off x="1280160" y="1481328"/>
+            <a:ext cx="4023360" cy="320040"/>
+          </a:xfrm>
+          <a:prstGeom prst="rect">
+            <a:avLst/>
+          </a:prstGeom>
+          <a:noFill/>
+          <a:ln/>
+        </p:spPr>
+        <p:txBody>
+          <a:bodyPr wrap="square" lIns="0" tIns="0" rIns="0" bIns="0" rtlCol="0" anchor="t"/>
+          <a:lstStyle/>
+          <a:p>
+            <a:pPr indent="0" marL="0">
+              <a:buNone/>
+            </a:pPr>
+            <a:r>
+              <a:rPr lang="en-US" sz="1400" dirty="0">
+                <a:solidFill>
+                  <a:schemeClr val="tx1"/>
+                </a:solidFill>
+              </a:rPr>
+              <a:t>Writing the nine rules first saved me a lot of time</a:t>
+            </a:r>
+            <a:endParaRPr lang="en-US" sz="1400" dirty="0"/>
+          </a:p>
+        </p:txBody>
+      </p:sp>
+      <p:sp>
+        <p:nvSpPr>
+          <p:cNvPr id="7" name="icon-bg_169"/>
+          <p:cNvSpPr/>
+          <p:nvPr/>
+        </p:nvSpPr>
+        <p:spPr>
+          <a:xfrm>
+            <a:off x="457200" y="1984248"/>
+            <a:ext cx="640080" cy="640080"/>
+          </a:xfrm>
+          <a:prstGeom prst="ellipse">
+            <a:avLst/>
+          </a:prstGeom>
+          <a:solidFill>
+            <a:srgbClr val="1F4E5F"/>
+          </a:solidFill>
+          <a:ln/>
+        </p:spPr>
+      </p:sp>
+      <p:pic>
+        <p:nvPicPr>
+          <p:cNvPr id="8" name="icon_170" descr="preencoded.png">    </p:cNvPr>
+          <p:cNvPicPr>
+            <a:picLocks noChangeAspect="1"/>
+          </p:cNvPicPr>
+          <p:nvPr/>
+        </p:nvPicPr>
+        <p:blipFill>
+          <a:blip r:embed="rId2"/>
+          <a:stretch>
+            <a:fillRect/>
+          </a:stretch>
+        </p:blipFill>
+        <p:spPr>
+          <a:xfrm>
+            <a:off x="617220" y="2144268"/>
+            <a:ext cx="320040" cy="320040"/>
+          </a:xfrm>
+          <a:prstGeom prst="rect">
+            <a:avLst/>
+          </a:prstGeom>
+        </p:spPr>
+      </p:pic>
+      <p:sp>
+        <p:nvSpPr>
+          <p:cNvPr id="9" name="text_171"/>
+          <p:cNvSpPr txBox="1"/>
+          <p:nvPr/>
+        </p:nvSpPr>
+        <p:spPr>
+          <a:xfrm>
+            <a:off x="1280160" y="2002536"/>
+            <a:ext cx="3657600" cy="320040"/>
+          </a:xfrm>
+          <a:prstGeom prst="rect">
+            <a:avLst/>
+          </a:prstGeom>
+          <a:noFill/>
+          <a:ln/>
+        </p:spPr>
+        <p:txBody>
+          <a:bodyPr wrap="square" lIns="0" tIns="0" rIns="0" bIns="0" rtlCol="0" anchor="t"/>
+          <a:lstStyle/>
+          <a:p>
+            <a:pPr indent="0" marL="0">
+              <a:buNone/>
+            </a:pPr>
+            <a:r>
+              <a:rPr lang="en-US" sz="1700" b="1" dirty="0">
+                <a:solidFill>
+                  <a:schemeClr val="tx2"/>
+                </a:solidFill>
+              </a:rPr>
+              <a:t>Learn independently</a:t>
+            </a:r>
+            <a:endParaRPr lang="en-US" sz="1700" dirty="0"/>
+          </a:p>
+        </p:txBody>
+      </p:sp>
+      <p:sp>
+        <p:nvSpPr>
+          <p:cNvPr id="10" name="text_172"/>
+          <p:cNvSpPr txBox="1"/>
+          <p:nvPr/>
+        </p:nvSpPr>
+        <p:spPr>
+          <a:xfrm>
+            <a:off x="1280160" y="2322576"/>
+            <a:ext cx="4023360" cy="320040"/>
+          </a:xfrm>
+          <a:prstGeom prst="rect">
+            <a:avLst/>
+          </a:prstGeom>
+          <a:noFill/>
+          <a:ln/>
+        </p:spPr>
+        <p:txBody>
+          <a:bodyPr wrap="square" lIns="0" tIns="0" rIns="0" bIns="0" rtlCol="0" anchor="t"/>
+          <a:lstStyle/>
+          <a:p>
+            <a:pPr indent="0" marL="0">
+              <a:buNone/>
+            </a:pPr>
+            <a:r>
+              <a:rPr lang="en-US" sz="1400" dirty="0">
+                <a:solidFill>
+                  <a:schemeClr val="tx1"/>
+                </a:solidFill>
+              </a:rPr>
+              <a:t>I found many answers in English documentation</a:t>
+            </a:r>
+            <a:endParaRPr lang="en-US" sz="1400" dirty="0"/>
+          </a:p>
+        </p:txBody>
+      </p:sp>
+      <p:sp>
+        <p:nvSpPr>
+          <p:cNvPr id="11" name="icon-bg_173"/>
+          <p:cNvSpPr/>
+          <p:nvPr/>
+        </p:nvSpPr>
+        <p:spPr>
+          <a:xfrm>
+            <a:off x="457200" y="2825496"/>
+            <a:ext cx="640080" cy="640080"/>
+          </a:xfrm>
+          <a:prstGeom prst="ellipse">
+            <a:avLst/>
+          </a:prstGeom>
+          <a:solidFill>
+            <a:srgbClr val="1F4E5F"/>
+          </a:solidFill>
+          <a:ln/>
+        </p:spPr>
+      </p:sp>
+      <p:pic>
+        <p:nvPicPr>
+          <p:cNvPr id="12" name="icon_174" descr="preencoded.png">    </p:cNvPr>
+          <p:cNvPicPr>
+            <a:picLocks noChangeAspect="1"/>
+          </p:cNvPicPr>
+          <p:nvPr/>
+        </p:nvPicPr>
+        <p:blipFill>
+          <a:blip r:embed="rId3"/>
+          <a:stretch>
+            <a:fillRect/>
+          </a:stretch>
+        </p:blipFill>
+        <p:spPr>
+          <a:xfrm>
+            <a:off x="617220" y="2985516"/>
+            <a:ext cx="320040" cy="320040"/>
+          </a:xfrm>
+          <a:prstGeom prst="rect">
+            <a:avLst/>
+          </a:prstGeom>
+        </p:spPr>
+      </p:pic>
+      <p:sp>
+        <p:nvSpPr>
+          <p:cNvPr id="13" name="text_175"/>
+          <p:cNvSpPr txBox="1"/>
+          <p:nvPr/>
+        </p:nvSpPr>
+        <p:spPr>
+          <a:xfrm>
+            <a:off x="1280160" y="2843784"/>
+            <a:ext cx="3657600" cy="320040"/>
+          </a:xfrm>
+          <a:prstGeom prst="rect">
+            <a:avLst/>
+          </a:prstGeom>
+          <a:noFill/>
+          <a:ln/>
+        </p:spPr>
+        <p:txBody>
+          <a:bodyPr wrap="square" lIns="0" tIns="0" rIns="0" bIns="0" rtlCol="0" anchor="t"/>
+          <a:lstStyle/>
+          <a:p>
+            <a:pPr indent="0" marL="0">
+              <a:buNone/>
+            </a:pPr>
+            <a:r>
+              <a:rPr lang="en-US" sz="1700" b="1" dirty="0">
+                <a:solidFill>
+                  <a:schemeClr val="tx2"/>
+                </a:solidFill>
+              </a:rPr>
+              <a:t>Write clearly</a:t>
+            </a:r>
+            <a:endParaRPr lang="en-US" sz="1700" dirty="0"/>
+          </a:p>
+        </p:txBody>
+      </p:sp>
+      <p:sp>
+        <p:nvSpPr>
+          <p:cNvPr id="14" name="text_176"/>
+          <p:cNvSpPr txBox="1"/>
+          <p:nvPr/>
+        </p:nvSpPr>
+        <p:spPr>
+          <a:xfrm>
+            <a:off x="1280160" y="3163824"/>
+            <a:ext cx="4023360" cy="320040"/>
+          </a:xfrm>
+          <a:prstGeom prst="rect">
+            <a:avLst/>
+          </a:prstGeom>
+          <a:noFill/>
+          <a:ln/>
+        </p:spPr>
+        <p:txBody>
+          <a:bodyPr wrap="square" lIns="0" tIns="0" rIns="0" bIns="0" rtlCol="0" anchor="t"/>
+          <a:lstStyle/>
+          <a:p>
+            <a:pPr indent="0" marL="0">
+              <a:buNone/>
+            </a:pPr>
+            <a:r>
+              <a:rPr lang="en-US" sz="1400" dirty="0">
+                <a:solidFill>
+                  <a:schemeClr val="tx1"/>
+                </a:solidFill>
+              </a:rPr>
+              <a:t>Documentation taught me to explain ideas simply</a:t>
+            </a:r>
+            <a:endParaRPr lang="en-US" sz="1400" dirty="0"/>
+          </a:p>
+        </p:txBody>
+      </p:sp>
+      <p:sp>
+        <p:nvSpPr>
+          <p:cNvPr id="15" name="icon-bg_177"/>
+          <p:cNvSpPr/>
+          <p:nvPr/>
+        </p:nvSpPr>
+        <p:spPr>
+          <a:xfrm>
+            <a:off x="457200" y="3666744"/>
+            <a:ext cx="640080" cy="640080"/>
+          </a:xfrm>
+          <a:prstGeom prst="ellipse">
+            <a:avLst/>
+          </a:prstGeom>
+          <a:solidFill>
+            <a:srgbClr val="1F4E5F"/>
+          </a:solidFill>
+          <a:ln/>
+        </p:spPr>
+      </p:sp>
+      <p:pic>
+        <p:nvPicPr>
+          <p:cNvPr id="16" name="icon_178" descr="preencoded.png">    </p:cNvPr>
+          <p:cNvPicPr>
+            <a:picLocks noChangeAspect="1"/>
+          </p:cNvPicPr>
+          <p:nvPr/>
+        </p:nvPicPr>
+        <p:blipFill>
+          <a:blip r:embed="rId4"/>
+          <a:stretch>
+            <a:fillRect/>
+          </a:stretch>
+        </p:blipFill>
+        <p:spPr>
+          <a:xfrm>
+            <a:off x="617220" y="3826764"/>
+            <a:ext cx="320040" cy="320040"/>
+          </a:xfrm>
+          <a:prstGeom prst="rect">
+            <a:avLst/>
+          </a:prstGeom>
+        </p:spPr>
+      </p:pic>
+      <p:sp>
+        <p:nvSpPr>
+          <p:cNvPr id="17" name="text_179"/>
+          <p:cNvSpPr txBox="1"/>
+          <p:nvPr/>
+        </p:nvSpPr>
+        <p:spPr>
+          <a:xfrm>
+            <a:off x="1280160" y="3685032"/>
+            <a:ext cx="3657600" cy="320040"/>
+          </a:xfrm>
+          <a:prstGeom prst="rect">
+            <a:avLst/>
+          </a:prstGeom>
+          <a:noFill/>
+          <a:ln/>
+        </p:spPr>
+        <p:txBody>
+          <a:bodyPr wrap="square" lIns="0" tIns="0" rIns="0" bIns="0" rtlCol="0" anchor="t"/>
+          <a:lstStyle/>
+          <a:p>
+            <a:pPr indent="0" marL="0">
+              <a:buNone/>
+            </a:pPr>
+            <a:r>
+              <a:rPr lang="en-US" sz="1700" b="1" dirty="0">
+                <a:solidFill>
+                  <a:schemeClr val="tx2"/>
+                </a:solidFill>
+              </a:rPr>
+              <a:t>Manage my time</a:t>
+            </a:r>
+            <a:endParaRPr lang="en-US" sz="1700" dirty="0"/>
+          </a:p>
+        </p:txBody>
+      </p:sp>
+      <p:sp>
+        <p:nvSpPr>
+          <p:cNvPr id="18" name="text_180"/>
+          <p:cNvSpPr txBox="1"/>
+          <p:nvPr/>
+        </p:nvSpPr>
+        <p:spPr>
+          <a:xfrm>
+            <a:off x="1280160" y="4005072"/>
+            <a:ext cx="4023360" cy="320040"/>
+          </a:xfrm>
+          <a:prstGeom prst="rect">
+            <a:avLst/>
+          </a:prstGeom>
+          <a:noFill/>
+          <a:ln/>
+        </p:spPr>
+        <p:txBody>
+          <a:bodyPr wrap="square" lIns="0" tIns="0" rIns="0" bIns="0" rtlCol="0" anchor="t"/>
+          <a:lstStyle/>
+          <a:p>
+            <a:pPr indent="0" marL="0">
+              <a:buNone/>
+            </a:pPr>
+            <a:r>
+              <a:rPr lang="en-US" sz="1400" dirty="0">
+                <a:solidFill>
+                  <a:schemeClr val="tx1"/>
+                </a:solidFill>
+              </a:rPr>
+              <a:t>Small stages kept me motivated and on track</a:t>
+            </a:r>
+            <a:endParaRPr lang="en-US" sz="1400" dirty="0"/>
+          </a:p>
+        </p:txBody>
+      </p:sp>
+      <p:sp>
+        <p:nvSpPr>
+          <p:cNvPr id="19" name="card_181"/>
+          <p:cNvSpPr/>
+          <p:nvPr/>
+        </p:nvSpPr>
+        <p:spPr>
+          <a:xfrm>
+            <a:off x="5669280" y="1143000"/>
+            <a:ext cx="3017520" cy="3337560"/>
+          </a:xfrm>
+          <a:prstGeom prst="roundRect">
+            <a:avLst>
+              <a:gd name="adj" fmla="val 2424"/>
+            </a:avLst>
+          </a:prstGeom>
+          <a:solidFill>
+            <a:schemeClr val="accent5"/>
+          </a:solidFill>
+          <a:ln/>
+        </p:spPr>
+      </p:sp>
+      <p:sp>
+        <p:nvSpPr>
+          <p:cNvPr id="20" name="text_182"/>
+          <p:cNvSpPr txBox="1"/>
+          <p:nvPr/>
+        </p:nvSpPr>
+        <p:spPr>
+          <a:xfrm>
+            <a:off x="5897880" y="1280160"/>
+            <a:ext cx="2560320" cy="365760"/>
+          </a:xfrm>
+          <a:prstGeom prst="rect">
+            <a:avLst/>
+          </a:prstGeom>
+          <a:noFill/>
+          <a:ln/>
+        </p:spPr>
+        <p:txBody>
+          <a:bodyPr wrap="square" lIns="0" tIns="0" rIns="0" bIns="0" rtlCol="0" anchor="t"/>
+          <a:lstStyle/>
+          <a:p>
+            <a:pPr indent="0" marL="0">
+              <a:buNone/>
+            </a:pPr>
+            <a:r>
+              <a:rPr lang="en-US" sz="1800" b="1" dirty="0">
+                <a:solidFill>
+                  <a:schemeClr val="tx2"/>
+                </a:solidFill>
+              </a:rPr>
+              <a:t>Next steps</a:t>
+            </a:r>
+            <a:endParaRPr lang="en-US" sz="1800" dirty="0"/>
+          </a:p>
+        </p:txBody>
+      </p:sp>
+      <p:sp>
+        <p:nvSpPr>
+          <p:cNvPr id="21" name="text_183"/>
+          <p:cNvSpPr txBox="1"/>
+          <p:nvPr/>
+        </p:nvSpPr>
+        <p:spPr>
+          <a:xfrm>
+            <a:off x="5897880" y="1783080"/>
+            <a:ext cx="2606040" cy="2560320"/>
+          </a:xfrm>
+          <a:prstGeom prst="rect">
+            <a:avLst/>
+          </a:prstGeom>
+          <a:noFill/>
+          <a:ln/>
+        </p:spPr>
+        <p:txBody>
+          <a:bodyPr wrap="square" lIns="0" tIns="0" rIns="0" bIns="0" rtlCol="0" anchor="t"/>
+          <a:lstStyle/>
+          <a:p>
+            <a:pPr marL="342900" indent="-342900">
+              <a:spcAft>
+                <a:spcPts val="1000"/>
+              </a:spcAft>
+              <a:buSzPct val="100000"/>
+              <a:buChar char="•"/>
+            </a:pPr>
+            <a:r>
+              <a:rPr lang="en-US" sz="1500" dirty="0">
+                <a:solidFill>
+                  <a:schemeClr val="tx1"/>
+                </a:solidFill>
+              </a:rPr>
+              <a:t>Automatic tests</a:t>
+            </a:r>
+            <a:endParaRPr lang="en-US" sz="1500" dirty="0"/>
+          </a:p>
+          <a:p>
+            <a:pPr marL="342900" indent="-342900">
+              <a:spcAft>
+                <a:spcPts val="1000"/>
+              </a:spcAft>
+              <a:buSzPct val="100000"/>
+              <a:buChar char="•"/>
+            </a:pPr>
+            <a:r>
+              <a:rPr lang="en-US" sz="1500" dirty="0">
+                <a:solidFill>
+                  <a:schemeClr val="tx1"/>
+                </a:solidFill>
+              </a:rPr>
+              <a:t>Waiting list with email alerts</a:t>
+            </a:r>
+            <a:endParaRPr lang="en-US" sz="1500" dirty="0"/>
+          </a:p>
+          <a:p>
+            <a:pPr marL="342900" indent="-342900">
+              <a:spcAft>
+                <a:spcPts val="1000"/>
+              </a:spcAft>
+              <a:buSzPct val="100000"/>
+              <a:buChar char="•"/>
+            </a:pPr>
+            <a:r>
+              <a:rPr lang="en-US" sz="1500" dirty="0">
+                <a:solidFill>
+                  <a:schemeClr val="tx1"/>
+                </a:solidFill>
+              </a:rPr>
+              <a:t>Automatic prerequisite check</a:t>
+            </a:r>
+            <a:endParaRPr lang="en-US" sz="1500" dirty="0"/>
+          </a:p>
+        </p:txBody>
+      </p:sp>
+      <p:sp>
+        <p:nvSpPr>
+          <p:cNvPr id="25" name="Slide Number Placeholder 0"/>
+          <p:cNvSpPr>
+            <a:spLocks noGrp="1"/>
+          </p:cNvSpPr>
+          <p:nvPr>
+            <p:ph type="sldNum" sz="quarter" idx="4294967295"/>
+          </p:nvPr>
+        </p:nvSpPr>
+        <p:spPr>
+          <a:xfrm>
+            <a:off x="8229600" y="4754880"/>
+            <a:ext cx="457200" cy="274320"/>
+          </a:xfrm>
+          <a:prstGeom prst="rect">
+            <a:avLst/>
+          </a:prstGeom>
+          <a:extLst>
+            <a:ext uri="{C572A759-6A51-4108-AA02-DFA0A04FC94B}">
+              <ma14:wrappingTextBoxFlag xmlns:ma14="http://schemas.microsoft.com/office/mac/drawingml/2011/main" val="0"/>
+            </a:ext>
+          </a:extLst>
+        </p:spPr>
+        <p:txBody>
+          <a:bodyPr/>
+          <a:lstStyle>
+            <a:lvl1pPr>
+              <a:defRPr sz="1000">
+                <a:solidFill>
+                  <a:srgbClr val="5B6B73"/>
+                </a:solidFill>
+              </a:defRPr>
+            </a:lvl1pPr>
+          </a:lstStyle>
+          <a:p>
+            <a:pPr algn="r"/>
+            <a:fld id="{F7021451-1387-4CA6-816F-3879F97B5CBC}" type="slidenum">
+              <a:rPr b="0" lang="en-US"/>
+              <a:t>11</a:t>
+            </a:fld>
+            <a:endParaRPr lang="en-US"/>
+          </a:p>
+        </p:txBody>
+      </p:sp>
+    </p:spTree>
+  </p:cSld>
+  <p:clrMapOvr>
+    <a:masterClrMapping/>
+  </p:clrMapOvr>
+</p:sld>
+</file>
+
+<file path=ppt/slides/slide12.xml><?xml version="1.0" encoding="utf-8"?>
+<p:sld xmlns:a="http://schemas.openxmlformats.org/drawingml/2006/main" xmlns:r="http://schemas.openxmlformats.org/officeDocument/2006/relationships" xmlns:p="http://schemas.openxmlformats.org/presentationml/2006/main">
+  <p:cSld name="Slide 12">
+    <p:spTree>
+      <p:nvGrpSpPr>
+        <p:cNvPr id="1" name=""/>
+        <p:cNvGrpSpPr/>
+        <p:nvPr/>
+      </p:nvGrpSpPr>
+      <p:grpSpPr>
+        <a:xfrm>
+          <a:off x="0" y="0"/>
+          <a:ext cx="0" cy="0"/>
+          <a:chOff x="0" y="0"/>
+          <a:chExt cx="0" cy="0"/>
+        </a:xfrm>
+      </p:grpSpPr>
+      <p:sp>
+        <p:nvSpPr>
+          <p:cNvPr id="2" name="Text 0"/>
+          <p:cNvSpPr/>
+          <p:nvPr>
+            <p:ph idx="100" type="title" hasCustomPrompt="1"/>
+          </p:nvPr>
+        </p:nvSpPr>
+        <p:spPr>
+          <a:xfrm>
+            <a:off x="548640" y="1417320"/>
+            <a:ext cx="8046720" cy="1371600"/>
+          </a:xfrm>
+          <a:prstGeom prst="rect">
+            <a:avLst/>
+          </a:prstGeom>
+          <a:noFill/>
+          <a:ln/>
+        </p:spPr>
+        <p:txBody>
+          <a:bodyPr wrap="square" rtlCol="0" anchor="t"/>
+          <a:lstStyle/>
+          <a:p>
+            <a:pPr algn="l" indent="0" marL="0">
+              <a:buNone/>
+            </a:pPr>
+            <a:r>
+              <a:rPr lang="en-US" sz="4000" b="1" dirty="0">
+                <a:solidFill>
+                  <a:schemeClr val="bg1"/>
+                </a:solidFill>
+                <a:latin typeface="Cambria" pitchFamily="34" charset="0"/>
+                <a:ea typeface="Cambria" pitchFamily="34" charset="-122"/>
+                <a:cs typeface="Cambria" pitchFamily="34" charset="-120"/>
+              </a:rPr>
+              <a:t>Thank you!</a:t>
+            </a:r>
+            <a:endParaRPr lang="en-US" sz="4000" dirty="0"/>
+          </a:p>
+        </p:txBody>
+      </p:sp>
+      <p:sp>
+        <p:nvSpPr>
+          <p:cNvPr id="3" name="Text 0"/>
+          <p:cNvSpPr/>
+          <p:nvPr>
+            <p:ph idx="101" type="body" hasCustomPrompt="1"/>
+          </p:nvPr>
+        </p:nvSpPr>
+        <p:spPr>
+          <a:xfrm>
+            <a:off x="548640" y="2834640"/>
+            <a:ext cx="8046720" cy="822960"/>
+          </a:xfrm>
+          <a:prstGeom prst="rect">
+            <a:avLst/>
+          </a:prstGeom>
+          <a:noFill/>
+          <a:ln/>
+        </p:spPr>
+        <p:txBody>
+          <a:bodyPr wrap="square" rtlCol="0" anchor="t"/>
+          <a:lstStyle/>
+          <a:p>
+            <a:pPr indent="0" marL="0">
+              <a:buNone/>
+            </a:pPr>
+            <a:r>
+              <a:rPr lang="en-US" sz="1800" dirty="0">
+                <a:solidFill>
+                  <a:schemeClr val="accent5"/>
+                </a:solidFill>
+              </a:rPr>
+              <a:t>Questions and feedback are very welcome</a:t>
+            </a:r>
+            <a:endParaRPr lang="en-US" sz="1800" dirty="0"/>
+          </a:p>
+        </p:txBody>
+      </p:sp>
+      <p:sp>
+        <p:nvSpPr>
+          <p:cNvPr id="4" name="icon-bg_184"/>
+          <p:cNvSpPr/>
+          <p:nvPr/>
+        </p:nvSpPr>
+        <p:spPr>
+          <a:xfrm>
+            <a:off x="7635240" y="502920"/>
+            <a:ext cx="914400" cy="914400"/>
+          </a:xfrm>
+          <a:prstGeom prst="ellipse">
+            <a:avLst/>
+          </a:prstGeom>
+          <a:solidFill>
+            <a:srgbClr val="1F4E5F"/>
+          </a:solidFill>
+          <a:ln/>
+        </p:spPr>
+      </p:sp>
+      <p:pic>
+        <p:nvPicPr>
+          <p:cNvPr id="5" name="icon_185" descr="preencoded.png">    </p:cNvPr>
+          <p:cNvPicPr>
+            <a:picLocks noChangeAspect="1"/>
+          </p:cNvPicPr>
+          <p:nvPr/>
+        </p:nvPicPr>
+        <p:blipFill>
+          <a:blip r:embed="rId1"/>
+          <a:stretch>
+            <a:fillRect/>
+          </a:stretch>
+        </p:blipFill>
+        <p:spPr>
+          <a:xfrm>
             <a:off x="7863840" y="731520"/>
             <a:ext cx="457200" cy="457200"/>
           </a:xfrm>
@@ -3171,7 +4244,7 @@
       </p:pic>
       <p:sp>
         <p:nvSpPr>
-          <p:cNvPr id="6" name="text_170"/>
+          <p:cNvPr id="6" name="text_186"/>
           <p:cNvSpPr txBox="1"/>
           <p:nvPr/>
         </p:nvSpPr>
@@ -5195,7 +6268,7 @@
                 <a:ea typeface="Cambria" pitchFamily="34" charset="-122"/>
                 <a:cs typeface="Cambria" pitchFamily="34" charset="-120"/>
               </a:rPr>
-              <a:t>Two portals, one system</a:t>
+              <a:t>The student portal</a:t>
             </a:r>
             <a:endParaRPr lang="en-US" sz="3000" dirty="0"/>
           </a:p>
@@ -5203,49 +6276,39 @@
       </p:sp>
       <p:sp>
         <p:nvSpPr>
-          <p:cNvPr id="3" name="card_55"/>
+          <p:cNvPr id="3" name="shot-frame_55"/>
           <p:cNvSpPr/>
           <p:nvPr/>
         </p:nvSpPr>
         <p:spPr>
           <a:xfrm>
-            <a:off x="457200" y="1188720"/>
-            <a:ext cx="4023360" cy="3291840"/>
-          </a:xfrm>
-          <a:prstGeom prst="roundRect">
-            <a:avLst>
-              <a:gd name="adj" fmla="val 2222"/>
-            </a:avLst>
+            <a:off x="438912" y="1124712"/>
+            <a:ext cx="5294376" cy="3178112"/>
+          </a:xfrm>
+          <a:prstGeom prst="rect">
+            <a:avLst/>
           </a:prstGeom>
           <a:solidFill>
-            <a:schemeClr val="bg2"/>
+            <a:srgbClr val="FFFFFF"/>
           </a:solidFill>
-          <a:ln/>
-        </p:spPr>
-      </p:sp>
-      <p:sp>
-        <p:nvSpPr>
-          <p:cNvPr id="4" name="icon-bg_56"/>
-          <p:cNvSpPr/>
-          <p:nvPr/>
-        </p:nvSpPr>
-        <p:spPr>
-          <a:xfrm>
-            <a:off x="731520" y="1463040"/>
-            <a:ext cx="685800" cy="685800"/>
-          </a:xfrm>
-          <a:prstGeom prst="ellipse">
-            <a:avLst/>
-          </a:prstGeom>
-          <a:solidFill>
-            <a:srgbClr val="1F4E5F"/>
-          </a:solidFill>
-          <a:ln/>
+          <a:ln w="9525">
+            <a:solidFill>
+              <a:srgbClr val="C9D6DA"/>
+            </a:solidFill>
+            <a:prstDash val="solid"/>
+          </a:ln>
+          <a:effectLst>
+            <a:outerShdw sx="100000" sy="100000" kx="0" ky="0" algn="bl" rotWithShape="0" blurRad="76200" dist="25400" dir="5400000">
+              <a:srgbClr val="000000">
+                <a:alpha val="12000"/>
+              </a:srgbClr>
+            </a:outerShdw>
+          </a:effectLst>
         </p:spPr>
       </p:sp>
       <p:pic>
         <p:nvPicPr>
-          <p:cNvPr id="5" name="icon_57" descr="preencoded.png">    </p:cNvPr>
+          <p:cNvPr id="4" name="screenshot_56" descr="Register or cancel with one click">    </p:cNvPr>
           <p:cNvPicPr>
             <a:picLocks noChangeAspect="1"/>
           </p:cNvPicPr>
@@ -5259,8 +6322,8 @@
         </p:blipFill>
         <p:spPr>
           <a:xfrm>
-            <a:off x="902970" y="1634490"/>
-            <a:ext cx="342900" cy="342900"/>
+            <a:off x="457200" y="1143000"/>
+            <a:ext cx="5257800" cy="3141536"/>
           </a:xfrm>
           <a:prstGeom prst="rect">
             <a:avLst/>
@@ -5269,179 +6332,97 @@
       </p:pic>
       <p:sp>
         <p:nvSpPr>
-          <p:cNvPr id="6" name="text_58"/>
-          <p:cNvSpPr txBox="1"/>
-          <p:nvPr/>
-        </p:nvSpPr>
-        <p:spPr>
-          <a:xfrm>
-            <a:off x="1600200" y="1600200"/>
-            <a:ext cx="2651760" cy="411480"/>
-          </a:xfrm>
-          <a:prstGeom prst="rect">
-            <a:avLst/>
-          </a:prstGeom>
-          <a:noFill/>
-          <a:ln/>
-        </p:spPr>
-        <p:txBody>
-          <a:bodyPr wrap="square" lIns="0" tIns="0" rIns="0" bIns="0" rtlCol="0" anchor="t"/>
-          <a:lstStyle/>
-          <a:p>
-            <a:pPr indent="0" marL="0">
-              <a:buNone/>
-            </a:pPr>
-            <a:r>
-              <a:rPr lang="en-US" sz="2000" b="1" dirty="0">
-                <a:solidFill>
-                  <a:schemeClr val="tx2"/>
-                </a:solidFill>
-              </a:rPr>
-              <a:t>Student portal</a:t>
-            </a:r>
-            <a:endParaRPr lang="en-US" sz="2000" dirty="0"/>
-          </a:p>
-        </p:txBody>
-      </p:sp>
-      <p:sp>
-        <p:nvSpPr>
-          <p:cNvPr id="7" name="text_59"/>
-          <p:cNvSpPr txBox="1"/>
-          <p:nvPr/>
-        </p:nvSpPr>
-        <p:spPr>
-          <a:xfrm>
-            <a:off x="777240" y="2377440"/>
-            <a:ext cx="3474720" cy="1920240"/>
-          </a:xfrm>
-          <a:prstGeom prst="rect">
-            <a:avLst/>
-          </a:prstGeom>
-          <a:noFill/>
-          <a:ln/>
-        </p:spPr>
-        <p:txBody>
-          <a:bodyPr wrap="square" lIns="0" tIns="0" rIns="0" bIns="0" rtlCol="0" anchor="t"/>
-          <a:lstStyle/>
-          <a:p>
-            <a:pPr marL="342900" indent="-342900">
-              <a:spcAft>
-                <a:spcPts val="800"/>
-              </a:spcAft>
-              <a:buSzPct val="100000"/>
-              <a:buChar char="•"/>
-            </a:pPr>
-            <a:r>
-              <a:rPr lang="en-US" sz="1500" dirty="0">
-                <a:solidFill>
-                  <a:schemeClr val="tx1"/>
-                </a:solidFill>
-              </a:rPr>
-              <a:t>Personal information</a:t>
-            </a:r>
-            <a:endParaRPr lang="en-US" sz="1500" dirty="0"/>
-          </a:p>
-          <a:p>
-            <a:pPr marL="342900" indent="-342900">
-              <a:spcAft>
-                <a:spcPts val="800"/>
-              </a:spcAft>
-              <a:buSzPct val="100000"/>
-              <a:buChar char="•"/>
-            </a:pPr>
-            <a:r>
-              <a:rPr lang="en-US" sz="1500" dirty="0">
-                <a:solidFill>
-                  <a:schemeClr val="tx1"/>
-                </a:solidFill>
-              </a:rPr>
-              <a:t>One-click course registration and cancellation</a:t>
-            </a:r>
-            <a:endParaRPr lang="en-US" sz="1500" dirty="0"/>
-          </a:p>
-          <a:p>
-            <a:pPr marL="342900" indent="-342900">
-              <a:spcAft>
-                <a:spcPts val="800"/>
-              </a:spcAft>
-              <a:buSzPct val="100000"/>
-              <a:buChar char="•"/>
-            </a:pPr>
-            <a:r>
-              <a:rPr lang="en-US" sz="1500" dirty="0">
-                <a:solidFill>
-                  <a:schemeClr val="tx1"/>
-                </a:solidFill>
-              </a:rPr>
-              <a:t>Weekly timetable (odd / even weeks)</a:t>
-            </a:r>
-            <a:endParaRPr lang="en-US" sz="1500" dirty="0"/>
-          </a:p>
-          <a:p>
-            <a:pPr marL="342900" indent="-342900">
-              <a:spcAft>
-                <a:spcPts val="800"/>
-              </a:spcAft>
-              <a:buSzPct val="100000"/>
-              <a:buChar char="•"/>
-            </a:pPr>
-            <a:r>
-              <a:rPr lang="en-US" sz="1500" dirty="0">
-                <a:solidFill>
-                  <a:schemeClr val="tx1"/>
-                </a:solidFill>
-              </a:rPr>
-              <a:t>Grade lookup and GPA</a:t>
-            </a:r>
-            <a:endParaRPr lang="en-US" sz="1500" dirty="0"/>
-          </a:p>
-        </p:txBody>
-      </p:sp>
-      <p:sp>
-        <p:nvSpPr>
-          <p:cNvPr id="8" name="card_60"/>
+          <p:cNvPr id="5" name="caption-bg_57"/>
           <p:cNvSpPr/>
           <p:nvPr/>
         </p:nvSpPr>
         <p:spPr>
           <a:xfrm>
-            <a:off x="4663440" y="1188720"/>
-            <a:ext cx="4023360" cy="3291840"/>
+            <a:off x="548640" y="3900488"/>
+            <a:ext cx="2674620" cy="292608"/>
           </a:xfrm>
           <a:prstGeom prst="roundRect">
             <a:avLst>
-              <a:gd name="adj" fmla="val 2222"/>
+              <a:gd name="adj" fmla="val 18750"/>
             </a:avLst>
           </a:prstGeom>
           <a:solidFill>
-            <a:schemeClr val="bg2"/>
+            <a:srgbClr val="17323D"/>
           </a:solidFill>
           <a:ln/>
         </p:spPr>
       </p:sp>
       <p:sp>
         <p:nvSpPr>
-          <p:cNvPr id="9" name="icon-bg_61"/>
+          <p:cNvPr id="6" name="caption_58"/>
+          <p:cNvSpPr txBox="1"/>
+          <p:nvPr/>
+        </p:nvSpPr>
+        <p:spPr>
+          <a:xfrm>
+            <a:off x="548640" y="3900488"/>
+            <a:ext cx="2674620" cy="292608"/>
+          </a:xfrm>
+          <a:prstGeom prst="rect">
+            <a:avLst/>
+          </a:prstGeom>
+          <a:noFill/>
+          <a:ln/>
+        </p:spPr>
+        <p:txBody>
+          <a:bodyPr wrap="square" lIns="0" tIns="0" rIns="0" bIns="0" rtlCol="0" anchor="ctr"/>
+          <a:lstStyle/>
+          <a:p>
+            <a:pPr algn="ctr" indent="0" marL="0">
+              <a:buNone/>
+            </a:pPr>
+            <a:r>
+              <a:rPr lang="en-US" sz="1200" b="1" dirty="0">
+                <a:solidFill>
+                  <a:schemeClr val="bg1"/>
+                </a:solidFill>
+              </a:rPr>
+              <a:t>Register or cancel with one click</a:t>
+            </a:r>
+            <a:endParaRPr lang="en-US" sz="1200" dirty="0"/>
+          </a:p>
+        </p:txBody>
+      </p:sp>
+      <p:sp>
+        <p:nvSpPr>
+          <p:cNvPr id="7" name="shot-frame_59"/>
           <p:cNvSpPr/>
           <p:nvPr/>
         </p:nvSpPr>
         <p:spPr>
           <a:xfrm>
-            <a:off x="4937760" y="1463040"/>
-            <a:ext cx="685800" cy="685800"/>
-          </a:xfrm>
-          <a:prstGeom prst="ellipse">
+            <a:off x="6016752" y="1124712"/>
+            <a:ext cx="2688336" cy="1621003"/>
+          </a:xfrm>
+          <a:prstGeom prst="rect">
             <a:avLst/>
           </a:prstGeom>
           <a:solidFill>
-            <a:srgbClr val="E07A2F"/>
+            <a:srgbClr val="FFFFFF"/>
           </a:solidFill>
-          <a:ln/>
+          <a:ln w="9525">
+            <a:solidFill>
+              <a:srgbClr val="C9D6DA"/>
+            </a:solidFill>
+            <a:prstDash val="solid"/>
+          </a:ln>
+          <a:effectLst>
+            <a:outerShdw sx="100000" sy="100000" kx="0" ky="0" algn="bl" rotWithShape="0" blurRad="76200" dist="25400" dir="5400000">
+              <a:srgbClr val="000000">
+                <a:alpha val="12000"/>
+              </a:srgbClr>
+            </a:outerShdw>
+          </a:effectLst>
         </p:spPr>
       </p:sp>
       <p:pic>
         <p:nvPicPr>
-          <p:cNvPr id="10" name="icon_62" descr="preencoded.png">    </p:cNvPr>
+          <p:cNvPr id="8" name="screenshot_60" descr="Weekly timetable">    </p:cNvPr>
           <p:cNvPicPr>
             <a:picLocks noChangeAspect="1"/>
           </p:cNvPicPr>
@@ -5455,8 +6436,8 @@
         </p:blipFill>
         <p:spPr>
           <a:xfrm>
-            <a:off x="5109210" y="1634490"/>
-            <a:ext cx="342900" cy="342900"/>
+            <a:off x="6035040" y="1143000"/>
+            <a:ext cx="2651760" cy="1584427"/>
           </a:xfrm>
           <a:prstGeom prst="rect">
             <a:avLst/>
@@ -5465,14 +6446,186 @@
       </p:pic>
       <p:sp>
         <p:nvSpPr>
-          <p:cNvPr id="11" name="text_63"/>
-          <p:cNvSpPr txBox="1"/>
-          <p:nvPr/>
-        </p:nvSpPr>
-        <p:spPr>
-          <a:xfrm>
-            <a:off x="5806440" y="1600200"/>
-            <a:ext cx="2651760" cy="411480"/>
+          <p:cNvPr id="9" name="caption-bg_61"/>
+          <p:cNvSpPr/>
+          <p:nvPr/>
+        </p:nvSpPr>
+        <p:spPr>
+          <a:xfrm>
+            <a:off x="6126480" y="2343379"/>
+            <a:ext cx="1353312" cy="292608"/>
+          </a:xfrm>
+          <a:prstGeom prst="roundRect">
+            <a:avLst>
+              <a:gd name="adj" fmla="val 18750"/>
+            </a:avLst>
+          </a:prstGeom>
+          <a:solidFill>
+            <a:srgbClr val="17323D"/>
+          </a:solidFill>
+          <a:ln/>
+        </p:spPr>
+      </p:sp>
+      <p:sp>
+        <p:nvSpPr>
+          <p:cNvPr id="10" name="caption_62"/>
+          <p:cNvSpPr txBox="1"/>
+          <p:nvPr/>
+        </p:nvSpPr>
+        <p:spPr>
+          <a:xfrm>
+            <a:off x="6126480" y="2343379"/>
+            <a:ext cx="1353312" cy="292608"/>
+          </a:xfrm>
+          <a:prstGeom prst="rect">
+            <a:avLst/>
+          </a:prstGeom>
+          <a:noFill/>
+          <a:ln/>
+        </p:spPr>
+        <p:txBody>
+          <a:bodyPr wrap="square" lIns="0" tIns="0" rIns="0" bIns="0" rtlCol="0" anchor="ctr"/>
+          <a:lstStyle/>
+          <a:p>
+            <a:pPr algn="ctr" indent="0" marL="0">
+              <a:buNone/>
+            </a:pPr>
+            <a:r>
+              <a:rPr lang="en-US" sz="1200" b="1" dirty="0">
+                <a:solidFill>
+                  <a:schemeClr val="bg1"/>
+                </a:solidFill>
+              </a:rPr>
+              <a:t>Weekly timetable</a:t>
+            </a:r>
+            <a:endParaRPr lang="en-US" sz="1200" dirty="0"/>
+          </a:p>
+        </p:txBody>
+      </p:sp>
+      <p:sp>
+        <p:nvSpPr>
+          <p:cNvPr id="11" name="shot-frame_63"/>
+          <p:cNvSpPr/>
+          <p:nvPr/>
+        </p:nvSpPr>
+        <p:spPr>
+          <a:xfrm>
+            <a:off x="6016752" y="2937739"/>
+            <a:ext cx="2688336" cy="1621003"/>
+          </a:xfrm>
+          <a:prstGeom prst="rect">
+            <a:avLst/>
+          </a:prstGeom>
+          <a:solidFill>
+            <a:srgbClr val="FFFFFF"/>
+          </a:solidFill>
+          <a:ln w="9525">
+            <a:solidFill>
+              <a:srgbClr val="C9D6DA"/>
+            </a:solidFill>
+            <a:prstDash val="solid"/>
+          </a:ln>
+          <a:effectLst>
+            <a:outerShdw sx="100000" sy="100000" kx="0" ky="0" algn="bl" rotWithShape="0" blurRad="76200" dist="25400" dir="5400000">
+              <a:srgbClr val="000000">
+                <a:alpha val="12000"/>
+              </a:srgbClr>
+            </a:outerShdw>
+          </a:effectLst>
+        </p:spPr>
+      </p:sp>
+      <p:pic>
+        <p:nvPicPr>
+          <p:cNvPr id="12" name="screenshot_64" descr="Grades and GPA">    </p:cNvPr>
+          <p:cNvPicPr>
+            <a:picLocks noChangeAspect="1"/>
+          </p:cNvPicPr>
+          <p:nvPr/>
+        </p:nvPicPr>
+        <p:blipFill>
+          <a:blip r:embed="rId3"/>
+          <a:stretch>
+            <a:fillRect/>
+          </a:stretch>
+        </p:blipFill>
+        <p:spPr>
+          <a:xfrm>
+            <a:off x="6035040" y="2956027"/>
+            <a:ext cx="2651760" cy="1584427"/>
+          </a:xfrm>
+          <a:prstGeom prst="rect">
+            <a:avLst/>
+          </a:prstGeom>
+        </p:spPr>
+      </p:pic>
+      <p:sp>
+        <p:nvSpPr>
+          <p:cNvPr id="13" name="caption-bg_65"/>
+          <p:cNvSpPr/>
+          <p:nvPr/>
+        </p:nvSpPr>
+        <p:spPr>
+          <a:xfrm>
+            <a:off x="6126480" y="4156405"/>
+            <a:ext cx="1197864" cy="292608"/>
+          </a:xfrm>
+          <a:prstGeom prst="roundRect">
+            <a:avLst>
+              <a:gd name="adj" fmla="val 18750"/>
+            </a:avLst>
+          </a:prstGeom>
+          <a:solidFill>
+            <a:srgbClr val="17323D"/>
+          </a:solidFill>
+          <a:ln/>
+        </p:spPr>
+      </p:sp>
+      <p:sp>
+        <p:nvSpPr>
+          <p:cNvPr id="14" name="caption_66"/>
+          <p:cNvSpPr txBox="1"/>
+          <p:nvPr/>
+        </p:nvSpPr>
+        <p:spPr>
+          <a:xfrm>
+            <a:off x="6126480" y="4156405"/>
+            <a:ext cx="1197864" cy="292608"/>
+          </a:xfrm>
+          <a:prstGeom prst="rect">
+            <a:avLst/>
+          </a:prstGeom>
+          <a:noFill/>
+          <a:ln/>
+        </p:spPr>
+        <p:txBody>
+          <a:bodyPr wrap="square" lIns="0" tIns="0" rIns="0" bIns="0" rtlCol="0" anchor="ctr"/>
+          <a:lstStyle/>
+          <a:p>
+            <a:pPr algn="ctr" indent="0" marL="0">
+              <a:buNone/>
+            </a:pPr>
+            <a:r>
+              <a:rPr lang="en-US" sz="1200" b="1" dirty="0">
+                <a:solidFill>
+                  <a:schemeClr val="bg1"/>
+                </a:solidFill>
+              </a:rPr>
+              <a:t>Grades and GPA</a:t>
+            </a:r>
+            <a:endParaRPr lang="en-US" sz="1200" dirty="0"/>
+          </a:p>
+        </p:txBody>
+      </p:sp>
+      <p:sp>
+        <p:nvSpPr>
+          <p:cNvPr id="15" name="text_67"/>
+          <p:cNvSpPr txBox="1"/>
+          <p:nvPr/>
+        </p:nvSpPr>
+        <p:spPr>
+          <a:xfrm>
+            <a:off x="457200" y="4389120"/>
+            <a:ext cx="5257800" cy="274320"/>
           </a:xfrm>
           <a:prstGeom prst="rect">
             <a:avLst/>
@@ -5488,108 +6641,14 @@
               <a:buNone/>
             </a:pPr>
             <a:r>
-              <a:rPr lang="en-US" sz="2000" b="1" dirty="0">
-                <a:solidFill>
-                  <a:schemeClr val="tx2"/>
-                </a:solidFill>
-              </a:rPr>
-              <a:t>Admin portal</a:t>
-            </a:r>
-            <a:endParaRPr lang="en-US" sz="2000" dirty="0"/>
-          </a:p>
-        </p:txBody>
-      </p:sp>
-      <p:sp>
-        <p:nvSpPr>
-          <p:cNvPr id="12" name="text_64"/>
-          <p:cNvSpPr txBox="1"/>
-          <p:nvPr/>
-        </p:nvSpPr>
-        <p:spPr>
-          <a:xfrm>
-            <a:off x="4983480" y="2377440"/>
-            <a:ext cx="3474720" cy="1920240"/>
-          </a:xfrm>
-          <a:prstGeom prst="rect">
-            <a:avLst/>
-          </a:prstGeom>
-          <a:noFill/>
-          <a:ln/>
-        </p:spPr>
-        <p:txBody>
-          <a:bodyPr wrap="square" lIns="0" tIns="0" rIns="0" bIns="0" rtlCol="0" anchor="t"/>
-          <a:lstStyle/>
-          <a:p>
-            <a:pPr marL="342900" indent="-342900">
-              <a:spcAft>
-                <a:spcPts val="800"/>
-              </a:spcAft>
-              <a:buSzPct val="100000"/>
-              <a:buChar char="•"/>
-            </a:pPr>
-            <a:r>
-              <a:rPr lang="en-US" sz="1500" dirty="0">
-                <a:solidFill>
-                  <a:schemeClr val="tx1"/>
-                </a:solidFill>
-              </a:rPr>
-              <a:t>Course management and prerequisites</a:t>
-            </a:r>
-            <a:endParaRPr lang="en-US" sz="1500" dirty="0"/>
-          </a:p>
-          <a:p>
-            <a:pPr marL="342900" indent="-342900">
-              <a:spcAft>
-                <a:spcPts val="800"/>
-              </a:spcAft>
-              <a:buSzPct val="100000"/>
-              <a:buChar char="•"/>
-            </a:pPr>
-            <a:r>
-              <a:rPr lang="en-US" sz="1500" dirty="0">
-                <a:solidFill>
-                  <a:schemeClr val="tx1"/>
-                </a:solidFill>
-              </a:rPr>
-              <a:t>Semesters and registration windows</a:t>
-            </a:r>
-            <a:endParaRPr lang="en-US" sz="1500" dirty="0"/>
-          </a:p>
-          <a:p>
-            <a:pPr marL="342900" indent="-342900">
-              <a:spcAft>
-                <a:spcPts val="800"/>
-              </a:spcAft>
-              <a:buSzPct val="100000"/>
-              <a:buChar char="•"/>
-            </a:pPr>
-            <a:r>
-              <a:rPr lang="en-US" sz="1500" dirty="0">
-                <a:solidFill>
-                  <a:schemeClr val="tx1"/>
-                </a:solidFill>
-              </a:rPr>
-              <a:t>Class sections, lecturers and rooms</a:t>
-            </a:r>
-            <a:endParaRPr lang="en-US" sz="1500" dirty="0"/>
-          </a:p>
-          <a:p>
-            <a:pPr marL="342900" indent="-342900">
-              <a:spcAft>
-                <a:spcPts val="800"/>
-              </a:spcAft>
-              <a:buSzPct val="100000"/>
-              <a:buChar char="•"/>
-            </a:pPr>
-            <a:r>
-              <a:rPr lang="en-US" sz="1500" dirty="0">
-                <a:solidFill>
-                  <a:schemeClr val="tx1"/>
-                </a:solidFill>
-              </a:rPr>
-              <a:t>Schedules and registration tracking</a:t>
-            </a:r>
-            <a:endParaRPr lang="en-US" sz="1500" dirty="0"/>
+              <a:rPr lang="en-US" sz="1200" i="1" dirty="0">
+                <a:solidFill>
+                  <a:schemeClr val="accent4"/>
+                </a:solidFill>
+              </a:rPr>
+              <a:t>Real screenshots of the running system</a:t>
+            </a:r>
+            <a:endParaRPr lang="en-US" sz="1200" dirty="0"/>
           </a:p>
         </p:txBody>
       </p:sp>
@@ -5698,7 +6757,7 @@
                 <a:ea typeface="Cambria" pitchFamily="34" charset="-122"/>
                 <a:cs typeface="Cambria" pitchFamily="34" charset="-120"/>
               </a:rPr>
-              <a:t>How it works: three parts</a:t>
+              <a:t>The administrator portal</a:t>
             </a:r>
             <a:endParaRPr lang="en-US" sz="3000" dirty="0"/>
           </a:p>
@@ -5706,49 +6765,39 @@
       </p:sp>
       <p:sp>
         <p:nvSpPr>
-          <p:cNvPr id="3" name="card_65"/>
+          <p:cNvPr id="3" name="shot-frame_68"/>
           <p:cNvSpPr/>
           <p:nvPr/>
         </p:nvSpPr>
         <p:spPr>
           <a:xfrm>
-            <a:off x="457200" y="1234440"/>
-            <a:ext cx="2514600" cy="2514600"/>
-          </a:xfrm>
-          <a:prstGeom prst="roundRect">
-            <a:avLst>
-              <a:gd name="adj" fmla="val 2909"/>
-            </a:avLst>
+            <a:off x="438912" y="1124712"/>
+            <a:ext cx="5294376" cy="3178112"/>
+          </a:xfrm>
+          <a:prstGeom prst="rect">
+            <a:avLst/>
           </a:prstGeom>
           <a:solidFill>
-            <a:schemeClr val="bg2"/>
+            <a:srgbClr val="FFFFFF"/>
           </a:solidFill>
-          <a:ln/>
-        </p:spPr>
-      </p:sp>
-      <p:sp>
-        <p:nvSpPr>
-          <p:cNvPr id="4" name="icon-bg_66"/>
-          <p:cNvSpPr/>
-          <p:nvPr/>
-        </p:nvSpPr>
-        <p:spPr>
-          <a:xfrm>
-            <a:off x="1325880" y="1463040"/>
-            <a:ext cx="777240" cy="777240"/>
-          </a:xfrm>
-          <a:prstGeom prst="ellipse">
-            <a:avLst/>
-          </a:prstGeom>
-          <a:solidFill>
-            <a:srgbClr val="1F4E5F"/>
-          </a:solidFill>
-          <a:ln/>
+          <a:ln w="9525">
+            <a:solidFill>
+              <a:srgbClr val="C9D6DA"/>
+            </a:solidFill>
+            <a:prstDash val="solid"/>
+          </a:ln>
+          <a:effectLst>
+            <a:outerShdw sx="100000" sy="100000" kx="0" ky="0" algn="bl" rotWithShape="0" blurRad="76200" dist="25400" dir="5400000">
+              <a:srgbClr val="000000">
+                <a:alpha val="12000"/>
+              </a:srgbClr>
+            </a:outerShdw>
+          </a:effectLst>
         </p:spPr>
       </p:sp>
       <p:pic>
         <p:nvPicPr>
-          <p:cNvPr id="5" name="icon_67" descr="preencoded.png">    </p:cNvPr>
+          <p:cNvPr id="4" name="screenshot_69" descr="Open classes, assign lecturers and rooms">    </p:cNvPr>
           <p:cNvPicPr>
             <a:picLocks noChangeAspect="1"/>
           </p:cNvPicPr>
@@ -5762,8 +6811,8 @@
         </p:blipFill>
         <p:spPr>
           <a:xfrm>
-            <a:off x="1520190" y="1657350"/>
-            <a:ext cx="388620" cy="388620"/>
+            <a:off x="457200" y="1143000"/>
+            <a:ext cx="5257800" cy="3141536"/>
           </a:xfrm>
           <a:prstGeom prst="rect">
             <a:avLst/>
@@ -5772,182 +6821,97 @@
       </p:pic>
       <p:sp>
         <p:nvSpPr>
-          <p:cNvPr id="6" name="text_68"/>
-          <p:cNvSpPr txBox="1"/>
-          <p:nvPr/>
-        </p:nvSpPr>
-        <p:spPr>
-          <a:xfrm>
-            <a:off x="594360" y="2377440"/>
-            <a:ext cx="2240280" cy="365760"/>
-          </a:xfrm>
-          <a:prstGeom prst="rect">
-            <a:avLst/>
-          </a:prstGeom>
-          <a:noFill/>
-          <a:ln/>
-        </p:spPr>
-        <p:txBody>
-          <a:bodyPr wrap="square" lIns="0" tIns="0" rIns="0" bIns="0" rtlCol="0" anchor="t"/>
+          <p:cNvPr id="5" name="caption-bg_70"/>
+          <p:cNvSpPr/>
+          <p:nvPr/>
+        </p:nvSpPr>
+        <p:spPr>
+          <a:xfrm>
+            <a:off x="548640" y="3900488"/>
+            <a:ext cx="3218688" cy="292608"/>
+          </a:xfrm>
+          <a:prstGeom prst="roundRect">
+            <a:avLst>
+              <a:gd name="adj" fmla="val 18750"/>
+            </a:avLst>
+          </a:prstGeom>
+          <a:solidFill>
+            <a:srgbClr val="17323D"/>
+          </a:solidFill>
+          <a:ln/>
+        </p:spPr>
+      </p:sp>
+      <p:sp>
+        <p:nvSpPr>
+          <p:cNvPr id="6" name="caption_71"/>
+          <p:cNvSpPr txBox="1"/>
+          <p:nvPr/>
+        </p:nvSpPr>
+        <p:spPr>
+          <a:xfrm>
+            <a:off x="548640" y="3900488"/>
+            <a:ext cx="3218688" cy="292608"/>
+          </a:xfrm>
+          <a:prstGeom prst="rect">
+            <a:avLst/>
+          </a:prstGeom>
+          <a:noFill/>
+          <a:ln/>
+        </p:spPr>
+        <p:txBody>
+          <a:bodyPr wrap="square" lIns="0" tIns="0" rIns="0" bIns="0" rtlCol="0" anchor="ctr"/>
           <a:lstStyle/>
           <a:p>
             <a:pPr algn="ctr" indent="0" marL="0">
               <a:buNone/>
             </a:pPr>
             <a:r>
-              <a:rPr lang="en-US" sz="1900" b="1" dirty="0">
-                <a:solidFill>
-                  <a:schemeClr val="tx2"/>
-                </a:solidFill>
-              </a:rPr>
-              <a:t>Front end</a:t>
-            </a:r>
-            <a:endParaRPr lang="en-US" sz="1900" dirty="0"/>
-          </a:p>
-        </p:txBody>
-      </p:sp>
-      <p:sp>
-        <p:nvSpPr>
-          <p:cNvPr id="7" name="text_69"/>
-          <p:cNvSpPr txBox="1"/>
-          <p:nvPr/>
-        </p:nvSpPr>
-        <p:spPr>
-          <a:xfrm>
-            <a:off x="640080" y="2788920"/>
-            <a:ext cx="2148840" cy="594360"/>
-          </a:xfrm>
-          <a:prstGeom prst="rect">
-            <a:avLst/>
-          </a:prstGeom>
-          <a:noFill/>
-          <a:ln/>
-        </p:spPr>
-        <p:txBody>
-          <a:bodyPr wrap="square" lIns="0" tIns="0" rIns="0" bIns="0" rtlCol="0" anchor="t"/>
-          <a:lstStyle/>
-          <a:p>
-            <a:pPr algn="ctr" indent="0" marL="0">
-              <a:buNone/>
-            </a:pPr>
-            <a:r>
-              <a:rPr lang="en-US" sz="1400" dirty="0">
-                <a:solidFill>
-                  <a:schemeClr val="tx1"/>
-                </a:solidFill>
-              </a:rPr>
-              <a:t>What users see and click in the browser</a:t>
-            </a:r>
-            <a:endParaRPr lang="en-US" sz="1400" dirty="0"/>
-          </a:p>
-        </p:txBody>
-      </p:sp>
-      <p:sp>
-        <p:nvSpPr>
-          <p:cNvPr id="8" name="text_70"/>
-          <p:cNvSpPr txBox="1"/>
-          <p:nvPr/>
-        </p:nvSpPr>
-        <p:spPr>
-          <a:xfrm>
-            <a:off x="594360" y="3383280"/>
-            <a:ext cx="2240280" cy="274320"/>
-          </a:xfrm>
-          <a:prstGeom prst="rect">
-            <a:avLst/>
-          </a:prstGeom>
-          <a:noFill/>
-          <a:ln/>
-        </p:spPr>
-        <p:txBody>
-          <a:bodyPr wrap="square" lIns="0" tIns="0" rIns="0" bIns="0" rtlCol="0" anchor="t"/>
-          <a:lstStyle/>
-          <a:p>
-            <a:pPr algn="ctr" indent="0" marL="0">
-              <a:buNone/>
-            </a:pPr>
-            <a:r>
-              <a:rPr lang="en-US" sz="1300" i="1" dirty="0">
-                <a:solidFill>
-                  <a:schemeClr val="accent4"/>
-                </a:solidFill>
-              </a:rPr>
-              <a:t>React</a:t>
-            </a:r>
-            <a:endParaRPr lang="en-US" sz="1300" dirty="0"/>
-          </a:p>
-        </p:txBody>
-      </p:sp>
-      <p:sp>
-        <p:nvSpPr>
-          <p:cNvPr id="9" name="arrow_71"/>
+              <a:rPr lang="en-US" sz="1200" b="1" dirty="0">
+                <a:solidFill>
+                  <a:schemeClr val="bg1"/>
+                </a:solidFill>
+              </a:rPr>
+              <a:t>Open classes, assign lecturers and rooms</a:t>
+            </a:r>
+            <a:endParaRPr lang="en-US" sz="1200" dirty="0"/>
+          </a:p>
+        </p:txBody>
+      </p:sp>
+      <p:sp>
+        <p:nvSpPr>
+          <p:cNvPr id="7" name="shot-frame_72"/>
           <p:cNvSpPr/>
           <p:nvPr/>
         </p:nvSpPr>
         <p:spPr>
           <a:xfrm>
-            <a:off x="3017520" y="2487168"/>
-            <a:ext cx="274320" cy="0"/>
-          </a:xfrm>
-          <a:prstGeom prst="line">
-            <a:avLst/>
-          </a:prstGeom>
-          <a:noFill/>
-          <a:ln w="25400">
+            <a:off x="6016752" y="1124712"/>
+            <a:ext cx="2688336" cy="1621003"/>
+          </a:xfrm>
+          <a:prstGeom prst="rect">
+            <a:avLst/>
+          </a:prstGeom>
+          <a:solidFill>
+            <a:srgbClr val="FFFFFF"/>
+          </a:solidFill>
+          <a:ln w="9525">
             <a:solidFill>
-              <a:srgbClr val="5B6B73"/>
+              <a:srgbClr val="C9D6DA"/>
             </a:solidFill>
             <a:prstDash val="solid"/>
-            <a:headEnd type="triangle"/>
-            <a:tailEnd type="triangle"/>
           </a:ln>
-        </p:spPr>
-      </p:sp>
-      <p:sp>
-        <p:nvSpPr>
-          <p:cNvPr id="10" name="card_72"/>
-          <p:cNvSpPr/>
-          <p:nvPr/>
-        </p:nvSpPr>
-        <p:spPr>
-          <a:xfrm>
-            <a:off x="3337560" y="1234440"/>
-            <a:ext cx="2514600" cy="2514600"/>
-          </a:xfrm>
-          <a:prstGeom prst="roundRect">
-            <a:avLst>
-              <a:gd name="adj" fmla="val 2909"/>
-            </a:avLst>
-          </a:prstGeom>
-          <a:solidFill>
-            <a:schemeClr val="accent5"/>
-          </a:solidFill>
-          <a:ln/>
-        </p:spPr>
-      </p:sp>
-      <p:sp>
-        <p:nvSpPr>
-          <p:cNvPr id="11" name="icon-bg_73"/>
-          <p:cNvSpPr/>
-          <p:nvPr/>
-        </p:nvSpPr>
-        <p:spPr>
-          <a:xfrm>
-            <a:off x="4206240" y="1463040"/>
-            <a:ext cx="777240" cy="777240"/>
-          </a:xfrm>
-          <a:prstGeom prst="ellipse">
-            <a:avLst/>
-          </a:prstGeom>
-          <a:solidFill>
-            <a:srgbClr val="E07A2F"/>
-          </a:solidFill>
-          <a:ln/>
+          <a:effectLst>
+            <a:outerShdw sx="100000" sy="100000" kx="0" ky="0" algn="bl" rotWithShape="0" blurRad="76200" dist="25400" dir="5400000">
+              <a:srgbClr val="000000">
+                <a:alpha val="12000"/>
+              </a:srgbClr>
+            </a:outerShdw>
+          </a:effectLst>
         </p:spPr>
       </p:sp>
       <p:pic>
         <p:nvPicPr>
-          <p:cNvPr id="12" name="icon_74" descr="preencoded.png">    </p:cNvPr>
+          <p:cNvPr id="8" name="screenshot_73" descr="Registration periods">    </p:cNvPr>
           <p:cNvPicPr>
             <a:picLocks noChangeAspect="1"/>
           </p:cNvPicPr>
@@ -5961,8 +6925,8 @@
         </p:blipFill>
         <p:spPr>
           <a:xfrm>
-            <a:off x="4400550" y="1657350"/>
-            <a:ext cx="388620" cy="388620"/>
+            <a:off x="6035040" y="1143000"/>
+            <a:ext cx="2651760" cy="1584427"/>
           </a:xfrm>
           <a:prstGeom prst="rect">
             <a:avLst/>
@@ -5971,182 +6935,97 @@
       </p:pic>
       <p:sp>
         <p:nvSpPr>
-          <p:cNvPr id="13" name="text_75"/>
-          <p:cNvSpPr txBox="1"/>
-          <p:nvPr/>
-        </p:nvSpPr>
-        <p:spPr>
-          <a:xfrm>
-            <a:off x="3474720" y="2377440"/>
-            <a:ext cx="2240280" cy="365760"/>
-          </a:xfrm>
-          <a:prstGeom prst="rect">
-            <a:avLst/>
-          </a:prstGeom>
-          <a:noFill/>
-          <a:ln/>
-        </p:spPr>
-        <p:txBody>
-          <a:bodyPr wrap="square" lIns="0" tIns="0" rIns="0" bIns="0" rtlCol="0" anchor="t"/>
+          <p:cNvPr id="9" name="caption-bg_74"/>
+          <p:cNvSpPr/>
+          <p:nvPr/>
+        </p:nvSpPr>
+        <p:spPr>
+          <a:xfrm>
+            <a:off x="6126480" y="2343379"/>
+            <a:ext cx="1664208" cy="292608"/>
+          </a:xfrm>
+          <a:prstGeom prst="roundRect">
+            <a:avLst>
+              <a:gd name="adj" fmla="val 18750"/>
+            </a:avLst>
+          </a:prstGeom>
+          <a:solidFill>
+            <a:srgbClr val="17323D"/>
+          </a:solidFill>
+          <a:ln/>
+        </p:spPr>
+      </p:sp>
+      <p:sp>
+        <p:nvSpPr>
+          <p:cNvPr id="10" name="caption_75"/>
+          <p:cNvSpPr txBox="1"/>
+          <p:nvPr/>
+        </p:nvSpPr>
+        <p:spPr>
+          <a:xfrm>
+            <a:off x="6126480" y="2343379"/>
+            <a:ext cx="1664208" cy="292608"/>
+          </a:xfrm>
+          <a:prstGeom prst="rect">
+            <a:avLst/>
+          </a:prstGeom>
+          <a:noFill/>
+          <a:ln/>
+        </p:spPr>
+        <p:txBody>
+          <a:bodyPr wrap="square" lIns="0" tIns="0" rIns="0" bIns="0" rtlCol="0" anchor="ctr"/>
           <a:lstStyle/>
           <a:p>
             <a:pPr algn="ctr" indent="0" marL="0">
               <a:buNone/>
             </a:pPr>
             <a:r>
-              <a:rPr lang="en-US" sz="1900" b="1" dirty="0">
-                <a:solidFill>
-                  <a:schemeClr val="tx2"/>
-                </a:solidFill>
-              </a:rPr>
-              <a:t>Back end</a:t>
-            </a:r>
-            <a:endParaRPr lang="en-US" sz="1900" dirty="0"/>
-          </a:p>
-        </p:txBody>
-      </p:sp>
-      <p:sp>
-        <p:nvSpPr>
-          <p:cNvPr id="14" name="text_76"/>
-          <p:cNvSpPr txBox="1"/>
-          <p:nvPr/>
-        </p:nvSpPr>
-        <p:spPr>
-          <a:xfrm>
-            <a:off x="3520440" y="2788920"/>
-            <a:ext cx="2148840" cy="594360"/>
-          </a:xfrm>
-          <a:prstGeom prst="rect">
-            <a:avLst/>
-          </a:prstGeom>
-          <a:noFill/>
-          <a:ln/>
-        </p:spPr>
-        <p:txBody>
-          <a:bodyPr wrap="square" lIns="0" tIns="0" rIns="0" bIns="0" rtlCol="0" anchor="t"/>
-          <a:lstStyle/>
-          <a:p>
-            <a:pPr algn="ctr" indent="0" marL="0">
-              <a:buNone/>
-            </a:pPr>
-            <a:r>
-              <a:rPr lang="en-US" sz="1400" dirty="0">
-                <a:solidFill>
-                  <a:schemeClr val="tx1"/>
-                </a:solidFill>
-              </a:rPr>
-              <a:t>Checks who you are and applies the rules</a:t>
-            </a:r>
-            <a:endParaRPr lang="en-US" sz="1400" dirty="0"/>
-          </a:p>
-        </p:txBody>
-      </p:sp>
-      <p:sp>
-        <p:nvSpPr>
-          <p:cNvPr id="15" name="text_77"/>
-          <p:cNvSpPr txBox="1"/>
-          <p:nvPr/>
-        </p:nvSpPr>
-        <p:spPr>
-          <a:xfrm>
-            <a:off x="3474720" y="3383280"/>
-            <a:ext cx="2240280" cy="274320"/>
-          </a:xfrm>
-          <a:prstGeom prst="rect">
-            <a:avLst/>
-          </a:prstGeom>
-          <a:noFill/>
-          <a:ln/>
-        </p:spPr>
-        <p:txBody>
-          <a:bodyPr wrap="square" lIns="0" tIns="0" rIns="0" bIns="0" rtlCol="0" anchor="t"/>
-          <a:lstStyle/>
-          <a:p>
-            <a:pPr algn="ctr" indent="0" marL="0">
-              <a:buNone/>
-            </a:pPr>
-            <a:r>
-              <a:rPr lang="en-US" sz="1300" i="1" dirty="0">
-                <a:solidFill>
-                  <a:schemeClr val="accent4"/>
-                </a:solidFill>
-              </a:rPr>
-              <a:t>Node.js + Express</a:t>
-            </a:r>
-            <a:endParaRPr lang="en-US" sz="1300" dirty="0"/>
-          </a:p>
-        </p:txBody>
-      </p:sp>
-      <p:sp>
-        <p:nvSpPr>
-          <p:cNvPr id="16" name="arrow_78"/>
+              <a:rPr lang="en-US" sz="1200" b="1" dirty="0">
+                <a:solidFill>
+                  <a:schemeClr val="bg1"/>
+                </a:solidFill>
+              </a:rPr>
+              <a:t>Registration periods</a:t>
+            </a:r>
+            <a:endParaRPr lang="en-US" sz="1200" dirty="0"/>
+          </a:p>
+        </p:txBody>
+      </p:sp>
+      <p:sp>
+        <p:nvSpPr>
+          <p:cNvPr id="11" name="shot-frame_76"/>
           <p:cNvSpPr/>
           <p:nvPr/>
         </p:nvSpPr>
         <p:spPr>
           <a:xfrm>
-            <a:off x="5897880" y="2487168"/>
-            <a:ext cx="274320" cy="0"/>
-          </a:xfrm>
-          <a:prstGeom prst="line">
-            <a:avLst/>
-          </a:prstGeom>
-          <a:noFill/>
-          <a:ln w="25400">
+            <a:off x="6016752" y="2937739"/>
+            <a:ext cx="2688336" cy="1621003"/>
+          </a:xfrm>
+          <a:prstGeom prst="rect">
+            <a:avLst/>
+          </a:prstGeom>
+          <a:solidFill>
+            <a:srgbClr val="FFFFFF"/>
+          </a:solidFill>
+          <a:ln w="9525">
             <a:solidFill>
-              <a:srgbClr val="5B6B73"/>
+              <a:srgbClr val="C9D6DA"/>
             </a:solidFill>
             <a:prstDash val="solid"/>
-            <a:headEnd type="triangle"/>
-            <a:tailEnd type="triangle"/>
           </a:ln>
-        </p:spPr>
-      </p:sp>
-      <p:sp>
-        <p:nvSpPr>
-          <p:cNvPr id="17" name="card_79"/>
-          <p:cNvSpPr/>
-          <p:nvPr/>
-        </p:nvSpPr>
-        <p:spPr>
-          <a:xfrm>
-            <a:off x="6217920" y="1234440"/>
-            <a:ext cx="2514600" cy="2514600"/>
-          </a:xfrm>
-          <a:prstGeom prst="roundRect">
-            <a:avLst>
-              <a:gd name="adj" fmla="val 2909"/>
-            </a:avLst>
-          </a:prstGeom>
-          <a:solidFill>
-            <a:schemeClr val="bg2"/>
-          </a:solidFill>
-          <a:ln/>
-        </p:spPr>
-      </p:sp>
-      <p:sp>
-        <p:nvSpPr>
-          <p:cNvPr id="18" name="icon-bg_80"/>
-          <p:cNvSpPr/>
-          <p:nvPr/>
-        </p:nvSpPr>
-        <p:spPr>
-          <a:xfrm>
-            <a:off x="7086600" y="1463040"/>
-            <a:ext cx="777240" cy="777240"/>
-          </a:xfrm>
-          <a:prstGeom prst="ellipse">
-            <a:avLst/>
-          </a:prstGeom>
-          <a:solidFill>
-            <a:srgbClr val="1F4E5F"/>
-          </a:solidFill>
-          <a:ln/>
+          <a:effectLst>
+            <a:outerShdw sx="100000" sy="100000" kx="0" ky="0" algn="bl" rotWithShape="0" blurRad="76200" dist="25400" dir="5400000">
+              <a:srgbClr val="000000">
+                <a:alpha val="12000"/>
+              </a:srgbClr>
+            </a:outerShdw>
+          </a:effectLst>
         </p:spPr>
       </p:sp>
       <p:pic>
         <p:nvPicPr>
-          <p:cNvPr id="19" name="icon_81" descr="preencoded.png">    </p:cNvPr>
+          <p:cNvPr id="12" name="screenshot_77" descr="Room schedule">    </p:cNvPr>
           <p:cNvPicPr>
             <a:picLocks noChangeAspect="1"/>
           </p:cNvPicPr>
@@ -6160,8 +7039,8 @@
         </p:blipFill>
         <p:spPr>
           <a:xfrm>
-            <a:off x="7280910" y="1657350"/>
-            <a:ext cx="388620" cy="388620"/>
+            <a:off x="6035040" y="2956027"/>
+            <a:ext cx="2651760" cy="1584427"/>
           </a:xfrm>
           <a:prstGeom prst="rect">
             <a:avLst/>
@@ -6170,188 +7049,36 @@
       </p:pic>
       <p:sp>
         <p:nvSpPr>
-          <p:cNvPr id="20" name="text_82"/>
-          <p:cNvSpPr txBox="1"/>
-          <p:nvPr/>
-        </p:nvSpPr>
-        <p:spPr>
-          <a:xfrm>
-            <a:off x="6355080" y="2377440"/>
-            <a:ext cx="2240280" cy="365760"/>
-          </a:xfrm>
-          <a:prstGeom prst="rect">
-            <a:avLst/>
-          </a:prstGeom>
-          <a:noFill/>
-          <a:ln/>
-        </p:spPr>
-        <p:txBody>
-          <a:bodyPr wrap="square" lIns="0" tIns="0" rIns="0" bIns="0" rtlCol="0" anchor="t"/>
-          <a:lstStyle/>
-          <a:p>
-            <a:pPr algn="ctr" indent="0" marL="0">
-              <a:buNone/>
-            </a:pPr>
-            <a:r>
-              <a:rPr lang="en-US" sz="1900" b="1" dirty="0">
-                <a:solidFill>
-                  <a:schemeClr val="tx2"/>
-                </a:solidFill>
-              </a:rPr>
-              <a:t>Database</a:t>
-            </a:r>
-            <a:endParaRPr lang="en-US" sz="1900" dirty="0"/>
-          </a:p>
-        </p:txBody>
-      </p:sp>
-      <p:sp>
-        <p:nvSpPr>
-          <p:cNvPr id="21" name="text_83"/>
-          <p:cNvSpPr txBox="1"/>
-          <p:nvPr/>
-        </p:nvSpPr>
-        <p:spPr>
-          <a:xfrm>
-            <a:off x="6400800" y="2788920"/>
-            <a:ext cx="2148840" cy="594360"/>
-          </a:xfrm>
-          <a:prstGeom prst="rect">
-            <a:avLst/>
-          </a:prstGeom>
-          <a:noFill/>
-          <a:ln/>
-        </p:spPr>
-        <p:txBody>
-          <a:bodyPr wrap="square" lIns="0" tIns="0" rIns="0" bIns="0" rtlCol="0" anchor="t"/>
-          <a:lstStyle/>
-          <a:p>
-            <a:pPr algn="ctr" indent="0" marL="0">
-              <a:buNone/>
-            </a:pPr>
-            <a:r>
-              <a:rPr lang="en-US" sz="1400" dirty="0">
-                <a:solidFill>
-                  <a:schemeClr val="tx1"/>
-                </a:solidFill>
-              </a:rPr>
-              <a:t>Stores students, classes, timetables and grades</a:t>
-            </a:r>
-            <a:endParaRPr lang="en-US" sz="1400" dirty="0"/>
-          </a:p>
-        </p:txBody>
-      </p:sp>
-      <p:sp>
-        <p:nvSpPr>
-          <p:cNvPr id="22" name="text_84"/>
-          <p:cNvSpPr txBox="1"/>
-          <p:nvPr/>
-        </p:nvSpPr>
-        <p:spPr>
-          <a:xfrm>
-            <a:off x="6355080" y="3383280"/>
-            <a:ext cx="2240280" cy="274320"/>
-          </a:xfrm>
-          <a:prstGeom prst="rect">
-            <a:avLst/>
-          </a:prstGeom>
-          <a:noFill/>
-          <a:ln/>
-        </p:spPr>
-        <p:txBody>
-          <a:bodyPr wrap="square" lIns="0" tIns="0" rIns="0" bIns="0" rtlCol="0" anchor="t"/>
-          <a:lstStyle/>
-          <a:p>
-            <a:pPr algn="ctr" indent="0" marL="0">
-              <a:buNone/>
-            </a:pPr>
-            <a:r>
-              <a:rPr lang="en-US" sz="1300" i="1" dirty="0">
-                <a:solidFill>
-                  <a:schemeClr val="accent4"/>
-                </a:solidFill>
-              </a:rPr>
-              <a:t>MySQL</a:t>
-            </a:r>
-            <a:endParaRPr lang="en-US" sz="1300" dirty="0"/>
-          </a:p>
-        </p:txBody>
-      </p:sp>
-      <p:sp>
-        <p:nvSpPr>
-          <p:cNvPr id="23" name="card_85"/>
+          <p:cNvPr id="13" name="caption-bg_78"/>
           <p:cNvSpPr/>
           <p:nvPr/>
         </p:nvSpPr>
         <p:spPr>
           <a:xfrm>
-            <a:off x="457200" y="3931920"/>
-            <a:ext cx="8229600" cy="548640"/>
+            <a:off x="6126480" y="4156405"/>
+            <a:ext cx="1120140" cy="292608"/>
           </a:xfrm>
           <a:prstGeom prst="roundRect">
             <a:avLst>
-              <a:gd name="adj" fmla="val 13333"/>
+              <a:gd name="adj" fmla="val 18750"/>
             </a:avLst>
           </a:prstGeom>
           <a:solidFill>
-            <a:schemeClr val="accent5"/>
+            <a:srgbClr val="17323D"/>
           </a:solidFill>
           <a:ln/>
         </p:spPr>
       </p:sp>
       <p:sp>
         <p:nvSpPr>
-          <p:cNvPr id="24" name="icon-bg_86"/>
-          <p:cNvSpPr/>
-          <p:nvPr/>
-        </p:nvSpPr>
-        <p:spPr>
-          <a:xfrm>
-            <a:off x="594360" y="3995928"/>
-            <a:ext cx="420624" cy="420624"/>
-          </a:xfrm>
-          <a:prstGeom prst="ellipse">
-            <a:avLst/>
-          </a:prstGeom>
-          <a:solidFill>
-            <a:srgbClr val="1F4E5F"/>
-          </a:solidFill>
-          <a:ln/>
-        </p:spPr>
-      </p:sp>
-      <p:pic>
-        <p:nvPicPr>
-          <p:cNvPr id="25" name="icon_87" descr="preencoded.png">    </p:cNvPr>
-          <p:cNvPicPr>
-            <a:picLocks noChangeAspect="1"/>
-          </p:cNvPicPr>
-          <p:nvPr/>
-        </p:nvPicPr>
-        <p:blipFill>
-          <a:blip r:embed="rId4"/>
-          <a:stretch>
-            <a:fillRect/>
-          </a:stretch>
-        </p:blipFill>
-        <p:spPr>
-          <a:xfrm>
-            <a:off x="699516" y="4101084"/>
-            <a:ext cx="210312" cy="210312"/>
-          </a:xfrm>
-          <a:prstGeom prst="rect">
-            <a:avLst/>
-          </a:prstGeom>
-        </p:spPr>
-      </p:pic>
-      <p:sp>
-        <p:nvSpPr>
-          <p:cNvPr id="26" name="text_88"/>
-          <p:cNvSpPr txBox="1"/>
-          <p:nvPr/>
-        </p:nvSpPr>
-        <p:spPr>
-          <a:xfrm>
-            <a:off x="1188720" y="3931920"/>
-            <a:ext cx="7315200" cy="548640"/>
+          <p:cNvPr id="14" name="caption_79"/>
+          <p:cNvSpPr txBox="1"/>
+          <p:nvPr/>
+        </p:nvSpPr>
+        <p:spPr>
+          <a:xfrm>
+            <a:off x="6126480" y="4156405"/>
+            <a:ext cx="1120140" cy="292608"/>
           </a:xfrm>
           <a:prstGeom prst="rect">
             <a:avLst/>
@@ -6363,18 +7090,54 @@
           <a:bodyPr wrap="square" lIns="0" tIns="0" rIns="0" bIns="0" rtlCol="0" anchor="ctr"/>
           <a:lstStyle/>
           <a:p>
+            <a:pPr algn="ctr" indent="0" marL="0">
+              <a:buNone/>
+            </a:pPr>
+            <a:r>
+              <a:rPr lang="en-US" sz="1200" b="1" dirty="0">
+                <a:solidFill>
+                  <a:schemeClr val="bg1"/>
+                </a:solidFill>
+              </a:rPr>
+              <a:t>Room schedule</a:t>
+            </a:r>
+            <a:endParaRPr lang="en-US" sz="1200" dirty="0"/>
+          </a:p>
+        </p:txBody>
+      </p:sp>
+      <p:sp>
+        <p:nvSpPr>
+          <p:cNvPr id="15" name="text_80"/>
+          <p:cNvSpPr txBox="1"/>
+          <p:nvPr/>
+        </p:nvSpPr>
+        <p:spPr>
+          <a:xfrm>
+            <a:off x="457200" y="4389120"/>
+            <a:ext cx="5257800" cy="274320"/>
+          </a:xfrm>
+          <a:prstGeom prst="rect">
+            <a:avLst/>
+          </a:prstGeom>
+          <a:noFill/>
+          <a:ln/>
+        </p:spPr>
+        <p:txBody>
+          <a:bodyPr wrap="square" lIns="0" tIns="0" rIns="0" bIns="0" rtlCol="0" anchor="t"/>
+          <a:lstStyle/>
+          <a:p>
             <a:pPr indent="0" marL="0">
               <a:buNone/>
             </a:pPr>
             <a:r>
-              <a:rPr lang="en-US" sz="1500" dirty="0">
-                <a:solidFill>
-                  <a:schemeClr val="tx2"/>
-                </a:solidFill>
-              </a:rPr>
-              <a:t>Packaged with Docker: the whole system starts with one command</a:t>
-            </a:r>
-            <a:endParaRPr lang="en-US" sz="1500" dirty="0"/>
+              <a:rPr lang="en-US" sz="1200" i="1" dirty="0">
+                <a:solidFill>
+                  <a:schemeClr val="accent4"/>
+                </a:solidFill>
+              </a:rPr>
+              <a:t>Real screenshots of the running system</a:t>
+            </a:r>
+            <a:endParaRPr lang="en-US" sz="1200" dirty="0"/>
           </a:p>
         </p:txBody>
       </p:sp>
@@ -6483,7 +7246,7 @@
                 <a:ea typeface="Cambria" pitchFamily="34" charset="-122"/>
                 <a:cs typeface="Cambria" pitchFamily="34" charset="-120"/>
               </a:rPr>
-              <a:t>Challenge 1: the last seat</a:t>
+              <a:t>How it works: three parts</a:t>
             </a:r>
             <a:endParaRPr lang="en-US" sz="3000" dirty="0"/>
           </a:p>
@@ -6491,18 +7254,18 @@
       </p:sp>
       <p:sp>
         <p:nvSpPr>
-          <p:cNvPr id="3" name="card_89"/>
+          <p:cNvPr id="3" name="card_81"/>
           <p:cNvSpPr/>
           <p:nvPr/>
         </p:nvSpPr>
         <p:spPr>
           <a:xfrm>
-            <a:off x="457200" y="1188720"/>
-            <a:ext cx="4023360" cy="3291840"/>
+            <a:off x="457200" y="1234440"/>
+            <a:ext cx="2514600" cy="2514600"/>
           </a:xfrm>
           <a:prstGeom prst="roundRect">
             <a:avLst>
-              <a:gd name="adj" fmla="val 2222"/>
+              <a:gd name="adj" fmla="val 2909"/>
             </a:avLst>
           </a:prstGeom>
           <a:solidFill>
@@ -6513,14 +7276,58 @@
       </p:sp>
       <p:sp>
         <p:nvSpPr>
-          <p:cNvPr id="4" name="text_90"/>
-          <p:cNvSpPr txBox="1"/>
-          <p:nvPr/>
-        </p:nvSpPr>
-        <p:spPr>
-          <a:xfrm>
-            <a:off x="685800" y="1325880"/>
-            <a:ext cx="3566160" cy="365760"/>
+          <p:cNvPr id="4" name="icon-bg_82"/>
+          <p:cNvSpPr/>
+          <p:nvPr/>
+        </p:nvSpPr>
+        <p:spPr>
+          <a:xfrm>
+            <a:off x="1325880" y="1463040"/>
+            <a:ext cx="777240" cy="777240"/>
+          </a:xfrm>
+          <a:prstGeom prst="ellipse">
+            <a:avLst/>
+          </a:prstGeom>
+          <a:solidFill>
+            <a:srgbClr val="1F4E5F"/>
+          </a:solidFill>
+          <a:ln/>
+        </p:spPr>
+      </p:sp>
+      <p:pic>
+        <p:nvPicPr>
+          <p:cNvPr id="5" name="icon_83" descr="preencoded.png">    </p:cNvPr>
+          <p:cNvPicPr>
+            <a:picLocks noChangeAspect="1"/>
+          </p:cNvPicPr>
+          <p:nvPr/>
+        </p:nvPicPr>
+        <p:blipFill>
+          <a:blip r:embed="rId1"/>
+          <a:stretch>
+            <a:fillRect/>
+          </a:stretch>
+        </p:blipFill>
+        <p:spPr>
+          <a:xfrm>
+            <a:off x="1520190" y="1657350"/>
+            <a:ext cx="388620" cy="388620"/>
+          </a:xfrm>
+          <a:prstGeom prst="rect">
+            <a:avLst/>
+          </a:prstGeom>
+        </p:spPr>
+      </p:pic>
+      <p:sp>
+        <p:nvSpPr>
+          <p:cNvPr id="6" name="text_84"/>
+          <p:cNvSpPr txBox="1"/>
+          <p:nvPr/>
+        </p:nvSpPr>
+        <p:spPr>
+          <a:xfrm>
+            <a:off x="594360" y="2377440"/>
+            <a:ext cx="2240280" cy="365760"/>
           </a:xfrm>
           <a:prstGeom prst="rect">
             <a:avLst/>
@@ -6532,307 +7339,150 @@
           <a:bodyPr wrap="square" lIns="0" tIns="0" rIns="0" bIns="0" rtlCol="0" anchor="t"/>
           <a:lstStyle/>
           <a:p>
-            <a:pPr indent="0" marL="0">
-              <a:buNone/>
-            </a:pPr>
-            <a:r>
-              <a:rPr lang="en-US" sz="1800" b="1" dirty="0">
-                <a:solidFill>
-                  <a:schemeClr val="accent2"/>
-                </a:solidFill>
-              </a:rPr>
-              <a:t>Without protection</a:t>
-            </a:r>
-            <a:endParaRPr lang="en-US" sz="1800" dirty="0"/>
-          </a:p>
-        </p:txBody>
-      </p:sp>
-      <p:sp>
-        <p:nvSpPr>
-          <p:cNvPr id="5" name="step_91"/>
+            <a:pPr algn="ctr" indent="0" marL="0">
+              <a:buNone/>
+            </a:pPr>
+            <a:r>
+              <a:rPr lang="en-US" sz="1900" b="1" dirty="0">
+                <a:solidFill>
+                  <a:schemeClr val="tx2"/>
+                </a:solidFill>
+              </a:rPr>
+              <a:t>Front end</a:t>
+            </a:r>
+            <a:endParaRPr lang="en-US" sz="1900" dirty="0"/>
+          </a:p>
+        </p:txBody>
+      </p:sp>
+      <p:sp>
+        <p:nvSpPr>
+          <p:cNvPr id="7" name="text_85"/>
+          <p:cNvSpPr txBox="1"/>
+          <p:nvPr/>
+        </p:nvSpPr>
+        <p:spPr>
+          <a:xfrm>
+            <a:off x="640080" y="2788920"/>
+            <a:ext cx="2148840" cy="594360"/>
+          </a:xfrm>
+          <a:prstGeom prst="rect">
+            <a:avLst/>
+          </a:prstGeom>
+          <a:noFill/>
+          <a:ln/>
+        </p:spPr>
+        <p:txBody>
+          <a:bodyPr wrap="square" lIns="0" tIns="0" rIns="0" bIns="0" rtlCol="0" anchor="t"/>
+          <a:lstStyle/>
+          <a:p>
+            <a:pPr algn="ctr" indent="0" marL="0">
+              <a:buNone/>
+            </a:pPr>
+            <a:r>
+              <a:rPr lang="en-US" sz="1400" dirty="0">
+                <a:solidFill>
+                  <a:schemeClr val="tx1"/>
+                </a:solidFill>
+              </a:rPr>
+              <a:t>What users see and click in the browser</a:t>
+            </a:r>
+            <a:endParaRPr lang="en-US" sz="1400" dirty="0"/>
+          </a:p>
+        </p:txBody>
+      </p:sp>
+      <p:sp>
+        <p:nvSpPr>
+          <p:cNvPr id="8" name="text_86"/>
+          <p:cNvSpPr txBox="1"/>
+          <p:nvPr/>
+        </p:nvSpPr>
+        <p:spPr>
+          <a:xfrm>
+            <a:off x="594360" y="3383280"/>
+            <a:ext cx="2240280" cy="274320"/>
+          </a:xfrm>
+          <a:prstGeom prst="rect">
+            <a:avLst/>
+          </a:prstGeom>
+          <a:noFill/>
+          <a:ln/>
+        </p:spPr>
+        <p:txBody>
+          <a:bodyPr wrap="square" lIns="0" tIns="0" rIns="0" bIns="0" rtlCol="0" anchor="t"/>
+          <a:lstStyle/>
+          <a:p>
+            <a:pPr algn="ctr" indent="0" marL="0">
+              <a:buNone/>
+            </a:pPr>
+            <a:r>
+              <a:rPr lang="en-US" sz="1300" i="1" dirty="0">
+                <a:solidFill>
+                  <a:schemeClr val="accent4"/>
+                </a:solidFill>
+              </a:rPr>
+              <a:t>React</a:t>
+            </a:r>
+            <a:endParaRPr lang="en-US" sz="1300" dirty="0"/>
+          </a:p>
+        </p:txBody>
+      </p:sp>
+      <p:sp>
+        <p:nvSpPr>
+          <p:cNvPr id="9" name="arrow_87"/>
           <p:cNvSpPr/>
           <p:nvPr/>
         </p:nvSpPr>
         <p:spPr>
           <a:xfrm>
-            <a:off x="685800" y="1828800"/>
-            <a:ext cx="411480" cy="411480"/>
-          </a:xfrm>
-          <a:prstGeom prst="ellipse">
-            <a:avLst/>
+            <a:off x="3017520" y="2487168"/>
+            <a:ext cx="274320" cy="0"/>
+          </a:xfrm>
+          <a:prstGeom prst="line">
+            <a:avLst/>
+          </a:prstGeom>
+          <a:noFill/>
+          <a:ln w="25400">
+            <a:solidFill>
+              <a:srgbClr val="5B6B73"/>
+            </a:solidFill>
+            <a:prstDash val="solid"/>
+            <a:headEnd type="triangle"/>
+            <a:tailEnd type="triangle"/>
+          </a:ln>
+        </p:spPr>
+      </p:sp>
+      <p:sp>
+        <p:nvSpPr>
+          <p:cNvPr id="10" name="card_88"/>
+          <p:cNvSpPr/>
+          <p:nvPr/>
+        </p:nvSpPr>
+        <p:spPr>
+          <a:xfrm>
+            <a:off x="3337560" y="1234440"/>
+            <a:ext cx="2514600" cy="2514600"/>
+          </a:xfrm>
+          <a:prstGeom prst="roundRect">
+            <a:avLst>
+              <a:gd name="adj" fmla="val 2909"/>
+            </a:avLst>
           </a:prstGeom>
           <a:solidFill>
-            <a:srgbClr val="5B6B73"/>
+            <a:schemeClr val="accent5"/>
           </a:solidFill>
           <a:ln/>
         </p:spPr>
       </p:sp>
       <p:sp>
         <p:nvSpPr>
-          <p:cNvPr id="6" name="text_92"/>
-          <p:cNvSpPr txBox="1"/>
-          <p:nvPr/>
-        </p:nvSpPr>
-        <p:spPr>
-          <a:xfrm>
-            <a:off x="685800" y="1828800"/>
-            <a:ext cx="411480" cy="411480"/>
-          </a:xfrm>
-          <a:prstGeom prst="rect">
-            <a:avLst/>
-          </a:prstGeom>
-          <a:noFill/>
-          <a:ln/>
-        </p:spPr>
-        <p:txBody>
-          <a:bodyPr wrap="square" lIns="0" tIns="0" rIns="0" bIns="0" rtlCol="0" anchor="ctr"/>
-          <a:lstStyle/>
-          <a:p>
-            <a:pPr algn="ctr" indent="0" marL="0">
-              <a:buNone/>
-            </a:pPr>
-            <a:r>
-              <a:rPr lang="en-US" sz="1400" b="1" dirty="0">
-                <a:solidFill>
-                  <a:schemeClr val="bg1"/>
-                </a:solidFill>
-              </a:rPr>
-              <a:t>1</a:t>
-            </a:r>
-            <a:endParaRPr lang="en-US" sz="1400" dirty="0"/>
-          </a:p>
-        </p:txBody>
-      </p:sp>
-      <p:sp>
-        <p:nvSpPr>
-          <p:cNvPr id="7" name="text_93"/>
-          <p:cNvSpPr txBox="1"/>
-          <p:nvPr/>
-        </p:nvSpPr>
-        <p:spPr>
-          <a:xfrm>
-            <a:off x="1280160" y="1828800"/>
-            <a:ext cx="3017520" cy="411480"/>
-          </a:xfrm>
-          <a:prstGeom prst="rect">
-            <a:avLst/>
-          </a:prstGeom>
-          <a:noFill/>
-          <a:ln/>
-        </p:spPr>
-        <p:txBody>
-          <a:bodyPr wrap="square" lIns="0" tIns="0" rIns="0" bIns="0" rtlCol="0" anchor="ctr"/>
-          <a:lstStyle/>
-          <a:p>
-            <a:pPr indent="0" marL="0">
-              <a:buNone/>
-            </a:pPr>
-            <a:r>
-              <a:rPr lang="en-US" sz="1500" dirty="0">
-                <a:solidFill>
-                  <a:schemeClr val="tx1"/>
-                </a:solidFill>
-              </a:rPr>
-              <a:t>Student A reads: 1 seat left</a:t>
-            </a:r>
-            <a:endParaRPr lang="en-US" sz="1500" dirty="0"/>
-          </a:p>
-        </p:txBody>
-      </p:sp>
-      <p:sp>
-        <p:nvSpPr>
-          <p:cNvPr id="8" name="step_94"/>
+          <p:cNvPr id="11" name="icon-bg_89"/>
           <p:cNvSpPr/>
           <p:nvPr/>
         </p:nvSpPr>
         <p:spPr>
           <a:xfrm>
-            <a:off x="685800" y="2450592"/>
-            <a:ext cx="411480" cy="411480"/>
-          </a:xfrm>
-          <a:prstGeom prst="ellipse">
-            <a:avLst/>
-          </a:prstGeom>
-          <a:solidFill>
-            <a:srgbClr val="5B6B73"/>
-          </a:solidFill>
-          <a:ln/>
-        </p:spPr>
-      </p:sp>
-      <p:sp>
-        <p:nvSpPr>
-          <p:cNvPr id="9" name="text_95"/>
-          <p:cNvSpPr txBox="1"/>
-          <p:nvPr/>
-        </p:nvSpPr>
-        <p:spPr>
-          <a:xfrm>
-            <a:off x="685800" y="2450592"/>
-            <a:ext cx="411480" cy="411480"/>
-          </a:xfrm>
-          <a:prstGeom prst="rect">
-            <a:avLst/>
-          </a:prstGeom>
-          <a:noFill/>
-          <a:ln/>
-        </p:spPr>
-        <p:txBody>
-          <a:bodyPr wrap="square" lIns="0" tIns="0" rIns="0" bIns="0" rtlCol="0" anchor="ctr"/>
-          <a:lstStyle/>
-          <a:p>
-            <a:pPr algn="ctr" indent="0" marL="0">
-              <a:buNone/>
-            </a:pPr>
-            <a:r>
-              <a:rPr lang="en-US" sz="1400" b="1" dirty="0">
-                <a:solidFill>
-                  <a:schemeClr val="bg1"/>
-                </a:solidFill>
-              </a:rPr>
-              <a:t>2</a:t>
-            </a:r>
-            <a:endParaRPr lang="en-US" sz="1400" dirty="0"/>
-          </a:p>
-        </p:txBody>
-      </p:sp>
-      <p:sp>
-        <p:nvSpPr>
-          <p:cNvPr id="10" name="text_96"/>
-          <p:cNvSpPr txBox="1"/>
-          <p:nvPr/>
-        </p:nvSpPr>
-        <p:spPr>
-          <a:xfrm>
-            <a:off x="1280160" y="2450592"/>
-            <a:ext cx="3017520" cy="411480"/>
-          </a:xfrm>
-          <a:prstGeom prst="rect">
-            <a:avLst/>
-          </a:prstGeom>
-          <a:noFill/>
-          <a:ln/>
-        </p:spPr>
-        <p:txBody>
-          <a:bodyPr wrap="square" lIns="0" tIns="0" rIns="0" bIns="0" rtlCol="0" anchor="ctr"/>
-          <a:lstStyle/>
-          <a:p>
-            <a:pPr indent="0" marL="0">
-              <a:buNone/>
-            </a:pPr>
-            <a:r>
-              <a:rPr lang="en-US" sz="1500" dirty="0">
-                <a:solidFill>
-                  <a:schemeClr val="tx1"/>
-                </a:solidFill>
-              </a:rPr>
-              <a:t>Student B reads: 1 seat left</a:t>
-            </a:r>
-            <a:endParaRPr lang="en-US" sz="1500" dirty="0"/>
-          </a:p>
-        </p:txBody>
-      </p:sp>
-      <p:sp>
-        <p:nvSpPr>
-          <p:cNvPr id="11" name="step_97"/>
-          <p:cNvSpPr/>
-          <p:nvPr/>
-        </p:nvSpPr>
-        <p:spPr>
-          <a:xfrm>
-            <a:off x="685800" y="3072384"/>
-            <a:ext cx="411480" cy="411480"/>
-          </a:xfrm>
-          <a:prstGeom prst="ellipse">
-            <a:avLst/>
-          </a:prstGeom>
-          <a:solidFill>
-            <a:srgbClr val="5B6B73"/>
-          </a:solidFill>
-          <a:ln/>
-        </p:spPr>
-      </p:sp>
-      <p:sp>
-        <p:nvSpPr>
-          <p:cNvPr id="12" name="text_98"/>
-          <p:cNvSpPr txBox="1"/>
-          <p:nvPr/>
-        </p:nvSpPr>
-        <p:spPr>
-          <a:xfrm>
-            <a:off x="685800" y="3072384"/>
-            <a:ext cx="411480" cy="411480"/>
-          </a:xfrm>
-          <a:prstGeom prst="rect">
-            <a:avLst/>
-          </a:prstGeom>
-          <a:noFill/>
-          <a:ln/>
-        </p:spPr>
-        <p:txBody>
-          <a:bodyPr wrap="square" lIns="0" tIns="0" rIns="0" bIns="0" rtlCol="0" anchor="ctr"/>
-          <a:lstStyle/>
-          <a:p>
-            <a:pPr algn="ctr" indent="0" marL="0">
-              <a:buNone/>
-            </a:pPr>
-            <a:r>
-              <a:rPr lang="en-US" sz="1400" b="1" dirty="0">
-                <a:solidFill>
-                  <a:schemeClr val="bg1"/>
-                </a:solidFill>
-              </a:rPr>
-              <a:t>3</a:t>
-            </a:r>
-            <a:endParaRPr lang="en-US" sz="1400" dirty="0"/>
-          </a:p>
-        </p:txBody>
-      </p:sp>
-      <p:sp>
-        <p:nvSpPr>
-          <p:cNvPr id="13" name="text_99"/>
-          <p:cNvSpPr txBox="1"/>
-          <p:nvPr/>
-        </p:nvSpPr>
-        <p:spPr>
-          <a:xfrm>
-            <a:off x="1280160" y="3072384"/>
-            <a:ext cx="3017520" cy="411480"/>
-          </a:xfrm>
-          <a:prstGeom prst="rect">
-            <a:avLst/>
-          </a:prstGeom>
-          <a:noFill/>
-          <a:ln/>
-        </p:spPr>
-        <p:txBody>
-          <a:bodyPr wrap="square" lIns="0" tIns="0" rIns="0" bIns="0" rtlCol="0" anchor="ctr"/>
-          <a:lstStyle/>
-          <a:p>
-            <a:pPr indent="0" marL="0">
-              <a:buNone/>
-            </a:pPr>
-            <a:r>
-              <a:rPr lang="en-US" sz="1500" dirty="0">
-                <a:solidFill>
-                  <a:schemeClr val="tx1"/>
-                </a:solidFill>
-              </a:rPr>
-              <a:t>Both are registered</a:t>
-            </a:r>
-            <a:endParaRPr lang="en-US" sz="1500" dirty="0"/>
-          </a:p>
-        </p:txBody>
-      </p:sp>
-      <p:sp>
-        <p:nvSpPr>
-          <p:cNvPr id="14" name="step_100"/>
-          <p:cNvSpPr/>
-          <p:nvPr/>
-        </p:nvSpPr>
-        <p:spPr>
-          <a:xfrm>
-            <a:off x="685800" y="3694176"/>
-            <a:ext cx="411480" cy="411480"/>
+            <a:off x="4206240" y="1463040"/>
+            <a:ext cx="777240" cy="777240"/>
           </a:xfrm>
           <a:prstGeom prst="ellipse">
             <a:avLst/>
@@ -6843,37 +7493,97 @@
           <a:ln/>
         </p:spPr>
       </p:sp>
-      <p:sp>
-        <p:nvSpPr>
-          <p:cNvPr id="15" name="text_101"/>
-          <p:cNvSpPr txBox="1"/>
-          <p:nvPr/>
-        </p:nvSpPr>
-        <p:spPr>
-          <a:xfrm>
-            <a:off x="685800" y="3694176"/>
-            <a:ext cx="411480" cy="411480"/>
-          </a:xfrm>
-          <a:prstGeom prst="rect">
-            <a:avLst/>
-          </a:prstGeom>
-          <a:noFill/>
-          <a:ln/>
-        </p:spPr>
-        <p:txBody>
-          <a:bodyPr wrap="square" lIns="0" tIns="0" rIns="0" bIns="0" rtlCol="0" anchor="ctr"/>
+      <p:pic>
+        <p:nvPicPr>
+          <p:cNvPr id="12" name="icon_90" descr="preencoded.png">    </p:cNvPr>
+          <p:cNvPicPr>
+            <a:picLocks noChangeAspect="1"/>
+          </p:cNvPicPr>
+          <p:nvPr/>
+        </p:nvPicPr>
+        <p:blipFill>
+          <a:blip r:embed="rId2"/>
+          <a:stretch>
+            <a:fillRect/>
+          </a:stretch>
+        </p:blipFill>
+        <p:spPr>
+          <a:xfrm>
+            <a:off x="4400550" y="1657350"/>
+            <a:ext cx="388620" cy="388620"/>
+          </a:xfrm>
+          <a:prstGeom prst="rect">
+            <a:avLst/>
+          </a:prstGeom>
+        </p:spPr>
+      </p:pic>
+      <p:sp>
+        <p:nvSpPr>
+          <p:cNvPr id="13" name="text_91"/>
+          <p:cNvSpPr txBox="1"/>
+          <p:nvPr/>
+        </p:nvSpPr>
+        <p:spPr>
+          <a:xfrm>
+            <a:off x="3474720" y="2377440"/>
+            <a:ext cx="2240280" cy="365760"/>
+          </a:xfrm>
+          <a:prstGeom prst="rect">
+            <a:avLst/>
+          </a:prstGeom>
+          <a:noFill/>
+          <a:ln/>
+        </p:spPr>
+        <p:txBody>
+          <a:bodyPr wrap="square" lIns="0" tIns="0" rIns="0" bIns="0" rtlCol="0" anchor="t"/>
           <a:lstStyle/>
           <a:p>
             <a:pPr algn="ctr" indent="0" marL="0">
               <a:buNone/>
             </a:pPr>
             <a:r>
-              <a:rPr lang="en-US" sz="1400" b="1" dirty="0">
-                <a:solidFill>
-                  <a:schemeClr val="bg1"/>
-                </a:solidFill>
-              </a:rPr>
-              <a:t>4</a:t>
+              <a:rPr lang="en-US" sz="1900" b="1" dirty="0">
+                <a:solidFill>
+                  <a:schemeClr val="tx2"/>
+                </a:solidFill>
+              </a:rPr>
+              <a:t>Back end</a:t>
+            </a:r>
+            <a:endParaRPr lang="en-US" sz="1900" dirty="0"/>
+          </a:p>
+        </p:txBody>
+      </p:sp>
+      <p:sp>
+        <p:nvSpPr>
+          <p:cNvPr id="14" name="text_92"/>
+          <p:cNvSpPr txBox="1"/>
+          <p:nvPr/>
+        </p:nvSpPr>
+        <p:spPr>
+          <a:xfrm>
+            <a:off x="3520440" y="2788920"/>
+            <a:ext cx="2148840" cy="594360"/>
+          </a:xfrm>
+          <a:prstGeom prst="rect">
+            <a:avLst/>
+          </a:prstGeom>
+          <a:noFill/>
+          <a:ln/>
+        </p:spPr>
+        <p:txBody>
+          <a:bodyPr wrap="square" lIns="0" tIns="0" rIns="0" bIns="0" rtlCol="0" anchor="t"/>
+          <a:lstStyle/>
+          <a:p>
+            <a:pPr algn="ctr" indent="0" marL="0">
+              <a:buNone/>
+            </a:pPr>
+            <a:r>
+              <a:rPr lang="en-US" sz="1400" dirty="0">
+                <a:solidFill>
+                  <a:schemeClr val="tx1"/>
+                </a:solidFill>
+              </a:rPr>
+              <a:t>Checks who you are and applies the rules</a:t>
             </a:r>
             <a:endParaRPr lang="en-US" sz="1400" dirty="0"/>
           </a:p>
@@ -6881,54 +7591,253 @@
       </p:sp>
       <p:sp>
         <p:nvSpPr>
-          <p:cNvPr id="16" name="text_102"/>
-          <p:cNvSpPr txBox="1"/>
-          <p:nvPr/>
-        </p:nvSpPr>
-        <p:spPr>
-          <a:xfrm>
-            <a:off x="1280160" y="3694176"/>
-            <a:ext cx="3017520" cy="411480"/>
-          </a:xfrm>
-          <a:prstGeom prst="rect">
-            <a:avLst/>
-          </a:prstGeom>
-          <a:noFill/>
-          <a:ln/>
-        </p:spPr>
-        <p:txBody>
-          <a:bodyPr wrap="square" lIns="0" tIns="0" rIns="0" bIns="0" rtlCol="0" anchor="ctr"/>
-          <a:lstStyle/>
-          <a:p>
-            <a:pPr indent="0" marL="0">
-              <a:buNone/>
-            </a:pPr>
-            <a:r>
-              <a:rPr lang="en-US" sz="1500" b="1" dirty="0">
-                <a:solidFill>
-                  <a:schemeClr val="tx1"/>
-                </a:solidFill>
-              </a:rPr>
-              <a:t>Class is over-full: 41 / 40</a:t>
-            </a:r>
-            <a:endParaRPr lang="en-US" sz="1500" dirty="0"/>
-          </a:p>
-        </p:txBody>
-      </p:sp>
-      <p:sp>
-        <p:nvSpPr>
-          <p:cNvPr id="17" name="card_103"/>
+          <p:cNvPr id="15" name="text_93"/>
+          <p:cNvSpPr txBox="1"/>
+          <p:nvPr/>
+        </p:nvSpPr>
+        <p:spPr>
+          <a:xfrm>
+            <a:off x="3474720" y="3383280"/>
+            <a:ext cx="2240280" cy="274320"/>
+          </a:xfrm>
+          <a:prstGeom prst="rect">
+            <a:avLst/>
+          </a:prstGeom>
+          <a:noFill/>
+          <a:ln/>
+        </p:spPr>
+        <p:txBody>
+          <a:bodyPr wrap="square" lIns="0" tIns="0" rIns="0" bIns="0" rtlCol="0" anchor="t"/>
+          <a:lstStyle/>
+          <a:p>
+            <a:pPr algn="ctr" indent="0" marL="0">
+              <a:buNone/>
+            </a:pPr>
+            <a:r>
+              <a:rPr lang="en-US" sz="1300" i="1" dirty="0">
+                <a:solidFill>
+                  <a:schemeClr val="accent4"/>
+                </a:solidFill>
+              </a:rPr>
+              <a:t>Node.js + Express</a:t>
+            </a:r>
+            <a:endParaRPr lang="en-US" sz="1300" dirty="0"/>
+          </a:p>
+        </p:txBody>
+      </p:sp>
+      <p:sp>
+        <p:nvSpPr>
+          <p:cNvPr id="16" name="arrow_94"/>
           <p:cNvSpPr/>
           <p:nvPr/>
         </p:nvSpPr>
         <p:spPr>
           <a:xfrm>
-            <a:off x="4663440" y="1188720"/>
-            <a:ext cx="4023360" cy="3291840"/>
+            <a:off x="5897880" y="2487168"/>
+            <a:ext cx="274320" cy="0"/>
+          </a:xfrm>
+          <a:prstGeom prst="line">
+            <a:avLst/>
+          </a:prstGeom>
+          <a:noFill/>
+          <a:ln w="25400">
+            <a:solidFill>
+              <a:srgbClr val="5B6B73"/>
+            </a:solidFill>
+            <a:prstDash val="solid"/>
+            <a:headEnd type="triangle"/>
+            <a:tailEnd type="triangle"/>
+          </a:ln>
+        </p:spPr>
+      </p:sp>
+      <p:sp>
+        <p:nvSpPr>
+          <p:cNvPr id="17" name="card_95"/>
+          <p:cNvSpPr/>
+          <p:nvPr/>
+        </p:nvSpPr>
+        <p:spPr>
+          <a:xfrm>
+            <a:off x="6217920" y="1234440"/>
+            <a:ext cx="2514600" cy="2514600"/>
           </a:xfrm>
           <a:prstGeom prst="roundRect">
             <a:avLst>
-              <a:gd name="adj" fmla="val 2222"/>
+              <a:gd name="adj" fmla="val 2909"/>
+            </a:avLst>
+          </a:prstGeom>
+          <a:solidFill>
+            <a:schemeClr val="bg2"/>
+          </a:solidFill>
+          <a:ln/>
+        </p:spPr>
+      </p:sp>
+      <p:sp>
+        <p:nvSpPr>
+          <p:cNvPr id="18" name="icon-bg_96"/>
+          <p:cNvSpPr/>
+          <p:nvPr/>
+        </p:nvSpPr>
+        <p:spPr>
+          <a:xfrm>
+            <a:off x="7086600" y="1463040"/>
+            <a:ext cx="777240" cy="777240"/>
+          </a:xfrm>
+          <a:prstGeom prst="ellipse">
+            <a:avLst/>
+          </a:prstGeom>
+          <a:solidFill>
+            <a:srgbClr val="1F4E5F"/>
+          </a:solidFill>
+          <a:ln/>
+        </p:spPr>
+      </p:sp>
+      <p:pic>
+        <p:nvPicPr>
+          <p:cNvPr id="19" name="icon_97" descr="preencoded.png">    </p:cNvPr>
+          <p:cNvPicPr>
+            <a:picLocks noChangeAspect="1"/>
+          </p:cNvPicPr>
+          <p:nvPr/>
+        </p:nvPicPr>
+        <p:blipFill>
+          <a:blip r:embed="rId3"/>
+          <a:stretch>
+            <a:fillRect/>
+          </a:stretch>
+        </p:blipFill>
+        <p:spPr>
+          <a:xfrm>
+            <a:off x="7280910" y="1657350"/>
+            <a:ext cx="388620" cy="388620"/>
+          </a:xfrm>
+          <a:prstGeom prst="rect">
+            <a:avLst/>
+          </a:prstGeom>
+        </p:spPr>
+      </p:pic>
+      <p:sp>
+        <p:nvSpPr>
+          <p:cNvPr id="20" name="text_98"/>
+          <p:cNvSpPr txBox="1"/>
+          <p:nvPr/>
+        </p:nvSpPr>
+        <p:spPr>
+          <a:xfrm>
+            <a:off x="6355080" y="2377440"/>
+            <a:ext cx="2240280" cy="365760"/>
+          </a:xfrm>
+          <a:prstGeom prst="rect">
+            <a:avLst/>
+          </a:prstGeom>
+          <a:noFill/>
+          <a:ln/>
+        </p:spPr>
+        <p:txBody>
+          <a:bodyPr wrap="square" lIns="0" tIns="0" rIns="0" bIns="0" rtlCol="0" anchor="t"/>
+          <a:lstStyle/>
+          <a:p>
+            <a:pPr algn="ctr" indent="0" marL="0">
+              <a:buNone/>
+            </a:pPr>
+            <a:r>
+              <a:rPr lang="en-US" sz="1900" b="1" dirty="0">
+                <a:solidFill>
+                  <a:schemeClr val="tx2"/>
+                </a:solidFill>
+              </a:rPr>
+              <a:t>Database</a:t>
+            </a:r>
+            <a:endParaRPr lang="en-US" sz="1900" dirty="0"/>
+          </a:p>
+        </p:txBody>
+      </p:sp>
+      <p:sp>
+        <p:nvSpPr>
+          <p:cNvPr id="21" name="text_99"/>
+          <p:cNvSpPr txBox="1"/>
+          <p:nvPr/>
+        </p:nvSpPr>
+        <p:spPr>
+          <a:xfrm>
+            <a:off x="6400800" y="2788920"/>
+            <a:ext cx="2148840" cy="594360"/>
+          </a:xfrm>
+          <a:prstGeom prst="rect">
+            <a:avLst/>
+          </a:prstGeom>
+          <a:noFill/>
+          <a:ln/>
+        </p:spPr>
+        <p:txBody>
+          <a:bodyPr wrap="square" lIns="0" tIns="0" rIns="0" bIns="0" rtlCol="0" anchor="t"/>
+          <a:lstStyle/>
+          <a:p>
+            <a:pPr algn="ctr" indent="0" marL="0">
+              <a:buNone/>
+            </a:pPr>
+            <a:r>
+              <a:rPr lang="en-US" sz="1400" dirty="0">
+                <a:solidFill>
+                  <a:schemeClr val="tx1"/>
+                </a:solidFill>
+              </a:rPr>
+              <a:t>Stores students, classes, timetables and grades</a:t>
+            </a:r>
+            <a:endParaRPr lang="en-US" sz="1400" dirty="0"/>
+          </a:p>
+        </p:txBody>
+      </p:sp>
+      <p:sp>
+        <p:nvSpPr>
+          <p:cNvPr id="22" name="text_100"/>
+          <p:cNvSpPr txBox="1"/>
+          <p:nvPr/>
+        </p:nvSpPr>
+        <p:spPr>
+          <a:xfrm>
+            <a:off x="6355080" y="3383280"/>
+            <a:ext cx="2240280" cy="274320"/>
+          </a:xfrm>
+          <a:prstGeom prst="rect">
+            <a:avLst/>
+          </a:prstGeom>
+          <a:noFill/>
+          <a:ln/>
+        </p:spPr>
+        <p:txBody>
+          <a:bodyPr wrap="square" lIns="0" tIns="0" rIns="0" bIns="0" rtlCol="0" anchor="t"/>
+          <a:lstStyle/>
+          <a:p>
+            <a:pPr algn="ctr" indent="0" marL="0">
+              <a:buNone/>
+            </a:pPr>
+            <a:r>
+              <a:rPr lang="en-US" sz="1300" i="1" dirty="0">
+                <a:solidFill>
+                  <a:schemeClr val="accent4"/>
+                </a:solidFill>
+              </a:rPr>
+              <a:t>MySQL</a:t>
+            </a:r>
+            <a:endParaRPr lang="en-US" sz="1300" dirty="0"/>
+          </a:p>
+        </p:txBody>
+      </p:sp>
+      <p:sp>
+        <p:nvSpPr>
+          <p:cNvPr id="23" name="card_101"/>
+          <p:cNvSpPr/>
+          <p:nvPr/>
+        </p:nvSpPr>
+        <p:spPr>
+          <a:xfrm>
+            <a:off x="457200" y="3931920"/>
+            <a:ext cx="8229600" cy="548640"/>
+          </a:xfrm>
+          <a:prstGeom prst="roundRect">
+            <a:avLst>
+              <a:gd name="adj" fmla="val 13333"/>
             </a:avLst>
           </a:prstGeom>
           <a:solidFill>
@@ -6939,187 +7848,81 @@
       </p:sp>
       <p:sp>
         <p:nvSpPr>
-          <p:cNvPr id="18" name="text_104"/>
-          <p:cNvSpPr txBox="1"/>
-          <p:nvPr/>
-        </p:nvSpPr>
-        <p:spPr>
-          <a:xfrm>
-            <a:off x="4892040" y="1325880"/>
-            <a:ext cx="3566160" cy="365760"/>
-          </a:xfrm>
-          <a:prstGeom prst="rect">
-            <a:avLst/>
-          </a:prstGeom>
-          <a:noFill/>
-          <a:ln/>
-        </p:spPr>
-        <p:txBody>
-          <a:bodyPr wrap="square" lIns="0" tIns="0" rIns="0" bIns="0" rtlCol="0" anchor="t"/>
+          <p:cNvPr id="24" name="icon-bg_102"/>
+          <p:cNvSpPr/>
+          <p:nvPr/>
+        </p:nvSpPr>
+        <p:spPr>
+          <a:xfrm>
+            <a:off x="594360" y="3995928"/>
+            <a:ext cx="420624" cy="420624"/>
+          </a:xfrm>
+          <a:prstGeom prst="ellipse">
+            <a:avLst/>
+          </a:prstGeom>
+          <a:solidFill>
+            <a:srgbClr val="1F4E5F"/>
+          </a:solidFill>
+          <a:ln/>
+        </p:spPr>
+      </p:sp>
+      <p:pic>
+        <p:nvPicPr>
+          <p:cNvPr id="25" name="icon_103" descr="preencoded.png">    </p:cNvPr>
+          <p:cNvPicPr>
+            <a:picLocks noChangeAspect="1"/>
+          </p:cNvPicPr>
+          <p:nvPr/>
+        </p:nvPicPr>
+        <p:blipFill>
+          <a:blip r:embed="rId4"/>
+          <a:stretch>
+            <a:fillRect/>
+          </a:stretch>
+        </p:blipFill>
+        <p:spPr>
+          <a:xfrm>
+            <a:off x="699516" y="4101084"/>
+            <a:ext cx="210312" cy="210312"/>
+          </a:xfrm>
+          <a:prstGeom prst="rect">
+            <a:avLst/>
+          </a:prstGeom>
+        </p:spPr>
+      </p:pic>
+      <p:sp>
+        <p:nvSpPr>
+          <p:cNvPr id="26" name="text_104"/>
+          <p:cNvSpPr txBox="1"/>
+          <p:nvPr/>
+        </p:nvSpPr>
+        <p:spPr>
+          <a:xfrm>
+            <a:off x="1188720" y="3931920"/>
+            <a:ext cx="7315200" cy="548640"/>
+          </a:xfrm>
+          <a:prstGeom prst="rect">
+            <a:avLst/>
+          </a:prstGeom>
+          <a:noFill/>
+          <a:ln/>
+        </p:spPr>
+        <p:txBody>
+          <a:bodyPr wrap="square" lIns="0" tIns="0" rIns="0" bIns="0" rtlCol="0" anchor="ctr"/>
           <a:lstStyle/>
           <a:p>
             <a:pPr indent="0" marL="0">
               <a:buNone/>
             </a:pPr>
             <a:r>
-              <a:rPr lang="en-US" sz="1800" b="1" dirty="0">
+              <a:rPr lang="en-US" sz="1500" dirty="0">
                 <a:solidFill>
                   <a:schemeClr val="tx2"/>
                 </a:solidFill>
               </a:rPr>
-              <a:t>My solution</a:t>
-            </a:r>
-            <a:endParaRPr lang="en-US" sz="1800" dirty="0"/>
-          </a:p>
-        </p:txBody>
-      </p:sp>
-      <p:sp>
-        <p:nvSpPr>
-          <p:cNvPr id="19" name="text_105"/>
-          <p:cNvSpPr txBox="1"/>
-          <p:nvPr/>
-        </p:nvSpPr>
-        <p:spPr>
-          <a:xfrm>
-            <a:off x="4892040" y="1828800"/>
-            <a:ext cx="3611880" cy="777240"/>
-          </a:xfrm>
-          <a:prstGeom prst="rect">
-            <a:avLst/>
-          </a:prstGeom>
-          <a:noFill/>
-          <a:ln/>
-        </p:spPr>
-        <p:txBody>
-          <a:bodyPr wrap="square" lIns="0" tIns="0" rIns="0" bIns="0" rtlCol="0" anchor="t"/>
-          <a:lstStyle/>
-          <a:p>
-            <a:pPr indent="0" marL="0">
-              <a:buNone/>
-            </a:pPr>
-            <a:r>
-              <a:rPr lang="en-US" sz="1400" b="1" dirty="0">
-                <a:solidFill>
-                  <a:schemeClr val="tx2"/>
-                </a:solidFill>
-              </a:rPr>
-              <a:t>All or nothing</a:t>
-            </a:r>
-            <a:endParaRPr lang="en-US" sz="1400" dirty="0"/>
-          </a:p>
-          <a:p>
-            <a:pPr indent="0" marL="0">
-              <a:buNone/>
-            </a:pPr>
-            <a:r>
-              <a:rPr lang="en-US" sz="1400" dirty="0">
-                <a:solidFill>
-                  <a:schemeClr val="tx1"/>
-                </a:solidFill>
-              </a:rPr>
-              <a:t>every check and the sign-up succeed together, or nothing changes</a:t>
-            </a:r>
-            <a:endParaRPr lang="en-US" sz="1400" dirty="0"/>
-          </a:p>
-        </p:txBody>
-      </p:sp>
-      <p:sp>
-        <p:nvSpPr>
-          <p:cNvPr id="20" name="text_106"/>
-          <p:cNvSpPr txBox="1"/>
-          <p:nvPr/>
-        </p:nvSpPr>
-        <p:spPr>
-          <a:xfrm>
-            <a:off x="4892040" y="2697480"/>
-            <a:ext cx="3611880" cy="777240"/>
-          </a:xfrm>
-          <a:prstGeom prst="rect">
-            <a:avLst/>
-          </a:prstGeom>
-          <a:noFill/>
-          <a:ln/>
-        </p:spPr>
-        <p:txBody>
-          <a:bodyPr wrap="square" lIns="0" tIns="0" rIns="0" bIns="0" rtlCol="0" anchor="t"/>
-          <a:lstStyle/>
-          <a:p>
-            <a:pPr indent="0" marL="0">
-              <a:buNone/>
-            </a:pPr>
-            <a:r>
-              <a:rPr lang="en-US" sz="1400" b="1" dirty="0">
-                <a:solidFill>
-                  <a:schemeClr val="tx2"/>
-                </a:solidFill>
-              </a:rPr>
-              <a:t>A short lock</a:t>
-            </a:r>
-            <a:endParaRPr lang="en-US" sz="1400" dirty="0"/>
-          </a:p>
-          <a:p>
-            <a:pPr indent="0" marL="0">
-              <a:buNone/>
-            </a:pPr>
-            <a:r>
-              <a:rPr lang="en-US" sz="1400" dirty="0">
-                <a:solidFill>
-                  <a:schemeClr val="tx1"/>
-                </a:solidFill>
-              </a:rPr>
-              <a:t>the class is locked for a moment, so Student B waits for Student A</a:t>
-            </a:r>
-            <a:endParaRPr lang="en-US" sz="1400" dirty="0"/>
-          </a:p>
-        </p:txBody>
-      </p:sp>
-      <p:sp>
-        <p:nvSpPr>
-          <p:cNvPr id="21" name="text_107"/>
-          <p:cNvSpPr txBox="1"/>
-          <p:nvPr/>
-        </p:nvSpPr>
-        <p:spPr>
-          <a:xfrm>
-            <a:off x="4892040" y="3566160"/>
-            <a:ext cx="3611880" cy="777240"/>
-          </a:xfrm>
-          <a:prstGeom prst="rect">
-            <a:avLst/>
-          </a:prstGeom>
-          <a:noFill/>
-          <a:ln/>
-        </p:spPr>
-        <p:txBody>
-          <a:bodyPr wrap="square" lIns="0" tIns="0" rIns="0" bIns="0" rtlCol="0" anchor="t"/>
-          <a:lstStyle/>
-          <a:p>
-            <a:pPr indent="0" marL="0">
-              <a:buNone/>
-            </a:pPr>
-            <a:r>
-              <a:rPr lang="en-US" sz="1400" b="1" dirty="0">
-                <a:solidFill>
-                  <a:schemeClr val="tx2"/>
-                </a:solidFill>
-              </a:rPr>
-              <a:t>A safety rule</a:t>
-            </a:r>
-            <a:endParaRPr lang="en-US" sz="1400" dirty="0"/>
-          </a:p>
-          <a:p>
-            <a:pPr indent="0" marL="0">
-              <a:buNone/>
-            </a:pPr>
-            <a:r>
-              <a:rPr lang="en-US" sz="1400" dirty="0">
-                <a:solidFill>
-                  <a:schemeClr val="tx1"/>
-                </a:solidFill>
-              </a:rPr>
-              <a:t>the database itself refuses more students than seats</a:t>
-            </a:r>
-            <a:endParaRPr lang="en-US" sz="1400" dirty="0"/>
+              <a:t>Packaged with Docker: the whole system starts with one command</a:t>
+            </a:r>
+            <a:endParaRPr lang="en-US" sz="1500" dirty="0"/>
           </a:p>
         </p:txBody>
       </p:sp>
@@ -7228,7 +8031,7 @@
                 <a:ea typeface="Cambria" pitchFamily="34" charset="-122"/>
                 <a:cs typeface="Cambria" pitchFamily="34" charset="-120"/>
               </a:rPr>
-              <a:t>Challenge 2: timetable clashes</a:t>
+              <a:t>Challenge 1: the last seat</a:t>
             </a:r>
             <a:endParaRPr lang="en-US" sz="3000" dirty="0"/>
           </a:p>
@@ -7236,54 +8039,18 @@
       </p:sp>
       <p:sp>
         <p:nvSpPr>
-          <p:cNvPr id="3" name="text_108"/>
-          <p:cNvSpPr txBox="1"/>
-          <p:nvPr/>
-        </p:nvSpPr>
-        <p:spPr>
-          <a:xfrm>
-            <a:off x="457200" y="1097280"/>
-            <a:ext cx="8229600" cy="365760"/>
-          </a:xfrm>
-          <a:prstGeom prst="rect">
-            <a:avLst/>
-          </a:prstGeom>
-          <a:noFill/>
-          <a:ln/>
-        </p:spPr>
-        <p:txBody>
-          <a:bodyPr wrap="square" lIns="0" tIns="0" rIns="0" bIns="0" rtlCol="0" anchor="t"/>
-          <a:lstStyle/>
-          <a:p>
-            <a:pPr indent="0" marL="0">
-              <a:buNone/>
-            </a:pPr>
-            <a:r>
-              <a:rPr lang="en-US" sz="1600" dirty="0">
-                <a:solidFill>
-                  <a:schemeClr val="accent4"/>
-                </a:solidFill>
-              </a:rPr>
-              <a:t>Two classes clash only if all three conditions are true</a:t>
-            </a:r>
-            <a:endParaRPr lang="en-US" sz="1600" dirty="0"/>
-          </a:p>
-        </p:txBody>
-      </p:sp>
-      <p:sp>
-        <p:nvSpPr>
-          <p:cNvPr id="4" name="card_109"/>
+          <p:cNvPr id="3" name="card_105"/>
           <p:cNvSpPr/>
           <p:nvPr/>
         </p:nvSpPr>
         <p:spPr>
           <a:xfrm>
-            <a:off x="457200" y="1645920"/>
-            <a:ext cx="2651760" cy="2011680"/>
+            <a:off x="457200" y="1188720"/>
+            <a:ext cx="4023360" cy="3291840"/>
           </a:xfrm>
           <a:prstGeom prst="roundRect">
             <a:avLst>
-              <a:gd name="adj" fmla="val 3636"/>
+              <a:gd name="adj" fmla="val 2222"/>
             </a:avLst>
           </a:prstGeom>
           <a:solidFill>
@@ -7294,410 +8061,422 @@
       </p:sp>
       <p:sp>
         <p:nvSpPr>
-          <p:cNvPr id="5" name="icon-bg_110"/>
+          <p:cNvPr id="4" name="text_106"/>
+          <p:cNvSpPr txBox="1"/>
+          <p:nvPr/>
+        </p:nvSpPr>
+        <p:spPr>
+          <a:xfrm>
+            <a:off x="685800" y="1325880"/>
+            <a:ext cx="3566160" cy="365760"/>
+          </a:xfrm>
+          <a:prstGeom prst="rect">
+            <a:avLst/>
+          </a:prstGeom>
+          <a:noFill/>
+          <a:ln/>
+        </p:spPr>
+        <p:txBody>
+          <a:bodyPr wrap="square" lIns="0" tIns="0" rIns="0" bIns="0" rtlCol="0" anchor="t"/>
+          <a:lstStyle/>
+          <a:p>
+            <a:pPr indent="0" marL="0">
+              <a:buNone/>
+            </a:pPr>
+            <a:r>
+              <a:rPr lang="en-US" sz="1800" b="1" dirty="0">
+                <a:solidFill>
+                  <a:schemeClr val="accent2"/>
+                </a:solidFill>
+              </a:rPr>
+              <a:t>Without protection</a:t>
+            </a:r>
+            <a:endParaRPr lang="en-US" sz="1800" dirty="0"/>
+          </a:p>
+        </p:txBody>
+      </p:sp>
+      <p:sp>
+        <p:nvSpPr>
+          <p:cNvPr id="5" name="step_107"/>
           <p:cNvSpPr/>
           <p:nvPr/>
         </p:nvSpPr>
         <p:spPr>
           <a:xfrm>
-            <a:off x="685800" y="1874520"/>
-            <a:ext cx="640080" cy="640080"/>
+            <a:off x="685800" y="1828800"/>
+            <a:ext cx="411480" cy="411480"/>
           </a:xfrm>
           <a:prstGeom prst="ellipse">
             <a:avLst/>
           </a:prstGeom>
           <a:solidFill>
-            <a:srgbClr val="1F4E5F"/>
+            <a:srgbClr val="5B6B73"/>
           </a:solidFill>
           <a:ln/>
         </p:spPr>
       </p:sp>
-      <p:pic>
-        <p:nvPicPr>
-          <p:cNvPr id="6" name="icon_111" descr="preencoded.png">    </p:cNvPr>
-          <p:cNvPicPr>
-            <a:picLocks noChangeAspect="1"/>
-          </p:cNvPicPr>
-          <p:nvPr/>
-        </p:nvPicPr>
-        <p:blipFill>
-          <a:blip r:embed="rId1"/>
-          <a:stretch>
-            <a:fillRect/>
-          </a:stretch>
-        </p:blipFill>
-        <p:spPr>
-          <a:xfrm>
-            <a:off x="845820" y="2034540"/>
-            <a:ext cx="320040" cy="320040"/>
-          </a:xfrm>
-          <a:prstGeom prst="rect">
-            <a:avLst/>
-          </a:prstGeom>
-        </p:spPr>
-      </p:pic>
-      <p:sp>
-        <p:nvSpPr>
-          <p:cNvPr id="7" name="text_112"/>
-          <p:cNvSpPr txBox="1"/>
-          <p:nvPr/>
-        </p:nvSpPr>
-        <p:spPr>
-          <a:xfrm>
-            <a:off x="685800" y="2651760"/>
-            <a:ext cx="2286000" cy="365760"/>
-          </a:xfrm>
-          <a:prstGeom prst="rect">
-            <a:avLst/>
-          </a:prstGeom>
-          <a:noFill/>
-          <a:ln/>
-        </p:spPr>
-        <p:txBody>
-          <a:bodyPr wrap="square" lIns="0" tIns="0" rIns="0" bIns="0" rtlCol="0" anchor="t"/>
+      <p:sp>
+        <p:nvSpPr>
+          <p:cNvPr id="6" name="text_108"/>
+          <p:cNvSpPr txBox="1"/>
+          <p:nvPr/>
+        </p:nvSpPr>
+        <p:spPr>
+          <a:xfrm>
+            <a:off x="685800" y="1828800"/>
+            <a:ext cx="411480" cy="411480"/>
+          </a:xfrm>
+          <a:prstGeom prst="rect">
+            <a:avLst/>
+          </a:prstGeom>
+          <a:noFill/>
+          <a:ln/>
+        </p:spPr>
+        <p:txBody>
+          <a:bodyPr wrap="square" lIns="0" tIns="0" rIns="0" bIns="0" rtlCol="0" anchor="ctr"/>
+          <a:lstStyle/>
+          <a:p>
+            <a:pPr algn="ctr" indent="0" marL="0">
+              <a:buNone/>
+            </a:pPr>
+            <a:r>
+              <a:rPr lang="en-US" sz="1400" b="1" dirty="0">
+                <a:solidFill>
+                  <a:schemeClr val="bg1"/>
+                </a:solidFill>
+              </a:rPr>
+              <a:t>1</a:t>
+            </a:r>
+            <a:endParaRPr lang="en-US" sz="1400" dirty="0"/>
+          </a:p>
+        </p:txBody>
+      </p:sp>
+      <p:sp>
+        <p:nvSpPr>
+          <p:cNvPr id="7" name="text_109"/>
+          <p:cNvSpPr txBox="1"/>
+          <p:nvPr/>
+        </p:nvSpPr>
+        <p:spPr>
+          <a:xfrm>
+            <a:off x="1280160" y="1828800"/>
+            <a:ext cx="3017520" cy="411480"/>
+          </a:xfrm>
+          <a:prstGeom prst="rect">
+            <a:avLst/>
+          </a:prstGeom>
+          <a:noFill/>
+          <a:ln/>
+        </p:spPr>
+        <p:txBody>
+          <a:bodyPr wrap="square" lIns="0" tIns="0" rIns="0" bIns="0" rtlCol="0" anchor="ctr"/>
           <a:lstStyle/>
           <a:p>
             <a:pPr indent="0" marL="0">
               <a:buNone/>
             </a:pPr>
             <a:r>
-              <a:rPr lang="en-US" sz="1700" b="1" dirty="0">
-                <a:solidFill>
-                  <a:schemeClr val="tx2"/>
-                </a:solidFill>
-              </a:rPr>
-              <a:t>Same day</a:t>
-            </a:r>
-            <a:endParaRPr lang="en-US" sz="1700" dirty="0"/>
-          </a:p>
-        </p:txBody>
-      </p:sp>
-      <p:sp>
-        <p:nvSpPr>
-          <p:cNvPr id="8" name="text_113"/>
-          <p:cNvSpPr txBox="1"/>
-          <p:nvPr/>
-        </p:nvSpPr>
-        <p:spPr>
-          <a:xfrm>
-            <a:off x="685800" y="3017520"/>
-            <a:ext cx="2286000" cy="594360"/>
-          </a:xfrm>
-          <a:prstGeom prst="rect">
-            <a:avLst/>
-          </a:prstGeom>
-          <a:noFill/>
-          <a:ln/>
-        </p:spPr>
-        <p:txBody>
-          <a:bodyPr wrap="square" lIns="0" tIns="0" rIns="0" bIns="0" rtlCol="0" anchor="t"/>
+              <a:rPr lang="en-US" sz="1500" dirty="0">
+                <a:solidFill>
+                  <a:schemeClr val="tx1"/>
+                </a:solidFill>
+              </a:rPr>
+              <a:t>Student A reads: 1 seat left</a:t>
+            </a:r>
+            <a:endParaRPr lang="en-US" sz="1500" dirty="0"/>
+          </a:p>
+        </p:txBody>
+      </p:sp>
+      <p:sp>
+        <p:nvSpPr>
+          <p:cNvPr id="8" name="step_110"/>
+          <p:cNvSpPr/>
+          <p:nvPr/>
+        </p:nvSpPr>
+        <p:spPr>
+          <a:xfrm>
+            <a:off x="685800" y="2450592"/>
+            <a:ext cx="411480" cy="411480"/>
+          </a:xfrm>
+          <a:prstGeom prst="ellipse">
+            <a:avLst/>
+          </a:prstGeom>
+          <a:solidFill>
+            <a:srgbClr val="5B6B73"/>
+          </a:solidFill>
+          <a:ln/>
+        </p:spPr>
+      </p:sp>
+      <p:sp>
+        <p:nvSpPr>
+          <p:cNvPr id="9" name="text_111"/>
+          <p:cNvSpPr txBox="1"/>
+          <p:nvPr/>
+        </p:nvSpPr>
+        <p:spPr>
+          <a:xfrm>
+            <a:off x="685800" y="2450592"/>
+            <a:ext cx="411480" cy="411480"/>
+          </a:xfrm>
+          <a:prstGeom prst="rect">
+            <a:avLst/>
+          </a:prstGeom>
+          <a:noFill/>
+          <a:ln/>
+        </p:spPr>
+        <p:txBody>
+          <a:bodyPr wrap="square" lIns="0" tIns="0" rIns="0" bIns="0" rtlCol="0" anchor="ctr"/>
+          <a:lstStyle/>
+          <a:p>
+            <a:pPr algn="ctr" indent="0" marL="0">
+              <a:buNone/>
+            </a:pPr>
+            <a:r>
+              <a:rPr lang="en-US" sz="1400" b="1" dirty="0">
+                <a:solidFill>
+                  <a:schemeClr val="bg1"/>
+                </a:solidFill>
+              </a:rPr>
+              <a:t>2</a:t>
+            </a:r>
+            <a:endParaRPr lang="en-US" sz="1400" dirty="0"/>
+          </a:p>
+        </p:txBody>
+      </p:sp>
+      <p:sp>
+        <p:nvSpPr>
+          <p:cNvPr id="10" name="text_112"/>
+          <p:cNvSpPr txBox="1"/>
+          <p:nvPr/>
+        </p:nvSpPr>
+        <p:spPr>
+          <a:xfrm>
+            <a:off x="1280160" y="2450592"/>
+            <a:ext cx="3017520" cy="411480"/>
+          </a:xfrm>
+          <a:prstGeom prst="rect">
+            <a:avLst/>
+          </a:prstGeom>
+          <a:noFill/>
+          <a:ln/>
+        </p:spPr>
+        <p:txBody>
+          <a:bodyPr wrap="square" lIns="0" tIns="0" rIns="0" bIns="0" rtlCol="0" anchor="ctr"/>
           <a:lstStyle/>
           <a:p>
             <a:pPr indent="0" marL="0">
               <a:buNone/>
             </a:pPr>
             <a:r>
-              <a:rPr lang="en-US" sz="1300" dirty="0">
+              <a:rPr lang="en-US" sz="1500" dirty="0">
                 <a:solidFill>
                   <a:schemeClr val="tx1"/>
                 </a:solidFill>
               </a:rPr>
-              <a:t>Both meet on, for example, Monday</a:t>
-            </a:r>
-            <a:endParaRPr lang="en-US" sz="1300" dirty="0"/>
-          </a:p>
-        </p:txBody>
-      </p:sp>
-      <p:sp>
-        <p:nvSpPr>
-          <p:cNvPr id="9" name="card_114"/>
+              <a:t>Student B reads: 1 seat left</a:t>
+            </a:r>
+            <a:endParaRPr lang="en-US" sz="1500" dirty="0"/>
+          </a:p>
+        </p:txBody>
+      </p:sp>
+      <p:sp>
+        <p:nvSpPr>
+          <p:cNvPr id="11" name="step_113"/>
           <p:cNvSpPr/>
           <p:nvPr/>
         </p:nvSpPr>
         <p:spPr>
           <a:xfrm>
-            <a:off x="3246120" y="1645920"/>
-            <a:ext cx="2651760" cy="2011680"/>
+            <a:off x="685800" y="3072384"/>
+            <a:ext cx="411480" cy="411480"/>
+          </a:xfrm>
+          <a:prstGeom prst="ellipse">
+            <a:avLst/>
+          </a:prstGeom>
+          <a:solidFill>
+            <a:srgbClr val="5B6B73"/>
+          </a:solidFill>
+          <a:ln/>
+        </p:spPr>
+      </p:sp>
+      <p:sp>
+        <p:nvSpPr>
+          <p:cNvPr id="12" name="text_114"/>
+          <p:cNvSpPr txBox="1"/>
+          <p:nvPr/>
+        </p:nvSpPr>
+        <p:spPr>
+          <a:xfrm>
+            <a:off x="685800" y="3072384"/>
+            <a:ext cx="411480" cy="411480"/>
+          </a:xfrm>
+          <a:prstGeom prst="rect">
+            <a:avLst/>
+          </a:prstGeom>
+          <a:noFill/>
+          <a:ln/>
+        </p:spPr>
+        <p:txBody>
+          <a:bodyPr wrap="square" lIns="0" tIns="0" rIns="0" bIns="0" rtlCol="0" anchor="ctr"/>
+          <a:lstStyle/>
+          <a:p>
+            <a:pPr algn="ctr" indent="0" marL="0">
+              <a:buNone/>
+            </a:pPr>
+            <a:r>
+              <a:rPr lang="en-US" sz="1400" b="1" dirty="0">
+                <a:solidFill>
+                  <a:schemeClr val="bg1"/>
+                </a:solidFill>
+              </a:rPr>
+              <a:t>3</a:t>
+            </a:r>
+            <a:endParaRPr lang="en-US" sz="1400" dirty="0"/>
+          </a:p>
+        </p:txBody>
+      </p:sp>
+      <p:sp>
+        <p:nvSpPr>
+          <p:cNvPr id="13" name="text_115"/>
+          <p:cNvSpPr txBox="1"/>
+          <p:nvPr/>
+        </p:nvSpPr>
+        <p:spPr>
+          <a:xfrm>
+            <a:off x="1280160" y="3072384"/>
+            <a:ext cx="3017520" cy="411480"/>
+          </a:xfrm>
+          <a:prstGeom prst="rect">
+            <a:avLst/>
+          </a:prstGeom>
+          <a:noFill/>
+          <a:ln/>
+        </p:spPr>
+        <p:txBody>
+          <a:bodyPr wrap="square" lIns="0" tIns="0" rIns="0" bIns="0" rtlCol="0" anchor="ctr"/>
+          <a:lstStyle/>
+          <a:p>
+            <a:pPr indent="0" marL="0">
+              <a:buNone/>
+            </a:pPr>
+            <a:r>
+              <a:rPr lang="en-US" sz="1500" dirty="0">
+                <a:solidFill>
+                  <a:schemeClr val="tx1"/>
+                </a:solidFill>
+              </a:rPr>
+              <a:t>Both are registered</a:t>
+            </a:r>
+            <a:endParaRPr lang="en-US" sz="1500" dirty="0"/>
+          </a:p>
+        </p:txBody>
+      </p:sp>
+      <p:sp>
+        <p:nvSpPr>
+          <p:cNvPr id="14" name="step_116"/>
+          <p:cNvSpPr/>
+          <p:nvPr/>
+        </p:nvSpPr>
+        <p:spPr>
+          <a:xfrm>
+            <a:off x="685800" y="3694176"/>
+            <a:ext cx="411480" cy="411480"/>
+          </a:xfrm>
+          <a:prstGeom prst="ellipse">
+            <a:avLst/>
+          </a:prstGeom>
+          <a:solidFill>
+            <a:srgbClr val="E07A2F"/>
+          </a:solidFill>
+          <a:ln/>
+        </p:spPr>
+      </p:sp>
+      <p:sp>
+        <p:nvSpPr>
+          <p:cNvPr id="15" name="text_117"/>
+          <p:cNvSpPr txBox="1"/>
+          <p:nvPr/>
+        </p:nvSpPr>
+        <p:spPr>
+          <a:xfrm>
+            <a:off x="685800" y="3694176"/>
+            <a:ext cx="411480" cy="411480"/>
+          </a:xfrm>
+          <a:prstGeom prst="rect">
+            <a:avLst/>
+          </a:prstGeom>
+          <a:noFill/>
+          <a:ln/>
+        </p:spPr>
+        <p:txBody>
+          <a:bodyPr wrap="square" lIns="0" tIns="0" rIns="0" bIns="0" rtlCol="0" anchor="ctr"/>
+          <a:lstStyle/>
+          <a:p>
+            <a:pPr algn="ctr" indent="0" marL="0">
+              <a:buNone/>
+            </a:pPr>
+            <a:r>
+              <a:rPr lang="en-US" sz="1400" b="1" dirty="0">
+                <a:solidFill>
+                  <a:schemeClr val="bg1"/>
+                </a:solidFill>
+              </a:rPr>
+              <a:t>4</a:t>
+            </a:r>
+            <a:endParaRPr lang="en-US" sz="1400" dirty="0"/>
+          </a:p>
+        </p:txBody>
+      </p:sp>
+      <p:sp>
+        <p:nvSpPr>
+          <p:cNvPr id="16" name="text_118"/>
+          <p:cNvSpPr txBox="1"/>
+          <p:nvPr/>
+        </p:nvSpPr>
+        <p:spPr>
+          <a:xfrm>
+            <a:off x="1280160" y="3694176"/>
+            <a:ext cx="3017520" cy="411480"/>
+          </a:xfrm>
+          <a:prstGeom prst="rect">
+            <a:avLst/>
+          </a:prstGeom>
+          <a:noFill/>
+          <a:ln/>
+        </p:spPr>
+        <p:txBody>
+          <a:bodyPr wrap="square" lIns="0" tIns="0" rIns="0" bIns="0" rtlCol="0" anchor="ctr"/>
+          <a:lstStyle/>
+          <a:p>
+            <a:pPr indent="0" marL="0">
+              <a:buNone/>
+            </a:pPr>
+            <a:r>
+              <a:rPr lang="en-US" sz="1500" b="1" dirty="0">
+                <a:solidFill>
+                  <a:schemeClr val="tx1"/>
+                </a:solidFill>
+              </a:rPr>
+              <a:t>Class is over-full: 41 / 40</a:t>
+            </a:r>
+            <a:endParaRPr lang="en-US" sz="1500" dirty="0"/>
+          </a:p>
+        </p:txBody>
+      </p:sp>
+      <p:sp>
+        <p:nvSpPr>
+          <p:cNvPr id="17" name="card_119"/>
+          <p:cNvSpPr/>
+          <p:nvPr/>
+        </p:nvSpPr>
+        <p:spPr>
+          <a:xfrm>
+            <a:off x="4663440" y="1188720"/>
+            <a:ext cx="4023360" cy="3291840"/>
           </a:xfrm>
           <a:prstGeom prst="roundRect">
             <a:avLst>
-              <a:gd name="adj" fmla="val 3636"/>
-            </a:avLst>
-          </a:prstGeom>
-          <a:solidFill>
-            <a:schemeClr val="bg2"/>
-          </a:solidFill>
-          <a:ln/>
-        </p:spPr>
-      </p:sp>
-      <p:sp>
-        <p:nvSpPr>
-          <p:cNvPr id="10" name="icon-bg_115"/>
-          <p:cNvSpPr/>
-          <p:nvPr/>
-        </p:nvSpPr>
-        <p:spPr>
-          <a:xfrm>
-            <a:off x="3474720" y="1874520"/>
-            <a:ext cx="640080" cy="640080"/>
-          </a:xfrm>
-          <a:prstGeom prst="ellipse">
-            <a:avLst/>
-          </a:prstGeom>
-          <a:solidFill>
-            <a:srgbClr val="1F4E5F"/>
-          </a:solidFill>
-          <a:ln/>
-        </p:spPr>
-      </p:sp>
-      <p:pic>
-        <p:nvPicPr>
-          <p:cNvPr id="11" name="icon_116" descr="preencoded.png">    </p:cNvPr>
-          <p:cNvPicPr>
-            <a:picLocks noChangeAspect="1"/>
-          </p:cNvPicPr>
-          <p:nvPr/>
-        </p:nvPicPr>
-        <p:blipFill>
-          <a:blip r:embed="rId2"/>
-          <a:stretch>
-            <a:fillRect/>
-          </a:stretch>
-        </p:blipFill>
-        <p:spPr>
-          <a:xfrm>
-            <a:off x="3634740" y="2034540"/>
-            <a:ext cx="320040" cy="320040"/>
-          </a:xfrm>
-          <a:prstGeom prst="rect">
-            <a:avLst/>
-          </a:prstGeom>
-        </p:spPr>
-      </p:pic>
-      <p:sp>
-        <p:nvSpPr>
-          <p:cNvPr id="12" name="text_117"/>
-          <p:cNvSpPr txBox="1"/>
-          <p:nvPr/>
-        </p:nvSpPr>
-        <p:spPr>
-          <a:xfrm>
-            <a:off x="3474720" y="2651760"/>
-            <a:ext cx="2286000" cy="365760"/>
-          </a:xfrm>
-          <a:prstGeom prst="rect">
-            <a:avLst/>
-          </a:prstGeom>
-          <a:noFill/>
-          <a:ln/>
-        </p:spPr>
-        <p:txBody>
-          <a:bodyPr wrap="square" lIns="0" tIns="0" rIns="0" bIns="0" rtlCol="0" anchor="t"/>
-          <a:lstStyle/>
-          <a:p>
-            <a:pPr indent="0" marL="0">
-              <a:buNone/>
-            </a:pPr>
-            <a:r>
-              <a:rPr lang="en-US" sz="1700" b="1" dirty="0">
-                <a:solidFill>
-                  <a:schemeClr val="tx2"/>
-                </a:solidFill>
-              </a:rPr>
-              <a:t>Periods overlap</a:t>
-            </a:r>
-            <a:endParaRPr lang="en-US" sz="1700" dirty="0"/>
-          </a:p>
-        </p:txBody>
-      </p:sp>
-      <p:sp>
-        <p:nvSpPr>
-          <p:cNvPr id="13" name="text_118"/>
-          <p:cNvSpPr txBox="1"/>
-          <p:nvPr/>
-        </p:nvSpPr>
-        <p:spPr>
-          <a:xfrm>
-            <a:off x="3474720" y="3017520"/>
-            <a:ext cx="2286000" cy="594360"/>
-          </a:xfrm>
-          <a:prstGeom prst="rect">
-            <a:avLst/>
-          </a:prstGeom>
-          <a:noFill/>
-          <a:ln/>
-        </p:spPr>
-        <p:txBody>
-          <a:bodyPr wrap="square" lIns="0" tIns="0" rIns="0" bIns="0" rtlCol="0" anchor="t"/>
-          <a:lstStyle/>
-          <a:p>
-            <a:pPr indent="0" marL="0">
-              <a:buNone/>
-            </a:pPr>
-            <a:r>
-              <a:rPr lang="en-US" sz="1300" dirty="0">
-                <a:solidFill>
-                  <a:schemeClr val="tx1"/>
-                </a:solidFill>
-              </a:rPr>
-              <a:t>Their lesson times overlap, even by one period</a:t>
-            </a:r>
-            <a:endParaRPr lang="en-US" sz="1300" dirty="0"/>
-          </a:p>
-        </p:txBody>
-      </p:sp>
-      <p:sp>
-        <p:nvSpPr>
-          <p:cNvPr id="14" name="card_119"/>
-          <p:cNvSpPr/>
-          <p:nvPr/>
-        </p:nvSpPr>
-        <p:spPr>
-          <a:xfrm>
-            <a:off x="6035040" y="1645920"/>
-            <a:ext cx="2651760" cy="2011680"/>
-          </a:xfrm>
-          <a:prstGeom prst="roundRect">
-            <a:avLst>
-              <a:gd name="adj" fmla="val 3636"/>
-            </a:avLst>
-          </a:prstGeom>
-          <a:solidFill>
-            <a:schemeClr val="bg2"/>
-          </a:solidFill>
-          <a:ln/>
-        </p:spPr>
-      </p:sp>
-      <p:sp>
-        <p:nvSpPr>
-          <p:cNvPr id="15" name="icon-bg_120"/>
-          <p:cNvSpPr/>
-          <p:nvPr/>
-        </p:nvSpPr>
-        <p:spPr>
-          <a:xfrm>
-            <a:off x="6263640" y="1874520"/>
-            <a:ext cx="640080" cy="640080"/>
-          </a:xfrm>
-          <a:prstGeom prst="ellipse">
-            <a:avLst/>
-          </a:prstGeom>
-          <a:solidFill>
-            <a:srgbClr val="1F4E5F"/>
-          </a:solidFill>
-          <a:ln/>
-        </p:spPr>
-      </p:sp>
-      <p:pic>
-        <p:nvPicPr>
-          <p:cNvPr id="16" name="icon_121" descr="preencoded.png">    </p:cNvPr>
-          <p:cNvPicPr>
-            <a:picLocks noChangeAspect="1"/>
-          </p:cNvPicPr>
-          <p:nvPr/>
-        </p:nvPicPr>
-        <p:blipFill>
-          <a:blip r:embed="rId3"/>
-          <a:stretch>
-            <a:fillRect/>
-          </a:stretch>
-        </p:blipFill>
-        <p:spPr>
-          <a:xfrm>
-            <a:off x="6423660" y="2034540"/>
-            <a:ext cx="320040" cy="320040"/>
-          </a:xfrm>
-          <a:prstGeom prst="rect">
-            <a:avLst/>
-          </a:prstGeom>
-        </p:spPr>
-      </p:pic>
-      <p:sp>
-        <p:nvSpPr>
-          <p:cNvPr id="17" name="text_122"/>
-          <p:cNvSpPr txBox="1"/>
-          <p:nvPr/>
-        </p:nvSpPr>
-        <p:spPr>
-          <a:xfrm>
-            <a:off x="6263640" y="2651760"/>
-            <a:ext cx="2286000" cy="365760"/>
-          </a:xfrm>
-          <a:prstGeom prst="rect">
-            <a:avLst/>
-          </a:prstGeom>
-          <a:noFill/>
-          <a:ln/>
-        </p:spPr>
-        <p:txBody>
-          <a:bodyPr wrap="square" lIns="0" tIns="0" rIns="0" bIns="0" rtlCol="0" anchor="t"/>
-          <a:lstStyle/>
-          <a:p>
-            <a:pPr indent="0" marL="0">
-              <a:buNone/>
-            </a:pPr>
-            <a:r>
-              <a:rPr lang="en-US" sz="1700" b="1" dirty="0">
-                <a:solidFill>
-                  <a:schemeClr val="tx2"/>
-                </a:solidFill>
-              </a:rPr>
-              <a:t>Weeks match</a:t>
-            </a:r>
-            <a:endParaRPr lang="en-US" sz="1700" dirty="0"/>
-          </a:p>
-        </p:txBody>
-      </p:sp>
-      <p:sp>
-        <p:nvSpPr>
-          <p:cNvPr id="18" name="text_123"/>
-          <p:cNvSpPr txBox="1"/>
-          <p:nvPr/>
-        </p:nvSpPr>
-        <p:spPr>
-          <a:xfrm>
-            <a:off x="6263640" y="3017520"/>
-            <a:ext cx="2286000" cy="594360"/>
-          </a:xfrm>
-          <a:prstGeom prst="rect">
-            <a:avLst/>
-          </a:prstGeom>
-          <a:noFill/>
-          <a:ln/>
-        </p:spPr>
-        <p:txBody>
-          <a:bodyPr wrap="square" lIns="0" tIns="0" rIns="0" bIns="0" rtlCol="0" anchor="t"/>
-          <a:lstStyle/>
-          <a:p>
-            <a:pPr indent="0" marL="0">
-              <a:buNone/>
-            </a:pPr>
-            <a:r>
-              <a:rPr lang="en-US" sz="1300" dirty="0">
-                <a:solidFill>
-                  <a:schemeClr val="tx1"/>
-                </a:solidFill>
-              </a:rPr>
-              <a:t>An odd-week class never clashes with an even-week class</a:t>
-            </a:r>
-            <a:endParaRPr lang="en-US" sz="1300" dirty="0"/>
-          </a:p>
-        </p:txBody>
-      </p:sp>
-      <p:sp>
-        <p:nvSpPr>
-          <p:cNvPr id="19" name="card_124"/>
-          <p:cNvSpPr/>
-          <p:nvPr/>
-        </p:nvSpPr>
-        <p:spPr>
-          <a:xfrm>
-            <a:off x="457200" y="3840480"/>
-            <a:ext cx="8229600" cy="640080"/>
-          </a:xfrm>
-          <a:prstGeom prst="roundRect">
-            <a:avLst>
-              <a:gd name="adj" fmla="val 11429"/>
+              <a:gd name="adj" fmla="val 2222"/>
             </a:avLst>
           </a:prstGeom>
           <a:solidFill>
@@ -7708,48 +8487,187 @@
       </p:sp>
       <p:sp>
         <p:nvSpPr>
-          <p:cNvPr id="20" name="text_125"/>
-          <p:cNvSpPr txBox="1"/>
-          <p:nvPr/>
-        </p:nvSpPr>
-        <p:spPr>
-          <a:xfrm>
-            <a:off x="685800" y="3840480"/>
-            <a:ext cx="7772400" cy="640080"/>
-          </a:xfrm>
-          <a:prstGeom prst="rect">
-            <a:avLst/>
-          </a:prstGeom>
-          <a:noFill/>
-          <a:ln/>
-        </p:spPr>
-        <p:txBody>
-          <a:bodyPr wrap="square" lIns="0" tIns="0" rIns="0" bIns="0" rtlCol="0" anchor="ctr"/>
+          <p:cNvPr id="18" name="text_120"/>
+          <p:cNvSpPr txBox="1"/>
+          <p:nvPr/>
+        </p:nvSpPr>
+        <p:spPr>
+          <a:xfrm>
+            <a:off x="4892040" y="1325880"/>
+            <a:ext cx="3566160" cy="365760"/>
+          </a:xfrm>
+          <a:prstGeom prst="rect">
+            <a:avLst/>
+          </a:prstGeom>
+          <a:noFill/>
+          <a:ln/>
+        </p:spPr>
+        <p:txBody>
+          <a:bodyPr wrap="square" lIns="0" tIns="0" rIns="0" bIns="0" rtlCol="0" anchor="t"/>
           <a:lstStyle/>
           <a:p>
             <a:pPr indent="0" marL="0">
               <a:buNone/>
             </a:pPr>
             <a:r>
-              <a:rPr lang="en-US" sz="1500" b="1" dirty="0">
+              <a:rPr lang="en-US" sz="1800" b="1" dirty="0">
                 <a:solidFill>
                   <a:schemeClr val="tx2"/>
                 </a:solidFill>
               </a:rPr>
-              <a:t>Result: </a:t>
-            </a:r>
+              <a:t>My solution</a:t>
+            </a:r>
+            <a:endParaRPr lang="en-US" sz="1800" dirty="0"/>
+          </a:p>
+        </p:txBody>
+      </p:sp>
+      <p:sp>
+        <p:nvSpPr>
+          <p:cNvPr id="19" name="text_121"/>
+          <p:cNvSpPr txBox="1"/>
+          <p:nvPr/>
+        </p:nvSpPr>
+        <p:spPr>
+          <a:xfrm>
+            <a:off x="4892040" y="1828800"/>
+            <a:ext cx="3611880" cy="777240"/>
+          </a:xfrm>
+          <a:prstGeom prst="rect">
+            <a:avLst/>
+          </a:prstGeom>
+          <a:noFill/>
+          <a:ln/>
+        </p:spPr>
+        <p:txBody>
+          <a:bodyPr wrap="square" lIns="0" tIns="0" rIns="0" bIns="0" rtlCol="0" anchor="t"/>
+          <a:lstStyle/>
+          <a:p>
             <a:pPr indent="0" marL="0">
               <a:buNone/>
             </a:pPr>
             <a:r>
-              <a:rPr lang="en-US" sz="1500" dirty="0">
+              <a:rPr lang="en-US" sz="1400" b="1" dirty="0">
+                <a:solidFill>
+                  <a:schemeClr val="tx2"/>
+                </a:solidFill>
+              </a:rPr>
+              <a:t>All or nothing</a:t>
+            </a:r>
+            <a:endParaRPr lang="en-US" sz="1400" dirty="0"/>
+          </a:p>
+          <a:p>
+            <a:pPr indent="0" marL="0">
+              <a:buNone/>
+            </a:pPr>
+            <a:r>
+              <a:rPr lang="en-US" sz="1400" dirty="0">
                 <a:solidFill>
                   <a:schemeClr val="tx1"/>
                 </a:solidFill>
               </a:rPr>
-              <a:t>a clear message that names the clashing class, so the student knows exactly what to change.</a:t>
-            </a:r>
-            <a:endParaRPr lang="en-US" sz="1500" dirty="0"/>
+              <a:t>every check and the sign-up succeed together, or nothing changes</a:t>
+            </a:r>
+            <a:endParaRPr lang="en-US" sz="1400" dirty="0"/>
+          </a:p>
+        </p:txBody>
+      </p:sp>
+      <p:sp>
+        <p:nvSpPr>
+          <p:cNvPr id="20" name="text_122"/>
+          <p:cNvSpPr txBox="1"/>
+          <p:nvPr/>
+        </p:nvSpPr>
+        <p:spPr>
+          <a:xfrm>
+            <a:off x="4892040" y="2697480"/>
+            <a:ext cx="3611880" cy="777240"/>
+          </a:xfrm>
+          <a:prstGeom prst="rect">
+            <a:avLst/>
+          </a:prstGeom>
+          <a:noFill/>
+          <a:ln/>
+        </p:spPr>
+        <p:txBody>
+          <a:bodyPr wrap="square" lIns="0" tIns="0" rIns="0" bIns="0" rtlCol="0" anchor="t"/>
+          <a:lstStyle/>
+          <a:p>
+            <a:pPr indent="0" marL="0">
+              <a:buNone/>
+            </a:pPr>
+            <a:r>
+              <a:rPr lang="en-US" sz="1400" b="1" dirty="0">
+                <a:solidFill>
+                  <a:schemeClr val="tx2"/>
+                </a:solidFill>
+              </a:rPr>
+              <a:t>A short lock</a:t>
+            </a:r>
+            <a:endParaRPr lang="en-US" sz="1400" dirty="0"/>
+          </a:p>
+          <a:p>
+            <a:pPr indent="0" marL="0">
+              <a:buNone/>
+            </a:pPr>
+            <a:r>
+              <a:rPr lang="en-US" sz="1400" dirty="0">
+                <a:solidFill>
+                  <a:schemeClr val="tx1"/>
+                </a:solidFill>
+              </a:rPr>
+              <a:t>the class is locked for a moment, so Student B waits for Student A</a:t>
+            </a:r>
+            <a:endParaRPr lang="en-US" sz="1400" dirty="0"/>
+          </a:p>
+        </p:txBody>
+      </p:sp>
+      <p:sp>
+        <p:nvSpPr>
+          <p:cNvPr id="21" name="text_123"/>
+          <p:cNvSpPr txBox="1"/>
+          <p:nvPr/>
+        </p:nvSpPr>
+        <p:spPr>
+          <a:xfrm>
+            <a:off x="4892040" y="3566160"/>
+            <a:ext cx="3611880" cy="777240"/>
+          </a:xfrm>
+          <a:prstGeom prst="rect">
+            <a:avLst/>
+          </a:prstGeom>
+          <a:noFill/>
+          <a:ln/>
+        </p:spPr>
+        <p:txBody>
+          <a:bodyPr wrap="square" lIns="0" tIns="0" rIns="0" bIns="0" rtlCol="0" anchor="t"/>
+          <a:lstStyle/>
+          <a:p>
+            <a:pPr indent="0" marL="0">
+              <a:buNone/>
+            </a:pPr>
+            <a:r>
+              <a:rPr lang="en-US" sz="1400" b="1" dirty="0">
+                <a:solidFill>
+                  <a:schemeClr val="tx2"/>
+                </a:solidFill>
+              </a:rPr>
+              <a:t>A safety rule</a:t>
+            </a:r>
+            <a:endParaRPr lang="en-US" sz="1400" dirty="0"/>
+          </a:p>
+          <a:p>
+            <a:pPr indent="0" marL="0">
+              <a:buNone/>
+            </a:pPr>
+            <a:r>
+              <a:rPr lang="en-US" sz="1400" dirty="0">
+                <a:solidFill>
+                  <a:schemeClr val="tx1"/>
+                </a:solidFill>
+              </a:rPr>
+              <a:t>the database itself refuses more students than seats</a:t>
+            </a:r>
+            <a:endParaRPr lang="en-US" sz="1400" dirty="0"/>
           </a:p>
         </p:txBody>
       </p:sp>
@@ -7858,7 +8776,7 @@
                 <a:ea typeface="Cambria" pitchFamily="34" charset="-122"/>
                 <a:cs typeface="Cambria" pitchFamily="34" charset="-120"/>
               </a:rPr>
-              <a:t>How I built it</a:t>
+              <a:t>Challenge 2: timetable clashes</a:t>
             </a:r>
             <a:endParaRPr lang="en-US" sz="3000" dirty="0"/>
           </a:p>
@@ -7866,170 +8784,72 @@
       </p:sp>
       <p:sp>
         <p:nvSpPr>
-          <p:cNvPr id="3" name="timeline_126"/>
+          <p:cNvPr id="3" name="text_124"/>
+          <p:cNvSpPr txBox="1"/>
+          <p:nvPr/>
+        </p:nvSpPr>
+        <p:spPr>
+          <a:xfrm>
+            <a:off x="457200" y="1097280"/>
+            <a:ext cx="8229600" cy="365760"/>
+          </a:xfrm>
+          <a:prstGeom prst="rect">
+            <a:avLst/>
+          </a:prstGeom>
+          <a:noFill/>
+          <a:ln/>
+        </p:spPr>
+        <p:txBody>
+          <a:bodyPr wrap="square" lIns="0" tIns="0" rIns="0" bIns="0" rtlCol="0" anchor="t"/>
+          <a:lstStyle/>
+          <a:p>
+            <a:pPr indent="0" marL="0">
+              <a:buNone/>
+            </a:pPr>
+            <a:r>
+              <a:rPr lang="en-US" sz="1600" dirty="0">
+                <a:solidFill>
+                  <a:schemeClr val="accent4"/>
+                </a:solidFill>
+              </a:rPr>
+              <a:t>Two classes clash only if all three conditions are true</a:t>
+            </a:r>
+            <a:endParaRPr lang="en-US" sz="1600" dirty="0"/>
+          </a:p>
+        </p:txBody>
+      </p:sp>
+      <p:sp>
+        <p:nvSpPr>
+          <p:cNvPr id="4" name="card_125"/>
           <p:cNvSpPr/>
           <p:nvPr/>
         </p:nvSpPr>
         <p:spPr>
           <a:xfrm>
-            <a:off x="1188720" y="1965960"/>
-            <a:ext cx="6766560" cy="0"/>
-          </a:xfrm>
-          <a:prstGeom prst="line">
-            <a:avLst/>
-          </a:prstGeom>
-          <a:noFill/>
-          <a:ln w="38100">
-            <a:solidFill>
-              <a:srgbClr val="C9D6DA"/>
-            </a:solidFill>
-            <a:prstDash val="solid"/>
-          </a:ln>
-        </p:spPr>
-      </p:sp>
-      <p:sp>
-        <p:nvSpPr>
-          <p:cNvPr id="4" name="dot_127"/>
+            <a:off x="457200" y="1645920"/>
+            <a:ext cx="2651760" cy="2011680"/>
+          </a:xfrm>
+          <a:prstGeom prst="roundRect">
+            <a:avLst>
+              <a:gd name="adj" fmla="val 3636"/>
+            </a:avLst>
+          </a:prstGeom>
+          <a:solidFill>
+            <a:schemeClr val="bg2"/>
+          </a:solidFill>
+          <a:ln/>
+        </p:spPr>
+      </p:sp>
+      <p:sp>
+        <p:nvSpPr>
+          <p:cNvPr id="5" name="icon-bg_126"/>
           <p:cNvSpPr/>
           <p:nvPr/>
         </p:nvSpPr>
         <p:spPr>
           <a:xfrm>
-            <a:off x="1005840" y="1783080"/>
-            <a:ext cx="365760" cy="365760"/>
-          </a:xfrm>
-          <a:prstGeom prst="ellipse">
-            <a:avLst/>
-          </a:prstGeom>
-          <a:solidFill>
-            <a:srgbClr val="E07A2F"/>
-          </a:solidFill>
-          <a:ln w="38100">
-            <a:solidFill>
-              <a:srgbClr val="FFFFFF"/>
-            </a:solidFill>
-            <a:prstDash val="solid"/>
-          </a:ln>
-        </p:spPr>
-      </p:sp>
-      <p:sp>
-        <p:nvSpPr>
-          <p:cNvPr id="5" name="text_128"/>
-          <p:cNvSpPr txBox="1"/>
-          <p:nvPr/>
-        </p:nvSpPr>
-        <p:spPr>
-          <a:xfrm>
-            <a:off x="457200" y="1325880"/>
-            <a:ext cx="1463040" cy="320040"/>
-          </a:xfrm>
-          <a:prstGeom prst="rect">
-            <a:avLst/>
-          </a:prstGeom>
-          <a:noFill/>
-          <a:ln/>
-        </p:spPr>
-        <p:txBody>
-          <a:bodyPr wrap="square" lIns="0" tIns="0" rIns="0" bIns="0" rtlCol="0" anchor="t"/>
-          <a:lstStyle/>
-          <a:p>
-            <a:pPr algn="ctr" indent="0" marL="0">
-              <a:buNone/>
-            </a:pPr>
-            <a:r>
-              <a:rPr lang="en-US" sz="1200" dirty="0">
-                <a:solidFill>
-                  <a:schemeClr val="accent4"/>
-                </a:solidFill>
-              </a:rPr>
-              <a:t>Jan 2026</a:t>
-            </a:r>
-            <a:endParaRPr lang="en-US" sz="1200" dirty="0"/>
-          </a:p>
-        </p:txBody>
-      </p:sp>
-      <p:sp>
-        <p:nvSpPr>
-          <p:cNvPr id="6" name="text_129"/>
-          <p:cNvSpPr txBox="1"/>
-          <p:nvPr/>
-        </p:nvSpPr>
-        <p:spPr>
-          <a:xfrm>
-            <a:off x="457200" y="2331720"/>
-            <a:ext cx="1463040" cy="365760"/>
-          </a:xfrm>
-          <a:prstGeom prst="rect">
-            <a:avLst/>
-          </a:prstGeom>
-          <a:noFill/>
-          <a:ln/>
-        </p:spPr>
-        <p:txBody>
-          <a:bodyPr wrap="square" lIns="0" tIns="0" rIns="0" bIns="0" rtlCol="0" anchor="t"/>
-          <a:lstStyle/>
-          <a:p>
-            <a:pPr algn="ctr" indent="0" marL="0">
-              <a:buNone/>
-            </a:pPr>
-            <a:r>
-              <a:rPr lang="en-US" sz="1700" b="1" dirty="0">
-                <a:solidFill>
-                  <a:schemeClr val="tx2"/>
-                </a:solidFill>
-              </a:rPr>
-              <a:t>Analysis</a:t>
-            </a:r>
-            <a:endParaRPr lang="en-US" sz="1700" dirty="0"/>
-          </a:p>
-        </p:txBody>
-      </p:sp>
-      <p:sp>
-        <p:nvSpPr>
-          <p:cNvPr id="7" name="text_130"/>
-          <p:cNvSpPr txBox="1"/>
-          <p:nvPr/>
-        </p:nvSpPr>
-        <p:spPr>
-          <a:xfrm>
-            <a:off x="457200" y="2743200"/>
-            <a:ext cx="1463040" cy="1097280"/>
-          </a:xfrm>
-          <a:prstGeom prst="rect">
-            <a:avLst/>
-          </a:prstGeom>
-          <a:noFill/>
-          <a:ln/>
-        </p:spPr>
-        <p:txBody>
-          <a:bodyPr wrap="square" lIns="0" tIns="0" rIns="0" bIns="0" rtlCol="0" anchor="t"/>
-          <a:lstStyle/>
-          <a:p>
-            <a:pPr algn="ctr" indent="0" marL="0">
-              <a:buNone/>
-            </a:pPr>
-            <a:r>
-              <a:rPr lang="en-US" sz="1300" dirty="0">
-                <a:solidFill>
-                  <a:schemeClr val="tx1"/>
-                </a:solidFill>
-              </a:rPr>
-              <a:t>Studied the real process, wrote the 9 rules</a:t>
-            </a:r>
-            <a:endParaRPr lang="en-US" sz="1300" dirty="0"/>
-          </a:p>
-        </p:txBody>
-      </p:sp>
-      <p:sp>
-        <p:nvSpPr>
-          <p:cNvPr id="8" name="dot_131"/>
-          <p:cNvSpPr/>
-          <p:nvPr/>
-        </p:nvSpPr>
-        <p:spPr>
-          <a:xfrm>
-            <a:off x="2697480" y="1783080"/>
-            <a:ext cx="365760" cy="365760"/>
+            <a:off x="685800" y="1874520"/>
+            <a:ext cx="640080" cy="640080"/>
           </a:xfrm>
           <a:prstGeom prst="ellipse">
             <a:avLst/>
@@ -8037,24 +8857,43 @@
           <a:solidFill>
             <a:srgbClr val="1F4E5F"/>
           </a:solidFill>
-          <a:ln w="38100">
-            <a:solidFill>
-              <a:srgbClr val="FFFFFF"/>
-            </a:solidFill>
-            <a:prstDash val="solid"/>
-          </a:ln>
-        </p:spPr>
-      </p:sp>
-      <p:sp>
-        <p:nvSpPr>
-          <p:cNvPr id="9" name="text_132"/>
-          <p:cNvSpPr txBox="1"/>
-          <p:nvPr/>
-        </p:nvSpPr>
-        <p:spPr>
-          <a:xfrm>
-            <a:off x="2148840" y="1325880"/>
-            <a:ext cx="1463040" cy="320040"/>
+          <a:ln/>
+        </p:spPr>
+      </p:sp>
+      <p:pic>
+        <p:nvPicPr>
+          <p:cNvPr id="6" name="icon_127" descr="preencoded.png">    </p:cNvPr>
+          <p:cNvPicPr>
+            <a:picLocks noChangeAspect="1"/>
+          </p:cNvPicPr>
+          <p:nvPr/>
+        </p:nvPicPr>
+        <p:blipFill>
+          <a:blip r:embed="rId1"/>
+          <a:stretch>
+            <a:fillRect/>
+          </a:stretch>
+        </p:blipFill>
+        <p:spPr>
+          <a:xfrm>
+            <a:off x="845820" y="2034540"/>
+            <a:ext cx="320040" cy="320040"/>
+          </a:xfrm>
+          <a:prstGeom prst="rect">
+            <a:avLst/>
+          </a:prstGeom>
+        </p:spPr>
+      </p:pic>
+      <p:sp>
+        <p:nvSpPr>
+          <p:cNvPr id="7" name="text_128"/>
+          <p:cNvSpPr txBox="1"/>
+          <p:nvPr/>
+        </p:nvSpPr>
+        <p:spPr>
+          <a:xfrm>
+            <a:off x="685800" y="2651760"/>
+            <a:ext cx="2286000" cy="365760"/>
           </a:xfrm>
           <a:prstGeom prst="rect">
             <a:avLst/>
@@ -8066,31 +8905,31 @@
           <a:bodyPr wrap="square" lIns="0" tIns="0" rIns="0" bIns="0" rtlCol="0" anchor="t"/>
           <a:lstStyle/>
           <a:p>
-            <a:pPr algn="ctr" indent="0" marL="0">
-              <a:buNone/>
-            </a:pPr>
-            <a:r>
-              <a:rPr lang="en-US" sz="1200" dirty="0">
-                <a:solidFill>
-                  <a:schemeClr val="accent4"/>
-                </a:solidFill>
-              </a:rPr>
-              <a:t>Mar 2026</a:t>
-            </a:r>
-            <a:endParaRPr lang="en-US" sz="1200" dirty="0"/>
-          </a:p>
-        </p:txBody>
-      </p:sp>
-      <p:sp>
-        <p:nvSpPr>
-          <p:cNvPr id="10" name="text_133"/>
-          <p:cNvSpPr txBox="1"/>
-          <p:nvPr/>
-        </p:nvSpPr>
-        <p:spPr>
-          <a:xfrm>
-            <a:off x="2148840" y="2331720"/>
-            <a:ext cx="1463040" cy="365760"/>
+            <a:pPr indent="0" marL="0">
+              <a:buNone/>
+            </a:pPr>
+            <a:r>
+              <a:rPr lang="en-US" sz="1700" b="1" dirty="0">
+                <a:solidFill>
+                  <a:schemeClr val="tx2"/>
+                </a:solidFill>
+              </a:rPr>
+              <a:t>Same day</a:t>
+            </a:r>
+            <a:endParaRPr lang="en-US" sz="1700" dirty="0"/>
+          </a:p>
+        </p:txBody>
+      </p:sp>
+      <p:sp>
+        <p:nvSpPr>
+          <p:cNvPr id="8" name="text_129"/>
+          <p:cNvSpPr txBox="1"/>
+          <p:nvPr/>
+        </p:nvSpPr>
+        <p:spPr>
+          <a:xfrm>
+            <a:off x="685800" y="3017520"/>
+            <a:ext cx="2286000" cy="594360"/>
           </a:xfrm>
           <a:prstGeom prst="rect">
             <a:avLst/>
@@ -8102,43 +8941,7 @@
           <a:bodyPr wrap="square" lIns="0" tIns="0" rIns="0" bIns="0" rtlCol="0" anchor="t"/>
           <a:lstStyle/>
           <a:p>
-            <a:pPr algn="ctr" indent="0" marL="0">
-              <a:buNone/>
-            </a:pPr>
-            <a:r>
-              <a:rPr lang="en-US" sz="1700" b="1" dirty="0">
-                <a:solidFill>
-                  <a:schemeClr val="tx2"/>
-                </a:solidFill>
-              </a:rPr>
-              <a:t>Back end</a:t>
-            </a:r>
-            <a:endParaRPr lang="en-US" sz="1700" dirty="0"/>
-          </a:p>
-        </p:txBody>
-      </p:sp>
-      <p:sp>
-        <p:nvSpPr>
-          <p:cNvPr id="11" name="text_134"/>
-          <p:cNvSpPr txBox="1"/>
-          <p:nvPr/>
-        </p:nvSpPr>
-        <p:spPr>
-          <a:xfrm>
-            <a:off x="2148840" y="2743200"/>
-            <a:ext cx="1463040" cy="1097280"/>
-          </a:xfrm>
-          <a:prstGeom prst="rect">
-            <a:avLst/>
-          </a:prstGeom>
-          <a:noFill/>
-          <a:ln/>
-        </p:spPr>
-        <p:txBody>
-          <a:bodyPr wrap="square" lIns="0" tIns="0" rIns="0" bIns="0" rtlCol="0" anchor="t"/>
-          <a:lstStyle/>
-          <a:p>
-            <a:pPr algn="ctr" indent="0" marL="0">
+            <a:pPr indent="0" marL="0">
               <a:buNone/>
             </a:pPr>
             <a:r>
@@ -8147,7 +8950,7 @@
                   <a:schemeClr val="tx1"/>
                 </a:solidFill>
               </a:rPr>
-              <a:t>Database and all the registration rules</a:t>
+              <a:t>Both meet on, for example, Monday</a:t>
             </a:r>
             <a:endParaRPr lang="en-US" sz="1300" dirty="0"/>
           </a:p>
@@ -8155,14 +8958,36 @@
       </p:sp>
       <p:sp>
         <p:nvSpPr>
-          <p:cNvPr id="12" name="dot_135"/>
+          <p:cNvPr id="9" name="card_130"/>
           <p:cNvSpPr/>
           <p:nvPr/>
         </p:nvSpPr>
         <p:spPr>
           <a:xfrm>
-            <a:off x="4389120" y="1783080"/>
-            <a:ext cx="365760" cy="365760"/>
+            <a:off x="3246120" y="1645920"/>
+            <a:ext cx="2651760" cy="2011680"/>
+          </a:xfrm>
+          <a:prstGeom prst="roundRect">
+            <a:avLst>
+              <a:gd name="adj" fmla="val 3636"/>
+            </a:avLst>
+          </a:prstGeom>
+          <a:solidFill>
+            <a:schemeClr val="bg2"/>
+          </a:solidFill>
+          <a:ln/>
+        </p:spPr>
+      </p:sp>
+      <p:sp>
+        <p:nvSpPr>
+          <p:cNvPr id="10" name="icon-bg_131"/>
+          <p:cNvSpPr/>
+          <p:nvPr/>
+        </p:nvSpPr>
+        <p:spPr>
+          <a:xfrm>
+            <a:off x="3474720" y="1874520"/>
+            <a:ext cx="640080" cy="640080"/>
           </a:xfrm>
           <a:prstGeom prst="ellipse">
             <a:avLst/>
@@ -8170,24 +8995,43 @@
           <a:solidFill>
             <a:srgbClr val="1F4E5F"/>
           </a:solidFill>
-          <a:ln w="38100">
-            <a:solidFill>
-              <a:srgbClr val="FFFFFF"/>
-            </a:solidFill>
-            <a:prstDash val="solid"/>
-          </a:ln>
-        </p:spPr>
-      </p:sp>
-      <p:sp>
-        <p:nvSpPr>
-          <p:cNvPr id="13" name="text_136"/>
-          <p:cNvSpPr txBox="1"/>
-          <p:nvPr/>
-        </p:nvSpPr>
-        <p:spPr>
-          <a:xfrm>
-            <a:off x="3840480" y="1325880"/>
-            <a:ext cx="1463040" cy="320040"/>
+          <a:ln/>
+        </p:spPr>
+      </p:sp>
+      <p:pic>
+        <p:nvPicPr>
+          <p:cNvPr id="11" name="icon_132" descr="preencoded.png">    </p:cNvPr>
+          <p:cNvPicPr>
+            <a:picLocks noChangeAspect="1"/>
+          </p:cNvPicPr>
+          <p:nvPr/>
+        </p:nvPicPr>
+        <p:blipFill>
+          <a:blip r:embed="rId2"/>
+          <a:stretch>
+            <a:fillRect/>
+          </a:stretch>
+        </p:blipFill>
+        <p:spPr>
+          <a:xfrm>
+            <a:off x="3634740" y="2034540"/>
+            <a:ext cx="320040" cy="320040"/>
+          </a:xfrm>
+          <a:prstGeom prst="rect">
+            <a:avLst/>
+          </a:prstGeom>
+        </p:spPr>
+      </p:pic>
+      <p:sp>
+        <p:nvSpPr>
+          <p:cNvPr id="12" name="text_133"/>
+          <p:cNvSpPr txBox="1"/>
+          <p:nvPr/>
+        </p:nvSpPr>
+        <p:spPr>
+          <a:xfrm>
+            <a:off x="3474720" y="2651760"/>
+            <a:ext cx="2286000" cy="365760"/>
           </a:xfrm>
           <a:prstGeom prst="rect">
             <a:avLst/>
@@ -8199,31 +9043,31 @@
           <a:bodyPr wrap="square" lIns="0" tIns="0" rIns="0" bIns="0" rtlCol="0" anchor="t"/>
           <a:lstStyle/>
           <a:p>
-            <a:pPr algn="ctr" indent="0" marL="0">
-              <a:buNone/>
-            </a:pPr>
-            <a:r>
-              <a:rPr lang="en-US" sz="1200" dirty="0">
-                <a:solidFill>
-                  <a:schemeClr val="accent4"/>
-                </a:solidFill>
-              </a:rPr>
-              <a:t>Mar 2026</a:t>
-            </a:r>
-            <a:endParaRPr lang="en-US" sz="1200" dirty="0"/>
-          </a:p>
-        </p:txBody>
-      </p:sp>
-      <p:sp>
-        <p:nvSpPr>
-          <p:cNvPr id="14" name="text_137"/>
-          <p:cNvSpPr txBox="1"/>
-          <p:nvPr/>
-        </p:nvSpPr>
-        <p:spPr>
-          <a:xfrm>
-            <a:off x="3840480" y="2331720"/>
-            <a:ext cx="1463040" cy="365760"/>
+            <a:pPr indent="0" marL="0">
+              <a:buNone/>
+            </a:pPr>
+            <a:r>
+              <a:rPr lang="en-US" sz="1700" b="1" dirty="0">
+                <a:solidFill>
+                  <a:schemeClr val="tx2"/>
+                </a:solidFill>
+              </a:rPr>
+              <a:t>Periods overlap</a:t>
+            </a:r>
+            <a:endParaRPr lang="en-US" sz="1700" dirty="0"/>
+          </a:p>
+        </p:txBody>
+      </p:sp>
+      <p:sp>
+        <p:nvSpPr>
+          <p:cNvPr id="13" name="text_134"/>
+          <p:cNvSpPr txBox="1"/>
+          <p:nvPr/>
+        </p:nvSpPr>
+        <p:spPr>
+          <a:xfrm>
+            <a:off x="3474720" y="3017520"/>
+            <a:ext cx="2286000" cy="594360"/>
           </a:xfrm>
           <a:prstGeom prst="rect">
             <a:avLst/>
@@ -8235,43 +9079,7 @@
           <a:bodyPr wrap="square" lIns="0" tIns="0" rIns="0" bIns="0" rtlCol="0" anchor="t"/>
           <a:lstStyle/>
           <a:p>
-            <a:pPr algn="ctr" indent="0" marL="0">
-              <a:buNone/>
-            </a:pPr>
-            <a:r>
-              <a:rPr lang="en-US" sz="1700" b="1" dirty="0">
-                <a:solidFill>
-                  <a:schemeClr val="tx2"/>
-                </a:solidFill>
-              </a:rPr>
-              <a:t>Reorganise</a:t>
-            </a:r>
-            <a:endParaRPr lang="en-US" sz="1700" dirty="0"/>
-          </a:p>
-        </p:txBody>
-      </p:sp>
-      <p:sp>
-        <p:nvSpPr>
-          <p:cNvPr id="15" name="text_138"/>
-          <p:cNvSpPr txBox="1"/>
-          <p:nvPr/>
-        </p:nvSpPr>
-        <p:spPr>
-          <a:xfrm>
-            <a:off x="3840480" y="2743200"/>
-            <a:ext cx="1463040" cy="1097280"/>
-          </a:xfrm>
-          <a:prstGeom prst="rect">
-            <a:avLst/>
-          </a:prstGeom>
-          <a:noFill/>
-          <a:ln/>
-        </p:spPr>
-        <p:txBody>
-          <a:bodyPr wrap="square" lIns="0" tIns="0" rIns="0" bIns="0" rtlCol="0" anchor="t"/>
-          <a:lstStyle/>
-          <a:p>
-            <a:pPr algn="ctr" indent="0" marL="0">
+            <a:pPr indent="0" marL="0">
               <a:buNone/>
             </a:pPr>
             <a:r>
@@ -8280,7 +9088,7 @@
                   <a:schemeClr val="tx1"/>
                 </a:solidFill>
               </a:rPr>
-              <a:t>One clean project for all the code</a:t>
+              <a:t>Their lesson times overlap, even by one period</a:t>
             </a:r>
             <a:endParaRPr lang="en-US" sz="1300" dirty="0"/>
           </a:p>
@@ -8288,14 +9096,36 @@
       </p:sp>
       <p:sp>
         <p:nvSpPr>
-          <p:cNvPr id="16" name="dot_139"/>
+          <p:cNvPr id="14" name="card_135"/>
           <p:cNvSpPr/>
           <p:nvPr/>
         </p:nvSpPr>
         <p:spPr>
           <a:xfrm>
-            <a:off x="6080760" y="1783080"/>
-            <a:ext cx="365760" cy="365760"/>
+            <a:off x="6035040" y="1645920"/>
+            <a:ext cx="2651760" cy="2011680"/>
+          </a:xfrm>
+          <a:prstGeom prst="roundRect">
+            <a:avLst>
+              <a:gd name="adj" fmla="val 3636"/>
+            </a:avLst>
+          </a:prstGeom>
+          <a:solidFill>
+            <a:schemeClr val="bg2"/>
+          </a:solidFill>
+          <a:ln/>
+        </p:spPr>
+      </p:sp>
+      <p:sp>
+        <p:nvSpPr>
+          <p:cNvPr id="15" name="icon-bg_136"/>
+          <p:cNvSpPr/>
+          <p:nvPr/>
+        </p:nvSpPr>
+        <p:spPr>
+          <a:xfrm>
+            <a:off x="6263640" y="1874520"/>
+            <a:ext cx="640080" cy="640080"/>
           </a:xfrm>
           <a:prstGeom prst="ellipse">
             <a:avLst/>
@@ -8303,24 +9133,43 @@
           <a:solidFill>
             <a:srgbClr val="1F4E5F"/>
           </a:solidFill>
-          <a:ln w="38100">
-            <a:solidFill>
-              <a:srgbClr val="FFFFFF"/>
-            </a:solidFill>
-            <a:prstDash val="solid"/>
-          </a:ln>
-        </p:spPr>
-      </p:sp>
-      <p:sp>
-        <p:nvSpPr>
-          <p:cNvPr id="17" name="text_140"/>
-          <p:cNvSpPr txBox="1"/>
-          <p:nvPr/>
-        </p:nvSpPr>
-        <p:spPr>
-          <a:xfrm>
-            <a:off x="5532120" y="1325880"/>
-            <a:ext cx="1463040" cy="320040"/>
+          <a:ln/>
+        </p:spPr>
+      </p:sp>
+      <p:pic>
+        <p:nvPicPr>
+          <p:cNvPr id="16" name="icon_137" descr="preencoded.png">    </p:cNvPr>
+          <p:cNvPicPr>
+            <a:picLocks noChangeAspect="1"/>
+          </p:cNvPicPr>
+          <p:nvPr/>
+        </p:nvPicPr>
+        <p:blipFill>
+          <a:blip r:embed="rId3"/>
+          <a:stretch>
+            <a:fillRect/>
+          </a:stretch>
+        </p:blipFill>
+        <p:spPr>
+          <a:xfrm>
+            <a:off x="6423660" y="2034540"/>
+            <a:ext cx="320040" cy="320040"/>
+          </a:xfrm>
+          <a:prstGeom prst="rect">
+            <a:avLst/>
+          </a:prstGeom>
+        </p:spPr>
+      </p:pic>
+      <p:sp>
+        <p:nvSpPr>
+          <p:cNvPr id="17" name="text_138"/>
+          <p:cNvSpPr txBox="1"/>
+          <p:nvPr/>
+        </p:nvSpPr>
+        <p:spPr>
+          <a:xfrm>
+            <a:off x="6263640" y="2651760"/>
+            <a:ext cx="2286000" cy="365760"/>
           </a:xfrm>
           <a:prstGeom prst="rect">
             <a:avLst/>
@@ -8332,31 +9181,31 @@
           <a:bodyPr wrap="square" lIns="0" tIns="0" rIns="0" bIns="0" rtlCol="0" anchor="t"/>
           <a:lstStyle/>
           <a:p>
-            <a:pPr algn="ctr" indent="0" marL="0">
-              <a:buNone/>
-            </a:pPr>
-            <a:r>
-              <a:rPr lang="en-US" sz="1200" dirty="0">
-                <a:solidFill>
-                  <a:schemeClr val="accent4"/>
-                </a:solidFill>
-              </a:rPr>
-              <a:t>Mar 2026</a:t>
-            </a:r>
-            <a:endParaRPr lang="en-US" sz="1200" dirty="0"/>
-          </a:p>
-        </p:txBody>
-      </p:sp>
-      <p:sp>
-        <p:nvSpPr>
-          <p:cNvPr id="18" name="text_141"/>
-          <p:cNvSpPr txBox="1"/>
-          <p:nvPr/>
-        </p:nvSpPr>
-        <p:spPr>
-          <a:xfrm>
-            <a:off x="5532120" y="2331720"/>
-            <a:ext cx="1463040" cy="365760"/>
+            <a:pPr indent="0" marL="0">
+              <a:buNone/>
+            </a:pPr>
+            <a:r>
+              <a:rPr lang="en-US" sz="1700" b="1" dirty="0">
+                <a:solidFill>
+                  <a:schemeClr val="tx2"/>
+                </a:solidFill>
+              </a:rPr>
+              <a:t>Weeks match</a:t>
+            </a:r>
+            <a:endParaRPr lang="en-US" sz="1700" dirty="0"/>
+          </a:p>
+        </p:txBody>
+      </p:sp>
+      <p:sp>
+        <p:nvSpPr>
+          <p:cNvPr id="18" name="text_139"/>
+          <p:cNvSpPr txBox="1"/>
+          <p:nvPr/>
+        </p:nvSpPr>
+        <p:spPr>
+          <a:xfrm>
+            <a:off x="6263640" y="3017520"/>
+            <a:ext cx="2286000" cy="594360"/>
           </a:xfrm>
           <a:prstGeom prst="rect">
             <a:avLst/>
@@ -8368,43 +9217,7 @@
           <a:bodyPr wrap="square" lIns="0" tIns="0" rIns="0" bIns="0" rtlCol="0" anchor="t"/>
           <a:lstStyle/>
           <a:p>
-            <a:pPr algn="ctr" indent="0" marL="0">
-              <a:buNone/>
-            </a:pPr>
-            <a:r>
-              <a:rPr lang="en-US" sz="1700" b="1" dirty="0">
-                <a:solidFill>
-                  <a:schemeClr val="tx2"/>
-                </a:solidFill>
-              </a:rPr>
-              <a:t>Front end</a:t>
-            </a:r>
-            <a:endParaRPr lang="en-US" sz="1700" dirty="0"/>
-          </a:p>
-        </p:txBody>
-      </p:sp>
-      <p:sp>
-        <p:nvSpPr>
-          <p:cNvPr id="19" name="text_142"/>
-          <p:cNvSpPr txBox="1"/>
-          <p:nvPr/>
-        </p:nvSpPr>
-        <p:spPr>
-          <a:xfrm>
-            <a:off x="5532120" y="2743200"/>
-            <a:ext cx="1463040" cy="1097280"/>
-          </a:xfrm>
-          <a:prstGeom prst="rect">
-            <a:avLst/>
-          </a:prstGeom>
-          <a:noFill/>
-          <a:ln/>
-        </p:spPr>
-        <p:txBody>
-          <a:bodyPr wrap="square" lIns="0" tIns="0" rIns="0" bIns="0" rtlCol="0" anchor="t"/>
-          <a:lstStyle/>
-          <a:p>
-            <a:pPr algn="ctr" indent="0" marL="0">
+            <a:pPr indent="0" marL="0">
               <a:buNone/>
             </a:pPr>
             <a:r>
@@ -8413,7 +9226,7 @@
                   <a:schemeClr val="tx1"/>
                 </a:solidFill>
               </a:rPr>
-              <a:t>Student and admin websites, dark mode</a:t>
+              <a:t>An odd-week class never clashes with an even-week class</a:t>
             </a:r>
             <a:endParaRPr lang="en-US" sz="1300" dirty="0"/>
           </a:p>
@@ -8421,151 +9234,18 @@
       </p:sp>
       <p:sp>
         <p:nvSpPr>
-          <p:cNvPr id="20" name="dot_143"/>
+          <p:cNvPr id="19" name="card_140"/>
           <p:cNvSpPr/>
           <p:nvPr/>
         </p:nvSpPr>
         <p:spPr>
           <a:xfrm>
-            <a:off x="7772400" y="1783080"/>
-            <a:ext cx="365760" cy="365760"/>
-          </a:xfrm>
-          <a:prstGeom prst="ellipse">
-            <a:avLst/>
-          </a:prstGeom>
-          <a:solidFill>
-            <a:srgbClr val="1F4E5F"/>
-          </a:solidFill>
-          <a:ln w="38100">
-            <a:solidFill>
-              <a:srgbClr val="FFFFFF"/>
-            </a:solidFill>
-            <a:prstDash val="solid"/>
-          </a:ln>
-        </p:spPr>
-      </p:sp>
-      <p:sp>
-        <p:nvSpPr>
-          <p:cNvPr id="21" name="text_144"/>
-          <p:cNvSpPr txBox="1"/>
-          <p:nvPr/>
-        </p:nvSpPr>
-        <p:spPr>
-          <a:xfrm>
-            <a:off x="7223760" y="1325880"/>
-            <a:ext cx="1463040" cy="320040"/>
-          </a:xfrm>
-          <a:prstGeom prst="rect">
-            <a:avLst/>
-          </a:prstGeom>
-          <a:noFill/>
-          <a:ln/>
-        </p:spPr>
-        <p:txBody>
-          <a:bodyPr wrap="square" lIns="0" tIns="0" rIns="0" bIns="0" rtlCol="0" anchor="t"/>
-          <a:lstStyle/>
-          <a:p>
-            <a:pPr algn="ctr" indent="0" marL="0">
-              <a:buNone/>
-            </a:pPr>
-            <a:r>
-              <a:rPr lang="en-US" sz="1200" dirty="0">
-                <a:solidFill>
-                  <a:schemeClr val="accent4"/>
-                </a:solidFill>
-              </a:rPr>
-              <a:t>Mar 2026</a:t>
-            </a:r>
-            <a:endParaRPr lang="en-US" sz="1200" dirty="0"/>
-          </a:p>
-        </p:txBody>
-      </p:sp>
-      <p:sp>
-        <p:nvSpPr>
-          <p:cNvPr id="22" name="text_145"/>
-          <p:cNvSpPr txBox="1"/>
-          <p:nvPr/>
-        </p:nvSpPr>
-        <p:spPr>
-          <a:xfrm>
-            <a:off x="7223760" y="2331720"/>
-            <a:ext cx="1463040" cy="365760"/>
-          </a:xfrm>
-          <a:prstGeom prst="rect">
-            <a:avLst/>
-          </a:prstGeom>
-          <a:noFill/>
-          <a:ln/>
-        </p:spPr>
-        <p:txBody>
-          <a:bodyPr wrap="square" lIns="0" tIns="0" rIns="0" bIns="0" rtlCol="0" anchor="t"/>
-          <a:lstStyle/>
-          <a:p>
-            <a:pPr algn="ctr" indent="0" marL="0">
-              <a:buNone/>
-            </a:pPr>
-            <a:r>
-              <a:rPr lang="en-US" sz="1700" b="1" dirty="0">
-                <a:solidFill>
-                  <a:schemeClr val="tx2"/>
-                </a:solidFill>
-              </a:rPr>
-              <a:t>Release</a:t>
-            </a:r>
-            <a:endParaRPr lang="en-US" sz="1700" dirty="0"/>
-          </a:p>
-        </p:txBody>
-      </p:sp>
-      <p:sp>
-        <p:nvSpPr>
-          <p:cNvPr id="23" name="text_146"/>
-          <p:cNvSpPr txBox="1"/>
-          <p:nvPr/>
-        </p:nvSpPr>
-        <p:spPr>
-          <a:xfrm>
-            <a:off x="7223760" y="2743200"/>
-            <a:ext cx="1463040" cy="1097280"/>
-          </a:xfrm>
-          <a:prstGeom prst="rect">
-            <a:avLst/>
-          </a:prstGeom>
-          <a:noFill/>
-          <a:ln/>
-        </p:spPr>
-        <p:txBody>
-          <a:bodyPr wrap="square" lIns="0" tIns="0" rIns="0" bIns="0" rtlCol="0" anchor="t"/>
-          <a:lstStyle/>
-          <a:p>
-            <a:pPr algn="ctr" indent="0" marL="0">
-              <a:buNone/>
-            </a:pPr>
-            <a:r>
-              <a:rPr lang="en-US" sz="1300" dirty="0">
-                <a:solidFill>
-                  <a:schemeClr val="tx1"/>
-                </a:solidFill>
-              </a:rPr>
-              <a:t>Docker setup and documentation</a:t>
-            </a:r>
-            <a:endParaRPr lang="en-US" sz="1300" dirty="0"/>
-          </a:p>
-        </p:txBody>
-      </p:sp>
-      <p:sp>
-        <p:nvSpPr>
-          <p:cNvPr id="24" name="card_147"/>
-          <p:cNvSpPr/>
-          <p:nvPr/>
-        </p:nvSpPr>
-        <p:spPr>
-          <a:xfrm>
-            <a:off x="457200" y="3931920"/>
-            <a:ext cx="8229600" cy="548640"/>
+            <a:off x="457200" y="3840480"/>
+            <a:ext cx="8229600" cy="640080"/>
           </a:xfrm>
           <a:prstGeom prst="roundRect">
             <a:avLst>
-              <a:gd name="adj" fmla="val 13333"/>
+              <a:gd name="adj" fmla="val 11429"/>
             </a:avLst>
           </a:prstGeom>
           <a:solidFill>
@@ -8576,14 +9256,14 @@
       </p:sp>
       <p:sp>
         <p:nvSpPr>
-          <p:cNvPr id="25" name="text_148"/>
-          <p:cNvSpPr txBox="1"/>
-          <p:nvPr/>
-        </p:nvSpPr>
-        <p:spPr>
-          <a:xfrm>
-            <a:off x="685800" y="3931920"/>
-            <a:ext cx="7772400" cy="548640"/>
+          <p:cNvPr id="20" name="text_141"/>
+          <p:cNvSpPr txBox="1"/>
+          <p:nvPr/>
+        </p:nvSpPr>
+        <p:spPr>
+          <a:xfrm>
+            <a:off x="685800" y="3840480"/>
+            <a:ext cx="7772400" cy="640080"/>
           </a:xfrm>
           <a:prstGeom prst="rect">
             <a:avLst/>
@@ -8599,14 +9279,25 @@
               <a:buNone/>
             </a:pPr>
             <a:r>
-              <a:rPr lang="en-US" sz="1400" dirty="0">
+              <a:rPr lang="en-US" sz="1500" b="1" dirty="0">
                 <a:solidFill>
                   <a:schemeClr val="tx2"/>
                 </a:solidFill>
               </a:rPr>
-              <a:t>Every step saved with Git, so I could always go back after a mistake</a:t>
-            </a:r>
-            <a:endParaRPr lang="en-US" sz="1400" dirty="0"/>
+              <a:t>Result: </a:t>
+            </a:r>
+            <a:pPr indent="0" marL="0">
+              <a:buNone/>
+            </a:pPr>
+            <a:r>
+              <a:rPr lang="en-US" sz="1500" dirty="0">
+                <a:solidFill>
+                  <a:schemeClr val="tx1"/>
+                </a:solidFill>
+              </a:rPr>
+              <a:t>a clear message that names the clashing class, so the student knows exactly what to change.</a:t>
+            </a:r>
+            <a:endParaRPr lang="en-US" sz="1500" dirty="0"/>
           </a:p>
         </p:txBody>
       </p:sp>

--- a/report/presentation.pptx
+++ b/report/presentation.pptx
@@ -118,38 +118,38 @@
   <p:extLst>
     <p:ext uri="{521415D9-36F7-43E2-AB2F-B90AF26B5E84}">
       <p14:sectionLst xmlns:p14="http://schemas.microsoft.com/office/powerpoint/2010/main">
-        <p14:section name="Opening" id="{614aad71-0d2f-a5c2-ac54-9dd84e1f107f}">
+        <p14:section name="Opening" id="{bbee04c2-1ec2-76ac-7689-974e5e9e2904}">
           <p14:sldIdLst>
             <p14:sldId id="256"/>
           </p14:sldIdLst>
         </p14:section>
-        <p14:section name="Context" id="{3107c312-559a-afaa-75bc-0c80b9063319}">
+        <p14:section name="Context" id="{b6b77f16-860b-4d24-3214-57f58d3b9be9}">
           <p14:sldIdLst>
             <p14:sldId id="257"/>
             <p14:sldId id="258"/>
             <p14:sldId id="259"/>
           </p14:sldIdLst>
         </p14:section>
-        <p14:section name="Solution" id="{b3cca349-d7ca-7435-f37c-16a9cf6fb68f}">
+        <p14:section name="Solution" id="{adad0f96-beeb-f56d-dc10-f140c3942452}">
           <p14:sldIdLst>
             <p14:sldId id="260"/>
             <p14:sldId id="261"/>
             <p14:sldId id="262"/>
           </p14:sldIdLst>
         </p14:section>
-        <p14:section name="Hard part" id="{a7a00222-03df-c221-5acd-2a80124e208c}">
+        <p14:section name="Hard part" id="{23d96f43-e1f8-fd4d-2e8c-a7aba4087236}">
           <p14:sldIdLst>
             <p14:sldId id="263"/>
             <p14:sldId id="264"/>
           </p14:sldIdLst>
         </p14:section>
-        <p14:section name="Journey" id="{b507da08-0e7c-ee31-1407-ea7e71134d17}">
+        <p14:section name="Journey" id="{8b3869c0-8758-cd91-a51f-cf6fd06263cd}">
           <p14:sldIdLst>
             <p14:sldId id="265"/>
             <p14:sldId id="266"/>
           </p14:sldIdLst>
         </p14:section>
-        <p14:section name="Closing" id="{a921c2a5-a2e8-7ba8-d161-c98c460637a3}">
+        <p14:section name="Closing" id="{bf82fec8-4145-a5d0-6c44-2e1ca14d8a33}">
           <p14:sldIdLst>
             <p14:sldId id="267"/>
           </p14:sldIdLst>
@@ -558,7 +558,7 @@
           <a:p>
             <a:r>
               <a:rPr lang="en-US" dirty="0"/>
-              <a:t>Good morning, everyone. My name is [your name]. Today, I would like to tell you about a project that I have worked on: a course registration system for university students. I will explain why I built it, what it does, the biggest challenges I faced, and what I learned along the way.</a:t>
+              <a:t>Good morning, everyone. My name is [your name]. Today, I would like to tell you about a project that I have worked on. It is a website that helps university students register for their classes. I will explain why I built it, what it does, the biggest problems I had, and what I have learned.</a:t>
             </a:r>
             <a:endParaRPr lang="en-US" dirty="0"/>
           </a:p>
@@ -646,7 +646,7 @@
           <a:p>
             <a:r>
               <a:rPr lang="en-US" dirty="0"/>
-              <a:t>Now, let me briefly describe how I built the project. I worked in five stages. In January, I analysed the real process and wrote down nine rules. In March, I built the database and the back end, then reorganised the code, built the two websites, and finally prepared the release with Docker and documentation. I used Git the whole time, so I could always go back if I made a mistake.</a:t>
+              <a:t>Now, let me quickly explain how I built the project. I divided the work into five stages. In January, I looked at how registration works at my university, and I wrote down nine rules. In March, I built the database and the back end. Then I reorganised the code, built the two websites, and finally I set up Docker and wrote the guides. I used Git during the whole project, so I could always go back if I made a mistake.</a:t>
             </a:r>
             <a:endParaRPr lang="en-US" dirty="0"/>
           </a:p>
@@ -734,7 +734,7 @@
           <a:p>
             <a:r>
               <a:rPr lang="en-US" dirty="0"/>
-              <a:t>Finally, what did I learn? Of course, I improved my technical skills. But more importantly, I learned four skills that are useful in any job. First, plan before acting: writing the rules first saved me a lot of time. Second, learn independently: many answers were only in English documentation. Third, write clearly: writing documentation taught me to explain ideas simply. And fourth, manage my time by working in small stages. In the future, I would like to add automatic tests, a waiting list, and a prerequisite check.</a:t>
+              <a:t>Finally, what have I learned? Of course, my technical skills have improved a lot. But I think the most useful things are four skills that I can use in any job. First, plan before doing: writing the rules first saved me a lot of time. Second, learn by myself: I found many answers in English guides. Third, write clearly: writing guides taught me to explain ideas in a simple way. And fourth, manage my time by working in small stages. In the future, I would like to add automatic tests, a waiting list and a check for required courses.</a:t>
             </a:r>
             <a:endParaRPr lang="en-US" dirty="0"/>
           </a:p>
@@ -822,7 +822,7 @@
           <a:p>
             <a:r>
               <a:rPr lang="en-US" dirty="0"/>
-              <a:t>To sum up, this project started from a problem I experienced myself and became a complete, working system. It taught me that good software is not only about code, but about understanding people's problems. Thank you very much for listening. I would be happy to answer any questions you may have.</a:t>
+              <a:t>To sum up, this project started from a problem that I had as a student, and it became a complete system that really works. It has taught me that good software is not only about code. It is also about understanding people's problems. Thank you very much for listening. I would be happy to answer any questions you have.</a:t>
             </a:r>
             <a:endParaRPr lang="en-US" dirty="0"/>
           </a:p>
@@ -910,7 +910,7 @@
           <a:p>
             <a:r>
               <a:rPr lang="en-US" dirty="0"/>
-              <a:t>My presentation is divided into four parts. First, I will talk about why I chose this project. Second, I will show you what the system does and how it works. Third, I will focus on the two hardest problems I had to solve. And finally, I will share what I learned. The presentation will take about eight minutes, and I will be happy to answer your questions at the end.</a:t>
+              <a:t>My presentation has four parts. First, I will talk about why I chose this project. Second, I will show you what the system does and how it works. Third, I will talk about the two most difficult problems that I had to solve. And finally, I will tell you what I have learned. My talk will take about eight minutes, and after that I will be happy to answer your questions.</a:t>
             </a:r>
             <a:endParaRPr lang="en-US" dirty="0"/>
           </a:p>
@@ -998,7 +998,7 @@
           <a:p>
             <a:r>
               <a:rPr lang="en-US" dirty="0"/>
-              <a:t>Let me start with the problem. I am sure many of you remember registration day. Everyone clicks at the same time, so seats disappear in minutes. It is easy to choose two classes that are at the same time. The registration period is very short. And on the other side, the academic office often manages everything in spreadsheets. I experienced this stress myself, and that is exactly why I chose this project.</a:t>
+              <a:t>Let me start with the problem. I am sure that many of you remember registration day. Everyone clicks at the same time, so the seats are gone in a few minutes. It is also easy to choose two classes at the same time by mistake. The registration period is very short, too. And for the university staff, a lot of the work is still done in Excel. I have had this stressful experience myself, and that is why I chose this project.</a:t>
             </a:r>
             <a:endParaRPr lang="en-US" dirty="0"/>
           </a:p>
@@ -1086,7 +1086,7 @@
           <a:p>
             <a:r>
               <a:rPr lang="en-US" dirty="0"/>
-              <a:t>Here is the project at a glance. The system has two portals: one for students and one for administrators. It checks nine rules every time a student signs up for a class. I built it in about three months, from January to March 2026, and I designed and developed it by myself. My main goal was simple: the system must be fair, reliable and easy to use, even on the busiest day.</a:t>
+              <a:t>Here is a quick look at the project. The system has two portals: one for students and one for staff. It checks nine rules every time a student registers for a class. I built it in about three months, from January to March this year, and I did all the work by myself. My main goal was simple: the system must be fair, it must work well, and it must be easy to use, even on the busiest day.</a:t>
             </a:r>
             <a:endParaRPr lang="en-US" dirty="0"/>
           </a:p>
@@ -1174,7 +1174,7 @@
           <a:p>
             <a:r>
               <a:rPr lang="en-US" dirty="0"/>
-              <a:t>Now, let's move on to what the system actually does. Rather than just describing it, I would like to show you some real screenshots. This is the student portal. On the left is the registration page: students can see every class, its timetable and how many seats are left, and they can register or cancel with just one click. On the right, you can see the weekly timetable, which is built automatically, and the grades page with the student's GPA.</a:t>
+              <a:t>Now, let's move on to what the system can do. Instead of just describing it, I would like to show you some real screenshots. This is the student portal. On the left, you can see the registration page. Students can see every class, its timetable and how many seats are left, and they can register or cancel with just one click. On the right, there is the weekly timetable, which is made automatically, and the page where students can check their grades and GPA.</a:t>
             </a:r>
             <a:endParaRPr lang="en-US" dirty="0"/>
           </a:p>
@@ -1262,7 +1262,7 @@
           <a:p>
             <a:r>
               <a:rPr lang="en-US" dirty="0"/>
-              <a:t>And this is the administrator portal. Here, the academic office can open new classes and assign lecturers and rooms. They can also set the registration period for each semester and see the schedule of every room in one view. Each user only sees the portal that matches their role.</a:t>
+              <a:t>And this is the portal for the staff. Here, they can open new classes and choose the lecturer and the room for each class. They can also set the registration period for each semester, and they can see the timetable of every room on one page. Each user can only see the portal which matches their role.</a:t>
             </a:r>
             <a:endParaRPr lang="en-US" dirty="0"/>
           </a:p>
@@ -1350,7 +1350,7 @@
           <a:p>
             <a:r>
               <a:rPr lang="en-US" dirty="0"/>
-              <a:t>So, how does it work? Like most web applications, it has three parts. The front end is what users see in their browser; I built it with React. The back end is the 'brain': it checks who the user is and applies all the rules. And the database stores all the information. Finally, I packaged everything with a tool called Docker, so the whole system can be started with a single command.</a:t>
+              <a:t>So, how does it work? Like most websites, it has three parts. The front end is what users see in their browser. I built it with React. The back end is like the brain of the system. It checks who the user is and follows all the rules. And the database keeps all the information. Finally, I used a tool called Docker, so the whole system can be started with just one command.</a:t>
             </a:r>
             <a:endParaRPr lang="en-US" dirty="0"/>
           </a:p>
@@ -1438,7 +1438,7 @@
           <a:p>
             <a:r>
               <a:rPr lang="en-US" dirty="0"/>
-              <a:t>This brings me to the most interesting part: the challenges. The first one is what I call 'the last seat'. Imagine a class with forty seats and thirty-nine students. Two students click Register at exactly the same moment. Without protection, both see one free seat, both are accepted, and the class ends up with forty-one students. To solve this, I made the sign-up 'all or nothing', and I lock the class for a very short moment, so the second student has to wait. When it is their turn, the system correctly says the class is full. As a final safety net, the database itself refuses more students than seats.</a:t>
+              <a:t>This brings me to the most interesting part: the problems I had to solve. The first one is what I call 'the last seat'. Imagine a class with forty seats, and thirty-nine students have already registered. Then two students click Register at exactly the same time. Without any protection, both of them see one free seat, both of them are accepted, and the class ends up with forty-one students. To fix this, I made the system lock the class for a very short moment, so the second student has to wait. When it is their turn, the system can see that the class is full. As an extra safety rule, the database never allows more students than seats.</a:t>
             </a:r>
             <a:endParaRPr lang="en-US" dirty="0"/>
           </a:p>
@@ -1526,7 +1526,7 @@
           <a:p>
             <a:r>
               <a:rPr lang="en-US" dirty="0"/>
-              <a:t>The second challenge was timetable clashes. It sounds easy, but some classes only meet in odd weeks, and others only in even weeks. So I defined a clear rule: two classes clash only if all three conditions on this slide are true: the same day, overlapping periods, and compatible weeks. And when there is a clash, the system does not just say 'Error'. It tells the student exactly which class is the problem.</a:t>
+              <a:t>The second problem was timetable clashes. It sounds easy, but some classes only meet in odd weeks, and others only meet in even weeks. So I decided on a clear rule: two classes clash only if all three things on this slide are true. They are on the same day, their lesson times overlap, and their weeks match. When there is a clash, the system does not just say 'Error'. It tells the student which class is causing the problem.</a:t>
             </a:r>
             <a:endParaRPr lang="en-US" dirty="0"/>
           </a:p>
@@ -2708,7 +2708,7 @@
                   <a:schemeClr val="tx2"/>
                 </a:solidFill>
               </a:rPr>
-              <a:t>Analysis</a:t>
+              <a:t>Planning</a:t>
             </a:r>
             <a:endParaRPr lang="en-US" sz="1700" dirty="0"/>
           </a:p>
@@ -2744,7 +2744,7 @@
                   <a:schemeClr val="tx1"/>
                 </a:solidFill>
               </a:rPr>
-              <a:t>Studied the real process, wrote the 9 rules</a:t>
+              <a:t>Looked at the real process, wrote 9 rules</a:t>
             </a:r>
             <a:endParaRPr lang="en-US" sz="1300" dirty="0"/>
           </a:p>
@@ -2974,7 +2974,7 @@
                   <a:schemeClr val="tx2"/>
                 </a:solidFill>
               </a:rPr>
-              <a:t>Reorganise</a:t>
+              <a:t>Reorganising</a:t>
             </a:r>
             <a:endParaRPr lang="en-US" sz="1700" dirty="0"/>
           </a:p>
@@ -3240,7 +3240,7 @@
                   <a:schemeClr val="tx2"/>
                 </a:solidFill>
               </a:rPr>
-              <a:t>Release</a:t>
+              <a:t>Sharing</a:t>
             </a:r>
             <a:endParaRPr lang="en-US" sz="1700" dirty="0"/>
           </a:p>
@@ -3276,7 +3276,7 @@
                   <a:schemeClr val="tx1"/>
                 </a:solidFill>
               </a:rPr>
-              <a:t>Docker setup and documentation</a:t>
+              <a:t>Docker setup and guides</a:t>
             </a:r>
             <a:endParaRPr lang="en-US" sz="1300" dirty="0"/>
           </a:p>
@@ -3525,7 +3525,7 @@
                   <a:schemeClr val="tx2"/>
                 </a:solidFill>
               </a:rPr>
-              <a:t>Plan before acting</a:t>
+              <a:t>Plan before doing</a:t>
             </a:r>
             <a:endParaRPr lang="en-US" sz="1700" dirty="0"/>
           </a:p>
@@ -3641,7 +3641,7 @@
                   <a:schemeClr val="tx2"/>
                 </a:solidFill>
               </a:rPr>
-              <a:t>Learn independently</a:t>
+              <a:t>Learn by myself</a:t>
             </a:r>
             <a:endParaRPr lang="en-US" sz="1700" dirty="0"/>
           </a:p>
@@ -3677,7 +3677,7 @@
                   <a:schemeClr val="tx1"/>
                 </a:solidFill>
               </a:rPr>
-              <a:t>I found many answers in English documentation</a:t>
+              <a:t>I found many answers in English guides</a:t>
             </a:r>
             <a:endParaRPr lang="en-US" sz="1400" dirty="0"/>
           </a:p>
@@ -3793,7 +3793,7 @@
                   <a:schemeClr val="tx1"/>
                 </a:solidFill>
               </a:rPr>
-              <a:t>Documentation taught me to explain ideas simply</a:t>
+              <a:t>Writing guides taught me to explain ideas simply</a:t>
             </a:r>
             <a:endParaRPr lang="en-US" sz="1400" dirty="0"/>
           </a:p>
@@ -3909,7 +3909,7 @@
                   <a:schemeClr val="tx1"/>
                 </a:solidFill>
               </a:rPr>
-              <a:t>Small stages kept me motivated and on track</a:t>
+              <a:t>Small stages kept me motivated every week</a:t>
             </a:r>
             <a:endParaRPr lang="en-US" sz="1400" dirty="0"/>
           </a:p>
@@ -4043,7 +4043,7 @@
                   <a:schemeClr val="tx1"/>
                 </a:solidFill>
               </a:rPr>
-              <a:t>Automatic prerequisite check</a:t>
+              <a:t>Check for required courses</a:t>
             </a:r>
             <a:endParaRPr lang="en-US" sz="1500" dirty="0"/>
           </a:p>
@@ -5533,7 +5533,7 @@
                   <a:schemeClr val="tx1"/>
                 </a:solidFill>
               </a:rPr>
-              <a:t>Courses, rooms and sections are often managed in spreadsheets</a:t>
+              <a:t>Staff often manage courses, rooms and classes in Excel</a:t>
             </a:r>
             <a:endParaRPr lang="en-US" sz="1400" dirty="0"/>
           </a:p>
@@ -8565,7 +8565,7 @@
                   <a:schemeClr val="tx1"/>
                 </a:solidFill>
               </a:rPr>
-              <a:t>every check and the sign-up succeed together, or nothing changes</a:t>
+              <a:t>all checks and the sign-up happen together, or nothing is saved</a:t>
             </a:r>
             <a:endParaRPr lang="en-US" sz="1400" dirty="0"/>
           </a:p>
@@ -8665,7 +8665,7 @@
                   <a:schemeClr val="tx1"/>
                 </a:solidFill>
               </a:rPr>
-              <a:t>the database itself refuses more students than seats</a:t>
+              <a:t>the database never allows more students than seats</a:t>
             </a:r>
             <a:endParaRPr lang="en-US" sz="1400" dirty="0"/>
           </a:p>
